--- a/Fase 1/1.-Documentación Formal/Evidencias grupales/Presentación Proyecto.pptx
+++ b/Fase 1/1.-Documentación Formal/Evidencias grupales/Presentación Proyecto.pptx
@@ -4,6 +4,9 @@
   <p:sldMasterIdLst>
     <p:sldMasterId id="2147483648" r:id="rId1"/>
   </p:sldMasterIdLst>
+  <p:notesMasterIdLst>
+    <p:notesMasterId r:id="rId13"/>
+  </p:notesMasterIdLst>
   <p:sldIdLst>
     <p:sldId id="256" r:id="rId2"/>
     <p:sldId id="257" r:id="rId3"/>
@@ -17,11 +20,8 @@
     <p:sldId id="265" r:id="rId11"/>
     <p:sldId id="266" r:id="rId12"/>
   </p:sldIdLst>
-  <p:notesMasterIdLst>
-    <p:notesMasterId r:id="rId13"/>
-  </p:notesMasterIdLst>
-  <p:sldSz cx="12191695" cy="6858000"/>
-  <p:notesSz cx="6858000" cy="12191695"/>
+  <p:sldSz cx="12192000" cy="6858000"/>
+  <p:notesSz cx="6858000" cy="12192000"/>
   <p:defaultTextStyle>
     <a:lvl1pPr marL="0" algn="l" defTabSz="914400" rtl="0" eaLnBrk="1" latinLnBrk="0" hangingPunct="1">
       <a:defRPr sz="1800" kern="1200">
@@ -114,7 +114,1199 @@
       </a:defRPr>
     </a:lvl9pPr>
   </p:defaultTextStyle>
+  <p:extLst>
+    <p:ext uri="{EFAFB233-063F-42B5-8137-9DF3F51BA10A}">
+      <p15:sldGuideLst xmlns:p15="http://schemas.microsoft.com/office/powerpoint/2012/main"/>
+    </p:ext>
+  </p:extLst>
 </p:presentation>
+</file>
+
+<file path=ppt/revisionInfo.xml><?xml version="1.0" encoding="utf-8"?>
+<p1510:revInfo xmlns:a="http://schemas.openxmlformats.org/drawingml/2006/main" xmlns:r="http://schemas.openxmlformats.org/officeDocument/2006/relationships" xmlns:p1510="http://schemas.microsoft.com/office/powerpoint/2015/10/main">
+  <p1510:revLst>
+    <p1510:client id="{DB2B0492-6EAF-4199-9A95-BE120A09D6D4}" v="23" dt="2026-09-12T11:45:47.211"/>
+  </p1510:revLst>
+</p1510:revInfo>
+</file>
+
+<file path=ppt/changesInfos/changesInfo1.xml><?xml version="1.0" encoding="utf-8"?>
+<pc:chgInfo xmlns:a="http://schemas.openxmlformats.org/drawingml/2006/main" xmlns:r="http://schemas.openxmlformats.org/officeDocument/2006/relationships" xmlns:ac="http://schemas.microsoft.com/office/drawing/2013/main/command" xmlns:pc="http://schemas.microsoft.com/office/powerpoint/2013/main/command">
+  <pc:docChgLst>
+    <pc:chgData name="Luis Ovalle" userId="cb995196-5c5b-4938-acce-a0f7f8d61c64" providerId="ADAL" clId="{DDBE67AE-DEA9-498E-9EDE-2699B19B1413}"/>
+    <pc:docChg chg="undo custSel modSld">
+      <pc:chgData name="Luis Ovalle" userId="cb995196-5c5b-4938-acce-a0f7f8d61c64" providerId="ADAL" clId="{DDBE67AE-DEA9-498E-9EDE-2699B19B1413}" dt="2026-09-12T11:45:47.211" v="276" actId="11530"/>
+      <pc:docMkLst>
+        <pc:docMk/>
+      </pc:docMkLst>
+      <pc:sldChg chg="addSp delSp modSp mod">
+        <pc:chgData name="Luis Ovalle" userId="cb995196-5c5b-4938-acce-a0f7f8d61c64" providerId="ADAL" clId="{DDBE67AE-DEA9-498E-9EDE-2699B19B1413}" dt="2026-09-12T11:34:21.028" v="56" actId="403"/>
+        <pc:sldMkLst>
+          <pc:docMk/>
+          <pc:sldMk cId="0" sldId="256"/>
+        </pc:sldMkLst>
+        <pc:spChg chg="mod">
+          <ac:chgData name="Luis Ovalle" userId="cb995196-5c5b-4938-acce-a0f7f8d61c64" providerId="ADAL" clId="{DDBE67AE-DEA9-498E-9EDE-2699B19B1413}" dt="2026-09-12T03:49:10.912" v="0" actId="20577"/>
+          <ac:spMkLst>
+            <pc:docMk/>
+            <pc:sldMk cId="0" sldId="256"/>
+            <ac:spMk id="6" creationId="{00000000-0000-0000-0000-000000000000}"/>
+          </ac:spMkLst>
+        </pc:spChg>
+        <pc:spChg chg="mod">
+          <ac:chgData name="Luis Ovalle" userId="cb995196-5c5b-4938-acce-a0f7f8d61c64" providerId="ADAL" clId="{DDBE67AE-DEA9-498E-9EDE-2699B19B1413}" dt="2026-09-12T11:34:21.028" v="56" actId="403"/>
+          <ac:spMkLst>
+            <pc:docMk/>
+            <pc:sldMk cId="0" sldId="256"/>
+            <ac:spMk id="8" creationId="{00000000-0000-0000-0000-000000000000}"/>
+          </ac:spMkLst>
+        </pc:spChg>
+        <pc:spChg chg="mod">
+          <ac:chgData name="Luis Ovalle" userId="cb995196-5c5b-4938-acce-a0f7f8d61c64" providerId="ADAL" clId="{DDBE67AE-DEA9-498E-9EDE-2699B19B1413}" dt="2026-09-12T11:34:12.995" v="53" actId="1076"/>
+          <ac:spMkLst>
+            <pc:docMk/>
+            <pc:sldMk cId="0" sldId="256"/>
+            <ac:spMk id="9" creationId="{00000000-0000-0000-0000-000000000000}"/>
+          </ac:spMkLst>
+        </pc:spChg>
+        <pc:picChg chg="del">
+          <ac:chgData name="Luis Ovalle" userId="cb995196-5c5b-4938-acce-a0f7f8d61c64" providerId="ADAL" clId="{DDBE67AE-DEA9-498E-9EDE-2699B19B1413}" dt="2026-09-12T11:33:48.814" v="44" actId="478"/>
+          <ac:picMkLst>
+            <pc:docMk/>
+            <pc:sldMk cId="0" sldId="256"/>
+            <ac:picMk id="7" creationId="{00000000-0000-0000-0000-000000000000}"/>
+          </ac:picMkLst>
+        </pc:picChg>
+        <pc:picChg chg="add mod">
+          <ac:chgData name="Luis Ovalle" userId="cb995196-5c5b-4938-acce-a0f7f8d61c64" providerId="ADAL" clId="{DDBE67AE-DEA9-498E-9EDE-2699B19B1413}" dt="2026-09-12T11:34:05.169" v="51" actId="1076"/>
+          <ac:picMkLst>
+            <pc:docMk/>
+            <pc:sldMk cId="0" sldId="256"/>
+            <ac:picMk id="12" creationId="{04534938-E875-A618-06F5-7870618D7D64}"/>
+          </ac:picMkLst>
+        </pc:picChg>
+      </pc:sldChg>
+      <pc:sldChg chg="delSp modSp mod">
+        <pc:chgData name="Luis Ovalle" userId="cb995196-5c5b-4938-acce-a0f7f8d61c64" providerId="ADAL" clId="{DDBE67AE-DEA9-498E-9EDE-2699B19B1413}" dt="2026-09-12T03:51:21.270" v="42" actId="255"/>
+        <pc:sldMkLst>
+          <pc:docMk/>
+          <pc:sldMk cId="0" sldId="257"/>
+        </pc:sldMkLst>
+        <pc:spChg chg="mod">
+          <ac:chgData name="Luis Ovalle" userId="cb995196-5c5b-4938-acce-a0f7f8d61c64" providerId="ADAL" clId="{DDBE67AE-DEA9-498E-9EDE-2699B19B1413}" dt="2026-09-12T03:49:28.003" v="1" actId="14100"/>
+          <ac:spMkLst>
+            <pc:docMk/>
+            <pc:sldMk cId="0" sldId="257"/>
+            <ac:spMk id="8" creationId="{00000000-0000-0000-0000-000000000000}"/>
+          </ac:spMkLst>
+        </pc:spChg>
+        <pc:spChg chg="mod">
+          <ac:chgData name="Luis Ovalle" userId="cb995196-5c5b-4938-acce-a0f7f8d61c64" providerId="ADAL" clId="{DDBE67AE-DEA9-498E-9EDE-2699B19B1413}" dt="2026-09-12T03:50:06.919" v="14" actId="404"/>
+          <ac:spMkLst>
+            <pc:docMk/>
+            <pc:sldMk cId="0" sldId="257"/>
+            <ac:spMk id="9" creationId="{00000000-0000-0000-0000-000000000000}"/>
+          </ac:spMkLst>
+        </pc:spChg>
+        <pc:spChg chg="del">
+          <ac:chgData name="Luis Ovalle" userId="cb995196-5c5b-4938-acce-a0f7f8d61c64" providerId="ADAL" clId="{DDBE67AE-DEA9-498E-9EDE-2699B19B1413}" dt="2026-09-12T03:50:00.175" v="10" actId="478"/>
+          <ac:spMkLst>
+            <pc:docMk/>
+            <pc:sldMk cId="0" sldId="257"/>
+            <ac:spMk id="10" creationId="{00000000-0000-0000-0000-000000000000}"/>
+          </ac:spMkLst>
+        </pc:spChg>
+        <pc:spChg chg="mod">
+          <ac:chgData name="Luis Ovalle" userId="cb995196-5c5b-4938-acce-a0f7f8d61c64" providerId="ADAL" clId="{DDBE67AE-DEA9-498E-9EDE-2699B19B1413}" dt="2026-09-12T03:50:20.884" v="18" actId="11530"/>
+          <ac:spMkLst>
+            <pc:docMk/>
+            <pc:sldMk cId="0" sldId="257"/>
+            <ac:spMk id="11" creationId="{00000000-0000-0000-0000-000000000000}"/>
+          </ac:spMkLst>
+        </pc:spChg>
+        <pc:spChg chg="del">
+          <ac:chgData name="Luis Ovalle" userId="cb995196-5c5b-4938-acce-a0f7f8d61c64" providerId="ADAL" clId="{DDBE67AE-DEA9-498E-9EDE-2699B19B1413}" dt="2026-09-12T03:50:28.839" v="19" actId="478"/>
+          <ac:spMkLst>
+            <pc:docMk/>
+            <pc:sldMk cId="0" sldId="257"/>
+            <ac:spMk id="12" creationId="{00000000-0000-0000-0000-000000000000}"/>
+          </ac:spMkLst>
+        </pc:spChg>
+        <pc:spChg chg="mod">
+          <ac:chgData name="Luis Ovalle" userId="cb995196-5c5b-4938-acce-a0f7f8d61c64" providerId="ADAL" clId="{DDBE67AE-DEA9-498E-9EDE-2699B19B1413}" dt="2026-09-12T03:51:21.270" v="42" actId="255"/>
+          <ac:spMkLst>
+            <pc:docMk/>
+            <pc:sldMk cId="0" sldId="257"/>
+            <ac:spMk id="13" creationId="{00000000-0000-0000-0000-000000000000}"/>
+          </ac:spMkLst>
+        </pc:spChg>
+        <pc:spChg chg="del">
+          <ac:chgData name="Luis Ovalle" userId="cb995196-5c5b-4938-acce-a0f7f8d61c64" providerId="ADAL" clId="{DDBE67AE-DEA9-498E-9EDE-2699B19B1413}" dt="2026-09-12T03:50:31.982" v="20" actId="478"/>
+          <ac:spMkLst>
+            <pc:docMk/>
+            <pc:sldMk cId="0" sldId="257"/>
+            <ac:spMk id="14" creationId="{00000000-0000-0000-0000-000000000000}"/>
+          </ac:spMkLst>
+        </pc:spChg>
+        <pc:spChg chg="mod">
+          <ac:chgData name="Luis Ovalle" userId="cb995196-5c5b-4938-acce-a0f7f8d61c64" providerId="ADAL" clId="{DDBE67AE-DEA9-498E-9EDE-2699B19B1413}" dt="2026-09-12T03:50:40.890" v="27" actId="403"/>
+          <ac:spMkLst>
+            <pc:docMk/>
+            <pc:sldMk cId="0" sldId="257"/>
+            <ac:spMk id="15" creationId="{00000000-0000-0000-0000-000000000000}"/>
+          </ac:spMkLst>
+        </pc:spChg>
+        <pc:spChg chg="mod">
+          <ac:chgData name="Luis Ovalle" userId="cb995196-5c5b-4938-acce-a0f7f8d61c64" providerId="ADAL" clId="{DDBE67AE-DEA9-498E-9EDE-2699B19B1413}" dt="2026-09-12T03:50:47.478" v="34" actId="403"/>
+          <ac:spMkLst>
+            <pc:docMk/>
+            <pc:sldMk cId="0" sldId="257"/>
+            <ac:spMk id="19" creationId="{00000000-0000-0000-0000-000000000000}"/>
+          </ac:spMkLst>
+        </pc:spChg>
+      </pc:sldChg>
+      <pc:sldChg chg="addSp delSp modSp mod">
+        <pc:chgData name="Luis Ovalle" userId="cb995196-5c5b-4938-acce-a0f7f8d61c64" providerId="ADAL" clId="{DDBE67AE-DEA9-498E-9EDE-2699B19B1413}" dt="2026-09-12T11:35:51.838" v="71" actId="1076"/>
+        <pc:sldMkLst>
+          <pc:docMk/>
+          <pc:sldMk cId="0" sldId="258"/>
+        </pc:sldMkLst>
+        <pc:spChg chg="mod">
+          <ac:chgData name="Luis Ovalle" userId="cb995196-5c5b-4938-acce-a0f7f8d61c64" providerId="ADAL" clId="{DDBE67AE-DEA9-498E-9EDE-2699B19B1413}" dt="2026-09-12T03:49:45.339" v="3" actId="27636"/>
+          <ac:spMkLst>
+            <pc:docMk/>
+            <pc:sldMk cId="0" sldId="258"/>
+            <ac:spMk id="8" creationId="{00000000-0000-0000-0000-000000000000}"/>
+          </ac:spMkLst>
+        </pc:spChg>
+        <pc:spChg chg="del">
+          <ac:chgData name="Luis Ovalle" userId="cb995196-5c5b-4938-acce-a0f7f8d61c64" providerId="ADAL" clId="{DDBE67AE-DEA9-498E-9EDE-2699B19B1413}" dt="2026-09-12T11:34:53.488" v="57" actId="478"/>
+          <ac:spMkLst>
+            <pc:docMk/>
+            <pc:sldMk cId="0" sldId="258"/>
+            <ac:spMk id="9" creationId="{00000000-0000-0000-0000-000000000000}"/>
+          </ac:spMkLst>
+        </pc:spChg>
+        <pc:spChg chg="del">
+          <ac:chgData name="Luis Ovalle" userId="cb995196-5c5b-4938-acce-a0f7f8d61c64" providerId="ADAL" clId="{DDBE67AE-DEA9-498E-9EDE-2699B19B1413}" dt="2026-09-12T11:34:59.545" v="58" actId="478"/>
+          <ac:spMkLst>
+            <pc:docMk/>
+            <pc:sldMk cId="0" sldId="258"/>
+            <ac:spMk id="10" creationId="{00000000-0000-0000-0000-000000000000}"/>
+          </ac:spMkLst>
+        </pc:spChg>
+        <pc:spChg chg="del">
+          <ac:chgData name="Luis Ovalle" userId="cb995196-5c5b-4938-acce-a0f7f8d61c64" providerId="ADAL" clId="{DDBE67AE-DEA9-498E-9EDE-2699B19B1413}" dt="2026-09-12T11:34:53.488" v="57" actId="478"/>
+          <ac:spMkLst>
+            <pc:docMk/>
+            <pc:sldMk cId="0" sldId="258"/>
+            <ac:spMk id="11" creationId="{00000000-0000-0000-0000-000000000000}"/>
+          </ac:spMkLst>
+        </pc:spChg>
+        <pc:spChg chg="del">
+          <ac:chgData name="Luis Ovalle" userId="cb995196-5c5b-4938-acce-a0f7f8d61c64" providerId="ADAL" clId="{DDBE67AE-DEA9-498E-9EDE-2699B19B1413}" dt="2026-09-12T11:34:59.545" v="58" actId="478"/>
+          <ac:spMkLst>
+            <pc:docMk/>
+            <pc:sldMk cId="0" sldId="258"/>
+            <ac:spMk id="12" creationId="{00000000-0000-0000-0000-000000000000}"/>
+          </ac:spMkLst>
+        </pc:spChg>
+        <pc:spChg chg="del">
+          <ac:chgData name="Luis Ovalle" userId="cb995196-5c5b-4938-acce-a0f7f8d61c64" providerId="ADAL" clId="{DDBE67AE-DEA9-498E-9EDE-2699B19B1413}" dt="2026-09-12T11:34:53.488" v="57" actId="478"/>
+          <ac:spMkLst>
+            <pc:docMk/>
+            <pc:sldMk cId="0" sldId="258"/>
+            <ac:spMk id="13" creationId="{00000000-0000-0000-0000-000000000000}"/>
+          </ac:spMkLst>
+        </pc:spChg>
+        <pc:spChg chg="del">
+          <ac:chgData name="Luis Ovalle" userId="cb995196-5c5b-4938-acce-a0f7f8d61c64" providerId="ADAL" clId="{DDBE67AE-DEA9-498E-9EDE-2699B19B1413}" dt="2026-09-12T11:34:59.545" v="58" actId="478"/>
+          <ac:spMkLst>
+            <pc:docMk/>
+            <pc:sldMk cId="0" sldId="258"/>
+            <ac:spMk id="14" creationId="{00000000-0000-0000-0000-000000000000}"/>
+          </ac:spMkLst>
+        </pc:spChg>
+        <pc:spChg chg="del">
+          <ac:chgData name="Luis Ovalle" userId="cb995196-5c5b-4938-acce-a0f7f8d61c64" providerId="ADAL" clId="{DDBE67AE-DEA9-498E-9EDE-2699B19B1413}" dt="2026-09-12T11:34:53.488" v="57" actId="478"/>
+          <ac:spMkLst>
+            <pc:docMk/>
+            <pc:sldMk cId="0" sldId="258"/>
+            <ac:spMk id="15" creationId="{00000000-0000-0000-0000-000000000000}"/>
+          </ac:spMkLst>
+        </pc:spChg>
+        <pc:spChg chg="del">
+          <ac:chgData name="Luis Ovalle" userId="cb995196-5c5b-4938-acce-a0f7f8d61c64" providerId="ADAL" clId="{DDBE67AE-DEA9-498E-9EDE-2699B19B1413}" dt="2026-09-12T11:34:59.545" v="58" actId="478"/>
+          <ac:spMkLst>
+            <pc:docMk/>
+            <pc:sldMk cId="0" sldId="258"/>
+            <ac:spMk id="16" creationId="{00000000-0000-0000-0000-000000000000}"/>
+          </ac:spMkLst>
+        </pc:spChg>
+        <pc:spChg chg="add mod">
+          <ac:chgData name="Luis Ovalle" userId="cb995196-5c5b-4938-acce-a0f7f8d61c64" providerId="ADAL" clId="{DDBE67AE-DEA9-498E-9EDE-2699B19B1413}" dt="2026-09-12T11:35:08.492" v="60"/>
+          <ac:spMkLst>
+            <pc:docMk/>
+            <pc:sldMk cId="0" sldId="258"/>
+            <ac:spMk id="20" creationId="{2CE242BB-18CE-558D-C2DC-C207C5E307CD}"/>
+          </ac:spMkLst>
+        </pc:spChg>
+        <pc:spChg chg="add mod">
+          <ac:chgData name="Luis Ovalle" userId="cb995196-5c5b-4938-acce-a0f7f8d61c64" providerId="ADAL" clId="{DDBE67AE-DEA9-498E-9EDE-2699B19B1413}" dt="2026-09-12T11:35:08.492" v="60"/>
+          <ac:spMkLst>
+            <pc:docMk/>
+            <pc:sldMk cId="0" sldId="258"/>
+            <ac:spMk id="21" creationId="{DDA67E35-7A8B-6380-ED50-8F996E1B3B75}"/>
+          </ac:spMkLst>
+        </pc:spChg>
+        <pc:spChg chg="add mod">
+          <ac:chgData name="Luis Ovalle" userId="cb995196-5c5b-4938-acce-a0f7f8d61c64" providerId="ADAL" clId="{DDBE67AE-DEA9-498E-9EDE-2699B19B1413}" dt="2026-09-12T11:35:08.492" v="60"/>
+          <ac:spMkLst>
+            <pc:docMk/>
+            <pc:sldMk cId="0" sldId="258"/>
+            <ac:spMk id="22" creationId="{CB12DDDA-9FCB-7694-CFAA-5C6AE1F686CB}"/>
+          </ac:spMkLst>
+        </pc:spChg>
+        <pc:spChg chg="add mod">
+          <ac:chgData name="Luis Ovalle" userId="cb995196-5c5b-4938-acce-a0f7f8d61c64" providerId="ADAL" clId="{DDBE67AE-DEA9-498E-9EDE-2699B19B1413}" dt="2026-09-12T11:35:08.492" v="60"/>
+          <ac:spMkLst>
+            <pc:docMk/>
+            <pc:sldMk cId="0" sldId="258"/>
+            <ac:spMk id="23" creationId="{661B8CB6-F1AE-65B4-193A-0AB392A3E769}"/>
+          </ac:spMkLst>
+        </pc:spChg>
+        <pc:spChg chg="add mod">
+          <ac:chgData name="Luis Ovalle" userId="cb995196-5c5b-4938-acce-a0f7f8d61c64" providerId="ADAL" clId="{DDBE67AE-DEA9-498E-9EDE-2699B19B1413}" dt="2026-09-12T11:35:18.597" v="62" actId="1076"/>
+          <ac:spMkLst>
+            <pc:docMk/>
+            <pc:sldMk cId="0" sldId="258"/>
+            <ac:spMk id="24" creationId="{7078551F-C3AB-3C84-4D08-6A73FD6A5A81}"/>
+          </ac:spMkLst>
+        </pc:spChg>
+        <pc:spChg chg="add mod">
+          <ac:chgData name="Luis Ovalle" userId="cb995196-5c5b-4938-acce-a0f7f8d61c64" providerId="ADAL" clId="{DDBE67AE-DEA9-498E-9EDE-2699B19B1413}" dt="2026-09-12T11:35:18.597" v="62" actId="1076"/>
+          <ac:spMkLst>
+            <pc:docMk/>
+            <pc:sldMk cId="0" sldId="258"/>
+            <ac:spMk id="25" creationId="{6E25E900-8092-71C8-C73A-09A5E4AF48D5}"/>
+          </ac:spMkLst>
+        </pc:spChg>
+        <pc:spChg chg="add mod">
+          <ac:chgData name="Luis Ovalle" userId="cb995196-5c5b-4938-acce-a0f7f8d61c64" providerId="ADAL" clId="{DDBE67AE-DEA9-498E-9EDE-2699B19B1413}" dt="2026-09-12T11:35:18.597" v="62" actId="1076"/>
+          <ac:spMkLst>
+            <pc:docMk/>
+            <pc:sldMk cId="0" sldId="258"/>
+            <ac:spMk id="27" creationId="{591D82F5-DAE5-E0AF-0541-6888EFDD65F7}"/>
+          </ac:spMkLst>
+        </pc:spChg>
+        <pc:spChg chg="add mod">
+          <ac:chgData name="Luis Ovalle" userId="cb995196-5c5b-4938-acce-a0f7f8d61c64" providerId="ADAL" clId="{DDBE67AE-DEA9-498E-9EDE-2699B19B1413}" dt="2026-09-12T11:35:18.597" v="62" actId="1076"/>
+          <ac:spMkLst>
+            <pc:docMk/>
+            <pc:sldMk cId="0" sldId="258"/>
+            <ac:spMk id="28" creationId="{A7EC4F8D-BE3A-4518-AC2C-5ED8075490A1}"/>
+          </ac:spMkLst>
+        </pc:spChg>
+        <pc:spChg chg="add mod">
+          <ac:chgData name="Luis Ovalle" userId="cb995196-5c5b-4938-acce-a0f7f8d61c64" providerId="ADAL" clId="{DDBE67AE-DEA9-498E-9EDE-2699B19B1413}" dt="2026-09-12T11:35:18.597" v="62" actId="1076"/>
+          <ac:spMkLst>
+            <pc:docMk/>
+            <pc:sldMk cId="0" sldId="258"/>
+            <ac:spMk id="29" creationId="{510F01FD-8393-440F-A37E-2ECC4EB62DB0}"/>
+          </ac:spMkLst>
+        </pc:spChg>
+        <pc:spChg chg="add mod">
+          <ac:chgData name="Luis Ovalle" userId="cb995196-5c5b-4938-acce-a0f7f8d61c64" providerId="ADAL" clId="{DDBE67AE-DEA9-498E-9EDE-2699B19B1413}" dt="2026-09-12T11:35:18.597" v="62" actId="1076"/>
+          <ac:spMkLst>
+            <pc:docMk/>
+            <pc:sldMk cId="0" sldId="258"/>
+            <ac:spMk id="30" creationId="{71763D0E-1341-A059-D7EB-FF4D114BCC77}"/>
+          </ac:spMkLst>
+        </pc:spChg>
+        <pc:spChg chg="add mod">
+          <ac:chgData name="Luis Ovalle" userId="cb995196-5c5b-4938-acce-a0f7f8d61c64" providerId="ADAL" clId="{DDBE67AE-DEA9-498E-9EDE-2699B19B1413}" dt="2026-09-12T11:35:18.597" v="62" actId="1076"/>
+          <ac:spMkLst>
+            <pc:docMk/>
+            <pc:sldMk cId="0" sldId="258"/>
+            <ac:spMk id="31" creationId="{F6779796-E64E-03ED-BED3-F58F64A1BF03}"/>
+          </ac:spMkLst>
+        </pc:spChg>
+        <pc:spChg chg="add mod">
+          <ac:chgData name="Luis Ovalle" userId="cb995196-5c5b-4938-acce-a0f7f8d61c64" providerId="ADAL" clId="{DDBE67AE-DEA9-498E-9EDE-2699B19B1413}" dt="2026-09-12T11:35:18.597" v="62" actId="1076"/>
+          <ac:spMkLst>
+            <pc:docMk/>
+            <pc:sldMk cId="0" sldId="258"/>
+            <ac:spMk id="33" creationId="{CAADB195-8D3A-9A31-C175-452D599BF9EE}"/>
+          </ac:spMkLst>
+        </pc:spChg>
+        <pc:spChg chg="add mod">
+          <ac:chgData name="Luis Ovalle" userId="cb995196-5c5b-4938-acce-a0f7f8d61c64" providerId="ADAL" clId="{DDBE67AE-DEA9-498E-9EDE-2699B19B1413}" dt="2026-09-12T11:35:18.597" v="62" actId="1076"/>
+          <ac:spMkLst>
+            <pc:docMk/>
+            <pc:sldMk cId="0" sldId="258"/>
+            <ac:spMk id="34" creationId="{592DC94D-CEC7-A6F6-B866-9D849CE8D86A}"/>
+          </ac:spMkLst>
+        </pc:spChg>
+        <pc:spChg chg="add mod">
+          <ac:chgData name="Luis Ovalle" userId="cb995196-5c5b-4938-acce-a0f7f8d61c64" providerId="ADAL" clId="{DDBE67AE-DEA9-498E-9EDE-2699B19B1413}" dt="2026-09-12T11:35:18.597" v="62" actId="1076"/>
+          <ac:spMkLst>
+            <pc:docMk/>
+            <pc:sldMk cId="0" sldId="258"/>
+            <ac:spMk id="35" creationId="{E9E93F86-D15A-221D-FBC0-A329B5903995}"/>
+          </ac:spMkLst>
+        </pc:spChg>
+        <pc:spChg chg="add mod">
+          <ac:chgData name="Luis Ovalle" userId="cb995196-5c5b-4938-acce-a0f7f8d61c64" providerId="ADAL" clId="{DDBE67AE-DEA9-498E-9EDE-2699B19B1413}" dt="2026-09-12T11:35:34.433" v="69"/>
+          <ac:spMkLst>
+            <pc:docMk/>
+            <pc:sldMk cId="0" sldId="258"/>
+            <ac:spMk id="38" creationId="{C77392FC-26F9-219F-273C-B143A343D3A7}"/>
+          </ac:spMkLst>
+        </pc:spChg>
+        <pc:spChg chg="add mod">
+          <ac:chgData name="Luis Ovalle" userId="cb995196-5c5b-4938-acce-a0f7f8d61c64" providerId="ADAL" clId="{DDBE67AE-DEA9-498E-9EDE-2699B19B1413}" dt="2026-09-12T11:35:51.838" v="71" actId="1076"/>
+          <ac:spMkLst>
+            <pc:docMk/>
+            <pc:sldMk cId="0" sldId="258"/>
+            <ac:spMk id="39" creationId="{67F18460-01AC-FC1A-1456-B9058E2105A4}"/>
+          </ac:spMkLst>
+        </pc:spChg>
+        <pc:spChg chg="add mod">
+          <ac:chgData name="Luis Ovalle" userId="cb995196-5c5b-4938-acce-a0f7f8d61c64" providerId="ADAL" clId="{DDBE67AE-DEA9-498E-9EDE-2699B19B1413}" dt="2026-09-12T11:35:51.838" v="71" actId="1076"/>
+          <ac:spMkLst>
+            <pc:docMk/>
+            <pc:sldMk cId="0" sldId="258"/>
+            <ac:spMk id="40" creationId="{071277BF-0E4C-E18A-4C34-2382D3494C7B}"/>
+          </ac:spMkLst>
+        </pc:spChg>
+        <pc:spChg chg="add mod">
+          <ac:chgData name="Luis Ovalle" userId="cb995196-5c5b-4938-acce-a0f7f8d61c64" providerId="ADAL" clId="{DDBE67AE-DEA9-498E-9EDE-2699B19B1413}" dt="2026-09-12T11:35:51.838" v="71" actId="1076"/>
+          <ac:spMkLst>
+            <pc:docMk/>
+            <pc:sldMk cId="0" sldId="258"/>
+            <ac:spMk id="42" creationId="{B4769283-AEEE-86E0-B085-C441EDDAA15E}"/>
+          </ac:spMkLst>
+        </pc:spChg>
+        <pc:picChg chg="del">
+          <ac:chgData name="Luis Ovalle" userId="cb995196-5c5b-4938-acce-a0f7f8d61c64" providerId="ADAL" clId="{DDBE67AE-DEA9-498E-9EDE-2699B19B1413}" dt="2026-09-12T11:34:53.488" v="57" actId="478"/>
+          <ac:picMkLst>
+            <pc:docMk/>
+            <pc:sldMk cId="0" sldId="258"/>
+            <ac:picMk id="17" creationId="{00000000-0000-0000-0000-000000000000}"/>
+          </ac:picMkLst>
+        </pc:picChg>
+        <pc:picChg chg="del">
+          <ac:chgData name="Luis Ovalle" userId="cb995196-5c5b-4938-acce-a0f7f8d61c64" providerId="ADAL" clId="{DDBE67AE-DEA9-498E-9EDE-2699B19B1413}" dt="2026-09-12T11:34:53.488" v="57" actId="478"/>
+          <ac:picMkLst>
+            <pc:docMk/>
+            <pc:sldMk cId="0" sldId="258"/>
+            <ac:picMk id="18" creationId="{00000000-0000-0000-0000-000000000000}"/>
+          </ac:picMkLst>
+        </pc:picChg>
+        <pc:picChg chg="add mod">
+          <ac:chgData name="Luis Ovalle" userId="cb995196-5c5b-4938-acce-a0f7f8d61c64" providerId="ADAL" clId="{DDBE67AE-DEA9-498E-9EDE-2699B19B1413}" dt="2026-09-12T11:35:26.132" v="65" actId="1076"/>
+          <ac:picMkLst>
+            <pc:docMk/>
+            <pc:sldMk cId="0" sldId="258"/>
+            <ac:picMk id="36" creationId="{ADA60D20-6F98-762A-831C-7EB42BBB3EED}"/>
+          </ac:picMkLst>
+        </pc:picChg>
+        <pc:picChg chg="add mod">
+          <ac:chgData name="Luis Ovalle" userId="cb995196-5c5b-4938-acce-a0f7f8d61c64" providerId="ADAL" clId="{DDBE67AE-DEA9-498E-9EDE-2699B19B1413}" dt="2026-09-12T11:35:30.610" v="67" actId="1076"/>
+          <ac:picMkLst>
+            <pc:docMk/>
+            <pc:sldMk cId="0" sldId="258"/>
+            <ac:picMk id="37" creationId="{9C2638ED-0978-24C2-E80B-5661EB420B9F}"/>
+          </ac:picMkLst>
+        </pc:picChg>
+        <pc:picChg chg="add mod">
+          <ac:chgData name="Luis Ovalle" userId="cb995196-5c5b-4938-acce-a0f7f8d61c64" providerId="ADAL" clId="{DDBE67AE-DEA9-498E-9EDE-2699B19B1413}" dt="2026-09-12T11:35:51.838" v="71" actId="1076"/>
+          <ac:picMkLst>
+            <pc:docMk/>
+            <pc:sldMk cId="0" sldId="258"/>
+            <ac:picMk id="41" creationId="{ED6E3487-6D61-A73F-E5AC-2EB8EA0BE2EF}"/>
+          </ac:picMkLst>
+        </pc:picChg>
+      </pc:sldChg>
+      <pc:sldChg chg="addSp delSp modSp mod">
+        <pc:chgData name="Luis Ovalle" userId="cb995196-5c5b-4938-acce-a0f7f8d61c64" providerId="ADAL" clId="{DDBE67AE-DEA9-498E-9EDE-2699B19B1413}" dt="2026-09-12T11:39:29.941" v="156" actId="20577"/>
+        <pc:sldMkLst>
+          <pc:docMk/>
+          <pc:sldMk cId="0" sldId="259"/>
+        </pc:sldMkLst>
+        <pc:spChg chg="mod">
+          <ac:chgData name="Luis Ovalle" userId="cb995196-5c5b-4938-acce-a0f7f8d61c64" providerId="ADAL" clId="{DDBE67AE-DEA9-498E-9EDE-2699B19B1413}" dt="2026-09-12T03:49:45.339" v="4" actId="27636"/>
+          <ac:spMkLst>
+            <pc:docMk/>
+            <pc:sldMk cId="0" sldId="259"/>
+            <ac:spMk id="8" creationId="{00000000-0000-0000-0000-000000000000}"/>
+          </ac:spMkLst>
+        </pc:spChg>
+        <pc:spChg chg="mod">
+          <ac:chgData name="Luis Ovalle" userId="cb995196-5c5b-4938-acce-a0f7f8d61c64" providerId="ADAL" clId="{DDBE67AE-DEA9-498E-9EDE-2699B19B1413}" dt="2026-09-12T11:38:19.066" v="91" actId="1076"/>
+          <ac:spMkLst>
+            <pc:docMk/>
+            <pc:sldMk cId="0" sldId="259"/>
+            <ac:spMk id="14" creationId="{00000000-0000-0000-0000-000000000000}"/>
+          </ac:spMkLst>
+        </pc:spChg>
+        <pc:spChg chg="add mod">
+          <ac:chgData name="Luis Ovalle" userId="cb995196-5c5b-4938-acce-a0f7f8d61c64" providerId="ADAL" clId="{DDBE67AE-DEA9-498E-9EDE-2699B19B1413}" dt="2026-09-12T11:38:57.692" v="105" actId="1076"/>
+          <ac:spMkLst>
+            <pc:docMk/>
+            <pc:sldMk cId="0" sldId="259"/>
+            <ac:spMk id="19" creationId="{522AD7F4-0702-828A-4141-9D749140F482}"/>
+          </ac:spMkLst>
+        </pc:spChg>
+        <pc:spChg chg="add mod">
+          <ac:chgData name="Luis Ovalle" userId="cb995196-5c5b-4938-acce-a0f7f8d61c64" providerId="ADAL" clId="{DDBE67AE-DEA9-498E-9EDE-2699B19B1413}" dt="2026-09-12T11:38:07.334" v="88" actId="1076"/>
+          <ac:spMkLst>
+            <pc:docMk/>
+            <pc:sldMk cId="0" sldId="259"/>
+            <ac:spMk id="20" creationId="{7256A851-FD51-8EF0-B93B-BAECEC3EAD4F}"/>
+          </ac:spMkLst>
+        </pc:spChg>
+        <pc:spChg chg="add mod">
+          <ac:chgData name="Luis Ovalle" userId="cb995196-5c5b-4938-acce-a0f7f8d61c64" providerId="ADAL" clId="{DDBE67AE-DEA9-498E-9EDE-2699B19B1413}" dt="2026-09-12T11:38:32.122" v="94" actId="1076"/>
+          <ac:spMkLst>
+            <pc:docMk/>
+            <pc:sldMk cId="0" sldId="259"/>
+            <ac:spMk id="22" creationId="{5FDB1A26-0A0E-AC31-FCF8-3D29210F2F4E}"/>
+          </ac:spMkLst>
+        </pc:spChg>
+        <pc:spChg chg="add mod">
+          <ac:chgData name="Luis Ovalle" userId="cb995196-5c5b-4938-acce-a0f7f8d61c64" providerId="ADAL" clId="{DDBE67AE-DEA9-498E-9EDE-2699B19B1413}" dt="2026-09-12T11:38:37.570" v="96" actId="1076"/>
+          <ac:spMkLst>
+            <pc:docMk/>
+            <pc:sldMk cId="0" sldId="259"/>
+            <ac:spMk id="24" creationId="{6BDA0CDC-7E16-6159-205D-2C7D476D96B5}"/>
+          </ac:spMkLst>
+        </pc:spChg>
+        <pc:spChg chg="add mod">
+          <ac:chgData name="Luis Ovalle" userId="cb995196-5c5b-4938-acce-a0f7f8d61c64" providerId="ADAL" clId="{DDBE67AE-DEA9-498E-9EDE-2699B19B1413}" dt="2026-09-12T11:38:40.887" v="98" actId="1076"/>
+          <ac:spMkLst>
+            <pc:docMk/>
+            <pc:sldMk cId="0" sldId="259"/>
+            <ac:spMk id="26" creationId="{0AD14257-60D4-1101-68E1-F45FB7A2353A}"/>
+          </ac:spMkLst>
+        </pc:spChg>
+        <pc:spChg chg="add mod">
+          <ac:chgData name="Luis Ovalle" userId="cb995196-5c5b-4938-acce-a0f7f8d61c64" providerId="ADAL" clId="{DDBE67AE-DEA9-498E-9EDE-2699B19B1413}" dt="2026-09-12T11:39:12.190" v="117" actId="20577"/>
+          <ac:spMkLst>
+            <pc:docMk/>
+            <pc:sldMk cId="0" sldId="259"/>
+            <ac:spMk id="28" creationId="{05DD87FE-BAFD-221E-3FDD-6BC8C9FB4BE0}"/>
+          </ac:spMkLst>
+        </pc:spChg>
+        <pc:spChg chg="add mod">
+          <ac:chgData name="Luis Ovalle" userId="cb995196-5c5b-4938-acce-a0f7f8d61c64" providerId="ADAL" clId="{DDBE67AE-DEA9-498E-9EDE-2699B19B1413}" dt="2026-09-12T11:39:20.427" v="141" actId="20577"/>
+          <ac:spMkLst>
+            <pc:docMk/>
+            <pc:sldMk cId="0" sldId="259"/>
+            <ac:spMk id="30" creationId="{1FDD2C30-2E5D-C868-53A0-BB6A2F8AA148}"/>
+          </ac:spMkLst>
+        </pc:spChg>
+        <pc:spChg chg="add mod">
+          <ac:chgData name="Luis Ovalle" userId="cb995196-5c5b-4938-acce-a0f7f8d61c64" providerId="ADAL" clId="{DDBE67AE-DEA9-498E-9EDE-2699B19B1413}" dt="2026-09-12T11:39:29.941" v="156" actId="20577"/>
+          <ac:spMkLst>
+            <pc:docMk/>
+            <pc:sldMk cId="0" sldId="259"/>
+            <ac:spMk id="32" creationId="{9A789CEA-5EDE-0E45-6CAD-DC0B244D7356}"/>
+          </ac:spMkLst>
+        </pc:spChg>
+        <pc:picChg chg="del">
+          <ac:chgData name="Luis Ovalle" userId="cb995196-5c5b-4938-acce-a0f7f8d61c64" providerId="ADAL" clId="{DDBE67AE-DEA9-498E-9EDE-2699B19B1413}" dt="2026-09-12T11:36:42.397" v="72" actId="478"/>
+          <ac:picMkLst>
+            <pc:docMk/>
+            <pc:sldMk cId="0" sldId="259"/>
+            <ac:picMk id="9" creationId="{00000000-0000-0000-0000-000000000000}"/>
+          </ac:picMkLst>
+        </pc:picChg>
+        <pc:picChg chg="mod">
+          <ac:chgData name="Luis Ovalle" userId="cb995196-5c5b-4938-acce-a0f7f8d61c64" providerId="ADAL" clId="{DDBE67AE-DEA9-498E-9EDE-2699B19B1413}" dt="2026-09-12T11:38:13.187" v="89" actId="1076"/>
+          <ac:picMkLst>
+            <pc:docMk/>
+            <pc:sldMk cId="0" sldId="259"/>
+            <ac:picMk id="10" creationId="{00000000-0000-0000-0000-000000000000}"/>
+          </ac:picMkLst>
+        </pc:picChg>
+        <pc:picChg chg="del">
+          <ac:chgData name="Luis Ovalle" userId="cb995196-5c5b-4938-acce-a0f7f8d61c64" providerId="ADAL" clId="{DDBE67AE-DEA9-498E-9EDE-2699B19B1413}" dt="2026-09-12T11:37:32.811" v="79" actId="478"/>
+          <ac:picMkLst>
+            <pc:docMk/>
+            <pc:sldMk cId="0" sldId="259"/>
+            <ac:picMk id="11" creationId="{00000000-0000-0000-0000-000000000000}"/>
+          </ac:picMkLst>
+        </pc:picChg>
+        <pc:picChg chg="del mod">
+          <ac:chgData name="Luis Ovalle" userId="cb995196-5c5b-4938-acce-a0f7f8d61c64" providerId="ADAL" clId="{DDBE67AE-DEA9-498E-9EDE-2699B19B1413}" dt="2026-09-12T11:37:58.077" v="85" actId="478"/>
+          <ac:picMkLst>
+            <pc:docMk/>
+            <pc:sldMk cId="0" sldId="259"/>
+            <ac:picMk id="12" creationId="{00000000-0000-0000-0000-000000000000}"/>
+          </ac:picMkLst>
+        </pc:picChg>
+        <pc:picChg chg="mod">
+          <ac:chgData name="Luis Ovalle" userId="cb995196-5c5b-4938-acce-a0f7f8d61c64" providerId="ADAL" clId="{DDBE67AE-DEA9-498E-9EDE-2699B19B1413}" dt="2026-09-12T11:38:15.154" v="90" actId="1076"/>
+          <ac:picMkLst>
+            <pc:docMk/>
+            <pc:sldMk cId="0" sldId="259"/>
+            <ac:picMk id="13" creationId="{00000000-0000-0000-0000-000000000000}"/>
+          </ac:picMkLst>
+        </pc:picChg>
+        <pc:picChg chg="add mod">
+          <ac:chgData name="Luis Ovalle" userId="cb995196-5c5b-4938-acce-a0f7f8d61c64" providerId="ADAL" clId="{DDBE67AE-DEA9-498E-9EDE-2699B19B1413}" dt="2026-09-12T11:36:56.165" v="77" actId="1076"/>
+          <ac:picMkLst>
+            <pc:docMk/>
+            <pc:sldMk cId="0" sldId="259"/>
+            <ac:picMk id="15" creationId="{63AC5572-5DDF-1285-29A8-EBF51E999B34}"/>
+          </ac:picMkLst>
+        </pc:picChg>
+        <pc:picChg chg="add mod">
+          <ac:chgData name="Luis Ovalle" userId="cb995196-5c5b-4938-acce-a0f7f8d61c64" providerId="ADAL" clId="{DDBE67AE-DEA9-498E-9EDE-2699B19B1413}" dt="2026-09-12T11:37:49.565" v="83" actId="14100"/>
+          <ac:picMkLst>
+            <pc:docMk/>
+            <pc:sldMk cId="0" sldId="259"/>
+            <ac:picMk id="17" creationId="{9A11D080-6F48-5328-53D9-643C7EEB95E6}"/>
+          </ac:picMkLst>
+        </pc:picChg>
+        <pc:picChg chg="add mod">
+          <ac:chgData name="Luis Ovalle" userId="cb995196-5c5b-4938-acce-a0f7f8d61c64" providerId="ADAL" clId="{DDBE67AE-DEA9-498E-9EDE-2699B19B1413}" dt="2026-09-12T11:38:21.068" v="92" actId="1076"/>
+          <ac:picMkLst>
+            <pc:docMk/>
+            <pc:sldMk cId="0" sldId="259"/>
+            <ac:picMk id="18" creationId="{5BC4AB55-F1A0-1E70-8067-B89465F8A4EE}"/>
+          </ac:picMkLst>
+        </pc:picChg>
+      </pc:sldChg>
+      <pc:sldChg chg="delSp modSp mod">
+        <pc:chgData name="Luis Ovalle" userId="cb995196-5c5b-4938-acce-a0f7f8d61c64" providerId="ADAL" clId="{DDBE67AE-DEA9-498E-9EDE-2699B19B1413}" dt="2026-09-12T11:40:47.297" v="177" actId="403"/>
+        <pc:sldMkLst>
+          <pc:docMk/>
+          <pc:sldMk cId="0" sldId="260"/>
+        </pc:sldMkLst>
+        <pc:spChg chg="mod">
+          <ac:chgData name="Luis Ovalle" userId="cb995196-5c5b-4938-acce-a0f7f8d61c64" providerId="ADAL" clId="{DDBE67AE-DEA9-498E-9EDE-2699B19B1413}" dt="2026-09-12T11:40:42.399" v="176" actId="403"/>
+          <ac:spMkLst>
+            <pc:docMk/>
+            <pc:sldMk cId="0" sldId="260"/>
+            <ac:spMk id="9" creationId="{00000000-0000-0000-0000-000000000000}"/>
+          </ac:spMkLst>
+        </pc:spChg>
+        <pc:spChg chg="del">
+          <ac:chgData name="Luis Ovalle" userId="cb995196-5c5b-4938-acce-a0f7f8d61c64" providerId="ADAL" clId="{DDBE67AE-DEA9-498E-9EDE-2699B19B1413}" dt="2026-09-12T11:39:50.959" v="157" actId="478"/>
+          <ac:spMkLst>
+            <pc:docMk/>
+            <pc:sldMk cId="0" sldId="260"/>
+            <ac:spMk id="10" creationId="{00000000-0000-0000-0000-000000000000}"/>
+          </ac:spMkLst>
+        </pc:spChg>
+        <pc:spChg chg="mod">
+          <ac:chgData name="Luis Ovalle" userId="cb995196-5c5b-4938-acce-a0f7f8d61c64" providerId="ADAL" clId="{DDBE67AE-DEA9-498E-9EDE-2699B19B1413}" dt="2026-09-12T11:40:39.881" v="175" actId="403"/>
+          <ac:spMkLst>
+            <pc:docMk/>
+            <pc:sldMk cId="0" sldId="260"/>
+            <ac:spMk id="11" creationId="{00000000-0000-0000-0000-000000000000}"/>
+          </ac:spMkLst>
+        </pc:spChg>
+        <pc:spChg chg="del">
+          <ac:chgData name="Luis Ovalle" userId="cb995196-5c5b-4938-acce-a0f7f8d61c64" providerId="ADAL" clId="{DDBE67AE-DEA9-498E-9EDE-2699B19B1413}" dt="2026-09-12T11:39:51.992" v="158" actId="478"/>
+          <ac:spMkLst>
+            <pc:docMk/>
+            <pc:sldMk cId="0" sldId="260"/>
+            <ac:spMk id="12" creationId="{00000000-0000-0000-0000-000000000000}"/>
+          </ac:spMkLst>
+        </pc:spChg>
+        <pc:spChg chg="mod">
+          <ac:chgData name="Luis Ovalle" userId="cb995196-5c5b-4938-acce-a0f7f8d61c64" providerId="ADAL" clId="{DDBE67AE-DEA9-498E-9EDE-2699B19B1413}" dt="2026-09-12T11:40:37.083" v="174" actId="403"/>
+          <ac:spMkLst>
+            <pc:docMk/>
+            <pc:sldMk cId="0" sldId="260"/>
+            <ac:spMk id="13" creationId="{00000000-0000-0000-0000-000000000000}"/>
+          </ac:spMkLst>
+        </pc:spChg>
+        <pc:spChg chg="del">
+          <ac:chgData name="Luis Ovalle" userId="cb995196-5c5b-4938-acce-a0f7f8d61c64" providerId="ADAL" clId="{DDBE67AE-DEA9-498E-9EDE-2699B19B1413}" dt="2026-09-12T11:39:53.024" v="159" actId="478"/>
+          <ac:spMkLst>
+            <pc:docMk/>
+            <pc:sldMk cId="0" sldId="260"/>
+            <ac:spMk id="14" creationId="{00000000-0000-0000-0000-000000000000}"/>
+          </ac:spMkLst>
+        </pc:spChg>
+        <pc:spChg chg="mod">
+          <ac:chgData name="Luis Ovalle" userId="cb995196-5c5b-4938-acce-a0f7f8d61c64" providerId="ADAL" clId="{DDBE67AE-DEA9-498E-9EDE-2699B19B1413}" dt="2026-09-12T11:40:33.096" v="173" actId="404"/>
+          <ac:spMkLst>
+            <pc:docMk/>
+            <pc:sldMk cId="0" sldId="260"/>
+            <ac:spMk id="15" creationId="{00000000-0000-0000-0000-000000000000}"/>
+          </ac:spMkLst>
+        </pc:spChg>
+        <pc:spChg chg="del">
+          <ac:chgData name="Luis Ovalle" userId="cb995196-5c5b-4938-acce-a0f7f8d61c64" providerId="ADAL" clId="{DDBE67AE-DEA9-498E-9EDE-2699B19B1413}" dt="2026-09-12T11:39:54.099" v="160" actId="478"/>
+          <ac:spMkLst>
+            <pc:docMk/>
+            <pc:sldMk cId="0" sldId="260"/>
+            <ac:spMk id="16" creationId="{00000000-0000-0000-0000-000000000000}"/>
+          </ac:spMkLst>
+        </pc:spChg>
+        <pc:spChg chg="mod">
+          <ac:chgData name="Luis Ovalle" userId="cb995196-5c5b-4938-acce-a0f7f8d61c64" providerId="ADAL" clId="{DDBE67AE-DEA9-498E-9EDE-2699B19B1413}" dt="2026-09-12T11:40:47.297" v="177" actId="403"/>
+          <ac:spMkLst>
+            <pc:docMk/>
+            <pc:sldMk cId="0" sldId="260"/>
+            <ac:spMk id="17" creationId="{00000000-0000-0000-0000-000000000000}"/>
+          </ac:spMkLst>
+        </pc:spChg>
+        <pc:spChg chg="mod">
+          <ac:chgData name="Luis Ovalle" userId="cb995196-5c5b-4938-acce-a0f7f8d61c64" providerId="ADAL" clId="{DDBE67AE-DEA9-498E-9EDE-2699B19B1413}" dt="2026-09-12T11:40:47.297" v="177" actId="403"/>
+          <ac:spMkLst>
+            <pc:docMk/>
+            <pc:sldMk cId="0" sldId="260"/>
+            <ac:spMk id="18" creationId="{00000000-0000-0000-0000-000000000000}"/>
+          </ac:spMkLst>
+        </pc:spChg>
+        <pc:spChg chg="mod">
+          <ac:chgData name="Luis Ovalle" userId="cb995196-5c5b-4938-acce-a0f7f8d61c64" providerId="ADAL" clId="{DDBE67AE-DEA9-498E-9EDE-2699B19B1413}" dt="2026-09-12T11:40:47.297" v="177" actId="403"/>
+          <ac:spMkLst>
+            <pc:docMk/>
+            <pc:sldMk cId="0" sldId="260"/>
+            <ac:spMk id="19" creationId="{00000000-0000-0000-0000-000000000000}"/>
+          </ac:spMkLst>
+        </pc:spChg>
+        <pc:spChg chg="mod">
+          <ac:chgData name="Luis Ovalle" userId="cb995196-5c5b-4938-acce-a0f7f8d61c64" providerId="ADAL" clId="{DDBE67AE-DEA9-498E-9EDE-2699B19B1413}" dt="2026-09-12T11:40:47.297" v="177" actId="403"/>
+          <ac:spMkLst>
+            <pc:docMk/>
+            <pc:sldMk cId="0" sldId="260"/>
+            <ac:spMk id="20" creationId="{00000000-0000-0000-0000-000000000000}"/>
+          </ac:spMkLst>
+        </pc:spChg>
+        <pc:spChg chg="mod">
+          <ac:chgData name="Luis Ovalle" userId="cb995196-5c5b-4938-acce-a0f7f8d61c64" providerId="ADAL" clId="{DDBE67AE-DEA9-498E-9EDE-2699B19B1413}" dt="2026-09-12T11:40:47.297" v="177" actId="403"/>
+          <ac:spMkLst>
+            <pc:docMk/>
+            <pc:sldMk cId="0" sldId="260"/>
+            <ac:spMk id="21" creationId="{00000000-0000-0000-0000-000000000000}"/>
+          </ac:spMkLst>
+        </pc:spChg>
+        <pc:spChg chg="mod">
+          <ac:chgData name="Luis Ovalle" userId="cb995196-5c5b-4938-acce-a0f7f8d61c64" providerId="ADAL" clId="{DDBE67AE-DEA9-498E-9EDE-2699B19B1413}" dt="2026-09-12T11:40:47.297" v="177" actId="403"/>
+          <ac:spMkLst>
+            <pc:docMk/>
+            <pc:sldMk cId="0" sldId="260"/>
+            <ac:spMk id="22" creationId="{00000000-0000-0000-0000-000000000000}"/>
+          </ac:spMkLst>
+        </pc:spChg>
+        <pc:spChg chg="mod">
+          <ac:chgData name="Luis Ovalle" userId="cb995196-5c5b-4938-acce-a0f7f8d61c64" providerId="ADAL" clId="{DDBE67AE-DEA9-498E-9EDE-2699B19B1413}" dt="2026-09-12T11:40:47.297" v="177" actId="403"/>
+          <ac:spMkLst>
+            <pc:docMk/>
+            <pc:sldMk cId="0" sldId="260"/>
+            <ac:spMk id="23" creationId="{00000000-0000-0000-0000-000000000000}"/>
+          </ac:spMkLst>
+        </pc:spChg>
+      </pc:sldChg>
+      <pc:sldChg chg="delSp modSp mod">
+        <pc:chgData name="Luis Ovalle" userId="cb995196-5c5b-4938-acce-a0f7f8d61c64" providerId="ADAL" clId="{DDBE67AE-DEA9-498E-9EDE-2699B19B1413}" dt="2026-09-12T11:41:25.687" v="187" actId="403"/>
+        <pc:sldMkLst>
+          <pc:docMk/>
+          <pc:sldMk cId="0" sldId="261"/>
+        </pc:sldMkLst>
+        <pc:spChg chg="mod">
+          <ac:chgData name="Luis Ovalle" userId="cb995196-5c5b-4938-acce-a0f7f8d61c64" providerId="ADAL" clId="{DDBE67AE-DEA9-498E-9EDE-2699B19B1413}" dt="2026-09-12T11:41:20.152" v="185" actId="403"/>
+          <ac:spMkLst>
+            <pc:docMk/>
+            <pc:sldMk cId="0" sldId="261"/>
+            <ac:spMk id="9" creationId="{00000000-0000-0000-0000-000000000000}"/>
+          </ac:spMkLst>
+        </pc:spChg>
+        <pc:spChg chg="del">
+          <ac:chgData name="Luis Ovalle" userId="cb995196-5c5b-4938-acce-a0f7f8d61c64" providerId="ADAL" clId="{DDBE67AE-DEA9-498E-9EDE-2699B19B1413}" dt="2026-09-12T11:41:02.814" v="178" actId="478"/>
+          <ac:spMkLst>
+            <pc:docMk/>
+            <pc:sldMk cId="0" sldId="261"/>
+            <ac:spMk id="10" creationId="{00000000-0000-0000-0000-000000000000}"/>
+          </ac:spMkLst>
+        </pc:spChg>
+        <pc:spChg chg="mod">
+          <ac:chgData name="Luis Ovalle" userId="cb995196-5c5b-4938-acce-a0f7f8d61c64" providerId="ADAL" clId="{DDBE67AE-DEA9-498E-9EDE-2699B19B1413}" dt="2026-09-12T11:41:20.152" v="185" actId="403"/>
+          <ac:spMkLst>
+            <pc:docMk/>
+            <pc:sldMk cId="0" sldId="261"/>
+            <ac:spMk id="11" creationId="{00000000-0000-0000-0000-000000000000}"/>
+          </ac:spMkLst>
+        </pc:spChg>
+        <pc:spChg chg="del">
+          <ac:chgData name="Luis Ovalle" userId="cb995196-5c5b-4938-acce-a0f7f8d61c64" providerId="ADAL" clId="{DDBE67AE-DEA9-498E-9EDE-2699B19B1413}" dt="2026-09-12T11:41:04.351" v="179" actId="478"/>
+          <ac:spMkLst>
+            <pc:docMk/>
+            <pc:sldMk cId="0" sldId="261"/>
+            <ac:spMk id="12" creationId="{00000000-0000-0000-0000-000000000000}"/>
+          </ac:spMkLst>
+        </pc:spChg>
+        <pc:spChg chg="mod">
+          <ac:chgData name="Luis Ovalle" userId="cb995196-5c5b-4938-acce-a0f7f8d61c64" providerId="ADAL" clId="{DDBE67AE-DEA9-498E-9EDE-2699B19B1413}" dt="2026-09-12T11:41:20.152" v="185" actId="403"/>
+          <ac:spMkLst>
+            <pc:docMk/>
+            <pc:sldMk cId="0" sldId="261"/>
+            <ac:spMk id="13" creationId="{00000000-0000-0000-0000-000000000000}"/>
+          </ac:spMkLst>
+        </pc:spChg>
+        <pc:spChg chg="del">
+          <ac:chgData name="Luis Ovalle" userId="cb995196-5c5b-4938-acce-a0f7f8d61c64" providerId="ADAL" clId="{DDBE67AE-DEA9-498E-9EDE-2699B19B1413}" dt="2026-09-12T11:41:06.429" v="181" actId="478"/>
+          <ac:spMkLst>
+            <pc:docMk/>
+            <pc:sldMk cId="0" sldId="261"/>
+            <ac:spMk id="14" creationId="{00000000-0000-0000-0000-000000000000}"/>
+          </ac:spMkLst>
+        </pc:spChg>
+        <pc:spChg chg="mod">
+          <ac:chgData name="Luis Ovalle" userId="cb995196-5c5b-4938-acce-a0f7f8d61c64" providerId="ADAL" clId="{DDBE67AE-DEA9-498E-9EDE-2699B19B1413}" dt="2026-09-12T11:41:20.152" v="185" actId="403"/>
+          <ac:spMkLst>
+            <pc:docMk/>
+            <pc:sldMk cId="0" sldId="261"/>
+            <ac:spMk id="15" creationId="{00000000-0000-0000-0000-000000000000}"/>
+          </ac:spMkLst>
+        </pc:spChg>
+        <pc:spChg chg="del">
+          <ac:chgData name="Luis Ovalle" userId="cb995196-5c5b-4938-acce-a0f7f8d61c64" providerId="ADAL" clId="{DDBE67AE-DEA9-498E-9EDE-2699B19B1413}" dt="2026-09-12T11:41:05.397" v="180" actId="478"/>
+          <ac:spMkLst>
+            <pc:docMk/>
+            <pc:sldMk cId="0" sldId="261"/>
+            <ac:spMk id="16" creationId="{00000000-0000-0000-0000-000000000000}"/>
+          </ac:spMkLst>
+        </pc:spChg>
+        <pc:spChg chg="mod">
+          <ac:chgData name="Luis Ovalle" userId="cb995196-5c5b-4938-acce-a0f7f8d61c64" providerId="ADAL" clId="{DDBE67AE-DEA9-498E-9EDE-2699B19B1413}" dt="2026-09-12T11:41:25.687" v="187" actId="403"/>
+          <ac:spMkLst>
+            <pc:docMk/>
+            <pc:sldMk cId="0" sldId="261"/>
+            <ac:spMk id="17" creationId="{00000000-0000-0000-0000-000000000000}"/>
+          </ac:spMkLst>
+        </pc:spChg>
+      </pc:sldChg>
+      <pc:sldChg chg="modSp mod">
+        <pc:chgData name="Luis Ovalle" userId="cb995196-5c5b-4938-acce-a0f7f8d61c64" providerId="ADAL" clId="{DDBE67AE-DEA9-498E-9EDE-2699B19B1413}" dt="2026-09-12T11:42:05.974" v="206" actId="1076"/>
+        <pc:sldMkLst>
+          <pc:docMk/>
+          <pc:sldMk cId="0" sldId="262"/>
+        </pc:sldMkLst>
+        <pc:spChg chg="mod">
+          <ac:chgData name="Luis Ovalle" userId="cb995196-5c5b-4938-acce-a0f7f8d61c64" providerId="ADAL" clId="{DDBE67AE-DEA9-498E-9EDE-2699B19B1413}" dt="2026-09-12T11:41:37.127" v="192" actId="27636"/>
+          <ac:spMkLst>
+            <pc:docMk/>
+            <pc:sldMk cId="0" sldId="262"/>
+            <ac:spMk id="8" creationId="{00000000-0000-0000-0000-000000000000}"/>
+          </ac:spMkLst>
+        </pc:spChg>
+        <pc:spChg chg="mod">
+          <ac:chgData name="Luis Ovalle" userId="cb995196-5c5b-4938-acce-a0f7f8d61c64" providerId="ADAL" clId="{DDBE67AE-DEA9-498E-9EDE-2699B19B1413}" dt="2026-09-12T11:42:00.008" v="203" actId="403"/>
+          <ac:spMkLst>
+            <pc:docMk/>
+            <pc:sldMk cId="0" sldId="262"/>
+            <ac:spMk id="11" creationId="{00000000-0000-0000-0000-000000000000}"/>
+          </ac:spMkLst>
+        </pc:spChg>
+        <pc:spChg chg="mod">
+          <ac:chgData name="Luis Ovalle" userId="cb995196-5c5b-4938-acce-a0f7f8d61c64" providerId="ADAL" clId="{DDBE67AE-DEA9-498E-9EDE-2699B19B1413}" dt="2026-09-12T11:41:45.220" v="195" actId="403"/>
+          <ac:spMkLst>
+            <pc:docMk/>
+            <pc:sldMk cId="0" sldId="262"/>
+            <ac:spMk id="13" creationId="{00000000-0000-0000-0000-000000000000}"/>
+          </ac:spMkLst>
+        </pc:spChg>
+        <pc:spChg chg="mod">
+          <ac:chgData name="Luis Ovalle" userId="cb995196-5c5b-4938-acce-a0f7f8d61c64" providerId="ADAL" clId="{DDBE67AE-DEA9-498E-9EDE-2699B19B1413}" dt="2026-09-12T11:41:39.768" v="193" actId="403"/>
+          <ac:spMkLst>
+            <pc:docMk/>
+            <pc:sldMk cId="0" sldId="262"/>
+            <ac:spMk id="14" creationId="{00000000-0000-0000-0000-000000000000}"/>
+          </ac:spMkLst>
+        </pc:spChg>
+        <pc:spChg chg="mod">
+          <ac:chgData name="Luis Ovalle" userId="cb995196-5c5b-4938-acce-a0f7f8d61c64" providerId="ADAL" clId="{DDBE67AE-DEA9-498E-9EDE-2699B19B1413}" dt="2026-09-12T11:41:53.224" v="198" actId="27636"/>
+          <ac:spMkLst>
+            <pc:docMk/>
+            <pc:sldMk cId="0" sldId="262"/>
+            <ac:spMk id="15" creationId="{00000000-0000-0000-0000-000000000000}"/>
+          </ac:spMkLst>
+        </pc:spChg>
+        <pc:picChg chg="mod">
+          <ac:chgData name="Luis Ovalle" userId="cb995196-5c5b-4938-acce-a0f7f8d61c64" providerId="ADAL" clId="{DDBE67AE-DEA9-498E-9EDE-2699B19B1413}" dt="2026-09-12T11:42:05.974" v="206" actId="1076"/>
+          <ac:picMkLst>
+            <pc:docMk/>
+            <pc:sldMk cId="0" sldId="262"/>
+            <ac:picMk id="9" creationId="{00000000-0000-0000-0000-000000000000}"/>
+          </ac:picMkLst>
+        </pc:picChg>
+      </pc:sldChg>
+      <pc:sldChg chg="delSp modSp mod">
+        <pc:chgData name="Luis Ovalle" userId="cb995196-5c5b-4938-acce-a0f7f8d61c64" providerId="ADAL" clId="{DDBE67AE-DEA9-498E-9EDE-2699B19B1413}" dt="2026-09-12T11:42:44.476" v="213" actId="403"/>
+        <pc:sldMkLst>
+          <pc:docMk/>
+          <pc:sldMk cId="0" sldId="263"/>
+        </pc:sldMkLst>
+        <pc:spChg chg="mod">
+          <ac:chgData name="Luis Ovalle" userId="cb995196-5c5b-4938-acce-a0f7f8d61c64" providerId="ADAL" clId="{DDBE67AE-DEA9-498E-9EDE-2699B19B1413}" dt="2026-09-12T11:42:26.214" v="209" actId="403"/>
+          <ac:spMkLst>
+            <pc:docMk/>
+            <pc:sldMk cId="0" sldId="263"/>
+            <ac:spMk id="10" creationId="{00000000-0000-0000-0000-000000000000}"/>
+          </ac:spMkLst>
+        </pc:spChg>
+        <pc:spChg chg="mod">
+          <ac:chgData name="Luis Ovalle" userId="cb995196-5c5b-4938-acce-a0f7f8d61c64" providerId="ADAL" clId="{DDBE67AE-DEA9-498E-9EDE-2699B19B1413}" dt="2026-09-12T11:42:26.214" v="209" actId="403"/>
+          <ac:spMkLst>
+            <pc:docMk/>
+            <pc:sldMk cId="0" sldId="263"/>
+            <ac:spMk id="11" creationId="{00000000-0000-0000-0000-000000000000}"/>
+          </ac:spMkLst>
+        </pc:spChg>
+        <pc:spChg chg="mod">
+          <ac:chgData name="Luis Ovalle" userId="cb995196-5c5b-4938-acce-a0f7f8d61c64" providerId="ADAL" clId="{DDBE67AE-DEA9-498E-9EDE-2699B19B1413}" dt="2026-09-12T11:42:44.476" v="213" actId="403"/>
+          <ac:spMkLst>
+            <pc:docMk/>
+            <pc:sldMk cId="0" sldId="263"/>
+            <ac:spMk id="12" creationId="{00000000-0000-0000-0000-000000000000}"/>
+          </ac:spMkLst>
+        </pc:spChg>
+        <pc:spChg chg="del">
+          <ac:chgData name="Luis Ovalle" userId="cb995196-5c5b-4938-acce-a0f7f8d61c64" providerId="ADAL" clId="{DDBE67AE-DEA9-498E-9EDE-2699B19B1413}" dt="2026-09-12T11:42:19.326" v="207" actId="478"/>
+          <ac:spMkLst>
+            <pc:docMk/>
+            <pc:sldMk cId="0" sldId="263"/>
+            <ac:spMk id="13" creationId="{00000000-0000-0000-0000-000000000000}"/>
+          </ac:spMkLst>
+        </pc:spChg>
+        <pc:spChg chg="mod">
+          <ac:chgData name="Luis Ovalle" userId="cb995196-5c5b-4938-acce-a0f7f8d61c64" providerId="ADAL" clId="{DDBE67AE-DEA9-498E-9EDE-2699B19B1413}" dt="2026-09-12T11:42:44.476" v="213" actId="403"/>
+          <ac:spMkLst>
+            <pc:docMk/>
+            <pc:sldMk cId="0" sldId="263"/>
+            <ac:spMk id="14" creationId="{00000000-0000-0000-0000-000000000000}"/>
+          </ac:spMkLst>
+        </pc:spChg>
+        <pc:spChg chg="del">
+          <ac:chgData name="Luis Ovalle" userId="cb995196-5c5b-4938-acce-a0f7f8d61c64" providerId="ADAL" clId="{DDBE67AE-DEA9-498E-9EDE-2699B19B1413}" dt="2026-09-12T11:42:20.668" v="208" actId="478"/>
+          <ac:spMkLst>
+            <pc:docMk/>
+            <pc:sldMk cId="0" sldId="263"/>
+            <ac:spMk id="15" creationId="{00000000-0000-0000-0000-000000000000}"/>
+          </ac:spMkLst>
+        </pc:spChg>
+        <pc:spChg chg="mod">
+          <ac:chgData name="Luis Ovalle" userId="cb995196-5c5b-4938-acce-a0f7f8d61c64" providerId="ADAL" clId="{DDBE67AE-DEA9-498E-9EDE-2699B19B1413}" dt="2026-09-12T11:42:26.215" v="210" actId="27636"/>
+          <ac:spMkLst>
+            <pc:docMk/>
+            <pc:sldMk cId="0" sldId="263"/>
+            <ac:spMk id="16" creationId="{00000000-0000-0000-0000-000000000000}"/>
+          </ac:spMkLst>
+        </pc:spChg>
+      </pc:sldChg>
+      <pc:sldChg chg="delSp modSp mod">
+        <pc:chgData name="Luis Ovalle" userId="cb995196-5c5b-4938-acce-a0f7f8d61c64" providerId="ADAL" clId="{DDBE67AE-DEA9-498E-9EDE-2699B19B1413}" dt="2026-09-12T11:43:26.209" v="222" actId="403"/>
+        <pc:sldMkLst>
+          <pc:docMk/>
+          <pc:sldMk cId="0" sldId="264"/>
+        </pc:sldMkLst>
+        <pc:spChg chg="mod">
+          <ac:chgData name="Luis Ovalle" userId="cb995196-5c5b-4938-acce-a0f7f8d61c64" providerId="ADAL" clId="{DDBE67AE-DEA9-498E-9EDE-2699B19B1413}" dt="2026-09-12T11:43:06.425" v="214" actId="403"/>
+          <ac:spMkLst>
+            <pc:docMk/>
+            <pc:sldMk cId="0" sldId="264"/>
+            <ac:spMk id="11" creationId="{00000000-0000-0000-0000-000000000000}"/>
+          </ac:spMkLst>
+        </pc:spChg>
+        <pc:spChg chg="mod">
+          <ac:chgData name="Luis Ovalle" userId="cb995196-5c5b-4938-acce-a0f7f8d61c64" providerId="ADAL" clId="{DDBE67AE-DEA9-498E-9EDE-2699B19B1413}" dt="2026-09-12T11:43:06.425" v="214" actId="403"/>
+          <ac:spMkLst>
+            <pc:docMk/>
+            <pc:sldMk cId="0" sldId="264"/>
+            <ac:spMk id="12" creationId="{00000000-0000-0000-0000-000000000000}"/>
+          </ac:spMkLst>
+        </pc:spChg>
+        <pc:spChg chg="mod">
+          <ac:chgData name="Luis Ovalle" userId="cb995196-5c5b-4938-acce-a0f7f8d61c64" providerId="ADAL" clId="{DDBE67AE-DEA9-498E-9EDE-2699B19B1413}" dt="2026-09-12T11:43:06.425" v="214" actId="403"/>
+          <ac:spMkLst>
+            <pc:docMk/>
+            <pc:sldMk cId="0" sldId="264"/>
+            <ac:spMk id="13" creationId="{00000000-0000-0000-0000-000000000000}"/>
+          </ac:spMkLst>
+        </pc:spChg>
+        <pc:spChg chg="mod">
+          <ac:chgData name="Luis Ovalle" userId="cb995196-5c5b-4938-acce-a0f7f8d61c64" providerId="ADAL" clId="{DDBE67AE-DEA9-498E-9EDE-2699B19B1413}" dt="2026-09-12T11:43:06.425" v="214" actId="403"/>
+          <ac:spMkLst>
+            <pc:docMk/>
+            <pc:sldMk cId="0" sldId="264"/>
+            <ac:spMk id="14" creationId="{00000000-0000-0000-0000-000000000000}"/>
+          </ac:spMkLst>
+        </pc:spChg>
+        <pc:spChg chg="mod">
+          <ac:chgData name="Luis Ovalle" userId="cb995196-5c5b-4938-acce-a0f7f8d61c64" providerId="ADAL" clId="{DDBE67AE-DEA9-498E-9EDE-2699B19B1413}" dt="2026-09-12T11:43:06.425" v="214" actId="403"/>
+          <ac:spMkLst>
+            <pc:docMk/>
+            <pc:sldMk cId="0" sldId="264"/>
+            <ac:spMk id="15" creationId="{00000000-0000-0000-0000-000000000000}"/>
+          </ac:spMkLst>
+        </pc:spChg>
+        <pc:spChg chg="mod">
+          <ac:chgData name="Luis Ovalle" userId="cb995196-5c5b-4938-acce-a0f7f8d61c64" providerId="ADAL" clId="{DDBE67AE-DEA9-498E-9EDE-2699B19B1413}" dt="2026-09-12T11:43:26.209" v="222" actId="403"/>
+          <ac:spMkLst>
+            <pc:docMk/>
+            <pc:sldMk cId="0" sldId="264"/>
+            <ac:spMk id="16" creationId="{00000000-0000-0000-0000-000000000000}"/>
+          </ac:spMkLst>
+        </pc:spChg>
+        <pc:spChg chg="del mod">
+          <ac:chgData name="Luis Ovalle" userId="cb995196-5c5b-4938-acce-a0f7f8d61c64" providerId="ADAL" clId="{DDBE67AE-DEA9-498E-9EDE-2699B19B1413}" dt="2026-09-12T11:43:11.159" v="215" actId="478"/>
+          <ac:spMkLst>
+            <pc:docMk/>
+            <pc:sldMk cId="0" sldId="264"/>
+            <ac:spMk id="17" creationId="{00000000-0000-0000-0000-000000000000}"/>
+          </ac:spMkLst>
+        </pc:spChg>
+      </pc:sldChg>
+      <pc:sldChg chg="delSp modSp mod">
+        <pc:chgData name="Luis Ovalle" userId="cb995196-5c5b-4938-acce-a0f7f8d61c64" providerId="ADAL" clId="{DDBE67AE-DEA9-498E-9EDE-2699B19B1413}" dt="2026-09-12T11:45:47.211" v="276" actId="11530"/>
+        <pc:sldMkLst>
+          <pc:docMk/>
+          <pc:sldMk cId="0" sldId="265"/>
+        </pc:sldMkLst>
+        <pc:spChg chg="mod">
+          <ac:chgData name="Luis Ovalle" userId="cb995196-5c5b-4938-acce-a0f7f8d61c64" providerId="ADAL" clId="{DDBE67AE-DEA9-498E-9EDE-2699B19B1413}" dt="2026-09-12T11:43:54.892" v="229" actId="27636"/>
+          <ac:spMkLst>
+            <pc:docMk/>
+            <pc:sldMk cId="0" sldId="265"/>
+            <ac:spMk id="11" creationId="{00000000-0000-0000-0000-000000000000}"/>
+          </ac:spMkLst>
+        </pc:spChg>
+        <pc:spChg chg="mod">
+          <ac:chgData name="Luis Ovalle" userId="cb995196-5c5b-4938-acce-a0f7f8d61c64" providerId="ADAL" clId="{DDBE67AE-DEA9-498E-9EDE-2699B19B1413}" dt="2026-09-12T11:45:47.211" v="276" actId="11530"/>
+          <ac:spMkLst>
+            <pc:docMk/>
+            <pc:sldMk cId="0" sldId="265"/>
+            <ac:spMk id="12" creationId="{00000000-0000-0000-0000-000000000000}"/>
+          </ac:spMkLst>
+        </pc:spChg>
+        <pc:spChg chg="del">
+          <ac:chgData name="Luis Ovalle" userId="cb995196-5c5b-4938-acce-a0f7f8d61c64" providerId="ADAL" clId="{DDBE67AE-DEA9-498E-9EDE-2699B19B1413}" dt="2026-09-12T11:43:40.517" v="223" actId="478"/>
+          <ac:spMkLst>
+            <pc:docMk/>
+            <pc:sldMk cId="0" sldId="265"/>
+            <ac:spMk id="13" creationId="{00000000-0000-0000-0000-000000000000}"/>
+          </ac:spMkLst>
+        </pc:spChg>
+        <pc:spChg chg="mod">
+          <ac:chgData name="Luis Ovalle" userId="cb995196-5c5b-4938-acce-a0f7f8d61c64" providerId="ADAL" clId="{DDBE67AE-DEA9-498E-9EDE-2699B19B1413}" dt="2026-09-12T11:45:47.211" v="276" actId="11530"/>
+          <ac:spMkLst>
+            <pc:docMk/>
+            <pc:sldMk cId="0" sldId="265"/>
+            <ac:spMk id="14" creationId="{00000000-0000-0000-0000-000000000000}"/>
+          </ac:spMkLst>
+        </pc:spChg>
+        <pc:spChg chg="del">
+          <ac:chgData name="Luis Ovalle" userId="cb995196-5c5b-4938-acce-a0f7f8d61c64" providerId="ADAL" clId="{DDBE67AE-DEA9-498E-9EDE-2699B19B1413}" dt="2026-09-12T11:43:40.517" v="223" actId="478"/>
+          <ac:spMkLst>
+            <pc:docMk/>
+            <pc:sldMk cId="0" sldId="265"/>
+            <ac:spMk id="15" creationId="{00000000-0000-0000-0000-000000000000}"/>
+          </ac:spMkLst>
+        </pc:spChg>
+        <pc:spChg chg="mod">
+          <ac:chgData name="Luis Ovalle" userId="cb995196-5c5b-4938-acce-a0f7f8d61c64" providerId="ADAL" clId="{DDBE67AE-DEA9-498E-9EDE-2699B19B1413}" dt="2026-09-12T11:45:47.211" v="276" actId="11530"/>
+          <ac:spMkLst>
+            <pc:docMk/>
+            <pc:sldMk cId="0" sldId="265"/>
+            <ac:spMk id="16" creationId="{00000000-0000-0000-0000-000000000000}"/>
+          </ac:spMkLst>
+        </pc:spChg>
+        <pc:spChg chg="del">
+          <ac:chgData name="Luis Ovalle" userId="cb995196-5c5b-4938-acce-a0f7f8d61c64" providerId="ADAL" clId="{DDBE67AE-DEA9-498E-9EDE-2699B19B1413}" dt="2026-09-12T11:43:40.517" v="223" actId="478"/>
+          <ac:spMkLst>
+            <pc:docMk/>
+            <pc:sldMk cId="0" sldId="265"/>
+            <ac:spMk id="17" creationId="{00000000-0000-0000-0000-000000000000}"/>
+          </ac:spMkLst>
+        </pc:spChg>
+        <pc:spChg chg="mod">
+          <ac:chgData name="Luis Ovalle" userId="cb995196-5c5b-4938-acce-a0f7f8d61c64" providerId="ADAL" clId="{DDBE67AE-DEA9-498E-9EDE-2699B19B1413}" dt="2026-09-12T11:45:47.211" v="276" actId="11530"/>
+          <ac:spMkLst>
+            <pc:docMk/>
+            <pc:sldMk cId="0" sldId="265"/>
+            <ac:spMk id="18" creationId="{00000000-0000-0000-0000-000000000000}"/>
+          </ac:spMkLst>
+        </pc:spChg>
+        <pc:spChg chg="del">
+          <ac:chgData name="Luis Ovalle" userId="cb995196-5c5b-4938-acce-a0f7f8d61c64" providerId="ADAL" clId="{DDBE67AE-DEA9-498E-9EDE-2699B19B1413}" dt="2026-09-12T11:43:40.517" v="223" actId="478"/>
+          <ac:spMkLst>
+            <pc:docMk/>
+            <pc:sldMk cId="0" sldId="265"/>
+            <ac:spMk id="19" creationId="{00000000-0000-0000-0000-000000000000}"/>
+          </ac:spMkLst>
+        </pc:spChg>
+        <pc:spChg chg="mod">
+          <ac:chgData name="Luis Ovalle" userId="cb995196-5c5b-4938-acce-a0f7f8d61c64" providerId="ADAL" clId="{DDBE67AE-DEA9-498E-9EDE-2699B19B1413}" dt="2026-09-12T03:49:45.343" v="8" actId="27636"/>
+          <ac:spMkLst>
+            <pc:docMk/>
+            <pc:sldMk cId="0" sldId="265"/>
+            <ac:spMk id="20" creationId="{00000000-0000-0000-0000-000000000000}"/>
+          </ac:spMkLst>
+        </pc:spChg>
+      </pc:sldChg>
+      <pc:sldChg chg="delSp modSp mod">
+        <pc:chgData name="Luis Ovalle" userId="cb995196-5c5b-4938-acce-a0f7f8d61c64" providerId="ADAL" clId="{DDBE67AE-DEA9-498E-9EDE-2699B19B1413}" dt="2026-09-12T11:45:37.535" v="275" actId="27636"/>
+        <pc:sldMkLst>
+          <pc:docMk/>
+          <pc:sldMk cId="0" sldId="266"/>
+        </pc:sldMkLst>
+        <pc:spChg chg="mod">
+          <ac:chgData name="Luis Ovalle" userId="cb995196-5c5b-4938-acce-a0f7f8d61c64" providerId="ADAL" clId="{DDBE67AE-DEA9-498E-9EDE-2699B19B1413}" dt="2026-09-12T11:45:37.535" v="275" actId="27636"/>
+          <ac:spMkLst>
+            <pc:docMk/>
+            <pc:sldMk cId="0" sldId="266"/>
+            <ac:spMk id="9" creationId="{00000000-0000-0000-0000-000000000000}"/>
+          </ac:spMkLst>
+        </pc:spChg>
+        <pc:spChg chg="del">
+          <ac:chgData name="Luis Ovalle" userId="cb995196-5c5b-4938-acce-a0f7f8d61c64" providerId="ADAL" clId="{DDBE67AE-DEA9-498E-9EDE-2699B19B1413}" dt="2026-09-12T11:45:20.136" v="268" actId="478"/>
+          <ac:spMkLst>
+            <pc:docMk/>
+            <pc:sldMk cId="0" sldId="266"/>
+            <ac:spMk id="10" creationId="{00000000-0000-0000-0000-000000000000}"/>
+          </ac:spMkLst>
+        </pc:spChg>
+        <pc:spChg chg="mod">
+          <ac:chgData name="Luis Ovalle" userId="cb995196-5c5b-4938-acce-a0f7f8d61c64" providerId="ADAL" clId="{DDBE67AE-DEA9-498E-9EDE-2699B19B1413}" dt="2026-09-12T11:45:37.502" v="274" actId="11530"/>
+          <ac:spMkLst>
+            <pc:docMk/>
+            <pc:sldMk cId="0" sldId="266"/>
+            <ac:spMk id="11" creationId="{00000000-0000-0000-0000-000000000000}"/>
+          </ac:spMkLst>
+        </pc:spChg>
+        <pc:spChg chg="del">
+          <ac:chgData name="Luis Ovalle" userId="cb995196-5c5b-4938-acce-a0f7f8d61c64" providerId="ADAL" clId="{DDBE67AE-DEA9-498E-9EDE-2699B19B1413}" dt="2026-09-12T11:45:21.055" v="269" actId="478"/>
+          <ac:spMkLst>
+            <pc:docMk/>
+            <pc:sldMk cId="0" sldId="266"/>
+            <ac:spMk id="12" creationId="{00000000-0000-0000-0000-000000000000}"/>
+          </ac:spMkLst>
+        </pc:spChg>
+        <pc:spChg chg="mod">
+          <ac:chgData name="Luis Ovalle" userId="cb995196-5c5b-4938-acce-a0f7f8d61c64" providerId="ADAL" clId="{DDBE67AE-DEA9-498E-9EDE-2699B19B1413}" dt="2026-09-12T11:45:37.502" v="274" actId="11530"/>
+          <ac:spMkLst>
+            <pc:docMk/>
+            <pc:sldMk cId="0" sldId="266"/>
+            <ac:spMk id="13" creationId="{00000000-0000-0000-0000-000000000000}"/>
+          </ac:spMkLst>
+        </pc:spChg>
+        <pc:spChg chg="del">
+          <ac:chgData name="Luis Ovalle" userId="cb995196-5c5b-4938-acce-a0f7f8d61c64" providerId="ADAL" clId="{DDBE67AE-DEA9-498E-9EDE-2699B19B1413}" dt="2026-09-12T11:45:22.071" v="270" actId="478"/>
+          <ac:spMkLst>
+            <pc:docMk/>
+            <pc:sldMk cId="0" sldId="266"/>
+            <ac:spMk id="14" creationId="{00000000-0000-0000-0000-000000000000}"/>
+          </ac:spMkLst>
+        </pc:spChg>
+        <pc:spChg chg="mod">
+          <ac:chgData name="Luis Ovalle" userId="cb995196-5c5b-4938-acce-a0f7f8d61c64" providerId="ADAL" clId="{DDBE67AE-DEA9-498E-9EDE-2699B19B1413}" dt="2026-09-12T11:44:07.470" v="230" actId="1076"/>
+          <ac:spMkLst>
+            <pc:docMk/>
+            <pc:sldMk cId="0" sldId="266"/>
+            <ac:spMk id="17" creationId="{00000000-0000-0000-0000-000000000000}"/>
+          </ac:spMkLst>
+        </pc:spChg>
+        <pc:spChg chg="mod">
+          <ac:chgData name="Luis Ovalle" userId="cb995196-5c5b-4938-acce-a0f7f8d61c64" providerId="ADAL" clId="{DDBE67AE-DEA9-498E-9EDE-2699B19B1413}" dt="2026-09-12T11:44:56.077" v="240" actId="1582"/>
+          <ac:spMkLst>
+            <pc:docMk/>
+            <pc:sldMk cId="0" sldId="266"/>
+            <ac:spMk id="18" creationId="{00000000-0000-0000-0000-000000000000}"/>
+          </ac:spMkLst>
+        </pc:spChg>
+        <pc:spChg chg="mod">
+          <ac:chgData name="Luis Ovalle" userId="cb995196-5c5b-4938-acce-a0f7f8d61c64" providerId="ADAL" clId="{DDBE67AE-DEA9-498E-9EDE-2699B19B1413}" dt="2026-09-12T11:44:10.511" v="231" actId="1076"/>
+          <ac:spMkLst>
+            <pc:docMk/>
+            <pc:sldMk cId="0" sldId="266"/>
+            <ac:spMk id="20" creationId="{00000000-0000-0000-0000-000000000000}"/>
+          </ac:spMkLst>
+        </pc:spChg>
+        <pc:spChg chg="mod">
+          <ac:chgData name="Luis Ovalle" userId="cb995196-5c5b-4938-acce-a0f7f8d61c64" providerId="ADAL" clId="{DDBE67AE-DEA9-498E-9EDE-2699B19B1413}" dt="2026-09-12T11:44:56.077" v="240" actId="1582"/>
+          <ac:spMkLst>
+            <pc:docMk/>
+            <pc:sldMk cId="0" sldId="266"/>
+            <ac:spMk id="21" creationId="{00000000-0000-0000-0000-000000000000}"/>
+          </ac:spMkLst>
+        </pc:spChg>
+        <pc:spChg chg="mod">
+          <ac:chgData name="Luis Ovalle" userId="cb995196-5c5b-4938-acce-a0f7f8d61c64" providerId="ADAL" clId="{DDBE67AE-DEA9-498E-9EDE-2699B19B1413}" dt="2026-09-12T11:44:13.776" v="232" actId="1076"/>
+          <ac:spMkLst>
+            <pc:docMk/>
+            <pc:sldMk cId="0" sldId="266"/>
+            <ac:spMk id="23" creationId="{00000000-0000-0000-0000-000000000000}"/>
+          </ac:spMkLst>
+        </pc:spChg>
+        <pc:spChg chg="mod">
+          <ac:chgData name="Luis Ovalle" userId="cb995196-5c5b-4938-acce-a0f7f8d61c64" providerId="ADAL" clId="{DDBE67AE-DEA9-498E-9EDE-2699B19B1413}" dt="2026-09-12T11:44:56.077" v="240" actId="1582"/>
+          <ac:spMkLst>
+            <pc:docMk/>
+            <pc:sldMk cId="0" sldId="266"/>
+            <ac:spMk id="24" creationId="{00000000-0000-0000-0000-000000000000}"/>
+          </ac:spMkLst>
+        </pc:spChg>
+        <pc:spChg chg="mod">
+          <ac:chgData name="Luis Ovalle" userId="cb995196-5c5b-4938-acce-a0f7f8d61c64" providerId="ADAL" clId="{DDBE67AE-DEA9-498E-9EDE-2699B19B1413}" dt="2026-09-12T11:44:17.990" v="233" actId="1076"/>
+          <ac:spMkLst>
+            <pc:docMk/>
+            <pc:sldMk cId="0" sldId="266"/>
+            <ac:spMk id="26" creationId="{00000000-0000-0000-0000-000000000000}"/>
+          </ac:spMkLst>
+        </pc:spChg>
+        <pc:spChg chg="mod">
+          <ac:chgData name="Luis Ovalle" userId="cb995196-5c5b-4938-acce-a0f7f8d61c64" providerId="ADAL" clId="{DDBE67AE-DEA9-498E-9EDE-2699B19B1413}" dt="2026-09-12T11:44:56.077" v="240" actId="1582"/>
+          <ac:spMkLst>
+            <pc:docMk/>
+            <pc:sldMk cId="0" sldId="266"/>
+            <ac:spMk id="27" creationId="{00000000-0000-0000-0000-000000000000}"/>
+          </ac:spMkLst>
+        </pc:spChg>
+        <pc:spChg chg="mod">
+          <ac:chgData name="Luis Ovalle" userId="cb995196-5c5b-4938-acce-a0f7f8d61c64" providerId="ADAL" clId="{DDBE67AE-DEA9-498E-9EDE-2699B19B1413}" dt="2026-09-12T11:44:20.593" v="234" actId="1076"/>
+          <ac:spMkLst>
+            <pc:docMk/>
+            <pc:sldMk cId="0" sldId="266"/>
+            <ac:spMk id="29" creationId="{00000000-0000-0000-0000-000000000000}"/>
+          </ac:spMkLst>
+        </pc:spChg>
+        <pc:spChg chg="mod">
+          <ac:chgData name="Luis Ovalle" userId="cb995196-5c5b-4938-acce-a0f7f8d61c64" providerId="ADAL" clId="{DDBE67AE-DEA9-498E-9EDE-2699B19B1413}" dt="2026-09-12T11:44:56.077" v="240" actId="1582"/>
+          <ac:spMkLst>
+            <pc:docMk/>
+            <pc:sldMk cId="0" sldId="266"/>
+            <ac:spMk id="30" creationId="{00000000-0000-0000-0000-000000000000}"/>
+          </ac:spMkLst>
+        </pc:spChg>
+        <pc:spChg chg="mod">
+          <ac:chgData name="Luis Ovalle" userId="cb995196-5c5b-4938-acce-a0f7f8d61c64" providerId="ADAL" clId="{DDBE67AE-DEA9-498E-9EDE-2699B19B1413}" dt="2026-09-12T11:44:23.100" v="235" actId="1076"/>
+          <ac:spMkLst>
+            <pc:docMk/>
+            <pc:sldMk cId="0" sldId="266"/>
+            <ac:spMk id="32" creationId="{00000000-0000-0000-0000-000000000000}"/>
+          </ac:spMkLst>
+        </pc:spChg>
+        <pc:spChg chg="mod">
+          <ac:chgData name="Luis Ovalle" userId="cb995196-5c5b-4938-acce-a0f7f8d61c64" providerId="ADAL" clId="{DDBE67AE-DEA9-498E-9EDE-2699B19B1413}" dt="2026-09-12T11:45:14.504" v="267" actId="403"/>
+          <ac:spMkLst>
+            <pc:docMk/>
+            <pc:sldMk cId="0" sldId="266"/>
+            <ac:spMk id="33" creationId="{00000000-0000-0000-0000-000000000000}"/>
+          </ac:spMkLst>
+        </pc:spChg>
+      </pc:sldChg>
+    </pc:docChg>
+  </pc:docChgLst>
+</pc:chgInfo>
 </file>
 
 <file path=ppt/notesMasters/notesMaster1.xml><?xml version="1.0" encoding="utf-8"?>
@@ -139,234 +1331,10 @@
           <a:chExt cx="0" cy="0"/>
         </a:xfrm>
       </p:grpSpPr>
-      <p:sp>
-        <p:nvSpPr>
-          <p:cNvPr id="2" name="Header Placeholder 1"/>
-          <p:cNvSpPr>
-            <a:spLocks noGrp="1"/>
-          </p:cNvSpPr>
-          <p:nvPr>
-            <p:ph type="hdr" sz="quarter"/>
-          </p:nvPr>
-        </p:nvSpPr>
-        <p:spPr>
-          <a:xfrm>
-            <a:off x="0" y="0"/>
-            <a:ext cx="2971800" cy="458788"/>
-          </a:xfrm>
-          <a:prstGeom prst="rect">
-            <a:avLst/>
-          </a:prstGeom>
-        </p:spPr>
-        <p:txBody>
-          <a:bodyPr vert="horz" lIns="91440" tIns="45720" rIns="91440" bIns="45720" rtlCol="0"/>
-          <a:lstStyle>
-            <a:lvl1pPr algn="l">
-              <a:defRPr sz="1200"/>
-            </a:lvl1pPr>
-          </a:lstStyle>
-          <a:p>
-            <a:endParaRPr lang="en-US"/>
-          </a:p>
-        </p:txBody>
-      </p:sp>
-      <p:sp>
-        <p:nvSpPr>
-          <p:cNvPr id="3" name="Date Placeholder 2"/>
-          <p:cNvSpPr>
-            <a:spLocks noGrp="1"/>
-          </p:cNvSpPr>
-          <p:nvPr>
-            <p:ph type="dt" idx="1"/>
-          </p:nvPr>
-        </p:nvSpPr>
-        <p:spPr>
-          <a:xfrm>
-            <a:off x="3884613" y="0"/>
-            <a:ext cx="2971800" cy="458788"/>
-          </a:xfrm>
-          <a:prstGeom prst="rect">
-            <a:avLst/>
-          </a:prstGeom>
-        </p:spPr>
-        <p:txBody>
-          <a:bodyPr vert="horz" lIns="91440" tIns="45720" rIns="91440" bIns="45720" rtlCol="0"/>
-          <a:lstStyle>
-            <a:lvl1pPr algn="r">
-              <a:defRPr sz="1200"/>
-            </a:lvl1pPr>
-          </a:lstStyle>
-          <a:p>
-            <a:fld id="{5282F153-3F37-0F45-9E97-73ACFA13230C}" type="datetimeFigureOut">
-              <a:rPr lang="en-US"/>
-              <a:t>7/23/19</a:t>
-            </a:fld>
-            <a:endParaRPr lang="en-US"/>
-          </a:p>
-        </p:txBody>
-      </p:sp>
-      <p:sp>
-        <p:nvSpPr>
-          <p:cNvPr id="4" name="Slide Image Placeholder 3"/>
-          <p:cNvSpPr>
-            <a:spLocks noGrp="1" noRot="1" noChangeAspect="1"/>
-          </p:cNvSpPr>
-          <p:nvPr>
-            <p:ph type="sldImg" idx="2"/>
-          </p:nvPr>
-        </p:nvSpPr>
-        <p:spPr>
-          <a:xfrm>
-            <a:off x="685800" y="1143000"/>
-            <a:ext cx="5486400" cy="3086100"/>
-          </a:xfrm>
-          <a:prstGeom prst="rect">
-            <a:avLst/>
-          </a:prstGeom>
-          <a:noFill/>
-          <a:ln w="12700">
-            <a:solidFill>
-              <a:prstClr val="black"/>
-            </a:solidFill>
-          </a:ln>
-        </p:spPr>
-        <p:txBody>
-          <a:bodyPr vert="horz" lIns="91440" tIns="45720" rIns="91440" bIns="45720" rtlCol="0" anchor="ctr"/>
-          <a:lstStyle/>
-          <a:p>
-            <a:endParaRPr lang="en-US"/>
-          </a:p>
-        </p:txBody>
-      </p:sp>
-      <p:sp>
-        <p:nvSpPr>
-          <p:cNvPr id="5" name="Notes Placeholder 4"/>
-          <p:cNvSpPr>
-            <a:spLocks noGrp="1"/>
-          </p:cNvSpPr>
-          <p:nvPr>
-            <p:ph type="body" sz="quarter" idx="3"/>
-          </p:nvPr>
-        </p:nvSpPr>
-        <p:spPr>
-          <a:xfrm>
-            <a:off x="685800" y="4400550"/>
-            <a:ext cx="5486400" cy="3600450"/>
-          </a:xfrm>
-          <a:prstGeom prst="rect">
-            <a:avLst/>
-          </a:prstGeom>
-        </p:spPr>
-        <p:txBody>
-          <a:bodyPr vert="horz" lIns="91440" tIns="45720" rIns="91440" bIns="45720" rtlCol="0"/>
-          <a:lstStyle/>
-          <a:p>
-            <a:pPr lvl="0"/>
-            <a:r>
-              <a:rPr lang="en-US"/>
-              <a:t>Click to edit Master text styles</a:t>
-            </a:r>
-          </a:p>
-          <a:p>
-            <a:pPr lvl="1"/>
-            <a:r>
-              <a:rPr lang="en-US"/>
-              <a:t>Second level</a:t>
-            </a:r>
-          </a:p>
-          <a:p>
-            <a:pPr lvl="2"/>
-            <a:r>
-              <a:rPr lang="en-US"/>
-              <a:t>Third level</a:t>
-            </a:r>
-          </a:p>
-          <a:p>
-            <a:pPr lvl="3"/>
-            <a:r>
-              <a:rPr lang="en-US"/>
-              <a:t>Fourth level</a:t>
-            </a:r>
-          </a:p>
-          <a:p>
-            <a:pPr lvl="4"/>
-            <a:r>
-              <a:rPr lang="en-US"/>
-              <a:t>Fifth level</a:t>
-            </a:r>
-          </a:p>
-        </p:txBody>
-      </p:sp>
-      <p:sp>
-        <p:nvSpPr>
-          <p:cNvPr id="6" name="Footer Placeholder 5"/>
-          <p:cNvSpPr>
-            <a:spLocks noGrp="1"/>
-          </p:cNvSpPr>
-          <p:nvPr>
-            <p:ph type="ftr" sz="quarter" idx="4"/>
-          </p:nvPr>
-        </p:nvSpPr>
-        <p:spPr>
-          <a:xfrm>
-            <a:off x="0" y="8685213"/>
-            <a:ext cx="2971800" cy="458787"/>
-          </a:xfrm>
-          <a:prstGeom prst="rect">
-            <a:avLst/>
-          </a:prstGeom>
-        </p:spPr>
-        <p:txBody>
-          <a:bodyPr vert="horz" lIns="91440" tIns="45720" rIns="91440" bIns="45720" rtlCol="0" anchor="b"/>
-          <a:lstStyle>
-            <a:lvl1pPr algn="l">
-              <a:defRPr sz="1200"/>
-            </a:lvl1pPr>
-          </a:lstStyle>
-          <a:p>
-            <a:endParaRPr lang="en-US"/>
-          </a:p>
-        </p:txBody>
-      </p:sp>
-      <p:sp>
-        <p:nvSpPr>
-          <p:cNvPr id="7" name="Slide Number Placeholder 6"/>
-          <p:cNvSpPr>
-            <a:spLocks noGrp="1"/>
-          </p:cNvSpPr>
-          <p:nvPr>
-            <p:ph type="sldNum" sz="quarter" idx="5"/>
-          </p:nvPr>
-        </p:nvSpPr>
-        <p:spPr>
-          <a:xfrm>
-            <a:off x="3884613" y="8685213"/>
-            <a:ext cx="2971800" cy="458787"/>
-          </a:xfrm>
-          <a:prstGeom prst="rect">
-            <a:avLst/>
-          </a:prstGeom>
-        </p:spPr>
-        <p:txBody>
-          <a:bodyPr vert="horz" lIns="91440" tIns="45720" rIns="91440" bIns="45720" rtlCol="0" anchor="b"/>
-          <a:lstStyle>
-            <a:lvl1pPr algn="r">
-              <a:defRPr sz="1200"/>
-            </a:lvl1pPr>
-          </a:lstStyle>
-          <a:p>
-            <a:fld id="{CE5E9CC1-C706-0F49-92D6-E571CC5EEA8F}" type="slidenum">
-              <a:rPr lang="en-US"/>
-              <a:t>‹#›</a:t>
-            </a:fld>
-            <a:endParaRPr lang="en-US"/>
-          </a:p>
-        </p:txBody>
-      </p:sp>
     </p:spTree>
     <p:extLst>
       <p:ext uri="{BB962C8B-B14F-4D97-AF65-F5344CB8AC3E}">
-        <p14:creationId xmlns:p14="http://schemas.microsoft.com/office/powerpoint/2010/main" val="1024086991"/>
+        <p14:creationId xmlns:p14="http://schemas.microsoft.com/office/powerpoint/2010/main" val="594885405"/>
       </p:ext>
     </p:extLst>
   </p:cSld>
@@ -514,7 +1482,6 @@
               <a:rPr lang="en-US" dirty="0"/>
               <a:t>Buenos días/tardes. Somos el equipo BARB y vamos a presentar la definición de nuestro Proyecto APT de Capstone. BARB es una plataforma inteligente de mantenimiento industrial. En esta presentación mostraremos primero el problema y la solución general, luego el estado actual del aplicativo y finalmente el foco del semestre: PWA para tablets, RAG offline, reportes PDF gerenciales y auditoría funcional. La idea principal es que no estamos partiendo desde una pantalla aislada, sino desde un proyecto integral de Ingeniería en Informática.</a:t>
             </a:r>
-            <a:endParaRPr lang="en-US" dirty="0"/>
           </a:p>
         </p:txBody>
       </p:sp>
@@ -602,7 +1569,6 @@
               <a:rPr lang="en-US" dirty="0"/>
               <a:t>La auditoría es un punto crítico porque BARB maneja acciones que afectan mantenimiento, usuarios y documentación. La trazabilidad debe cubrir procesos importantes: orden de trabajo, creación y modificación de usuarios, cargas, descargas y acciones críticas de plataforma. En cada evento necesitamos al menos usuario, tenant o empresa, fecha y hora, acción, entidad afectada, resultado y metadata disponible. Esto no es solo una mejora técnica; es un requisito de control y confianza.</a:t>
             </a:r>
-            <a:endParaRPr lang="en-US" dirty="0"/>
           </a:p>
         </p:txBody>
       </p:sp>
@@ -690,7 +1656,6 @@
               <a:rPr lang="en-US" dirty="0"/>
               <a:t>Para cerrar, explicamos cómo se gestionará el proyecto. La metodología será Incremental + Scrumban, con liderazgo de Luis, reuniones semanales y trabajo sobre un fork privado único. Los incrementos serán diseño, PWA, RAG offline, PDF KPI, auditoría e integración/pruebas. El mensaje final para la evaluación es que BARB es un proyecto integral de ingeniería informática y que nuestro aporte está acotado, es trazable y tiene valor para la operación y la gerencia.</a:t>
             </a:r>
-            <a:endParaRPr lang="en-US" dirty="0"/>
           </a:p>
         </p:txBody>
       </p:sp>
@@ -778,7 +1743,6 @@
               <a:rPr lang="en-US" dirty="0"/>
               <a:t>Aquí debemos explicar el problema de negocio. En mantenimiento industrial el técnico normalmente está en terreno, no sentado frente a un escritorio. Necesita consultar manuales, crear órdenes de trabajo, sacar fotografías y registrar lo que hizo. Si la información está dispersa o no hay trazabilidad, la gestión se vuelve lenta y poco confiable. La oportunidad es aplicar TIC para centralizar información, apoyar el diagnóstico con IA, entregar KPIs a gerencia y dejar evidencia auditable.</a:t>
             </a:r>
-            <a:endParaRPr lang="en-US" dirty="0"/>
           </a:p>
         </p:txBody>
       </p:sp>
@@ -866,7 +1830,6 @@
               <a:rPr lang="en-US" dirty="0"/>
               <a:t>Esta lámina muestra que BARB no es solo una mejora puntual. Es una plataforma con módulos: asistente documental, topología, historial, dashboard KPI, carga documental y órdenes de trabajo. Para Duoc es importante mostrar el proyecto general porque permite evidenciar una solución de ingeniería completa. Luego acotaremos qué parte desarrollará nuestro equipo durante el semestre.</a:t>
             </a:r>
-            <a:endParaRPr lang="en-US" dirty="0"/>
           </a:p>
         </p:txBody>
       </p:sp>
@@ -954,7 +1917,6 @@
               <a:rPr lang="en-US" dirty="0"/>
               <a:t>La idea aquí es dejar claro qué existe actualmente. Vemos dashboard KPI, órdenes de trabajo con filtros y exportación, asistente documental, carga de documentos e historial. Esto es importante porque nuestra entrega no debe presentar como propio lo que ya existe. Lo que haremos es evolucionar esta base hacia una operación más móvil, más resiliente y más trazable.</a:t>
             </a:r>
-            <a:endParaRPr lang="en-US" dirty="0"/>
           </a:p>
         </p:txBody>
       </p:sp>
@@ -1042,7 +2004,6 @@
               <a:rPr lang="en-US" dirty="0"/>
               <a:t>En esta parte explicamos la arquitectura funcional. BARB integra frontend, API backend, datos e IA/RAG. Eso conecta con las competencias de la carrera: no es solamente programar, también es diseñar datos, integrar servicios, gestionar el proyecto, aplicar pruebas y asegurar trazabilidad. El componente emergente es la IA/RAG aplicada a documentación técnica y diagnóstico.</a:t>
             </a:r>
-            <a:endParaRPr lang="en-US" dirty="0"/>
           </a:p>
         </p:txBody>
       </p:sp>
@@ -1130,7 +2091,6 @@
               <a:rPr lang="en-US" dirty="0"/>
               <a:t>Esta es la lámina clave del alcance. Debemos decir que el equipo se enfocará en cuatro frentes: PWA/movilidad, RAG offline, reportes PDF y auditoría. También aclaramos que el RAG offline no implica obligatoriamente un LLM local; lo importante es asegurar recuperación de información técnica cuando falle la conexión o el servicio principal. Esta separación evita scope creep y permite demostrar avances por incremento.</a:t>
             </a:r>
-            <a:endParaRPr lang="en-US" dirty="0"/>
           </a:p>
         </p:txBody>
       </p:sp>
@@ -1218,7 +2178,6 @@
               <a:rPr lang="en-US" dirty="0"/>
               <a:t>Para movilidad, el foco no es crear una app nativa. La recomendación es una PWA porque cubre tablets iOS y Android sin publicar en tiendas. Lo más importante es la continuidad operacional: si el técnico crea una OT o toma una foto sin conexión, la información se guarda localmente, queda en una cola y se sincroniza cuando vuelve la red. Para evitar duplicados se usarían UUID e idempotencia; para evitar pérdida de cambios críticos, control de versión o updated_at.</a:t>
             </a:r>
-            <a:endParaRPr lang="en-US" dirty="0"/>
           </a:p>
         </p:txBody>
       </p:sp>
@@ -1306,7 +2265,6 @@
               <a:rPr lang="en-US" dirty="0"/>
               <a:t>Para el RAG offline debemos ser precisos. Offline no significa necesariamente ejecutar un modelo grande en la tablet. La necesidad es que el técnico pueda recuperar información técnica útil de manuales previamente preparados cuando no exista internet o falle el servicio principal. La implementación puede evaluar embeddings, almacenamiento local, búsqueda semántica o mecanismos híbridos. La tecnología definitiva se decidirá luego de pruebas, porque debe funcionar en dispositivos reales y con límites de almacenamiento.</a:t>
             </a:r>
-            <a:endParaRPr lang="en-US" dirty="0"/>
           </a:p>
         </p:txBody>
       </p:sp>
@@ -1394,7 +2352,6 @@
               <a:rPr lang="en-US" dirty="0"/>
               <a:t>En reportabilidad, ya existe una base de KPIs y exportación. El aporte Capstone es transformar esa información en un PDF gerencial. No se trata solo de listar estados, sino de entregar un informe ejecutivo con KPIs, tendencias, ranking de máquinas e incidencias. Debe servir para reuniones, correos y toma de decisiones. Los filtros se alinean con lo solicitado por la contraparte: planta o site, piso o zona si corresponde, máquina, status, incidente u OT.</a:t>
             </a:r>
-            <a:endParaRPr lang="en-US" dirty="0"/>
           </a:p>
         </p:txBody>
       </p:sp>
@@ -1467,6 +2424,11 @@
 <file path=ppt/slideMasters/slideMaster1.xml><?xml version="1.0" encoding="utf-8"?>
 <p:sldMaster xmlns:a="http://schemas.openxmlformats.org/drawingml/2006/main" xmlns:r="http://schemas.openxmlformats.org/officeDocument/2006/relationships" xmlns:p="http://schemas.openxmlformats.org/presentationml/2006/main">
   <p:cSld>
+    <p:bg>
+      <p:bgRef idx="1001">
+        <a:schemeClr val="bg1"/>
+      </p:bgRef>
+    </p:bg>
     <p:spTree>
       <p:nvGrpSpPr>
         <p:cNvPr id="1" name=""/>
@@ -1749,6 +2711,7 @@
         <a:solidFill>
           <a:srgbClr val="F4F1EC"/>
         </a:solidFill>
+        <a:effectLst/>
       </p:bgPr>
     </p:bg>
     <p:spTree>
@@ -1792,7 +2755,7 @@
           <a:bodyPr wrap="square" lIns="254" tIns="254" rIns="254" bIns="254" rtlCol="0" anchor="ctr"/>
           <a:lstStyle/>
           <a:p>
-            <a:pPr algn="ctr" indent="0" marL="0">
+            <a:pPr marL="0" indent="0" algn="ctr">
               <a:buNone/>
             </a:pPr>
             <a:r>
@@ -1830,7 +2793,7 @@
           </a:bodyPr>
           <a:lstStyle/>
           <a:p>
-            <a:pPr indent="0" marL="0">
+            <a:pPr marL="0" indent="0">
               <a:buNone/>
             </a:pPr>
             <a:r>
@@ -1844,7 +2807,7 @@
             <a:endParaRPr lang="en-US" sz="3100" dirty="0"/>
           </a:p>
           <a:p>
-            <a:pPr indent="0" marL="0">
+            <a:pPr marL="0" indent="0">
               <a:buNone/>
             </a:pPr>
             <a:r>
@@ -1881,6 +2844,13 @@
             <a:prstDash val="solid"/>
           </a:ln>
         </p:spPr>
+        <p:txBody>
+          <a:bodyPr/>
+          <a:lstStyle/>
+          <a:p>
+            <a:endParaRPr lang="es-MX"/>
+          </a:p>
+        </p:txBody>
       </p:sp>
       <p:sp>
         <p:nvSpPr>
@@ -1903,7 +2873,7 @@
           <a:bodyPr wrap="square" lIns="0" tIns="0" rIns="0" bIns="0" rtlCol="0" anchor="ctr"/>
           <a:lstStyle/>
           <a:p>
-            <a:pPr indent="0" marL="0">
+            <a:pPr marL="0" indent="0">
               <a:buNone/>
             </a:pPr>
             <a:r>
@@ -1939,7 +2909,7 @@
           <a:bodyPr wrap="square" lIns="254" tIns="254" rIns="254" bIns="254" rtlCol="0" anchor="ctr"/>
           <a:lstStyle/>
           <a:p>
-            <a:pPr indent="0" marL="0">
+            <a:pPr marL="0" indent="0">
               <a:buNone/>
             </a:pPr>
             <a:r>
@@ -1948,12 +2918,12 @@
                   <a:srgbClr val="1F2937"/>
                 </a:solidFill>
               </a:rPr>
-              <a:t>Equipo: Luis Ovalle, Jorge Valdenegro y Miguel Sotor</a:t>
+              <a:t>Equipo: Luis Ovalle, Jorge Valdenegro y Miguel Soto</a:t>
             </a:r>
             <a:endParaRPr lang="en-US" sz="1150" dirty="0"/>
           </a:p>
           <a:p>
-            <a:pPr indent="0" marL="0">
+            <a:pPr marL="0" indent="0">
               <a:buNone/>
             </a:pPr>
             <a:r>
@@ -1967,7 +2937,7 @@
             <a:endParaRPr lang="en-US" sz="1150" dirty="0"/>
           </a:p>
           <a:p>
-            <a:pPr indent="0" marL="0">
+            <a:pPr marL="0" indent="0">
               <a:buNone/>
             </a:pPr>
             <a:r>
@@ -1979,176 +2949,183 @@
               <a:t>Metodología: Incremental + Scrumban</a:t>
             </a:r>
             <a:endParaRPr lang="en-US" sz="1150" dirty="0"/>
+          </a:p>
+        </p:txBody>
+      </p:sp>
+      <p:sp>
+        <p:nvSpPr>
+          <p:cNvPr id="8" name="Text 5"/>
+          <p:cNvSpPr/>
+          <p:nvPr/>
+        </p:nvSpPr>
+        <p:spPr>
+          <a:xfrm>
+            <a:off x="5963529" y="4717348"/>
+            <a:ext cx="5394960" cy="256032"/>
+          </a:xfrm>
+          <a:prstGeom prst="rect">
+            <a:avLst/>
+          </a:prstGeom>
+          <a:noFill/>
+          <a:ln/>
+        </p:spPr>
+        <p:txBody>
+          <a:bodyPr wrap="square" lIns="0" tIns="0" rIns="0" bIns="0" rtlCol="0" anchor="ctr"/>
+          <a:lstStyle/>
+          <a:p>
+            <a:pPr marL="0" indent="0" algn="ctr">
+              <a:buNone/>
+            </a:pPr>
+            <a:r>
+              <a:rPr lang="en-US" b="1" dirty="0">
+                <a:solidFill>
+                  <a:srgbClr val="1F4E79"/>
+                </a:solidFill>
+              </a:rPr>
+              <a:t>PWA / Tablets   ·   RAG offline   ·   PDF KPI   ·   Auditoría</a:t>
+            </a:r>
+            <a:endParaRPr lang="en-US" dirty="0"/>
+          </a:p>
+        </p:txBody>
+      </p:sp>
+      <p:sp>
+        <p:nvSpPr>
+          <p:cNvPr id="9" name="Text 6"/>
+          <p:cNvSpPr/>
+          <p:nvPr/>
+        </p:nvSpPr>
+        <p:spPr>
+          <a:xfrm>
+            <a:off x="5963529" y="4979710"/>
+            <a:ext cx="5394960" cy="201168"/>
+          </a:xfrm>
+          <a:prstGeom prst="rect">
+            <a:avLst/>
+          </a:prstGeom>
+          <a:noFill/>
+          <a:ln/>
+        </p:spPr>
+        <p:txBody>
+          <a:bodyPr wrap="square" lIns="0" tIns="0" rIns="0" bIns="0" rtlCol="0" anchor="ctr"/>
+          <a:lstStyle/>
+          <a:p>
+            <a:pPr marL="0" indent="0" algn="ctr">
+              <a:buNone/>
+            </a:pPr>
+            <a:r>
+              <a:rPr lang="en-US" sz="950" i="1" dirty="0">
+                <a:solidFill>
+                  <a:srgbClr val="6B7280"/>
+                </a:solidFill>
+              </a:rPr>
+              <a:t>Dashboard KPI administrador (AS-IS)</a:t>
+            </a:r>
+            <a:endParaRPr lang="en-US" sz="950" dirty="0"/>
+          </a:p>
+        </p:txBody>
+      </p:sp>
+      <p:sp>
+        <p:nvSpPr>
+          <p:cNvPr id="10" name="Text 7"/>
+          <p:cNvSpPr/>
+          <p:nvPr/>
+        </p:nvSpPr>
+        <p:spPr>
+          <a:xfrm>
+            <a:off x="320040" y="6473952"/>
+            <a:ext cx="6217920" cy="164592"/>
+          </a:xfrm>
+          <a:prstGeom prst="rect">
+            <a:avLst/>
+          </a:prstGeom>
+          <a:noFill/>
+          <a:ln/>
+        </p:spPr>
+        <p:txBody>
+          <a:bodyPr wrap="square" lIns="0" tIns="0" rIns="0" bIns="0" rtlCol="0" anchor="ctr"/>
+          <a:lstStyle/>
+          <a:p>
+            <a:pPr marL="0" indent="0">
+              <a:buNone/>
+            </a:pPr>
+            <a:r>
+              <a:rPr lang="en-US" sz="780" dirty="0">
+                <a:solidFill>
+                  <a:srgbClr val="6B7280"/>
+                </a:solidFill>
+              </a:rPr>
+              <a:t>BARB | Capstone Ingeniería en Informática | Fase 1</a:t>
+            </a:r>
+            <a:endParaRPr lang="en-US" sz="780" dirty="0"/>
+          </a:p>
+        </p:txBody>
+      </p:sp>
+      <p:sp>
+        <p:nvSpPr>
+          <p:cNvPr id="11" name="Text 8"/>
+          <p:cNvSpPr/>
+          <p:nvPr/>
+        </p:nvSpPr>
+        <p:spPr>
+          <a:xfrm>
+            <a:off x="11567160" y="6455664"/>
+            <a:ext cx="274320" cy="164592"/>
+          </a:xfrm>
+          <a:prstGeom prst="rect">
+            <a:avLst/>
+          </a:prstGeom>
+          <a:noFill/>
+          <a:ln/>
+        </p:spPr>
+        <p:txBody>
+          <a:bodyPr wrap="square" lIns="0" tIns="0" rIns="0" bIns="0" rtlCol="0" anchor="ctr"/>
+          <a:lstStyle/>
+          <a:p>
+            <a:pPr marL="0" indent="0" algn="r">
+              <a:buNone/>
+            </a:pPr>
+            <a:r>
+              <a:rPr lang="en-US" sz="780" dirty="0">
+                <a:solidFill>
+                  <a:srgbClr val="6B7280"/>
+                </a:solidFill>
+              </a:rPr>
+              <a:t>1</a:t>
+            </a:r>
+            <a:endParaRPr lang="en-US" sz="780" dirty="0"/>
           </a:p>
         </p:txBody>
       </p:sp>
       <p:pic>
         <p:nvPicPr>
-          <p:cNvPr id="7" name="Image 0" descr="/mnt/data/barb_split/media/image13.png">    </p:cNvPr>
+          <p:cNvPr id="12" name="Image 0">
+            <a:extLst>
+              <a:ext uri="{FF2B5EF4-FFF2-40B4-BE49-F238E27FC236}">
+                <a16:creationId xmlns:a16="http://schemas.microsoft.com/office/drawing/2014/main" id="{04534938-E875-A618-06F5-7870618D7D64}"/>
+              </a:ext>
+            </a:extLst>
+          </p:cNvPr>
           <p:cNvPicPr>
             <a:picLocks noChangeAspect="1"/>
           </p:cNvPicPr>
           <p:nvPr/>
         </p:nvPicPr>
         <p:blipFill>
-          <a:blip r:embed="rId1"/>
-          <a:srcRect l="22326" r="22326" t="0" b="0"/>
-          <a:stretch/>
+          <a:blip r:embed="rId3"/>
+          <a:stretch>
+            <a:fillRect/>
+          </a:stretch>
         </p:blipFill>
         <p:spPr>
           <a:xfrm>
-            <a:off x="5989320" y="868680"/>
-            <a:ext cx="5806440" cy="4297680"/>
+            <a:off x="4988474" y="1318143"/>
+            <a:ext cx="7092157" cy="2905429"/>
           </a:xfrm>
           <a:prstGeom prst="rect">
             <a:avLst/>
           </a:prstGeom>
         </p:spPr>
       </p:pic>
-      <p:sp>
-        <p:nvSpPr>
-          <p:cNvPr id="8" name="Text 5"/>
-          <p:cNvSpPr/>
-          <p:nvPr/>
-        </p:nvSpPr>
-        <p:spPr>
-          <a:xfrm>
-            <a:off x="6080760" y="5349240"/>
-            <a:ext cx="5394960" cy="256032"/>
-          </a:xfrm>
-          <a:prstGeom prst="rect">
-            <a:avLst/>
-          </a:prstGeom>
-          <a:noFill/>
-          <a:ln/>
-        </p:spPr>
-        <p:txBody>
-          <a:bodyPr wrap="square" lIns="0" tIns="0" rIns="0" bIns="0" rtlCol="0" anchor="ctr"/>
-          <a:lstStyle/>
-          <a:p>
-            <a:pPr algn="ctr" indent="0" marL="0">
-              <a:buNone/>
-            </a:pPr>
-            <a:r>
-              <a:rPr lang="en-US" sz="1200" b="1" dirty="0">
-                <a:solidFill>
-                  <a:srgbClr val="1F4E79"/>
-                </a:solidFill>
-              </a:rPr>
-              <a:t>PWA / Tablets   ·   RAG offline   ·   PDF KPI   ·   Auditoría</a:t>
-            </a:r>
-            <a:endParaRPr lang="en-US" sz="1200" dirty="0"/>
-          </a:p>
-        </p:txBody>
-      </p:sp>
-      <p:sp>
-        <p:nvSpPr>
-          <p:cNvPr id="9" name="Text 6"/>
-          <p:cNvSpPr/>
-          <p:nvPr/>
-        </p:nvSpPr>
-        <p:spPr>
-          <a:xfrm>
-            <a:off x="6080760" y="5650992"/>
-            <a:ext cx="5394960" cy="201168"/>
-          </a:xfrm>
-          <a:prstGeom prst="rect">
-            <a:avLst/>
-          </a:prstGeom>
-          <a:noFill/>
-          <a:ln/>
-        </p:spPr>
-        <p:txBody>
-          <a:bodyPr wrap="square" lIns="0" tIns="0" rIns="0" bIns="0" rtlCol="0" anchor="ctr"/>
-          <a:lstStyle/>
-          <a:p>
-            <a:pPr algn="ctr" indent="0" marL="0">
-              <a:buNone/>
-            </a:pPr>
-            <a:r>
-              <a:rPr lang="en-US" sz="950" i="1" dirty="0">
-                <a:solidFill>
-                  <a:srgbClr val="6B7280"/>
-                </a:solidFill>
-              </a:rPr>
-              <a:t>Dashboard KPI administrador (AS-IS)</a:t>
-            </a:r>
-            <a:endParaRPr lang="en-US" sz="950" dirty="0"/>
-          </a:p>
-        </p:txBody>
-      </p:sp>
-      <p:sp>
-        <p:nvSpPr>
-          <p:cNvPr id="10" name="Text 7"/>
-          <p:cNvSpPr/>
-          <p:nvPr/>
-        </p:nvSpPr>
-        <p:spPr>
-          <a:xfrm>
-            <a:off x="320040" y="6473952"/>
-            <a:ext cx="6217920" cy="164592"/>
-          </a:xfrm>
-          <a:prstGeom prst="rect">
-            <a:avLst/>
-          </a:prstGeom>
-          <a:noFill/>
-          <a:ln/>
-        </p:spPr>
-        <p:txBody>
-          <a:bodyPr wrap="square" lIns="0" tIns="0" rIns="0" bIns="0" rtlCol="0" anchor="ctr"/>
-          <a:lstStyle/>
-          <a:p>
-            <a:pPr indent="0" marL="0">
-              <a:buNone/>
-            </a:pPr>
-            <a:r>
-              <a:rPr lang="en-US" sz="780" dirty="0">
-                <a:solidFill>
-                  <a:srgbClr val="6B7280"/>
-                </a:solidFill>
-              </a:rPr>
-              <a:t>BARB | Capstone Ingeniería en Informática | Fase 1</a:t>
-            </a:r>
-            <a:endParaRPr lang="en-US" sz="780" dirty="0"/>
-          </a:p>
-        </p:txBody>
-      </p:sp>
-      <p:sp>
-        <p:nvSpPr>
-          <p:cNvPr id="11" name="Text 8"/>
-          <p:cNvSpPr/>
-          <p:nvPr/>
-        </p:nvSpPr>
-        <p:spPr>
-          <a:xfrm>
-            <a:off x="11567160" y="6455664"/>
-            <a:ext cx="274320" cy="164592"/>
-          </a:xfrm>
-          <a:prstGeom prst="rect">
-            <a:avLst/>
-          </a:prstGeom>
-          <a:noFill/>
-          <a:ln/>
-        </p:spPr>
-        <p:txBody>
-          <a:bodyPr wrap="square" lIns="0" tIns="0" rIns="0" bIns="0" rtlCol="0" anchor="ctr"/>
-          <a:lstStyle/>
-          <a:p>
-            <a:pPr algn="r" indent="0" marL="0">
-              <a:buNone/>
-            </a:pPr>
-            <a:r>
-              <a:rPr lang="en-US" sz="780" dirty="0">
-                <a:solidFill>
-                  <a:srgbClr val="6B7280"/>
-                </a:solidFill>
-              </a:rPr>
-              <a:t>1</a:t>
-            </a:r>
-            <a:endParaRPr lang="en-US" sz="780" dirty="0"/>
-          </a:p>
-        </p:txBody>
-      </p:sp>
     </p:spTree>
   </p:cSld>
   <p:clrMapOvr>
@@ -2165,6 +3142,7 @@
         <a:solidFill>
           <a:srgbClr val="F4F1EC"/>
         </a:solidFill>
+        <a:effectLst/>
       </p:bgPr>
     </p:bg>
     <p:spTree>
@@ -2208,7 +3186,7 @@
           <a:bodyPr wrap="square" lIns="254" tIns="254" rIns="254" bIns="254" rtlCol="0" anchor="ctr"/>
           <a:lstStyle/>
           <a:p>
-            <a:pPr algn="ctr" indent="0" marL="0">
+            <a:pPr marL="0" indent="0" algn="ctr">
               <a:buNone/>
             </a:pPr>
             <a:r>
@@ -2247,7 +3225,7 @@
           <a:bodyPr wrap="square" lIns="0" tIns="0" rIns="0" bIns="0" rtlCol="0" anchor="ctr"/>
           <a:lstStyle/>
           <a:p>
-            <a:pPr indent="0" marL="0">
+            <a:pPr marL="0" indent="0">
               <a:buNone/>
             </a:pPr>
             <a:r>
@@ -2286,7 +3264,7 @@
           <a:bodyPr wrap="square" lIns="0" tIns="0" rIns="0" bIns="0" rtlCol="0" anchor="ctr"/>
           <a:lstStyle/>
           <a:p>
-            <a:pPr indent="0" marL="0">
+            <a:pPr marL="0" indent="0">
               <a:buNone/>
             </a:pPr>
             <a:r>
@@ -2326,6 +3304,13 @@
             <a:prstDash val="solid"/>
           </a:ln>
         </p:spPr>
+        <p:txBody>
+          <a:bodyPr/>
+          <a:lstStyle/>
+          <a:p>
+            <a:endParaRPr lang="es-MX"/>
+          </a:p>
+        </p:txBody>
       </p:sp>
       <p:sp>
         <p:nvSpPr>
@@ -2348,7 +3333,7 @@
           <a:bodyPr wrap="square" lIns="0" tIns="0" rIns="0" bIns="0" rtlCol="0" anchor="ctr"/>
           <a:lstStyle/>
           <a:p>
-            <a:pPr indent="0" marL="0">
+            <a:pPr marL="0" indent="0">
               <a:buNone/>
             </a:pPr>
             <a:r>
@@ -2384,7 +3369,7 @@
           <a:bodyPr wrap="square" lIns="0" tIns="0" rIns="0" bIns="0" rtlCol="0" anchor="ctr"/>
           <a:lstStyle/>
           <a:p>
-            <a:pPr algn="r" indent="0" marL="0">
+            <a:pPr marL="0" indent="0" algn="r">
               <a:buNone/>
             </a:pPr>
             <a:r>
@@ -2401,15 +3386,15 @@
       </p:sp>
       <p:pic>
         <p:nvPicPr>
-          <p:cNvPr id="8" name="Image 0" descr="/mnt/data/barb_split/media/image22.png">    </p:cNvPr>
+          <p:cNvPr id="8" name="Image 0" descr="/mnt/data/barb_split/media/image22.png"/>
           <p:cNvPicPr>
             <a:picLocks noChangeAspect="1"/>
           </p:cNvPicPr>
           <p:nvPr/>
         </p:nvPicPr>
         <p:blipFill>
-          <a:blip r:embed="rId1"/>
-          <a:srcRect l="4922" r="4922" t="0" b="0"/>
+          <a:blip r:embed="rId3"/>
+          <a:srcRect l="4922" r="4922"/>
           <a:stretch/>
         </p:blipFill>
         <p:spPr>
@@ -2424,15 +3409,15 @@
       </p:pic>
       <p:pic>
         <p:nvPicPr>
-          <p:cNvPr id="9" name="Image 1" descr="/mnt/data/barb_split/media/image20.png">    </p:cNvPr>
+          <p:cNvPr id="9" name="Image 1" descr="/mnt/data/barb_split/media/image20.png"/>
           <p:cNvPicPr>
             <a:picLocks noChangeAspect="1"/>
           </p:cNvPicPr>
           <p:nvPr/>
         </p:nvPicPr>
         <p:blipFill>
-          <a:blip r:embed="rId2"/>
-          <a:srcRect l="0" r="0" t="23312" b="23312"/>
+          <a:blip r:embed="rId4"/>
+          <a:srcRect t="23312" b="23312"/>
           <a:stretch/>
         </p:blipFill>
         <p:spPr>
@@ -2468,7 +3453,7 @@
           </a:bodyPr>
           <a:lstStyle/>
           <a:p>
-            <a:pPr algn="ctr" indent="0" marL="0">
+            <a:pPr marL="0" indent="0" algn="ctr">
               <a:buNone/>
             </a:pPr>
             <a:r>
@@ -2502,22 +3487,22 @@
         </p:spPr>
         <p:txBody>
           <a:bodyPr wrap="square" lIns="254" tIns="254" rIns="254" bIns="254" rtlCol="0" anchor="t">
-            <a:normAutofit/>
+            <a:normAutofit fontScale="92500" lnSpcReduction="10000"/>
           </a:bodyPr>
           <a:lstStyle/>
           <a:p>
-            <a:pPr algn="l" indent="0" marL="0">
-              <a:buNone/>
-            </a:pPr>
-            <a:r>
-              <a:rPr lang="en-US" sz="2000" b="1" dirty="0">
+            <a:pPr marL="0" indent="0" algn="l">
+              <a:buNone/>
+            </a:pPr>
+            <a:r>
+              <a:rPr lang="en-US" sz="2400" b="1" dirty="0">
                 <a:solidFill>
                   <a:srgbClr val="1F2937"/>
                 </a:solidFill>
               </a:rPr>
               <a:t>Cobertura obligatoria</a:t>
             </a:r>
-            <a:endParaRPr lang="en-US" sz="2000" dirty="0"/>
+            <a:endParaRPr lang="en-US" sz="2400" dirty="0"/>
           </a:p>
         </p:txBody>
       </p:sp>
@@ -2532,7 +3517,7 @@
             <a:off x="6199632" y="1874520"/>
             <a:ext cx="2377440" cy="1051560"/>
           </a:xfrm>
-          <a:prstGeom prst="rect">
+          <a:prstGeom prst="roundRect">
             <a:avLst/>
           </a:prstGeom>
           <a:solidFill>
@@ -2546,15 +3531,15 @@
         </p:spPr>
         <p:txBody>
           <a:bodyPr wrap="square" lIns="1524" tIns="1524" rIns="1524" bIns="1524" rtlCol="0" anchor="t">
-            <a:normAutofit/>
+            <a:noAutofit/>
           </a:bodyPr>
           <a:lstStyle/>
           <a:p>
-            <a:pPr indent="0" marL="0">
-              <a:buNone/>
-            </a:pPr>
-            <a:r>
-              <a:rPr lang="en-US" sz="1220" b="1" dirty="0">
+            <a:pPr marL="0" indent="0" algn="ctr">
+              <a:buNone/>
+            </a:pPr>
+            <a:r>
+              <a:rPr lang="en-US" sz="1400" b="1" dirty="0">
                 <a:solidFill>
                   <a:srgbClr val="1F2937"/>
                 </a:solidFill>
@@ -2564,17 +3549,14 @@
               </a:rPr>
               <a:t>OT</a:t>
             </a:r>
-            <a:pPr indent="0" marL="0">
-              <a:buNone/>
-            </a:pPr>
-            <a:endParaRPr lang="en-US" sz="1220" dirty="0"/>
-          </a:p>
-          <a:p>
-            <a:pPr indent="0" marL="0">
-              <a:buNone/>
-            </a:pPr>
-            <a:r>
-              <a:rPr lang="en-US" sz="1220" dirty="0">
+            <a:endParaRPr lang="en-US" sz="1400" dirty="0"/>
+          </a:p>
+          <a:p>
+            <a:pPr marL="0" indent="0" algn="ctr">
+              <a:buNone/>
+            </a:pPr>
+            <a:r>
+              <a:rPr lang="en-US" sz="1400" dirty="0">
                 <a:solidFill>
                   <a:srgbClr val="1F2937"/>
                 </a:solidFill>
@@ -2584,32 +3566,9 @@
               </a:rPr>
               <a:t>Creación, asignación, estados, comentarios, adjuntos, cierre y eliminación lógica.</a:t>
             </a:r>
-            <a:endParaRPr lang="en-US" sz="1220" dirty="0"/>
-          </a:p>
-        </p:txBody>
-      </p:sp>
-      <p:sp>
-        <p:nvSpPr>
-          <p:cNvPr id="13" name="Shape 9"/>
-          <p:cNvSpPr/>
-          <p:nvPr/>
-        </p:nvSpPr>
-        <p:spPr>
-          <a:xfrm>
-            <a:off x="6199632" y="2889504"/>
-            <a:ext cx="2377440" cy="0"/>
-          </a:xfrm>
-          <a:prstGeom prst="line">
-            <a:avLst/>
-          </a:prstGeom>
-          <a:noFill/>
-          <a:ln w="25400">
-            <a:solidFill>
-              <a:srgbClr val="C62828"/>
-            </a:solidFill>
-            <a:prstDash val="solid"/>
-          </a:ln>
-        </p:spPr>
+            <a:endParaRPr lang="en-US" sz="1400" dirty="0"/>
+          </a:p>
+        </p:txBody>
       </p:sp>
       <p:sp>
         <p:nvSpPr>
@@ -2622,7 +3581,7 @@
             <a:off x="8961120" y="1874520"/>
             <a:ext cx="2377440" cy="1051560"/>
           </a:xfrm>
-          <a:prstGeom prst="rect">
+          <a:prstGeom prst="roundRect">
             <a:avLst/>
           </a:prstGeom>
           <a:solidFill>
@@ -2640,11 +3599,11 @@
           </a:bodyPr>
           <a:lstStyle/>
           <a:p>
-            <a:pPr indent="0" marL="0">
-              <a:buNone/>
-            </a:pPr>
-            <a:r>
-              <a:rPr lang="en-US" sz="1220" b="1" dirty="0">
+            <a:pPr marL="0" indent="0" algn="ctr">
+              <a:buNone/>
+            </a:pPr>
+            <a:r>
+              <a:rPr lang="en-US" sz="1400" b="1" dirty="0">
                 <a:solidFill>
                   <a:srgbClr val="1F2937"/>
                 </a:solidFill>
@@ -2654,17 +3613,14 @@
               </a:rPr>
               <a:t>Usuarios</a:t>
             </a:r>
-            <a:pPr indent="0" marL="0">
-              <a:buNone/>
-            </a:pPr>
-            <a:endParaRPr lang="en-US" sz="1220" dirty="0"/>
-          </a:p>
-          <a:p>
-            <a:pPr indent="0" marL="0">
-              <a:buNone/>
-            </a:pPr>
-            <a:r>
-              <a:rPr lang="en-US" sz="1220" dirty="0">
+            <a:endParaRPr lang="en-US" sz="1400" dirty="0"/>
+          </a:p>
+          <a:p>
+            <a:pPr marL="0" indent="0" algn="ctr">
+              <a:buNone/>
+            </a:pPr>
+            <a:r>
+              <a:rPr lang="en-US" sz="1400" dirty="0">
                 <a:solidFill>
                   <a:srgbClr val="1F2937"/>
                 </a:solidFill>
@@ -2674,32 +3630,9 @@
               </a:rPr>
               <a:t>Creación, cambios, permisos, activación, desactivación y roles.</a:t>
             </a:r>
-            <a:endParaRPr lang="en-US" sz="1220" dirty="0"/>
-          </a:p>
-        </p:txBody>
-      </p:sp>
-      <p:sp>
-        <p:nvSpPr>
-          <p:cNvPr id="15" name="Shape 11"/>
-          <p:cNvSpPr/>
-          <p:nvPr/>
-        </p:nvSpPr>
-        <p:spPr>
-          <a:xfrm>
-            <a:off x="8961120" y="2889504"/>
-            <a:ext cx="2377440" cy="0"/>
-          </a:xfrm>
-          <a:prstGeom prst="line">
-            <a:avLst/>
-          </a:prstGeom>
-          <a:noFill/>
-          <a:ln w="25400">
-            <a:solidFill>
-              <a:srgbClr val="2563EB"/>
-            </a:solidFill>
-            <a:prstDash val="solid"/>
-          </a:ln>
-        </p:spPr>
+            <a:endParaRPr lang="en-US" sz="1400" dirty="0"/>
+          </a:p>
+        </p:txBody>
       </p:sp>
       <p:sp>
         <p:nvSpPr>
@@ -2712,7 +3645,7 @@
             <a:off x="6199632" y="3337560"/>
             <a:ext cx="2377440" cy="1051560"/>
           </a:xfrm>
-          <a:prstGeom prst="rect">
+          <a:prstGeom prst="roundRect">
             <a:avLst/>
           </a:prstGeom>
           <a:solidFill>
@@ -2730,11 +3663,11 @@
           </a:bodyPr>
           <a:lstStyle/>
           <a:p>
-            <a:pPr indent="0" marL="0">
-              <a:buNone/>
-            </a:pPr>
-            <a:r>
-              <a:rPr lang="en-US" sz="1220" b="1" dirty="0">
+            <a:pPr marL="0" indent="0" algn="ctr">
+              <a:buNone/>
+            </a:pPr>
+            <a:r>
+              <a:rPr lang="en-US" sz="1400" b="1" dirty="0">
                 <a:solidFill>
                   <a:srgbClr val="1F2937"/>
                 </a:solidFill>
@@ -2744,17 +3677,14 @@
               </a:rPr>
               <a:t>Información</a:t>
             </a:r>
-            <a:pPr indent="0" marL="0">
-              <a:buNone/>
-            </a:pPr>
-            <a:endParaRPr lang="en-US" sz="1220" dirty="0"/>
-          </a:p>
-          <a:p>
-            <a:pPr indent="0" marL="0">
-              <a:buNone/>
-            </a:pPr>
-            <a:r>
-              <a:rPr lang="en-US" sz="1220" dirty="0">
+            <a:endParaRPr lang="en-US" sz="1400" dirty="0"/>
+          </a:p>
+          <a:p>
+            <a:pPr marL="0" indent="0" algn="ctr">
+              <a:buNone/>
+            </a:pPr>
+            <a:r>
+              <a:rPr lang="en-US" sz="1400" dirty="0">
                 <a:solidFill>
                   <a:srgbClr val="1F2937"/>
                 </a:solidFill>
@@ -2764,32 +3694,9 @@
               </a:rPr>
               <a:t>Cargas, descargas, altas, bajas y modificaciones críticas.</a:t>
             </a:r>
-            <a:endParaRPr lang="en-US" sz="1220" dirty="0"/>
-          </a:p>
-        </p:txBody>
-      </p:sp>
-      <p:sp>
-        <p:nvSpPr>
-          <p:cNvPr id="17" name="Shape 13"/>
-          <p:cNvSpPr/>
-          <p:nvPr/>
-        </p:nvSpPr>
-        <p:spPr>
-          <a:xfrm>
-            <a:off x="6199632" y="4352544"/>
-            <a:ext cx="2377440" cy="0"/>
-          </a:xfrm>
-          <a:prstGeom prst="line">
-            <a:avLst/>
-          </a:prstGeom>
-          <a:noFill/>
-          <a:ln w="25400">
-            <a:solidFill>
-              <a:srgbClr val="059669"/>
-            </a:solidFill>
-            <a:prstDash val="solid"/>
-          </a:ln>
-        </p:spPr>
+            <a:endParaRPr lang="en-US" sz="1400" dirty="0"/>
+          </a:p>
+        </p:txBody>
       </p:sp>
       <p:sp>
         <p:nvSpPr>
@@ -2802,7 +3709,7 @@
             <a:off x="8961120" y="3337560"/>
             <a:ext cx="2377440" cy="1051560"/>
           </a:xfrm>
-          <a:prstGeom prst="rect">
+          <a:prstGeom prst="roundRect">
             <a:avLst/>
           </a:prstGeom>
           <a:solidFill>
@@ -2820,11 +3727,11 @@
           </a:bodyPr>
           <a:lstStyle/>
           <a:p>
-            <a:pPr indent="0" marL="0">
-              <a:buNone/>
-            </a:pPr>
-            <a:r>
-              <a:rPr lang="en-US" sz="1220" b="1" dirty="0">
+            <a:pPr marL="0" indent="0" algn="ctr">
+              <a:buNone/>
+            </a:pPr>
+            <a:r>
+              <a:rPr lang="en-US" sz="1400" b="1" dirty="0">
                 <a:solidFill>
                   <a:srgbClr val="1F2937"/>
                 </a:solidFill>
@@ -2834,17 +3741,14 @@
               </a:rPr>
               <a:t>Datos del log</a:t>
             </a:r>
-            <a:pPr indent="0" marL="0">
-              <a:buNone/>
-            </a:pPr>
-            <a:endParaRPr lang="en-US" sz="1220" dirty="0"/>
-          </a:p>
-          <a:p>
-            <a:pPr indent="0" marL="0">
-              <a:buNone/>
-            </a:pPr>
-            <a:r>
-              <a:rPr lang="en-US" sz="1220" dirty="0">
+            <a:endParaRPr lang="en-US" sz="1400" dirty="0"/>
+          </a:p>
+          <a:p>
+            <a:pPr marL="0" indent="0" algn="ctr">
+              <a:buNone/>
+            </a:pPr>
+            <a:r>
+              <a:rPr lang="en-US" sz="1400" dirty="0">
                 <a:solidFill>
                   <a:srgbClr val="1F2937"/>
                 </a:solidFill>
@@ -2854,32 +3758,9 @@
               </a:rPr>
               <a:t>Usuario, tenant, fecha/hora, acción, entidad, resultado e IP/metadata.</a:t>
             </a:r>
-            <a:endParaRPr lang="en-US" sz="1220" dirty="0"/>
-          </a:p>
-        </p:txBody>
-      </p:sp>
-      <p:sp>
-        <p:nvSpPr>
-          <p:cNvPr id="19" name="Shape 15"/>
-          <p:cNvSpPr/>
-          <p:nvPr/>
-        </p:nvSpPr>
-        <p:spPr>
-          <a:xfrm>
-            <a:off x="8961120" y="4352544"/>
-            <a:ext cx="2377440" cy="0"/>
-          </a:xfrm>
-          <a:prstGeom prst="line">
-            <a:avLst/>
-          </a:prstGeom>
-          <a:noFill/>
-          <a:ln w="25400">
-            <a:solidFill>
-              <a:srgbClr val="6D28D9"/>
-            </a:solidFill>
-            <a:prstDash val="solid"/>
-          </a:ln>
-        </p:spPr>
+            <a:endParaRPr lang="en-US" sz="1400" dirty="0"/>
+          </a:p>
+        </p:txBody>
       </p:sp>
       <p:sp>
         <p:nvSpPr>
@@ -2900,11 +3781,11 @@
         </p:spPr>
         <p:txBody>
           <a:bodyPr wrap="square" lIns="254" tIns="254" rIns="254" bIns="254" rtlCol="0" anchor="t">
-            <a:normAutofit/>
+            <a:normAutofit fontScale="92500" lnSpcReduction="10000"/>
           </a:bodyPr>
           <a:lstStyle/>
           <a:p>
-            <a:pPr algn="l" indent="0" marL="0">
+            <a:pPr marL="0" indent="0" algn="l">
               <a:buNone/>
             </a:pPr>
             <a:r>
@@ -2935,6 +3816,7 @@
         <a:solidFill>
           <a:srgbClr val="F4F1EC"/>
         </a:solidFill>
+        <a:effectLst/>
       </p:bgPr>
     </p:bg>
     <p:spTree>
@@ -2978,7 +3860,7 @@
           <a:bodyPr wrap="square" lIns="254" tIns="254" rIns="254" bIns="254" rtlCol="0" anchor="ctr"/>
           <a:lstStyle/>
           <a:p>
-            <a:pPr algn="ctr" indent="0" marL="0">
+            <a:pPr marL="0" indent="0" algn="ctr">
               <a:buNone/>
             </a:pPr>
             <a:r>
@@ -3017,7 +3899,7 @@
           <a:bodyPr wrap="square" lIns="0" tIns="0" rIns="0" bIns="0" rtlCol="0" anchor="ctr"/>
           <a:lstStyle/>
           <a:p>
-            <a:pPr indent="0" marL="0">
+            <a:pPr marL="0" indent="0">
               <a:buNone/>
             </a:pPr>
             <a:r>
@@ -3056,7 +3938,7 @@
           <a:bodyPr wrap="square" lIns="0" tIns="0" rIns="0" bIns="0" rtlCol="0" anchor="ctr"/>
           <a:lstStyle/>
           <a:p>
-            <a:pPr indent="0" marL="0">
+            <a:pPr marL="0" indent="0">
               <a:buNone/>
             </a:pPr>
             <a:r>
@@ -3096,6 +3978,13 @@
             <a:prstDash val="solid"/>
           </a:ln>
         </p:spPr>
+        <p:txBody>
+          <a:bodyPr/>
+          <a:lstStyle/>
+          <a:p>
+            <a:endParaRPr lang="es-MX"/>
+          </a:p>
+        </p:txBody>
       </p:sp>
       <p:sp>
         <p:nvSpPr>
@@ -3118,7 +4007,7 @@
           <a:bodyPr wrap="square" lIns="0" tIns="0" rIns="0" bIns="0" rtlCol="0" anchor="ctr"/>
           <a:lstStyle/>
           <a:p>
-            <a:pPr indent="0" marL="0">
+            <a:pPr marL="0" indent="0">
               <a:buNone/>
             </a:pPr>
             <a:r>
@@ -3154,7 +4043,7 @@
           <a:bodyPr wrap="square" lIns="0" tIns="0" rIns="0" bIns="0" rtlCol="0" anchor="ctr"/>
           <a:lstStyle/>
           <a:p>
-            <a:pPr algn="r" indent="0" marL="0">
+            <a:pPr marL="0" indent="0" algn="r">
               <a:buNone/>
             </a:pPr>
             <a:r>
@@ -3192,7 +4081,7 @@
           </a:bodyPr>
           <a:lstStyle/>
           <a:p>
-            <a:pPr algn="l" indent="0" marL="0">
+            <a:pPr marL="0" indent="0" algn="l">
               <a:buNone/>
             </a:pPr>
             <a:r>
@@ -3218,7 +4107,7 @@
             <a:off x="594360" y="1737360"/>
             <a:ext cx="3566160" cy="868680"/>
           </a:xfrm>
-          <a:prstGeom prst="rect">
+          <a:prstGeom prst="roundRect">
             <a:avLst/>
           </a:prstGeom>
           <a:solidFill>
@@ -3232,15 +4121,15 @@
         </p:spPr>
         <p:txBody>
           <a:bodyPr wrap="square" lIns="1524" tIns="1524" rIns="1524" bIns="1524" rtlCol="0" anchor="t">
-            <a:normAutofit/>
+            <a:normAutofit fontScale="92500"/>
           </a:bodyPr>
           <a:lstStyle/>
           <a:p>
-            <a:pPr indent="0" marL="0">
-              <a:buNone/>
-            </a:pPr>
-            <a:r>
-              <a:rPr lang="en-US" sz="1220" b="1" dirty="0">
+            <a:pPr marL="0" indent="0" algn="ctr">
+              <a:buNone/>
+            </a:pPr>
+            <a:r>
+              <a:rPr lang="en-US" sz="1600" b="1" dirty="0">
                 <a:solidFill>
                   <a:srgbClr val="1F2937"/>
                 </a:solidFill>
@@ -3250,17 +4139,14 @@
               </a:rPr>
               <a:t>Gobierno</a:t>
             </a:r>
-            <a:pPr indent="0" marL="0">
-              <a:buNone/>
-            </a:pPr>
-            <a:endParaRPr lang="en-US" sz="1220" dirty="0"/>
-          </a:p>
-          <a:p>
-            <a:pPr indent="0" marL="0">
-              <a:buNone/>
-            </a:pPr>
-            <a:r>
-              <a:rPr lang="en-US" sz="1220" dirty="0">
+            <a:endParaRPr lang="en-US" sz="1600" dirty="0"/>
+          </a:p>
+          <a:p>
+            <a:pPr marL="0" indent="0" algn="ctr">
+              <a:buNone/>
+            </a:pPr>
+            <a:r>
+              <a:rPr lang="en-US" sz="1600" dirty="0">
                 <a:solidFill>
                   <a:srgbClr val="1F2937"/>
                 </a:solidFill>
@@ -3270,32 +4156,9 @@
               </a:rPr>
               <a:t>Luis Ovalle lidera el proyecto, documentación y repositorio/fork privado.</a:t>
             </a:r>
-            <a:endParaRPr lang="en-US" sz="1220" dirty="0"/>
-          </a:p>
-        </p:txBody>
-      </p:sp>
-      <p:sp>
-        <p:nvSpPr>
-          <p:cNvPr id="10" name="Shape 8"/>
-          <p:cNvSpPr/>
-          <p:nvPr/>
-        </p:nvSpPr>
-        <p:spPr>
-          <a:xfrm>
-            <a:off x="594360" y="2569464"/>
-            <a:ext cx="3566160" cy="0"/>
-          </a:xfrm>
-          <a:prstGeom prst="line">
-            <a:avLst/>
-          </a:prstGeom>
-          <a:noFill/>
-          <a:ln w="25400">
-            <a:solidFill>
-              <a:srgbClr val="2563EB"/>
-            </a:solidFill>
-            <a:prstDash val="solid"/>
-          </a:ln>
-        </p:spPr>
+            <a:endParaRPr lang="en-US" sz="1600" dirty="0"/>
+          </a:p>
+        </p:txBody>
       </p:sp>
       <p:sp>
         <p:nvSpPr>
@@ -3308,7 +4171,7 @@
             <a:off x="4480560" y="1737360"/>
             <a:ext cx="3566160" cy="868680"/>
           </a:xfrm>
-          <a:prstGeom prst="rect">
+          <a:prstGeom prst="roundRect">
             <a:avLst/>
           </a:prstGeom>
           <a:solidFill>
@@ -3326,11 +4189,11 @@
           </a:bodyPr>
           <a:lstStyle/>
           <a:p>
-            <a:pPr indent="0" marL="0">
-              <a:buNone/>
-            </a:pPr>
-            <a:r>
-              <a:rPr lang="en-US" sz="1220" b="1" dirty="0">
+            <a:pPr marL="0" indent="0" algn="ctr">
+              <a:buNone/>
+            </a:pPr>
+            <a:r>
+              <a:rPr lang="en-US" sz="1600" b="1" dirty="0">
                 <a:solidFill>
                   <a:srgbClr val="1F2937"/>
                 </a:solidFill>
@@ -3340,17 +4203,14 @@
               </a:rPr>
               <a:t>Cadencia</a:t>
             </a:r>
-            <a:pPr indent="0" marL="0">
-              <a:buNone/>
-            </a:pPr>
-            <a:endParaRPr lang="en-US" sz="1220" dirty="0"/>
-          </a:p>
-          <a:p>
-            <a:pPr indent="0" marL="0">
-              <a:buNone/>
-            </a:pPr>
-            <a:r>
-              <a:rPr lang="en-US" sz="1220" dirty="0">
+            <a:endParaRPr lang="en-US" sz="1600" dirty="0"/>
+          </a:p>
+          <a:p>
+            <a:pPr marL="0" indent="0" algn="ctr">
+              <a:buNone/>
+            </a:pPr>
+            <a:r>
+              <a:rPr lang="en-US" sz="1600" dirty="0">
                 <a:solidFill>
                   <a:srgbClr val="1F2937"/>
                 </a:solidFill>
@@ -3360,32 +4220,9 @@
               </a:rPr>
               <a:t>Reunión semanal jueves 11:00 + coordinación técnica por WhatsApp.</a:t>
             </a:r>
-            <a:endParaRPr lang="en-US" sz="1220" dirty="0"/>
-          </a:p>
-        </p:txBody>
-      </p:sp>
-      <p:sp>
-        <p:nvSpPr>
-          <p:cNvPr id="12" name="Shape 10"/>
-          <p:cNvSpPr/>
-          <p:nvPr/>
-        </p:nvSpPr>
-        <p:spPr>
-          <a:xfrm>
-            <a:off x="4480560" y="2569464"/>
-            <a:ext cx="3566160" cy="0"/>
-          </a:xfrm>
-          <a:prstGeom prst="line">
-            <a:avLst/>
-          </a:prstGeom>
-          <a:noFill/>
-          <a:ln w="25400">
-            <a:solidFill>
-              <a:srgbClr val="059669"/>
-            </a:solidFill>
-            <a:prstDash val="solid"/>
-          </a:ln>
-        </p:spPr>
+            <a:endParaRPr lang="en-US" sz="1600" dirty="0"/>
+          </a:p>
+        </p:txBody>
       </p:sp>
       <p:sp>
         <p:nvSpPr>
@@ -3398,7 +4235,7 @@
             <a:off x="8366760" y="1737360"/>
             <a:ext cx="3108960" cy="868680"/>
           </a:xfrm>
-          <a:prstGeom prst="rect">
+          <a:prstGeom prst="roundRect">
             <a:avLst/>
           </a:prstGeom>
           <a:solidFill>
@@ -3416,11 +4253,11 @@
           </a:bodyPr>
           <a:lstStyle/>
           <a:p>
-            <a:pPr indent="0" marL="0">
-              <a:buNone/>
-            </a:pPr>
-            <a:r>
-              <a:rPr lang="en-US" sz="1220" b="1" dirty="0">
+            <a:pPr marL="0" indent="0" algn="ctr">
+              <a:buNone/>
+            </a:pPr>
+            <a:r>
+              <a:rPr lang="en-US" sz="1600" b="1" dirty="0">
                 <a:solidFill>
                   <a:srgbClr val="1F2937"/>
                 </a:solidFill>
@@ -3430,17 +4267,14 @@
               </a:rPr>
               <a:t>Flujo</a:t>
             </a:r>
-            <a:pPr indent="0" marL="0">
-              <a:buNone/>
-            </a:pPr>
-            <a:endParaRPr lang="en-US" sz="1220" dirty="0"/>
-          </a:p>
-          <a:p>
-            <a:pPr indent="0" marL="0">
-              <a:buNone/>
-            </a:pPr>
-            <a:r>
-              <a:rPr lang="en-US" sz="1220" dirty="0">
+            <a:endParaRPr lang="en-US" sz="1600" dirty="0"/>
+          </a:p>
+          <a:p>
+            <a:pPr marL="0" indent="0" algn="ctr">
+              <a:buNone/>
+            </a:pPr>
+            <a:r>
+              <a:rPr lang="en-US" sz="1600" dirty="0">
                 <a:solidFill>
                   <a:srgbClr val="1F2937"/>
                 </a:solidFill>
@@ -3450,32 +4284,9 @@
               </a:rPr>
               <a:t>Backlog → Por hacer → En progreso → Revisión → Pruebas → Hecho.</a:t>
             </a:r>
-            <a:endParaRPr lang="en-US" sz="1220" dirty="0"/>
-          </a:p>
-        </p:txBody>
-      </p:sp>
-      <p:sp>
-        <p:nvSpPr>
-          <p:cNvPr id="14" name="Shape 12"/>
-          <p:cNvSpPr/>
-          <p:nvPr/>
-        </p:nvSpPr>
-        <p:spPr>
-          <a:xfrm>
-            <a:off x="8366760" y="2569464"/>
-            <a:ext cx="3108960" cy="0"/>
-          </a:xfrm>
-          <a:prstGeom prst="line">
-            <a:avLst/>
-          </a:prstGeom>
-          <a:noFill/>
-          <a:ln w="25400">
-            <a:solidFill>
-              <a:srgbClr val="E07800"/>
-            </a:solidFill>
-            <a:prstDash val="solid"/>
-          </a:ln>
-        </p:spPr>
+            <a:endParaRPr lang="en-US" sz="1600" dirty="0"/>
+          </a:p>
+        </p:txBody>
       </p:sp>
       <p:sp>
         <p:nvSpPr>
@@ -3498,7 +4309,7 @@
           <a:bodyPr wrap="square" lIns="0" tIns="0" rIns="0" bIns="0" rtlCol="0" anchor="ctr"/>
           <a:lstStyle/>
           <a:p>
-            <a:pPr indent="0" marL="0">
+            <a:pPr marL="0" indent="0">
               <a:buNone/>
             </a:pPr>
             <a:r>
@@ -3540,7 +4351,7 @@
           <a:bodyPr wrap="square" lIns="0" tIns="0" rIns="0" bIns="0" rtlCol="0" anchor="ctr"/>
           <a:lstStyle/>
           <a:p>
-            <a:pPr algn="ctr" indent="0" marL="0">
+            <a:pPr marL="0" indent="0" algn="ctr">
               <a:buNone/>
             </a:pPr>
             <a:r>
@@ -3563,7 +4374,7 @@
         </p:nvSpPr>
         <p:spPr>
           <a:xfrm>
-            <a:off x="1161288" y="3739896"/>
+            <a:off x="1138428" y="3813048"/>
             <a:ext cx="1234440" cy="310896"/>
           </a:xfrm>
           <a:prstGeom prst="rect">
@@ -3578,7 +4389,7 @@
           </a:bodyPr>
           <a:lstStyle/>
           <a:p>
-            <a:pPr algn="l" indent="0" marL="0">
+            <a:pPr marL="0" indent="0" algn="l">
               <a:buNone/>
             </a:pPr>
             <a:r>
@@ -3601,22 +4412,38 @@
         </p:nvSpPr>
         <p:spPr>
           <a:xfrm>
-            <a:off x="2350008" y="3913632"/>
+            <a:off x="2258099" y="3913632"/>
             <a:ext cx="256032" cy="0"/>
           </a:xfrm>
           <a:prstGeom prst="line">
             <a:avLst/>
           </a:prstGeom>
           <a:noFill/>
-          <a:ln w="15240">
+          <a:ln w="57150">
             <a:solidFill>
-              <a:srgbClr val="BFB8AF"/>
+              <a:schemeClr val="tx1"/>
             </a:solidFill>
             <a:prstDash val="solid"/>
             <a:headEnd type="none"/>
             <a:tailEnd type="triangle"/>
           </a:ln>
         </p:spPr>
+        <p:txBody>
+          <a:bodyPr/>
+          <a:lstStyle/>
+          <a:p>
+            <a:endParaRPr lang="es-MX">
+              <a:ln>
+                <a:solidFill>
+                  <a:sysClr val="windowText" lastClr="000000"/>
+                </a:solidFill>
+              </a:ln>
+              <a:highlight>
+                <a:srgbClr val="000000"/>
+              </a:highlight>
+            </a:endParaRPr>
+          </a:p>
+        </p:txBody>
       </p:sp>
       <p:sp>
         <p:nvSpPr>
@@ -3645,7 +4472,7 @@
           <a:bodyPr wrap="square" lIns="0" tIns="0" rIns="0" bIns="0" rtlCol="0" anchor="ctr"/>
           <a:lstStyle/>
           <a:p>
-            <a:pPr algn="ctr" indent="0" marL="0">
+            <a:pPr marL="0" indent="0" algn="ctr">
               <a:buNone/>
             </a:pPr>
             <a:r>
@@ -3668,7 +4495,7 @@
         </p:nvSpPr>
         <p:spPr>
           <a:xfrm>
-            <a:off x="3081528" y="3739896"/>
+            <a:off x="3115525" y="3822192"/>
             <a:ext cx="1234440" cy="310896"/>
           </a:xfrm>
           <a:prstGeom prst="rect">
@@ -3683,7 +4510,7 @@
           </a:bodyPr>
           <a:lstStyle/>
           <a:p>
-            <a:pPr algn="l" indent="0" marL="0">
+            <a:pPr marL="0" indent="0" algn="l">
               <a:buNone/>
             </a:pPr>
             <a:r>
@@ -3706,22 +4533,38 @@
         </p:nvSpPr>
         <p:spPr>
           <a:xfrm>
-            <a:off x="4270248" y="3913632"/>
+            <a:off x="4178339" y="3913632"/>
             <a:ext cx="256032" cy="0"/>
           </a:xfrm>
           <a:prstGeom prst="line">
             <a:avLst/>
           </a:prstGeom>
           <a:noFill/>
-          <a:ln w="15240">
+          <a:ln w="57150">
             <a:solidFill>
-              <a:srgbClr val="BFB8AF"/>
+              <a:schemeClr val="tx1"/>
             </a:solidFill>
             <a:prstDash val="solid"/>
             <a:headEnd type="none"/>
             <a:tailEnd type="triangle"/>
           </a:ln>
         </p:spPr>
+        <p:txBody>
+          <a:bodyPr/>
+          <a:lstStyle/>
+          <a:p>
+            <a:endParaRPr lang="es-MX">
+              <a:ln>
+                <a:solidFill>
+                  <a:sysClr val="windowText" lastClr="000000"/>
+                </a:solidFill>
+              </a:ln>
+              <a:highlight>
+                <a:srgbClr val="000000"/>
+              </a:highlight>
+            </a:endParaRPr>
+          </a:p>
+        </p:txBody>
       </p:sp>
       <p:sp>
         <p:nvSpPr>
@@ -3750,7 +4593,7 @@
           <a:bodyPr wrap="square" lIns="0" tIns="0" rIns="0" bIns="0" rtlCol="0" anchor="ctr"/>
           <a:lstStyle/>
           <a:p>
-            <a:pPr algn="ctr" indent="0" marL="0">
+            <a:pPr marL="0" indent="0" algn="ctr">
               <a:buNone/>
             </a:pPr>
             <a:r>
@@ -3773,7 +4616,7 @@
         </p:nvSpPr>
         <p:spPr>
           <a:xfrm>
-            <a:off x="5001768" y="3739896"/>
+            <a:off x="5024628" y="3811290"/>
             <a:ext cx="1234440" cy="310896"/>
           </a:xfrm>
           <a:prstGeom prst="rect">
@@ -3788,7 +4631,7 @@
           </a:bodyPr>
           <a:lstStyle/>
           <a:p>
-            <a:pPr algn="l" indent="0" marL="0">
+            <a:pPr marL="0" indent="0" algn="l">
               <a:buNone/>
             </a:pPr>
             <a:r>
@@ -3811,22 +4654,38 @@
         </p:nvSpPr>
         <p:spPr>
           <a:xfrm>
-            <a:off x="6190488" y="3913632"/>
+            <a:off x="6098579" y="3913632"/>
             <a:ext cx="256032" cy="0"/>
           </a:xfrm>
           <a:prstGeom prst="line">
             <a:avLst/>
           </a:prstGeom>
           <a:noFill/>
-          <a:ln w="15240">
+          <a:ln w="57150">
             <a:solidFill>
-              <a:srgbClr val="BFB8AF"/>
+              <a:schemeClr val="tx1"/>
             </a:solidFill>
             <a:prstDash val="solid"/>
             <a:headEnd type="none"/>
             <a:tailEnd type="triangle"/>
           </a:ln>
         </p:spPr>
+        <p:txBody>
+          <a:bodyPr/>
+          <a:lstStyle/>
+          <a:p>
+            <a:endParaRPr lang="es-MX">
+              <a:ln>
+                <a:solidFill>
+                  <a:sysClr val="windowText" lastClr="000000"/>
+                </a:solidFill>
+              </a:ln>
+              <a:highlight>
+                <a:srgbClr val="000000"/>
+              </a:highlight>
+            </a:endParaRPr>
+          </a:p>
+        </p:txBody>
       </p:sp>
       <p:sp>
         <p:nvSpPr>
@@ -3855,7 +4714,7 @@
           <a:bodyPr wrap="square" lIns="0" tIns="0" rIns="0" bIns="0" rtlCol="0" anchor="ctr"/>
           <a:lstStyle/>
           <a:p>
-            <a:pPr algn="ctr" indent="0" marL="0">
+            <a:pPr marL="0" indent="0" algn="ctr">
               <a:buNone/>
             </a:pPr>
             <a:r>
@@ -3878,7 +4737,7 @@
         </p:nvSpPr>
         <p:spPr>
           <a:xfrm>
-            <a:off x="6922008" y="3739896"/>
+            <a:off x="6944868" y="3816565"/>
             <a:ext cx="1234440" cy="310896"/>
           </a:xfrm>
           <a:prstGeom prst="rect">
@@ -3893,7 +4752,7 @@
           </a:bodyPr>
           <a:lstStyle/>
           <a:p>
-            <a:pPr algn="l" indent="0" marL="0">
+            <a:pPr marL="0" indent="0" algn="l">
               <a:buNone/>
             </a:pPr>
             <a:r>
@@ -3916,22 +4775,38 @@
         </p:nvSpPr>
         <p:spPr>
           <a:xfrm>
-            <a:off x="8110728" y="3913632"/>
+            <a:off x="8018819" y="3913632"/>
             <a:ext cx="256032" cy="0"/>
           </a:xfrm>
           <a:prstGeom prst="line">
             <a:avLst/>
           </a:prstGeom>
           <a:noFill/>
-          <a:ln w="15240">
+          <a:ln w="57150">
             <a:solidFill>
-              <a:srgbClr val="BFB8AF"/>
+              <a:schemeClr val="tx1"/>
             </a:solidFill>
             <a:prstDash val="solid"/>
             <a:headEnd type="none"/>
             <a:tailEnd type="triangle"/>
           </a:ln>
         </p:spPr>
+        <p:txBody>
+          <a:bodyPr/>
+          <a:lstStyle/>
+          <a:p>
+            <a:endParaRPr lang="es-MX">
+              <a:ln>
+                <a:solidFill>
+                  <a:sysClr val="windowText" lastClr="000000"/>
+                </a:solidFill>
+              </a:ln>
+              <a:highlight>
+                <a:srgbClr val="000000"/>
+              </a:highlight>
+            </a:endParaRPr>
+          </a:p>
+        </p:txBody>
       </p:sp>
       <p:sp>
         <p:nvSpPr>
@@ -3960,7 +4835,7 @@
           <a:bodyPr wrap="square" lIns="0" tIns="0" rIns="0" bIns="0" rtlCol="0" anchor="ctr"/>
           <a:lstStyle/>
           <a:p>
-            <a:pPr algn="ctr" indent="0" marL="0">
+            <a:pPr marL="0" indent="0" algn="ctr">
               <a:buNone/>
             </a:pPr>
             <a:r>
@@ -3983,7 +4858,7 @@
         </p:nvSpPr>
         <p:spPr>
           <a:xfrm>
-            <a:off x="8842248" y="3739896"/>
+            <a:off x="8853971" y="3816565"/>
             <a:ext cx="1234440" cy="310896"/>
           </a:xfrm>
           <a:prstGeom prst="rect">
@@ -3998,7 +4873,7 @@
           </a:bodyPr>
           <a:lstStyle/>
           <a:p>
-            <a:pPr algn="l" indent="0" marL="0">
+            <a:pPr marL="0" indent="0" algn="l">
               <a:buNone/>
             </a:pPr>
             <a:r>
@@ -4021,22 +4896,38 @@
         </p:nvSpPr>
         <p:spPr>
           <a:xfrm>
-            <a:off x="10030968" y="3913632"/>
+            <a:off x="9939059" y="3913632"/>
             <a:ext cx="256032" cy="0"/>
           </a:xfrm>
           <a:prstGeom prst="line">
             <a:avLst/>
           </a:prstGeom>
           <a:noFill/>
-          <a:ln w="15240">
+          <a:ln w="57150">
             <a:solidFill>
-              <a:srgbClr val="BFB8AF"/>
+              <a:schemeClr val="tx1"/>
             </a:solidFill>
             <a:prstDash val="solid"/>
             <a:headEnd type="none"/>
             <a:tailEnd type="triangle"/>
           </a:ln>
         </p:spPr>
+        <p:txBody>
+          <a:bodyPr/>
+          <a:lstStyle/>
+          <a:p>
+            <a:endParaRPr lang="es-MX">
+              <a:ln>
+                <a:solidFill>
+                  <a:sysClr val="windowText" lastClr="000000"/>
+                </a:solidFill>
+              </a:ln>
+              <a:highlight>
+                <a:srgbClr val="000000"/>
+              </a:highlight>
+            </a:endParaRPr>
+          </a:p>
+        </p:txBody>
       </p:sp>
       <p:sp>
         <p:nvSpPr>
@@ -4065,7 +4956,7 @@
           <a:bodyPr wrap="square" lIns="0" tIns="0" rIns="0" bIns="0" rtlCol="0" anchor="ctr"/>
           <a:lstStyle/>
           <a:p>
-            <a:pPr algn="ctr" indent="0" marL="0">
+            <a:pPr marL="0" indent="0" algn="ctr">
               <a:buNone/>
             </a:pPr>
             <a:r>
@@ -4088,7 +4979,7 @@
         </p:nvSpPr>
         <p:spPr>
           <a:xfrm>
-            <a:off x="10762488" y="3739896"/>
+            <a:off x="10762488" y="3803904"/>
             <a:ext cx="1234440" cy="310896"/>
           </a:xfrm>
           <a:prstGeom prst="rect">
@@ -4103,7 +4994,7 @@
           </a:bodyPr>
           <a:lstStyle/>
           <a:p>
-            <a:pPr algn="l" indent="0" marL="0">
+            <a:pPr marL="0" indent="0" algn="l">
               <a:buNone/>
             </a:pPr>
             <a:r>
@@ -4139,18 +5030,18 @@
           <a:bodyPr wrap="square" lIns="0" tIns="0" rIns="0" bIns="0" rtlCol="0" anchor="ctr"/>
           <a:lstStyle/>
           <a:p>
-            <a:pPr indent="0" marL="0">
-              <a:buNone/>
-            </a:pPr>
-            <a:r>
-              <a:rPr lang="en-US" sz="800" b="1" dirty="0">
+            <a:pPr marL="0" indent="0">
+              <a:buNone/>
+            </a:pPr>
+            <a:r>
+              <a:rPr lang="en-US" b="1" dirty="0">
                 <a:solidFill>
                   <a:srgbClr val="059669"/>
                 </a:solidFill>
               </a:rPr>
-              <a:t>CIERRE PARA LA EVALUACIÓN</a:t>
-            </a:r>
-            <a:endParaRPr lang="en-US" sz="800" dirty="0"/>
+              <a:t>CIERRE</a:t>
+            </a:r>
+            <a:endParaRPr lang="en-US" dirty="0"/>
           </a:p>
         </p:txBody>
       </p:sp>
@@ -4177,7 +5068,7 @@
           </a:bodyPr>
           <a:lstStyle/>
           <a:p>
-            <a:pPr indent="0" marL="0">
+            <a:pPr marL="0" indent="0">
               <a:buNone/>
             </a:pPr>
             <a:r>
@@ -4215,7 +5106,7 @@
           </a:bodyPr>
           <a:lstStyle/>
           <a:p>
-            <a:pPr indent="0" marL="0">
+            <a:pPr marL="0" indent="0">
               <a:buNone/>
             </a:pPr>
             <a:r>
@@ -4253,7 +5144,7 @@
           </a:bodyPr>
           <a:lstStyle/>
           <a:p>
-            <a:pPr indent="0" marL="0">
+            <a:pPr marL="0" indent="0">
               <a:buNone/>
             </a:pPr>
             <a:r>
@@ -4291,7 +5182,7 @@
           </a:bodyPr>
           <a:lstStyle/>
           <a:p>
-            <a:pPr algn="l" indent="0" marL="0">
+            <a:pPr marL="0" indent="0" algn="l">
               <a:buNone/>
             </a:pPr>
             <a:r>
@@ -4322,6 +5213,7 @@
         <a:solidFill>
           <a:srgbClr val="F4F1EC"/>
         </a:solidFill>
+        <a:effectLst/>
       </p:bgPr>
     </p:bg>
     <p:spTree>
@@ -4365,7 +5257,7 @@
           <a:bodyPr wrap="square" lIns="254" tIns="254" rIns="254" bIns="254" rtlCol="0" anchor="ctr"/>
           <a:lstStyle/>
           <a:p>
-            <a:pPr algn="ctr" indent="0" marL="0">
+            <a:pPr marL="0" indent="0" algn="ctr">
               <a:buNone/>
             </a:pPr>
             <a:r>
@@ -4404,7 +5296,7 @@
           <a:bodyPr wrap="square" lIns="0" tIns="0" rIns="0" bIns="0" rtlCol="0" anchor="ctr"/>
           <a:lstStyle/>
           <a:p>
-            <a:pPr indent="0" marL="0">
+            <a:pPr marL="0" indent="0">
               <a:buNone/>
             </a:pPr>
             <a:r>
@@ -4443,7 +5335,7 @@
           <a:bodyPr wrap="square" lIns="0" tIns="0" rIns="0" bIns="0" rtlCol="0" anchor="ctr"/>
           <a:lstStyle/>
           <a:p>
-            <a:pPr indent="0" marL="0">
+            <a:pPr marL="0" indent="0">
               <a:buNone/>
             </a:pPr>
             <a:r>
@@ -4483,6 +5375,13 @@
             <a:prstDash val="solid"/>
           </a:ln>
         </p:spPr>
+        <p:txBody>
+          <a:bodyPr/>
+          <a:lstStyle/>
+          <a:p>
+            <a:endParaRPr lang="es-MX"/>
+          </a:p>
+        </p:txBody>
       </p:sp>
       <p:sp>
         <p:nvSpPr>
@@ -4505,7 +5404,7 @@
           <a:bodyPr wrap="square" lIns="0" tIns="0" rIns="0" bIns="0" rtlCol="0" anchor="ctr"/>
           <a:lstStyle/>
           <a:p>
-            <a:pPr indent="0" marL="0">
+            <a:pPr marL="0" indent="0">
               <a:buNone/>
             </a:pPr>
             <a:r>
@@ -4541,7 +5440,7 @@
           <a:bodyPr wrap="square" lIns="0" tIns="0" rIns="0" bIns="0" rtlCol="0" anchor="ctr"/>
           <a:lstStyle/>
           <a:p>
-            <a:pPr algn="r" indent="0" marL="0">
+            <a:pPr marL="0" indent="0" algn="r">
               <a:buNone/>
             </a:pPr>
             <a:r>
@@ -4565,7 +5464,7 @@
         <p:spPr>
           <a:xfrm>
             <a:off x="548640" y="1170432"/>
-            <a:ext cx="5029200" cy="685800"/>
+            <a:ext cx="10852052" cy="685800"/>
           </a:xfrm>
           <a:prstGeom prst="rect">
             <a:avLst/>
@@ -4579,7 +5478,7 @@
           </a:bodyPr>
           <a:lstStyle/>
           <a:p>
-            <a:pPr algn="l" indent="0" marL="0">
+            <a:pPr marL="0" indent="0" algn="l">
               <a:buNone/>
             </a:pPr>
             <a:r>
@@ -4605,7 +5504,7 @@
             <a:off x="594360" y="2148840"/>
             <a:ext cx="3383280" cy="1234440"/>
           </a:xfrm>
-          <a:prstGeom prst="rect">
+          <a:prstGeom prst="roundRect">
             <a:avLst/>
           </a:prstGeom>
           <a:solidFill>
@@ -4623,11 +5522,11 @@
           </a:bodyPr>
           <a:lstStyle/>
           <a:p>
-            <a:pPr indent="0" marL="0">
-              <a:buNone/>
-            </a:pPr>
-            <a:r>
-              <a:rPr lang="en-US" sz="1220" b="1" dirty="0">
+            <a:pPr marL="0" indent="0" algn="ctr">
+              <a:buNone/>
+            </a:pPr>
+            <a:r>
+              <a:rPr lang="en-US" sz="1600" b="1" dirty="0">
                 <a:solidFill>
                   <a:srgbClr val="1F2937"/>
                 </a:solidFill>
@@ -4637,17 +5536,14 @@
               </a:rPr>
               <a:t>Dolor operativo</a:t>
             </a:r>
-            <a:pPr indent="0" marL="0">
-              <a:buNone/>
-            </a:pPr>
-            <a:endParaRPr lang="en-US" sz="1220" dirty="0"/>
-          </a:p>
-          <a:p>
-            <a:pPr indent="0" marL="0">
-              <a:buNone/>
-            </a:pPr>
-            <a:r>
-              <a:rPr lang="en-US" sz="1220" dirty="0">
+            <a:endParaRPr lang="en-US" sz="1600" dirty="0"/>
+          </a:p>
+          <a:p>
+            <a:pPr marL="0" indent="0" algn="ctr">
+              <a:buNone/>
+            </a:pPr>
+            <a:r>
+              <a:rPr lang="en-US" sz="1600" dirty="0">
                 <a:solidFill>
                   <a:srgbClr val="1F2937"/>
                 </a:solidFill>
@@ -4657,32 +5553,9 @@
               </a:rPr>
               <a:t>Información técnica dispersa, dependencia del conocimiento experto y registros incompletos.</a:t>
             </a:r>
-            <a:endParaRPr lang="en-US" sz="1220" dirty="0"/>
-          </a:p>
-        </p:txBody>
-      </p:sp>
-      <p:sp>
-        <p:nvSpPr>
-          <p:cNvPr id="10" name="Shape 8"/>
-          <p:cNvSpPr/>
-          <p:nvPr/>
-        </p:nvSpPr>
-        <p:spPr>
-          <a:xfrm>
-            <a:off x="594360" y="3346704"/>
-            <a:ext cx="3383280" cy="0"/>
-          </a:xfrm>
-          <a:prstGeom prst="line">
-            <a:avLst/>
-          </a:prstGeom>
-          <a:noFill/>
-          <a:ln w="25400">
-            <a:solidFill>
-              <a:srgbClr val="C62828"/>
-            </a:solidFill>
-            <a:prstDash val="solid"/>
-          </a:ln>
-        </p:spPr>
+            <a:endParaRPr lang="en-US" sz="1600" dirty="0"/>
+          </a:p>
+        </p:txBody>
       </p:sp>
       <p:sp>
         <p:nvSpPr>
@@ -4695,7 +5568,7 @@
             <a:off x="4389120" y="2148840"/>
             <a:ext cx="3383280" cy="1234440"/>
           </a:xfrm>
-          <a:prstGeom prst="rect">
+          <a:prstGeom prst="roundRect">
             <a:avLst/>
           </a:prstGeom>
           <a:solidFill>
@@ -4713,11 +5586,11 @@
           </a:bodyPr>
           <a:lstStyle/>
           <a:p>
-            <a:pPr indent="0" marL="0">
-              <a:buNone/>
-            </a:pPr>
-            <a:r>
-              <a:rPr lang="en-US" sz="1220" b="1" dirty="0">
+            <a:pPr marL="0" indent="0" algn="ctr">
+              <a:buNone/>
+            </a:pPr>
+            <a:r>
+              <a:rPr lang="en-US" sz="1600" b="1" dirty="0">
                 <a:solidFill>
                   <a:srgbClr val="1F2937"/>
                 </a:solidFill>
@@ -4727,17 +5600,14 @@
               </a:rPr>
               <a:t>Impacto</a:t>
             </a:r>
-            <a:pPr indent="0" marL="0">
-              <a:buNone/>
-            </a:pPr>
-            <a:endParaRPr lang="en-US" sz="1220" dirty="0"/>
-          </a:p>
-          <a:p>
-            <a:pPr indent="0" marL="0">
-              <a:buNone/>
-            </a:pPr>
-            <a:r>
-              <a:rPr lang="en-US" sz="1220" dirty="0">
+            <a:endParaRPr lang="en-US" sz="1600" dirty="0"/>
+          </a:p>
+          <a:p>
+            <a:pPr marL="0" indent="0" algn="ctr">
+              <a:buNone/>
+            </a:pPr>
+            <a:r>
+              <a:rPr lang="en-US" sz="1600" dirty="0">
                 <a:solidFill>
                   <a:srgbClr val="1F2937"/>
                 </a:solidFill>
@@ -4747,32 +5617,9 @@
               </a:rPr>
               <a:t>Detenciones, reprocesos, tiempos muertos, baja disponibilidad y decisiones con datos fragmentados.</a:t>
             </a:r>
-            <a:endParaRPr lang="en-US" sz="1220" dirty="0"/>
-          </a:p>
-        </p:txBody>
-      </p:sp>
-      <p:sp>
-        <p:nvSpPr>
-          <p:cNvPr id="12" name="Shape 10"/>
-          <p:cNvSpPr/>
-          <p:nvPr/>
-        </p:nvSpPr>
-        <p:spPr>
-          <a:xfrm>
-            <a:off x="4389120" y="3346704"/>
-            <a:ext cx="3383280" cy="0"/>
-          </a:xfrm>
-          <a:prstGeom prst="line">
-            <a:avLst/>
-          </a:prstGeom>
-          <a:noFill/>
-          <a:ln w="25400">
-            <a:solidFill>
-              <a:srgbClr val="E07800"/>
-            </a:solidFill>
-            <a:prstDash val="solid"/>
-          </a:ln>
-        </p:spPr>
+            <a:endParaRPr lang="en-US" sz="1600" dirty="0"/>
+          </a:p>
+        </p:txBody>
       </p:sp>
       <p:sp>
         <p:nvSpPr>
@@ -4785,7 +5632,7 @@
             <a:off x="8183880" y="2148840"/>
             <a:ext cx="3383280" cy="1234440"/>
           </a:xfrm>
-          <a:prstGeom prst="rect">
+          <a:prstGeom prst="roundRect">
             <a:avLst/>
           </a:prstGeom>
           <a:solidFill>
@@ -4803,11 +5650,11 @@
           </a:bodyPr>
           <a:lstStyle/>
           <a:p>
-            <a:pPr indent="0" marL="0">
-              <a:buNone/>
-            </a:pPr>
-            <a:r>
-              <a:rPr lang="en-US" sz="1220" b="1" dirty="0">
+            <a:pPr marL="0" indent="0" algn="ctr">
+              <a:buNone/>
+            </a:pPr>
+            <a:r>
+              <a:rPr lang="en-US" sz="1600" b="1" dirty="0">
                 <a:solidFill>
                   <a:srgbClr val="1F2937"/>
                 </a:solidFill>
@@ -4817,17 +5664,14 @@
               </a:rPr>
               <a:t>Oportunidad TIC</a:t>
             </a:r>
-            <a:pPr indent="0" marL="0">
-              <a:buNone/>
-            </a:pPr>
-            <a:endParaRPr lang="en-US" sz="1220" dirty="0"/>
-          </a:p>
-          <a:p>
-            <a:pPr indent="0" marL="0">
-              <a:buNone/>
-            </a:pPr>
-            <a:r>
-              <a:rPr lang="en-US" sz="1220" dirty="0">
+            <a:endParaRPr lang="en-US" sz="1600" dirty="0"/>
+          </a:p>
+          <a:p>
+            <a:pPr marL="0" indent="0" algn="ctr">
+              <a:buNone/>
+            </a:pPr>
+            <a:r>
+              <a:rPr lang="en-US" sz="1600" dirty="0">
                 <a:solidFill>
                   <a:srgbClr val="1F2937"/>
                 </a:solidFill>
@@ -4837,32 +5681,9 @@
               </a:rPr>
               <a:t>Centralizar OT, documentación, IA, KPIs, topología y auditoría en una plataforma integrada por APIs.</a:t>
             </a:r>
-            <a:endParaRPr lang="en-US" sz="1220" dirty="0"/>
-          </a:p>
-        </p:txBody>
-      </p:sp>
-      <p:sp>
-        <p:nvSpPr>
-          <p:cNvPr id="14" name="Shape 12"/>
-          <p:cNvSpPr/>
-          <p:nvPr/>
-        </p:nvSpPr>
-        <p:spPr>
-          <a:xfrm>
-            <a:off x="8183880" y="3346704"/>
-            <a:ext cx="3383280" cy="0"/>
-          </a:xfrm>
-          <a:prstGeom prst="line">
-            <a:avLst/>
-          </a:prstGeom>
-          <a:noFill/>
-          <a:ln w="25400">
-            <a:solidFill>
-              <a:srgbClr val="2563EB"/>
-            </a:solidFill>
-            <a:prstDash val="solid"/>
-          </a:ln>
-        </p:spPr>
+            <a:endParaRPr lang="en-US" sz="1600" dirty="0"/>
+          </a:p>
+        </p:txBody>
       </p:sp>
       <p:sp>
         <p:nvSpPr>
@@ -4885,18 +5706,18 @@
           <a:bodyPr wrap="square" lIns="0" tIns="0" rIns="0" bIns="0" rtlCol="0" anchor="ctr"/>
           <a:lstStyle/>
           <a:p>
-            <a:pPr indent="0" marL="0">
-              <a:buNone/>
-            </a:pPr>
-            <a:r>
-              <a:rPr lang="en-US" sz="800" b="1" dirty="0">
+            <a:pPr marL="0" indent="0">
+              <a:buNone/>
+            </a:pPr>
+            <a:r>
+              <a:rPr lang="en-US" sz="1600" b="1" dirty="0">
                 <a:solidFill>
                   <a:srgbClr val="E07800"/>
                 </a:solidFill>
               </a:rPr>
               <a:t>POR QUÉ ES I+D+I</a:t>
             </a:r>
-            <a:endParaRPr lang="en-US" sz="800" dirty="0"/>
+            <a:endParaRPr lang="en-US" sz="1600" dirty="0"/>
           </a:p>
         </p:txBody>
       </p:sp>
@@ -4923,7 +5744,7 @@
           </a:bodyPr>
           <a:lstStyle/>
           <a:p>
-            <a:pPr indent="0" marL="0">
+            <a:pPr marL="0" indent="0">
               <a:buNone/>
             </a:pPr>
             <a:r>
@@ -4961,7 +5782,7 @@
           </a:bodyPr>
           <a:lstStyle/>
           <a:p>
-            <a:pPr indent="0" marL="0">
+            <a:pPr marL="0" indent="0">
               <a:buNone/>
             </a:pPr>
             <a:r>
@@ -4999,7 +5820,7 @@
           </a:bodyPr>
           <a:lstStyle/>
           <a:p>
-            <a:pPr indent="0" marL="0">
+            <a:pPr marL="0" indent="0">
               <a:buNone/>
             </a:pPr>
             <a:r>
@@ -5035,18 +5856,18 @@
           <a:bodyPr wrap="square" lIns="0" tIns="0" rIns="0" bIns="0" rtlCol="0" anchor="ctr"/>
           <a:lstStyle/>
           <a:p>
-            <a:pPr indent="0" marL="0">
-              <a:buNone/>
-            </a:pPr>
-            <a:r>
-              <a:rPr lang="en-US" sz="800" b="1" dirty="0">
+            <a:pPr marL="0" indent="0">
+              <a:buNone/>
+            </a:pPr>
+            <a:r>
+              <a:rPr lang="en-US" sz="1600" b="1" dirty="0">
                 <a:solidFill>
                   <a:srgbClr val="059669"/>
                 </a:solidFill>
               </a:rPr>
               <a:t>MENSAJE CLAVE</a:t>
             </a:r>
-            <a:endParaRPr lang="en-US" sz="800" dirty="0"/>
+            <a:endParaRPr lang="en-US" sz="1600" dirty="0"/>
           </a:p>
         </p:txBody>
       </p:sp>
@@ -5073,7 +5894,7 @@
           </a:bodyPr>
           <a:lstStyle/>
           <a:p>
-            <a:pPr algn="l" indent="0" marL="0">
+            <a:pPr marL="0" indent="0" algn="l">
               <a:buNone/>
             </a:pPr>
             <a:r>
@@ -5104,6 +5925,7 @@
         <a:solidFill>
           <a:srgbClr val="F4F1EC"/>
         </a:solidFill>
+        <a:effectLst/>
       </p:bgPr>
     </p:bg>
     <p:spTree>
@@ -5147,7 +5969,7 @@
           <a:bodyPr wrap="square" lIns="254" tIns="254" rIns="254" bIns="254" rtlCol="0" anchor="ctr"/>
           <a:lstStyle/>
           <a:p>
-            <a:pPr algn="ctr" indent="0" marL="0">
+            <a:pPr marL="0" indent="0" algn="ctr">
               <a:buNone/>
             </a:pPr>
             <a:r>
@@ -5186,7 +6008,7 @@
           <a:bodyPr wrap="square" lIns="0" tIns="0" rIns="0" bIns="0" rtlCol="0" anchor="ctr"/>
           <a:lstStyle/>
           <a:p>
-            <a:pPr indent="0" marL="0">
+            <a:pPr marL="0" indent="0">
               <a:buNone/>
             </a:pPr>
             <a:r>
@@ -5225,7 +6047,7 @@
           <a:bodyPr wrap="square" lIns="0" tIns="0" rIns="0" bIns="0" rtlCol="0" anchor="ctr"/>
           <a:lstStyle/>
           <a:p>
-            <a:pPr indent="0" marL="0">
+            <a:pPr marL="0" indent="0">
               <a:buNone/>
             </a:pPr>
             <a:r>
@@ -5265,6 +6087,13 @@
             <a:prstDash val="solid"/>
           </a:ln>
         </p:spPr>
+        <p:txBody>
+          <a:bodyPr/>
+          <a:lstStyle/>
+          <a:p>
+            <a:endParaRPr lang="es-MX"/>
+          </a:p>
+        </p:txBody>
       </p:sp>
       <p:sp>
         <p:nvSpPr>
@@ -5287,7 +6116,7 @@
           <a:bodyPr wrap="square" lIns="0" tIns="0" rIns="0" bIns="0" rtlCol="0" anchor="ctr"/>
           <a:lstStyle/>
           <a:p>
-            <a:pPr indent="0" marL="0">
+            <a:pPr marL="0" indent="0">
               <a:buNone/>
             </a:pPr>
             <a:r>
@@ -5323,7 +6152,7 @@
           <a:bodyPr wrap="square" lIns="0" tIns="0" rIns="0" bIns="0" rtlCol="0" anchor="ctr"/>
           <a:lstStyle/>
           <a:p>
-            <a:pPr algn="r" indent="0" marL="0">
+            <a:pPr marL="0" indent="0" algn="r">
               <a:buNone/>
             </a:pPr>
             <a:r>
@@ -5348,6 +6177,44 @@
           <a:xfrm>
             <a:off x="548640" y="1097280"/>
             <a:ext cx="3291840" cy="566928"/>
+          </a:xfrm>
+          <a:prstGeom prst="rect">
+            <a:avLst/>
+          </a:prstGeom>
+          <a:noFill/>
+          <a:ln/>
+        </p:spPr>
+        <p:txBody>
+          <a:bodyPr wrap="square" lIns="254" tIns="254" rIns="254" bIns="254" rtlCol="0" anchor="t">
+            <a:normAutofit fontScale="92500" lnSpcReduction="20000"/>
+          </a:bodyPr>
+          <a:lstStyle/>
+          <a:p>
+            <a:pPr marL="0" indent="0" algn="l">
+              <a:buNone/>
+            </a:pPr>
+            <a:r>
+              <a:rPr lang="en-US" sz="1600" b="1" dirty="0">
+                <a:solidFill>
+                  <a:srgbClr val="1F2937"/>
+                </a:solidFill>
+              </a:rPr>
+              <a:t>Antes de delimitar el Capstone, se presenta BARB como un proyecto completo de Ingeniería en Informática.</a:t>
+            </a:r>
+            <a:endParaRPr lang="en-US" sz="1600" dirty="0"/>
+          </a:p>
+        </p:txBody>
+      </p:sp>
+      <p:sp>
+        <p:nvSpPr>
+          <p:cNvPr id="19" name="Text 15"/>
+          <p:cNvSpPr/>
+          <p:nvPr/>
+        </p:nvSpPr>
+        <p:spPr>
+          <a:xfrm>
+            <a:off x="3931920" y="5925312"/>
+            <a:ext cx="7635240" cy="201168"/>
           </a:xfrm>
           <a:prstGeom prst="rect">
             <a:avLst/>
@@ -5361,398 +6228,1277 @@
           </a:bodyPr>
           <a:lstStyle/>
           <a:p>
-            <a:pPr algn="l" indent="0" marL="0">
-              <a:buNone/>
-            </a:pPr>
-            <a:r>
-              <a:rPr lang="en-US" sz="1600" b="1" dirty="0">
-                <a:solidFill>
-                  <a:srgbClr val="1F2937"/>
-                </a:solidFill>
-              </a:rPr>
-              <a:t>Antes de delimitar el Capstone, se presenta BARB como un proyecto completo de Ingeniería en Informática.</a:t>
-            </a:r>
-            <a:endParaRPr lang="en-US" sz="1600" dirty="0"/>
-          </a:p>
-        </p:txBody>
-      </p:sp>
-      <p:sp>
-        <p:nvSpPr>
-          <p:cNvPr id="9" name="Text 7"/>
-          <p:cNvSpPr/>
-          <p:nvPr/>
-        </p:nvSpPr>
-        <p:spPr>
-          <a:xfrm>
-            <a:off x="594360" y="1874520"/>
-            <a:ext cx="2743200" cy="868680"/>
-          </a:xfrm>
-          <a:prstGeom prst="rect">
-            <a:avLst/>
+            <a:pPr marL="0" indent="0" algn="ctr">
+              <a:buNone/>
+            </a:pPr>
+            <a:r>
+              <a:rPr lang="en-US" sz="950" i="1" dirty="0">
+                <a:solidFill>
+                  <a:srgbClr val="6B7280"/>
+                </a:solidFill>
+              </a:rPr>
+              <a:t>Menú principal y topología de planta actuales (AS-IS)</a:t>
+            </a:r>
+            <a:endParaRPr lang="en-US" sz="950" dirty="0"/>
+          </a:p>
+        </p:txBody>
+      </p:sp>
+      <p:sp>
+        <p:nvSpPr>
+          <p:cNvPr id="24" name="Shape 3">
+            <a:extLst>
+              <a:ext uri="{FF2B5EF4-FFF2-40B4-BE49-F238E27FC236}">
+                <a16:creationId xmlns:a16="http://schemas.microsoft.com/office/drawing/2014/main" id="{7078551F-C3AB-3C84-4D08-6A73FD6A5A81}"/>
+              </a:ext>
+            </a:extLst>
+          </p:cNvPr>
+          <p:cNvSpPr/>
+          <p:nvPr/>
+        </p:nvSpPr>
+        <p:spPr>
+          <a:xfrm>
+            <a:off x="548640" y="1778508"/>
+            <a:ext cx="2926080" cy="960120"/>
+          </a:xfrm>
+          <a:prstGeom prst="roundRect">
+            <a:avLst>
+              <a:gd name="adj" fmla="val 7619"/>
+            </a:avLst>
           </a:prstGeom>
           <a:solidFill>
-            <a:srgbClr val="FFFFFF"/>
+            <a:srgbClr val="F3F7FB"/>
           </a:solidFill>
           <a:ln w="12700">
             <a:solidFill>
-              <a:srgbClr val="D9D3C9"/>
-            </a:solidFill>
-          </a:ln>
-        </p:spPr>
-        <p:txBody>
-          <a:bodyPr wrap="square" lIns="1524" tIns="1524" rIns="1524" bIns="1524" rtlCol="0" anchor="t">
-            <a:normAutofit/>
-          </a:bodyPr>
-          <a:lstStyle/>
-          <a:p>
-            <a:pPr indent="0" marL="0">
-              <a:buNone/>
-            </a:pPr>
-            <a:r>
-              <a:rPr lang="en-US" sz="1220" b="1" dirty="0">
-                <a:solidFill>
-                  <a:srgbClr val="1F2937"/>
-                </a:solidFill>
-                <a:latin typeface="Calibri" pitchFamily="34" charset="0"/>
-                <a:ea typeface="Calibri" pitchFamily="34" charset="-122"/>
-                <a:cs typeface="Calibri" pitchFamily="34" charset="-120"/>
-              </a:rPr>
-              <a:t>Asistente documental</a:t>
-            </a:r>
-            <a:pPr indent="0" marL="0">
-              <a:buNone/>
-            </a:pPr>
-            <a:endParaRPr lang="en-US" sz="1220" dirty="0"/>
-          </a:p>
-          <a:p>
-            <a:pPr indent="0" marL="0">
-              <a:buNone/>
-            </a:pPr>
-            <a:r>
-              <a:rPr lang="en-US" sz="1220" dirty="0">
-                <a:solidFill>
-                  <a:srgbClr val="1F2937"/>
-                </a:solidFill>
-                <a:latin typeface="Calibri" pitchFamily="34" charset="0"/>
-                <a:ea typeface="Calibri" pitchFamily="34" charset="-122"/>
-                <a:cs typeface="Calibri" pitchFamily="34" charset="-120"/>
-              </a:rPr>
-              <a:t>Consulta manuales y procedimientos técnicos.</a:t>
-            </a:r>
-            <a:endParaRPr lang="en-US" sz="1220" dirty="0"/>
-          </a:p>
-        </p:txBody>
-      </p:sp>
-      <p:sp>
-        <p:nvSpPr>
-          <p:cNvPr id="10" name="Shape 8"/>
-          <p:cNvSpPr/>
-          <p:nvPr/>
-        </p:nvSpPr>
-        <p:spPr>
-          <a:xfrm>
-            <a:off x="594360" y="2706624"/>
-            <a:ext cx="2743200" cy="0"/>
-          </a:xfrm>
-          <a:prstGeom prst="line">
-            <a:avLst/>
-          </a:prstGeom>
-          <a:noFill/>
-          <a:ln w="25400">
-            <a:solidFill>
-              <a:srgbClr val="2563EB"/>
+              <a:srgbClr val="D0D7E2"/>
             </a:solidFill>
             <a:prstDash val="solid"/>
           </a:ln>
         </p:spPr>
-      </p:sp>
-      <p:sp>
-        <p:nvSpPr>
-          <p:cNvPr id="11" name="Text 9"/>
-          <p:cNvSpPr/>
-          <p:nvPr/>
-        </p:nvSpPr>
-        <p:spPr>
-          <a:xfrm>
-            <a:off x="594360" y="2971800"/>
-            <a:ext cx="2743200" cy="868680"/>
-          </a:xfrm>
-          <a:prstGeom prst="rect">
-            <a:avLst/>
+        <p:txBody>
+          <a:bodyPr/>
+          <a:lstStyle/>
+          <a:p>
+            <a:endParaRPr lang="es-MX"/>
+          </a:p>
+        </p:txBody>
+      </p:sp>
+      <p:sp>
+        <p:nvSpPr>
+          <p:cNvPr id="25" name="Text 4">
+            <a:extLst>
+              <a:ext uri="{FF2B5EF4-FFF2-40B4-BE49-F238E27FC236}">
+                <a16:creationId xmlns:a16="http://schemas.microsoft.com/office/drawing/2014/main" id="{6E25E900-8092-71C8-C73A-09A5E4AF48D5}"/>
+              </a:ext>
+            </a:extLst>
+          </p:cNvPr>
+          <p:cNvSpPr/>
+          <p:nvPr/>
+        </p:nvSpPr>
+        <p:spPr>
+          <a:xfrm>
+            <a:off x="713232" y="1924812"/>
+            <a:ext cx="2596896" cy="237744"/>
+          </a:xfrm>
+          <a:prstGeom prst="rect">
+            <a:avLst/>
+          </a:prstGeom>
+          <a:noFill/>
+          <a:ln/>
+        </p:spPr>
+        <p:txBody>
+          <a:bodyPr wrap="square" lIns="0" tIns="0" rIns="0" bIns="0" rtlCol="0" anchor="ctr"/>
+          <a:lstStyle>
+            <a:lvl1pPr marL="0" algn="l" defTabSz="914400" rtl="0" eaLnBrk="1" latinLnBrk="0" hangingPunct="1">
+              <a:defRPr sz="1800" kern="1200">
+                <a:solidFill>
+                  <a:schemeClr val="tx1"/>
+                </a:solidFill>
+                <a:latin typeface="+mn-lt"/>
+                <a:ea typeface="+mn-ea"/>
+                <a:cs typeface="+mn-cs"/>
+              </a:defRPr>
+            </a:lvl1pPr>
+            <a:lvl2pPr marL="457200" algn="l" defTabSz="914400" rtl="0" eaLnBrk="1" latinLnBrk="0" hangingPunct="1">
+              <a:defRPr sz="1800" kern="1200">
+                <a:solidFill>
+                  <a:schemeClr val="tx1"/>
+                </a:solidFill>
+                <a:latin typeface="+mn-lt"/>
+                <a:ea typeface="+mn-ea"/>
+                <a:cs typeface="+mn-cs"/>
+              </a:defRPr>
+            </a:lvl2pPr>
+            <a:lvl3pPr marL="914400" algn="l" defTabSz="914400" rtl="0" eaLnBrk="1" latinLnBrk="0" hangingPunct="1">
+              <a:defRPr sz="1800" kern="1200">
+                <a:solidFill>
+                  <a:schemeClr val="tx1"/>
+                </a:solidFill>
+                <a:latin typeface="+mn-lt"/>
+                <a:ea typeface="+mn-ea"/>
+                <a:cs typeface="+mn-cs"/>
+              </a:defRPr>
+            </a:lvl3pPr>
+            <a:lvl4pPr marL="1371600" algn="l" defTabSz="914400" rtl="0" eaLnBrk="1" latinLnBrk="0" hangingPunct="1">
+              <a:defRPr sz="1800" kern="1200">
+                <a:solidFill>
+                  <a:schemeClr val="tx1"/>
+                </a:solidFill>
+                <a:latin typeface="+mn-lt"/>
+                <a:ea typeface="+mn-ea"/>
+                <a:cs typeface="+mn-cs"/>
+              </a:defRPr>
+            </a:lvl4pPr>
+            <a:lvl5pPr marL="1828800" algn="l" defTabSz="914400" rtl="0" eaLnBrk="1" latinLnBrk="0" hangingPunct="1">
+              <a:defRPr sz="1800" kern="1200">
+                <a:solidFill>
+                  <a:schemeClr val="tx1"/>
+                </a:solidFill>
+                <a:latin typeface="+mn-lt"/>
+                <a:ea typeface="+mn-ea"/>
+                <a:cs typeface="+mn-cs"/>
+              </a:defRPr>
+            </a:lvl5pPr>
+            <a:lvl6pPr marL="2286000" algn="l" defTabSz="914400" rtl="0" eaLnBrk="1" latinLnBrk="0" hangingPunct="1">
+              <a:defRPr sz="1800" kern="1200">
+                <a:solidFill>
+                  <a:schemeClr val="tx1"/>
+                </a:solidFill>
+                <a:latin typeface="+mn-lt"/>
+                <a:ea typeface="+mn-ea"/>
+                <a:cs typeface="+mn-cs"/>
+              </a:defRPr>
+            </a:lvl6pPr>
+            <a:lvl7pPr marL="2743200" algn="l" defTabSz="914400" rtl="0" eaLnBrk="1" latinLnBrk="0" hangingPunct="1">
+              <a:defRPr sz="1800" kern="1200">
+                <a:solidFill>
+                  <a:schemeClr val="tx1"/>
+                </a:solidFill>
+                <a:latin typeface="+mn-lt"/>
+                <a:ea typeface="+mn-ea"/>
+                <a:cs typeface="+mn-cs"/>
+              </a:defRPr>
+            </a:lvl7pPr>
+            <a:lvl8pPr marL="3200400" algn="l" defTabSz="914400" rtl="0" eaLnBrk="1" latinLnBrk="0" hangingPunct="1">
+              <a:defRPr sz="1800" kern="1200">
+                <a:solidFill>
+                  <a:schemeClr val="tx1"/>
+                </a:solidFill>
+                <a:latin typeface="+mn-lt"/>
+                <a:ea typeface="+mn-ea"/>
+                <a:cs typeface="+mn-cs"/>
+              </a:defRPr>
+            </a:lvl8pPr>
+            <a:lvl9pPr marL="3657600" algn="l" defTabSz="914400" rtl="0" eaLnBrk="1" latinLnBrk="0" hangingPunct="1">
+              <a:defRPr sz="1800" kern="1200">
+                <a:solidFill>
+                  <a:schemeClr val="tx1"/>
+                </a:solidFill>
+                <a:latin typeface="+mn-lt"/>
+                <a:ea typeface="+mn-ea"/>
+                <a:cs typeface="+mn-cs"/>
+              </a:defRPr>
+            </a:lvl9pPr>
+          </a:lstStyle>
+          <a:p>
+            <a:pPr marL="0" indent="0">
+              <a:buNone/>
+            </a:pPr>
+            <a:r>
+              <a:rPr lang="en-US" sz="1250" b="1" dirty="0">
+                <a:solidFill>
+                  <a:srgbClr val="17365D"/>
+                </a:solidFill>
+              </a:rPr>
+              <a:t>Asistente documental</a:t>
+            </a:r>
+            <a:endParaRPr lang="en-US" sz="1250" dirty="0"/>
+          </a:p>
+        </p:txBody>
+      </p:sp>
+      <p:sp>
+        <p:nvSpPr>
+          <p:cNvPr id="26" name="Text 5">
+            <a:extLst>
+              <a:ext uri="{FF2B5EF4-FFF2-40B4-BE49-F238E27FC236}">
+                <a16:creationId xmlns:a16="http://schemas.microsoft.com/office/drawing/2014/main" id="{EB9C3DA8-40A7-260E-4062-1072A9ADE174}"/>
+              </a:ext>
+            </a:extLst>
+          </p:cNvPr>
+          <p:cNvSpPr/>
+          <p:nvPr/>
+        </p:nvSpPr>
+        <p:spPr>
+          <a:xfrm>
+            <a:off x="713232" y="2263140"/>
+            <a:ext cx="2596896" cy="374904"/>
+          </a:xfrm>
+          <a:prstGeom prst="rect">
+            <a:avLst/>
+          </a:prstGeom>
+          <a:noFill/>
+          <a:ln/>
+        </p:spPr>
+        <p:txBody>
+          <a:bodyPr wrap="square" lIns="254" tIns="254" rIns="254" bIns="254" rtlCol="0" anchor="ctr">
+            <a:normAutofit/>
+          </a:bodyPr>
+          <a:lstStyle>
+            <a:lvl1pPr marL="0" algn="l" defTabSz="914400" rtl="0" eaLnBrk="1" latinLnBrk="0" hangingPunct="1">
+              <a:defRPr sz="1800" kern="1200">
+                <a:solidFill>
+                  <a:schemeClr val="tx1"/>
+                </a:solidFill>
+                <a:latin typeface="+mn-lt"/>
+                <a:ea typeface="+mn-ea"/>
+                <a:cs typeface="+mn-cs"/>
+              </a:defRPr>
+            </a:lvl1pPr>
+            <a:lvl2pPr marL="457200" algn="l" defTabSz="914400" rtl="0" eaLnBrk="1" latinLnBrk="0" hangingPunct="1">
+              <a:defRPr sz="1800" kern="1200">
+                <a:solidFill>
+                  <a:schemeClr val="tx1"/>
+                </a:solidFill>
+                <a:latin typeface="+mn-lt"/>
+                <a:ea typeface="+mn-ea"/>
+                <a:cs typeface="+mn-cs"/>
+              </a:defRPr>
+            </a:lvl2pPr>
+            <a:lvl3pPr marL="914400" algn="l" defTabSz="914400" rtl="0" eaLnBrk="1" latinLnBrk="0" hangingPunct="1">
+              <a:defRPr sz="1800" kern="1200">
+                <a:solidFill>
+                  <a:schemeClr val="tx1"/>
+                </a:solidFill>
+                <a:latin typeface="+mn-lt"/>
+                <a:ea typeface="+mn-ea"/>
+                <a:cs typeface="+mn-cs"/>
+              </a:defRPr>
+            </a:lvl3pPr>
+            <a:lvl4pPr marL="1371600" algn="l" defTabSz="914400" rtl="0" eaLnBrk="1" latinLnBrk="0" hangingPunct="1">
+              <a:defRPr sz="1800" kern="1200">
+                <a:solidFill>
+                  <a:schemeClr val="tx1"/>
+                </a:solidFill>
+                <a:latin typeface="+mn-lt"/>
+                <a:ea typeface="+mn-ea"/>
+                <a:cs typeface="+mn-cs"/>
+              </a:defRPr>
+            </a:lvl4pPr>
+            <a:lvl5pPr marL="1828800" algn="l" defTabSz="914400" rtl="0" eaLnBrk="1" latinLnBrk="0" hangingPunct="1">
+              <a:defRPr sz="1800" kern="1200">
+                <a:solidFill>
+                  <a:schemeClr val="tx1"/>
+                </a:solidFill>
+                <a:latin typeface="+mn-lt"/>
+                <a:ea typeface="+mn-ea"/>
+                <a:cs typeface="+mn-cs"/>
+              </a:defRPr>
+            </a:lvl5pPr>
+            <a:lvl6pPr marL="2286000" algn="l" defTabSz="914400" rtl="0" eaLnBrk="1" latinLnBrk="0" hangingPunct="1">
+              <a:defRPr sz="1800" kern="1200">
+                <a:solidFill>
+                  <a:schemeClr val="tx1"/>
+                </a:solidFill>
+                <a:latin typeface="+mn-lt"/>
+                <a:ea typeface="+mn-ea"/>
+                <a:cs typeface="+mn-cs"/>
+              </a:defRPr>
+            </a:lvl6pPr>
+            <a:lvl7pPr marL="2743200" algn="l" defTabSz="914400" rtl="0" eaLnBrk="1" latinLnBrk="0" hangingPunct="1">
+              <a:defRPr sz="1800" kern="1200">
+                <a:solidFill>
+                  <a:schemeClr val="tx1"/>
+                </a:solidFill>
+                <a:latin typeface="+mn-lt"/>
+                <a:ea typeface="+mn-ea"/>
+                <a:cs typeface="+mn-cs"/>
+              </a:defRPr>
+            </a:lvl7pPr>
+            <a:lvl8pPr marL="3200400" algn="l" defTabSz="914400" rtl="0" eaLnBrk="1" latinLnBrk="0" hangingPunct="1">
+              <a:defRPr sz="1800" kern="1200">
+                <a:solidFill>
+                  <a:schemeClr val="tx1"/>
+                </a:solidFill>
+                <a:latin typeface="+mn-lt"/>
+                <a:ea typeface="+mn-ea"/>
+                <a:cs typeface="+mn-cs"/>
+              </a:defRPr>
+            </a:lvl8pPr>
+            <a:lvl9pPr marL="3657600" algn="l" defTabSz="914400" rtl="0" eaLnBrk="1" latinLnBrk="0" hangingPunct="1">
+              <a:defRPr sz="1800" kern="1200">
+                <a:solidFill>
+                  <a:schemeClr val="tx1"/>
+                </a:solidFill>
+                <a:latin typeface="+mn-lt"/>
+                <a:ea typeface="+mn-ea"/>
+                <a:cs typeface="+mn-cs"/>
+              </a:defRPr>
+            </a:lvl9pPr>
+          </a:lstStyle>
+          <a:p>
+            <a:pPr marL="0" indent="0">
+              <a:buNone/>
+            </a:pPr>
+            <a:r>
+              <a:rPr lang="en-US" sz="1020" dirty="0">
+                <a:solidFill>
+                  <a:srgbClr val="111827"/>
+                </a:solidFill>
+              </a:rPr>
+              <a:t>Consulta manuales y procedimientos.</a:t>
+            </a:r>
+            <a:endParaRPr lang="en-US" sz="1020" dirty="0"/>
+          </a:p>
+        </p:txBody>
+      </p:sp>
+      <p:sp>
+        <p:nvSpPr>
+          <p:cNvPr id="27" name="Shape 6">
+            <a:extLst>
+              <a:ext uri="{FF2B5EF4-FFF2-40B4-BE49-F238E27FC236}">
+                <a16:creationId xmlns:a16="http://schemas.microsoft.com/office/drawing/2014/main" id="{591D82F5-DAE5-E0AF-0541-6888EFDD65F7}"/>
+              </a:ext>
+            </a:extLst>
+          </p:cNvPr>
+          <p:cNvSpPr/>
+          <p:nvPr/>
+        </p:nvSpPr>
+        <p:spPr>
+          <a:xfrm>
+            <a:off x="548640" y="2967228"/>
+            <a:ext cx="2926080" cy="960120"/>
+          </a:xfrm>
+          <a:prstGeom prst="roundRect">
+            <a:avLst>
+              <a:gd name="adj" fmla="val 7619"/>
+            </a:avLst>
           </a:prstGeom>
           <a:solidFill>
-            <a:srgbClr val="FFFFFF"/>
+            <a:srgbClr val="F3F7FB"/>
           </a:solidFill>
           <a:ln w="12700">
             <a:solidFill>
-              <a:srgbClr val="D9D3C9"/>
-            </a:solidFill>
-          </a:ln>
-        </p:spPr>
-        <p:txBody>
-          <a:bodyPr wrap="square" lIns="1524" tIns="1524" rIns="1524" bIns="1524" rtlCol="0" anchor="t">
-            <a:normAutofit/>
-          </a:bodyPr>
-          <a:lstStyle/>
-          <a:p>
-            <a:pPr indent="0" marL="0">
-              <a:buNone/>
-            </a:pPr>
-            <a:r>
-              <a:rPr lang="en-US" sz="1220" b="1" dirty="0">
-                <a:solidFill>
-                  <a:srgbClr val="1F2937"/>
-                </a:solidFill>
-                <a:latin typeface="Calibri" pitchFamily="34" charset="0"/>
-                <a:ea typeface="Calibri" pitchFamily="34" charset="-122"/>
-                <a:cs typeface="Calibri" pitchFamily="34" charset="-120"/>
-              </a:rPr>
-              <a:t>Topología de planta</a:t>
-            </a:r>
-            <a:pPr indent="0" marL="0">
-              <a:buNone/>
-            </a:pPr>
-            <a:endParaRPr lang="en-US" sz="1220" dirty="0"/>
-          </a:p>
-          <a:p>
-            <a:pPr indent="0" marL="0">
-              <a:buNone/>
-            </a:pPr>
-            <a:r>
-              <a:rPr lang="en-US" sz="1220" dirty="0">
-                <a:solidFill>
-                  <a:srgbClr val="1F2937"/>
-                </a:solidFill>
-                <a:latin typeface="Calibri" pitchFamily="34" charset="0"/>
-                <a:ea typeface="Calibri" pitchFamily="34" charset="-122"/>
-                <a:cs typeface="Calibri" pitchFamily="34" charset="-120"/>
-              </a:rPr>
-              <a:t>Visualiza plantas, disciplinas y máquinas.</a:t>
-            </a:r>
-            <a:endParaRPr lang="en-US" sz="1220" dirty="0"/>
-          </a:p>
-        </p:txBody>
-      </p:sp>
-      <p:sp>
-        <p:nvSpPr>
-          <p:cNvPr id="12" name="Shape 10"/>
-          <p:cNvSpPr/>
-          <p:nvPr/>
-        </p:nvSpPr>
-        <p:spPr>
-          <a:xfrm>
-            <a:off x="594360" y="3803904"/>
-            <a:ext cx="2743200" cy="0"/>
-          </a:xfrm>
-          <a:prstGeom prst="line">
-            <a:avLst/>
-          </a:prstGeom>
-          <a:noFill/>
-          <a:ln w="25400">
-            <a:solidFill>
-              <a:srgbClr val="059669"/>
+              <a:srgbClr val="D0D7E2"/>
             </a:solidFill>
             <a:prstDash val="solid"/>
           </a:ln>
         </p:spPr>
-      </p:sp>
-      <p:sp>
-        <p:nvSpPr>
-          <p:cNvPr id="13" name="Text 11"/>
-          <p:cNvSpPr/>
-          <p:nvPr/>
-        </p:nvSpPr>
-        <p:spPr>
-          <a:xfrm>
-            <a:off x="594360" y="4069080"/>
-            <a:ext cx="2743200" cy="868680"/>
-          </a:xfrm>
-          <a:prstGeom prst="rect">
-            <a:avLst/>
+        <p:txBody>
+          <a:bodyPr/>
+          <a:lstStyle/>
+          <a:p>
+            <a:endParaRPr lang="es-MX"/>
+          </a:p>
+        </p:txBody>
+      </p:sp>
+      <p:sp>
+        <p:nvSpPr>
+          <p:cNvPr id="28" name="Text 7">
+            <a:extLst>
+              <a:ext uri="{FF2B5EF4-FFF2-40B4-BE49-F238E27FC236}">
+                <a16:creationId xmlns:a16="http://schemas.microsoft.com/office/drawing/2014/main" id="{A7EC4F8D-BE3A-4518-AC2C-5ED8075490A1}"/>
+              </a:ext>
+            </a:extLst>
+          </p:cNvPr>
+          <p:cNvSpPr/>
+          <p:nvPr/>
+        </p:nvSpPr>
+        <p:spPr>
+          <a:xfrm>
+            <a:off x="713232" y="3113532"/>
+            <a:ext cx="2596896" cy="237744"/>
+          </a:xfrm>
+          <a:prstGeom prst="rect">
+            <a:avLst/>
+          </a:prstGeom>
+          <a:noFill/>
+          <a:ln/>
+        </p:spPr>
+        <p:txBody>
+          <a:bodyPr wrap="square" lIns="0" tIns="0" rIns="0" bIns="0" rtlCol="0" anchor="ctr"/>
+          <a:lstStyle>
+            <a:lvl1pPr marL="0" algn="l" defTabSz="914400" rtl="0" eaLnBrk="1" latinLnBrk="0" hangingPunct="1">
+              <a:defRPr sz="1800" kern="1200">
+                <a:solidFill>
+                  <a:schemeClr val="tx1"/>
+                </a:solidFill>
+                <a:latin typeface="+mn-lt"/>
+                <a:ea typeface="+mn-ea"/>
+                <a:cs typeface="+mn-cs"/>
+              </a:defRPr>
+            </a:lvl1pPr>
+            <a:lvl2pPr marL="457200" algn="l" defTabSz="914400" rtl="0" eaLnBrk="1" latinLnBrk="0" hangingPunct="1">
+              <a:defRPr sz="1800" kern="1200">
+                <a:solidFill>
+                  <a:schemeClr val="tx1"/>
+                </a:solidFill>
+                <a:latin typeface="+mn-lt"/>
+                <a:ea typeface="+mn-ea"/>
+                <a:cs typeface="+mn-cs"/>
+              </a:defRPr>
+            </a:lvl2pPr>
+            <a:lvl3pPr marL="914400" algn="l" defTabSz="914400" rtl="0" eaLnBrk="1" latinLnBrk="0" hangingPunct="1">
+              <a:defRPr sz="1800" kern="1200">
+                <a:solidFill>
+                  <a:schemeClr val="tx1"/>
+                </a:solidFill>
+                <a:latin typeface="+mn-lt"/>
+                <a:ea typeface="+mn-ea"/>
+                <a:cs typeface="+mn-cs"/>
+              </a:defRPr>
+            </a:lvl3pPr>
+            <a:lvl4pPr marL="1371600" algn="l" defTabSz="914400" rtl="0" eaLnBrk="1" latinLnBrk="0" hangingPunct="1">
+              <a:defRPr sz="1800" kern="1200">
+                <a:solidFill>
+                  <a:schemeClr val="tx1"/>
+                </a:solidFill>
+                <a:latin typeface="+mn-lt"/>
+                <a:ea typeface="+mn-ea"/>
+                <a:cs typeface="+mn-cs"/>
+              </a:defRPr>
+            </a:lvl4pPr>
+            <a:lvl5pPr marL="1828800" algn="l" defTabSz="914400" rtl="0" eaLnBrk="1" latinLnBrk="0" hangingPunct="1">
+              <a:defRPr sz="1800" kern="1200">
+                <a:solidFill>
+                  <a:schemeClr val="tx1"/>
+                </a:solidFill>
+                <a:latin typeface="+mn-lt"/>
+                <a:ea typeface="+mn-ea"/>
+                <a:cs typeface="+mn-cs"/>
+              </a:defRPr>
+            </a:lvl5pPr>
+            <a:lvl6pPr marL="2286000" algn="l" defTabSz="914400" rtl="0" eaLnBrk="1" latinLnBrk="0" hangingPunct="1">
+              <a:defRPr sz="1800" kern="1200">
+                <a:solidFill>
+                  <a:schemeClr val="tx1"/>
+                </a:solidFill>
+                <a:latin typeface="+mn-lt"/>
+                <a:ea typeface="+mn-ea"/>
+                <a:cs typeface="+mn-cs"/>
+              </a:defRPr>
+            </a:lvl6pPr>
+            <a:lvl7pPr marL="2743200" algn="l" defTabSz="914400" rtl="0" eaLnBrk="1" latinLnBrk="0" hangingPunct="1">
+              <a:defRPr sz="1800" kern="1200">
+                <a:solidFill>
+                  <a:schemeClr val="tx1"/>
+                </a:solidFill>
+                <a:latin typeface="+mn-lt"/>
+                <a:ea typeface="+mn-ea"/>
+                <a:cs typeface="+mn-cs"/>
+              </a:defRPr>
+            </a:lvl7pPr>
+            <a:lvl8pPr marL="3200400" algn="l" defTabSz="914400" rtl="0" eaLnBrk="1" latinLnBrk="0" hangingPunct="1">
+              <a:defRPr sz="1800" kern="1200">
+                <a:solidFill>
+                  <a:schemeClr val="tx1"/>
+                </a:solidFill>
+                <a:latin typeface="+mn-lt"/>
+                <a:ea typeface="+mn-ea"/>
+                <a:cs typeface="+mn-cs"/>
+              </a:defRPr>
+            </a:lvl8pPr>
+            <a:lvl9pPr marL="3657600" algn="l" defTabSz="914400" rtl="0" eaLnBrk="1" latinLnBrk="0" hangingPunct="1">
+              <a:defRPr sz="1800" kern="1200">
+                <a:solidFill>
+                  <a:schemeClr val="tx1"/>
+                </a:solidFill>
+                <a:latin typeface="+mn-lt"/>
+                <a:ea typeface="+mn-ea"/>
+                <a:cs typeface="+mn-cs"/>
+              </a:defRPr>
+            </a:lvl9pPr>
+          </a:lstStyle>
+          <a:p>
+            <a:pPr marL="0" indent="0">
+              <a:buNone/>
+            </a:pPr>
+            <a:r>
+              <a:rPr lang="en-US" sz="1250" b="1" dirty="0">
+                <a:solidFill>
+                  <a:srgbClr val="17365D"/>
+                </a:solidFill>
+              </a:rPr>
+              <a:t>Topología de planta</a:t>
+            </a:r>
+            <a:endParaRPr lang="en-US" sz="1250" dirty="0"/>
+          </a:p>
+        </p:txBody>
+      </p:sp>
+      <p:sp>
+        <p:nvSpPr>
+          <p:cNvPr id="29" name="Text 8">
+            <a:extLst>
+              <a:ext uri="{FF2B5EF4-FFF2-40B4-BE49-F238E27FC236}">
+                <a16:creationId xmlns:a16="http://schemas.microsoft.com/office/drawing/2014/main" id="{510F01FD-8393-440F-A37E-2ECC4EB62DB0}"/>
+              </a:ext>
+            </a:extLst>
+          </p:cNvPr>
+          <p:cNvSpPr/>
+          <p:nvPr/>
+        </p:nvSpPr>
+        <p:spPr>
+          <a:xfrm>
+            <a:off x="713232" y="3451860"/>
+            <a:ext cx="2596896" cy="374904"/>
+          </a:xfrm>
+          <a:prstGeom prst="rect">
+            <a:avLst/>
+          </a:prstGeom>
+          <a:noFill/>
+          <a:ln/>
+        </p:spPr>
+        <p:txBody>
+          <a:bodyPr wrap="square" lIns="254" tIns="254" rIns="254" bIns="254" rtlCol="0" anchor="ctr">
+            <a:normAutofit/>
+          </a:bodyPr>
+          <a:lstStyle>
+            <a:lvl1pPr marL="0" algn="l" defTabSz="914400" rtl="0" eaLnBrk="1" latinLnBrk="0" hangingPunct="1">
+              <a:defRPr sz="1800" kern="1200">
+                <a:solidFill>
+                  <a:schemeClr val="tx1"/>
+                </a:solidFill>
+                <a:latin typeface="+mn-lt"/>
+                <a:ea typeface="+mn-ea"/>
+                <a:cs typeface="+mn-cs"/>
+              </a:defRPr>
+            </a:lvl1pPr>
+            <a:lvl2pPr marL="457200" algn="l" defTabSz="914400" rtl="0" eaLnBrk="1" latinLnBrk="0" hangingPunct="1">
+              <a:defRPr sz="1800" kern="1200">
+                <a:solidFill>
+                  <a:schemeClr val="tx1"/>
+                </a:solidFill>
+                <a:latin typeface="+mn-lt"/>
+                <a:ea typeface="+mn-ea"/>
+                <a:cs typeface="+mn-cs"/>
+              </a:defRPr>
+            </a:lvl2pPr>
+            <a:lvl3pPr marL="914400" algn="l" defTabSz="914400" rtl="0" eaLnBrk="1" latinLnBrk="0" hangingPunct="1">
+              <a:defRPr sz="1800" kern="1200">
+                <a:solidFill>
+                  <a:schemeClr val="tx1"/>
+                </a:solidFill>
+                <a:latin typeface="+mn-lt"/>
+                <a:ea typeface="+mn-ea"/>
+                <a:cs typeface="+mn-cs"/>
+              </a:defRPr>
+            </a:lvl3pPr>
+            <a:lvl4pPr marL="1371600" algn="l" defTabSz="914400" rtl="0" eaLnBrk="1" latinLnBrk="0" hangingPunct="1">
+              <a:defRPr sz="1800" kern="1200">
+                <a:solidFill>
+                  <a:schemeClr val="tx1"/>
+                </a:solidFill>
+                <a:latin typeface="+mn-lt"/>
+                <a:ea typeface="+mn-ea"/>
+                <a:cs typeface="+mn-cs"/>
+              </a:defRPr>
+            </a:lvl4pPr>
+            <a:lvl5pPr marL="1828800" algn="l" defTabSz="914400" rtl="0" eaLnBrk="1" latinLnBrk="0" hangingPunct="1">
+              <a:defRPr sz="1800" kern="1200">
+                <a:solidFill>
+                  <a:schemeClr val="tx1"/>
+                </a:solidFill>
+                <a:latin typeface="+mn-lt"/>
+                <a:ea typeface="+mn-ea"/>
+                <a:cs typeface="+mn-cs"/>
+              </a:defRPr>
+            </a:lvl5pPr>
+            <a:lvl6pPr marL="2286000" algn="l" defTabSz="914400" rtl="0" eaLnBrk="1" latinLnBrk="0" hangingPunct="1">
+              <a:defRPr sz="1800" kern="1200">
+                <a:solidFill>
+                  <a:schemeClr val="tx1"/>
+                </a:solidFill>
+                <a:latin typeface="+mn-lt"/>
+                <a:ea typeface="+mn-ea"/>
+                <a:cs typeface="+mn-cs"/>
+              </a:defRPr>
+            </a:lvl6pPr>
+            <a:lvl7pPr marL="2743200" algn="l" defTabSz="914400" rtl="0" eaLnBrk="1" latinLnBrk="0" hangingPunct="1">
+              <a:defRPr sz="1800" kern="1200">
+                <a:solidFill>
+                  <a:schemeClr val="tx1"/>
+                </a:solidFill>
+                <a:latin typeface="+mn-lt"/>
+                <a:ea typeface="+mn-ea"/>
+                <a:cs typeface="+mn-cs"/>
+              </a:defRPr>
+            </a:lvl7pPr>
+            <a:lvl8pPr marL="3200400" algn="l" defTabSz="914400" rtl="0" eaLnBrk="1" latinLnBrk="0" hangingPunct="1">
+              <a:defRPr sz="1800" kern="1200">
+                <a:solidFill>
+                  <a:schemeClr val="tx1"/>
+                </a:solidFill>
+                <a:latin typeface="+mn-lt"/>
+                <a:ea typeface="+mn-ea"/>
+                <a:cs typeface="+mn-cs"/>
+              </a:defRPr>
+            </a:lvl8pPr>
+            <a:lvl9pPr marL="3657600" algn="l" defTabSz="914400" rtl="0" eaLnBrk="1" latinLnBrk="0" hangingPunct="1">
+              <a:defRPr sz="1800" kern="1200">
+                <a:solidFill>
+                  <a:schemeClr val="tx1"/>
+                </a:solidFill>
+                <a:latin typeface="+mn-lt"/>
+                <a:ea typeface="+mn-ea"/>
+                <a:cs typeface="+mn-cs"/>
+              </a:defRPr>
+            </a:lvl9pPr>
+          </a:lstStyle>
+          <a:p>
+            <a:pPr marL="0" indent="0">
+              <a:buNone/>
+            </a:pPr>
+            <a:r>
+              <a:rPr lang="en-US" sz="1020" dirty="0">
+                <a:solidFill>
+                  <a:srgbClr val="111827"/>
+                </a:solidFill>
+              </a:rPr>
+              <a:t>Mapa de plantas, disciplinas y máquinas.</a:t>
+            </a:r>
+            <a:endParaRPr lang="en-US" sz="1020" dirty="0"/>
+          </a:p>
+        </p:txBody>
+      </p:sp>
+      <p:sp>
+        <p:nvSpPr>
+          <p:cNvPr id="30" name="Shape 9">
+            <a:extLst>
+              <a:ext uri="{FF2B5EF4-FFF2-40B4-BE49-F238E27FC236}">
+                <a16:creationId xmlns:a16="http://schemas.microsoft.com/office/drawing/2014/main" id="{71763D0E-1341-A059-D7EB-FF4D114BCC77}"/>
+              </a:ext>
+            </a:extLst>
+          </p:cNvPr>
+          <p:cNvSpPr/>
+          <p:nvPr/>
+        </p:nvSpPr>
+        <p:spPr>
+          <a:xfrm>
+            <a:off x="548640" y="4155948"/>
+            <a:ext cx="2926080" cy="960120"/>
+          </a:xfrm>
+          <a:prstGeom prst="roundRect">
+            <a:avLst>
+              <a:gd name="adj" fmla="val 7619"/>
+            </a:avLst>
           </a:prstGeom>
           <a:solidFill>
-            <a:srgbClr val="FFFFFF"/>
+            <a:srgbClr val="F3F7FB"/>
           </a:solidFill>
           <a:ln w="12700">
             <a:solidFill>
-              <a:srgbClr val="D9D3C9"/>
-            </a:solidFill>
-          </a:ln>
-        </p:spPr>
-        <p:txBody>
-          <a:bodyPr wrap="square" lIns="1524" tIns="1524" rIns="1524" bIns="1524" rtlCol="0" anchor="t">
-            <a:normAutofit/>
-          </a:bodyPr>
-          <a:lstStyle/>
-          <a:p>
-            <a:pPr indent="0" marL="0">
-              <a:buNone/>
-            </a:pPr>
-            <a:r>
-              <a:rPr lang="en-US" sz="1220" b="1" dirty="0">
-                <a:solidFill>
-                  <a:srgbClr val="1F2937"/>
-                </a:solidFill>
-                <a:latin typeface="Calibri" pitchFamily="34" charset="0"/>
-                <a:ea typeface="Calibri" pitchFamily="34" charset="-122"/>
-                <a:cs typeface="Calibri" pitchFamily="34" charset="-120"/>
-              </a:rPr>
-              <a:t>Historial de diagnósticos</a:t>
-            </a:r>
-            <a:pPr indent="0" marL="0">
-              <a:buNone/>
-            </a:pPr>
-            <a:endParaRPr lang="en-US" sz="1220" dirty="0"/>
-          </a:p>
-          <a:p>
-            <a:pPr indent="0" marL="0">
-              <a:buNone/>
-            </a:pPr>
-            <a:r>
-              <a:rPr lang="en-US" sz="1220" dirty="0">
-                <a:solidFill>
-                  <a:srgbClr val="1F2937"/>
-                </a:solidFill>
-                <a:latin typeface="Calibri" pitchFamily="34" charset="0"/>
-                <a:ea typeface="Calibri" pitchFamily="34" charset="-122"/>
-                <a:cs typeface="Calibri" pitchFamily="34" charset="-120"/>
-              </a:rPr>
-              <a:t>Registra consultas y diagnósticos previos.</a:t>
-            </a:r>
-            <a:endParaRPr lang="en-US" sz="1220" dirty="0"/>
-          </a:p>
-        </p:txBody>
-      </p:sp>
-      <p:sp>
-        <p:nvSpPr>
-          <p:cNvPr id="14" name="Shape 12"/>
-          <p:cNvSpPr/>
-          <p:nvPr/>
-        </p:nvSpPr>
-        <p:spPr>
-          <a:xfrm>
-            <a:off x="594360" y="4901184"/>
-            <a:ext cx="2743200" cy="0"/>
-          </a:xfrm>
-          <a:prstGeom prst="line">
-            <a:avLst/>
-          </a:prstGeom>
-          <a:noFill/>
-          <a:ln w="25400">
-            <a:solidFill>
-              <a:srgbClr val="6D28D9"/>
+              <a:srgbClr val="D0D7E2"/>
             </a:solidFill>
             <a:prstDash val="solid"/>
           </a:ln>
         </p:spPr>
-      </p:sp>
-      <p:sp>
-        <p:nvSpPr>
-          <p:cNvPr id="15" name="Text 13"/>
-          <p:cNvSpPr/>
-          <p:nvPr/>
-        </p:nvSpPr>
-        <p:spPr>
-          <a:xfrm>
-            <a:off x="594360" y="5166360"/>
-            <a:ext cx="2743200" cy="868680"/>
-          </a:xfrm>
-          <a:prstGeom prst="rect">
-            <a:avLst/>
+        <p:txBody>
+          <a:bodyPr/>
+          <a:lstStyle/>
+          <a:p>
+            <a:endParaRPr lang="es-MX"/>
+          </a:p>
+        </p:txBody>
+      </p:sp>
+      <p:sp>
+        <p:nvSpPr>
+          <p:cNvPr id="31" name="Text 10">
+            <a:extLst>
+              <a:ext uri="{FF2B5EF4-FFF2-40B4-BE49-F238E27FC236}">
+                <a16:creationId xmlns:a16="http://schemas.microsoft.com/office/drawing/2014/main" id="{F6779796-E64E-03ED-BED3-F58F64A1BF03}"/>
+              </a:ext>
+            </a:extLst>
+          </p:cNvPr>
+          <p:cNvSpPr/>
+          <p:nvPr/>
+        </p:nvSpPr>
+        <p:spPr>
+          <a:xfrm>
+            <a:off x="713232" y="4302252"/>
+            <a:ext cx="2596896" cy="237744"/>
+          </a:xfrm>
+          <a:prstGeom prst="rect">
+            <a:avLst/>
+          </a:prstGeom>
+          <a:noFill/>
+          <a:ln/>
+        </p:spPr>
+        <p:txBody>
+          <a:bodyPr wrap="square" lIns="0" tIns="0" rIns="0" bIns="0" rtlCol="0" anchor="ctr"/>
+          <a:lstStyle>
+            <a:lvl1pPr marL="0" algn="l" defTabSz="914400" rtl="0" eaLnBrk="1" latinLnBrk="0" hangingPunct="1">
+              <a:defRPr sz="1800" kern="1200">
+                <a:solidFill>
+                  <a:schemeClr val="tx1"/>
+                </a:solidFill>
+                <a:latin typeface="+mn-lt"/>
+                <a:ea typeface="+mn-ea"/>
+                <a:cs typeface="+mn-cs"/>
+              </a:defRPr>
+            </a:lvl1pPr>
+            <a:lvl2pPr marL="457200" algn="l" defTabSz="914400" rtl="0" eaLnBrk="1" latinLnBrk="0" hangingPunct="1">
+              <a:defRPr sz="1800" kern="1200">
+                <a:solidFill>
+                  <a:schemeClr val="tx1"/>
+                </a:solidFill>
+                <a:latin typeface="+mn-lt"/>
+                <a:ea typeface="+mn-ea"/>
+                <a:cs typeface="+mn-cs"/>
+              </a:defRPr>
+            </a:lvl2pPr>
+            <a:lvl3pPr marL="914400" algn="l" defTabSz="914400" rtl="0" eaLnBrk="1" latinLnBrk="0" hangingPunct="1">
+              <a:defRPr sz="1800" kern="1200">
+                <a:solidFill>
+                  <a:schemeClr val="tx1"/>
+                </a:solidFill>
+                <a:latin typeface="+mn-lt"/>
+                <a:ea typeface="+mn-ea"/>
+                <a:cs typeface="+mn-cs"/>
+              </a:defRPr>
+            </a:lvl3pPr>
+            <a:lvl4pPr marL="1371600" algn="l" defTabSz="914400" rtl="0" eaLnBrk="1" latinLnBrk="0" hangingPunct="1">
+              <a:defRPr sz="1800" kern="1200">
+                <a:solidFill>
+                  <a:schemeClr val="tx1"/>
+                </a:solidFill>
+                <a:latin typeface="+mn-lt"/>
+                <a:ea typeface="+mn-ea"/>
+                <a:cs typeface="+mn-cs"/>
+              </a:defRPr>
+            </a:lvl4pPr>
+            <a:lvl5pPr marL="1828800" algn="l" defTabSz="914400" rtl="0" eaLnBrk="1" latinLnBrk="0" hangingPunct="1">
+              <a:defRPr sz="1800" kern="1200">
+                <a:solidFill>
+                  <a:schemeClr val="tx1"/>
+                </a:solidFill>
+                <a:latin typeface="+mn-lt"/>
+                <a:ea typeface="+mn-ea"/>
+                <a:cs typeface="+mn-cs"/>
+              </a:defRPr>
+            </a:lvl5pPr>
+            <a:lvl6pPr marL="2286000" algn="l" defTabSz="914400" rtl="0" eaLnBrk="1" latinLnBrk="0" hangingPunct="1">
+              <a:defRPr sz="1800" kern="1200">
+                <a:solidFill>
+                  <a:schemeClr val="tx1"/>
+                </a:solidFill>
+                <a:latin typeface="+mn-lt"/>
+                <a:ea typeface="+mn-ea"/>
+                <a:cs typeface="+mn-cs"/>
+              </a:defRPr>
+            </a:lvl6pPr>
+            <a:lvl7pPr marL="2743200" algn="l" defTabSz="914400" rtl="0" eaLnBrk="1" latinLnBrk="0" hangingPunct="1">
+              <a:defRPr sz="1800" kern="1200">
+                <a:solidFill>
+                  <a:schemeClr val="tx1"/>
+                </a:solidFill>
+                <a:latin typeface="+mn-lt"/>
+                <a:ea typeface="+mn-ea"/>
+                <a:cs typeface="+mn-cs"/>
+              </a:defRPr>
+            </a:lvl7pPr>
+            <a:lvl8pPr marL="3200400" algn="l" defTabSz="914400" rtl="0" eaLnBrk="1" latinLnBrk="0" hangingPunct="1">
+              <a:defRPr sz="1800" kern="1200">
+                <a:solidFill>
+                  <a:schemeClr val="tx1"/>
+                </a:solidFill>
+                <a:latin typeface="+mn-lt"/>
+                <a:ea typeface="+mn-ea"/>
+                <a:cs typeface="+mn-cs"/>
+              </a:defRPr>
+            </a:lvl8pPr>
+            <a:lvl9pPr marL="3657600" algn="l" defTabSz="914400" rtl="0" eaLnBrk="1" latinLnBrk="0" hangingPunct="1">
+              <a:defRPr sz="1800" kern="1200">
+                <a:solidFill>
+                  <a:schemeClr val="tx1"/>
+                </a:solidFill>
+                <a:latin typeface="+mn-lt"/>
+                <a:ea typeface="+mn-ea"/>
+                <a:cs typeface="+mn-cs"/>
+              </a:defRPr>
+            </a:lvl9pPr>
+          </a:lstStyle>
+          <a:p>
+            <a:pPr marL="0" indent="0">
+              <a:buNone/>
+            </a:pPr>
+            <a:r>
+              <a:rPr lang="en-US" sz="1250" b="1" dirty="0">
+                <a:solidFill>
+                  <a:srgbClr val="17365D"/>
+                </a:solidFill>
+              </a:rPr>
+              <a:t>Historial de diagnósticos</a:t>
+            </a:r>
+            <a:endParaRPr lang="en-US" sz="1250" dirty="0"/>
+          </a:p>
+        </p:txBody>
+      </p:sp>
+      <p:sp>
+        <p:nvSpPr>
+          <p:cNvPr id="32" name="Text 11">
+            <a:extLst>
+              <a:ext uri="{FF2B5EF4-FFF2-40B4-BE49-F238E27FC236}">
+                <a16:creationId xmlns:a16="http://schemas.microsoft.com/office/drawing/2014/main" id="{26141F67-3C95-00F7-2928-FCFCE451C1F3}"/>
+              </a:ext>
+            </a:extLst>
+          </p:cNvPr>
+          <p:cNvSpPr/>
+          <p:nvPr/>
+        </p:nvSpPr>
+        <p:spPr>
+          <a:xfrm>
+            <a:off x="713232" y="4640580"/>
+            <a:ext cx="2596896" cy="374904"/>
+          </a:xfrm>
+          <a:prstGeom prst="rect">
+            <a:avLst/>
+          </a:prstGeom>
+          <a:noFill/>
+          <a:ln/>
+        </p:spPr>
+        <p:txBody>
+          <a:bodyPr wrap="square" lIns="254" tIns="254" rIns="254" bIns="254" rtlCol="0" anchor="ctr">
+            <a:normAutofit/>
+          </a:bodyPr>
+          <a:lstStyle>
+            <a:lvl1pPr marL="0" algn="l" defTabSz="914400" rtl="0" eaLnBrk="1" latinLnBrk="0" hangingPunct="1">
+              <a:defRPr sz="1800" kern="1200">
+                <a:solidFill>
+                  <a:schemeClr val="tx1"/>
+                </a:solidFill>
+                <a:latin typeface="+mn-lt"/>
+                <a:ea typeface="+mn-ea"/>
+                <a:cs typeface="+mn-cs"/>
+              </a:defRPr>
+            </a:lvl1pPr>
+            <a:lvl2pPr marL="457200" algn="l" defTabSz="914400" rtl="0" eaLnBrk="1" latinLnBrk="0" hangingPunct="1">
+              <a:defRPr sz="1800" kern="1200">
+                <a:solidFill>
+                  <a:schemeClr val="tx1"/>
+                </a:solidFill>
+                <a:latin typeface="+mn-lt"/>
+                <a:ea typeface="+mn-ea"/>
+                <a:cs typeface="+mn-cs"/>
+              </a:defRPr>
+            </a:lvl2pPr>
+            <a:lvl3pPr marL="914400" algn="l" defTabSz="914400" rtl="0" eaLnBrk="1" latinLnBrk="0" hangingPunct="1">
+              <a:defRPr sz="1800" kern="1200">
+                <a:solidFill>
+                  <a:schemeClr val="tx1"/>
+                </a:solidFill>
+                <a:latin typeface="+mn-lt"/>
+                <a:ea typeface="+mn-ea"/>
+                <a:cs typeface="+mn-cs"/>
+              </a:defRPr>
+            </a:lvl3pPr>
+            <a:lvl4pPr marL="1371600" algn="l" defTabSz="914400" rtl="0" eaLnBrk="1" latinLnBrk="0" hangingPunct="1">
+              <a:defRPr sz="1800" kern="1200">
+                <a:solidFill>
+                  <a:schemeClr val="tx1"/>
+                </a:solidFill>
+                <a:latin typeface="+mn-lt"/>
+                <a:ea typeface="+mn-ea"/>
+                <a:cs typeface="+mn-cs"/>
+              </a:defRPr>
+            </a:lvl4pPr>
+            <a:lvl5pPr marL="1828800" algn="l" defTabSz="914400" rtl="0" eaLnBrk="1" latinLnBrk="0" hangingPunct="1">
+              <a:defRPr sz="1800" kern="1200">
+                <a:solidFill>
+                  <a:schemeClr val="tx1"/>
+                </a:solidFill>
+                <a:latin typeface="+mn-lt"/>
+                <a:ea typeface="+mn-ea"/>
+                <a:cs typeface="+mn-cs"/>
+              </a:defRPr>
+            </a:lvl5pPr>
+            <a:lvl6pPr marL="2286000" algn="l" defTabSz="914400" rtl="0" eaLnBrk="1" latinLnBrk="0" hangingPunct="1">
+              <a:defRPr sz="1800" kern="1200">
+                <a:solidFill>
+                  <a:schemeClr val="tx1"/>
+                </a:solidFill>
+                <a:latin typeface="+mn-lt"/>
+                <a:ea typeface="+mn-ea"/>
+                <a:cs typeface="+mn-cs"/>
+              </a:defRPr>
+            </a:lvl6pPr>
+            <a:lvl7pPr marL="2743200" algn="l" defTabSz="914400" rtl="0" eaLnBrk="1" latinLnBrk="0" hangingPunct="1">
+              <a:defRPr sz="1800" kern="1200">
+                <a:solidFill>
+                  <a:schemeClr val="tx1"/>
+                </a:solidFill>
+                <a:latin typeface="+mn-lt"/>
+                <a:ea typeface="+mn-ea"/>
+                <a:cs typeface="+mn-cs"/>
+              </a:defRPr>
+            </a:lvl7pPr>
+            <a:lvl8pPr marL="3200400" algn="l" defTabSz="914400" rtl="0" eaLnBrk="1" latinLnBrk="0" hangingPunct="1">
+              <a:defRPr sz="1800" kern="1200">
+                <a:solidFill>
+                  <a:schemeClr val="tx1"/>
+                </a:solidFill>
+                <a:latin typeface="+mn-lt"/>
+                <a:ea typeface="+mn-ea"/>
+                <a:cs typeface="+mn-cs"/>
+              </a:defRPr>
+            </a:lvl8pPr>
+            <a:lvl9pPr marL="3657600" algn="l" defTabSz="914400" rtl="0" eaLnBrk="1" latinLnBrk="0" hangingPunct="1">
+              <a:defRPr sz="1800" kern="1200">
+                <a:solidFill>
+                  <a:schemeClr val="tx1"/>
+                </a:solidFill>
+                <a:latin typeface="+mn-lt"/>
+                <a:ea typeface="+mn-ea"/>
+                <a:cs typeface="+mn-cs"/>
+              </a:defRPr>
+            </a:lvl9pPr>
+          </a:lstStyle>
+          <a:p>
+            <a:pPr marL="0" indent="0">
+              <a:buNone/>
+            </a:pPr>
+            <a:r>
+              <a:rPr lang="en-US" sz="1020" dirty="0">
+                <a:solidFill>
+                  <a:srgbClr val="111827"/>
+                </a:solidFill>
+              </a:rPr>
+              <a:t>Registro de consultas y diagnósticos previos.</a:t>
+            </a:r>
+            <a:endParaRPr lang="en-US" sz="1020" dirty="0"/>
+          </a:p>
+        </p:txBody>
+      </p:sp>
+      <p:sp>
+        <p:nvSpPr>
+          <p:cNvPr id="33" name="Shape 12">
+            <a:extLst>
+              <a:ext uri="{FF2B5EF4-FFF2-40B4-BE49-F238E27FC236}">
+                <a16:creationId xmlns:a16="http://schemas.microsoft.com/office/drawing/2014/main" id="{CAADB195-8D3A-9A31-C175-452D599BF9EE}"/>
+              </a:ext>
+            </a:extLst>
+          </p:cNvPr>
+          <p:cNvSpPr/>
+          <p:nvPr/>
+        </p:nvSpPr>
+        <p:spPr>
+          <a:xfrm>
+            <a:off x="548640" y="5344668"/>
+            <a:ext cx="2926080" cy="960120"/>
+          </a:xfrm>
+          <a:prstGeom prst="roundRect">
+            <a:avLst>
+              <a:gd name="adj" fmla="val 7619"/>
+            </a:avLst>
           </a:prstGeom>
           <a:solidFill>
-            <a:srgbClr val="FFFFFF"/>
+            <a:srgbClr val="F3F7FB"/>
           </a:solidFill>
           <a:ln w="12700">
             <a:solidFill>
-              <a:srgbClr val="D9D3C9"/>
-            </a:solidFill>
-          </a:ln>
-        </p:spPr>
-        <p:txBody>
-          <a:bodyPr wrap="square" lIns="1524" tIns="1524" rIns="1524" bIns="1524" rtlCol="0" anchor="t">
-            <a:normAutofit/>
-          </a:bodyPr>
-          <a:lstStyle/>
-          <a:p>
-            <a:pPr indent="0" marL="0">
-              <a:buNone/>
-            </a:pPr>
-            <a:r>
-              <a:rPr lang="en-US" sz="1220" b="1" dirty="0">
-                <a:solidFill>
-                  <a:srgbClr val="1F2937"/>
-                </a:solidFill>
-                <a:latin typeface="Calibri" pitchFamily="34" charset="0"/>
-                <a:ea typeface="Calibri" pitchFamily="34" charset="-122"/>
-                <a:cs typeface="Calibri" pitchFamily="34" charset="-120"/>
-              </a:rPr>
-              <a:t>Dashboard KPI</a:t>
-            </a:r>
-            <a:pPr indent="0" marL="0">
-              <a:buNone/>
-            </a:pPr>
-            <a:endParaRPr lang="en-US" sz="1220" dirty="0"/>
-          </a:p>
-          <a:p>
-            <a:pPr indent="0" marL="0">
-              <a:buNone/>
-            </a:pPr>
-            <a:r>
-              <a:rPr lang="en-US" sz="1220" dirty="0">
-                <a:solidFill>
-                  <a:srgbClr val="1F2937"/>
-                </a:solidFill>
-                <a:latin typeface="Calibri" pitchFamily="34" charset="0"/>
-                <a:ea typeface="Calibri" pitchFamily="34" charset="-122"/>
-                <a:cs typeface="Calibri" pitchFamily="34" charset="-120"/>
-              </a:rPr>
-              <a:t>Métricas, costos, backlog, MTTR y MTBF.</a:t>
-            </a:r>
-            <a:endParaRPr lang="en-US" sz="1220" dirty="0"/>
-          </a:p>
-        </p:txBody>
-      </p:sp>
-      <p:sp>
-        <p:nvSpPr>
-          <p:cNvPr id="16" name="Shape 14"/>
-          <p:cNvSpPr/>
-          <p:nvPr/>
-        </p:nvSpPr>
-        <p:spPr>
-          <a:xfrm>
-            <a:off x="594360" y="5998464"/>
-            <a:ext cx="2743200" cy="0"/>
-          </a:xfrm>
-          <a:prstGeom prst="line">
-            <a:avLst/>
-          </a:prstGeom>
-          <a:noFill/>
-          <a:ln w="25400">
-            <a:solidFill>
-              <a:srgbClr val="E07800"/>
+              <a:srgbClr val="D0D7E2"/>
             </a:solidFill>
             <a:prstDash val="solid"/>
           </a:ln>
         </p:spPr>
+        <p:txBody>
+          <a:bodyPr/>
+          <a:lstStyle/>
+          <a:p>
+            <a:endParaRPr lang="es-MX"/>
+          </a:p>
+        </p:txBody>
+      </p:sp>
+      <p:sp>
+        <p:nvSpPr>
+          <p:cNvPr id="34" name="Text 13">
+            <a:extLst>
+              <a:ext uri="{FF2B5EF4-FFF2-40B4-BE49-F238E27FC236}">
+                <a16:creationId xmlns:a16="http://schemas.microsoft.com/office/drawing/2014/main" id="{592DC94D-CEC7-A6F6-B866-9D849CE8D86A}"/>
+              </a:ext>
+            </a:extLst>
+          </p:cNvPr>
+          <p:cNvSpPr/>
+          <p:nvPr/>
+        </p:nvSpPr>
+        <p:spPr>
+          <a:xfrm>
+            <a:off x="713232" y="5490972"/>
+            <a:ext cx="2596896" cy="237744"/>
+          </a:xfrm>
+          <a:prstGeom prst="rect">
+            <a:avLst/>
+          </a:prstGeom>
+          <a:noFill/>
+          <a:ln/>
+        </p:spPr>
+        <p:txBody>
+          <a:bodyPr wrap="square" lIns="0" tIns="0" rIns="0" bIns="0" rtlCol="0" anchor="ctr"/>
+          <a:lstStyle>
+            <a:lvl1pPr marL="0" algn="l" defTabSz="914400" rtl="0" eaLnBrk="1" latinLnBrk="0" hangingPunct="1">
+              <a:defRPr sz="1800" kern="1200">
+                <a:solidFill>
+                  <a:schemeClr val="tx1"/>
+                </a:solidFill>
+                <a:latin typeface="+mn-lt"/>
+                <a:ea typeface="+mn-ea"/>
+                <a:cs typeface="+mn-cs"/>
+              </a:defRPr>
+            </a:lvl1pPr>
+            <a:lvl2pPr marL="457200" algn="l" defTabSz="914400" rtl="0" eaLnBrk="1" latinLnBrk="0" hangingPunct="1">
+              <a:defRPr sz="1800" kern="1200">
+                <a:solidFill>
+                  <a:schemeClr val="tx1"/>
+                </a:solidFill>
+                <a:latin typeface="+mn-lt"/>
+                <a:ea typeface="+mn-ea"/>
+                <a:cs typeface="+mn-cs"/>
+              </a:defRPr>
+            </a:lvl2pPr>
+            <a:lvl3pPr marL="914400" algn="l" defTabSz="914400" rtl="0" eaLnBrk="1" latinLnBrk="0" hangingPunct="1">
+              <a:defRPr sz="1800" kern="1200">
+                <a:solidFill>
+                  <a:schemeClr val="tx1"/>
+                </a:solidFill>
+                <a:latin typeface="+mn-lt"/>
+                <a:ea typeface="+mn-ea"/>
+                <a:cs typeface="+mn-cs"/>
+              </a:defRPr>
+            </a:lvl3pPr>
+            <a:lvl4pPr marL="1371600" algn="l" defTabSz="914400" rtl="0" eaLnBrk="1" latinLnBrk="0" hangingPunct="1">
+              <a:defRPr sz="1800" kern="1200">
+                <a:solidFill>
+                  <a:schemeClr val="tx1"/>
+                </a:solidFill>
+                <a:latin typeface="+mn-lt"/>
+                <a:ea typeface="+mn-ea"/>
+                <a:cs typeface="+mn-cs"/>
+              </a:defRPr>
+            </a:lvl4pPr>
+            <a:lvl5pPr marL="1828800" algn="l" defTabSz="914400" rtl="0" eaLnBrk="1" latinLnBrk="0" hangingPunct="1">
+              <a:defRPr sz="1800" kern="1200">
+                <a:solidFill>
+                  <a:schemeClr val="tx1"/>
+                </a:solidFill>
+                <a:latin typeface="+mn-lt"/>
+                <a:ea typeface="+mn-ea"/>
+                <a:cs typeface="+mn-cs"/>
+              </a:defRPr>
+            </a:lvl5pPr>
+            <a:lvl6pPr marL="2286000" algn="l" defTabSz="914400" rtl="0" eaLnBrk="1" latinLnBrk="0" hangingPunct="1">
+              <a:defRPr sz="1800" kern="1200">
+                <a:solidFill>
+                  <a:schemeClr val="tx1"/>
+                </a:solidFill>
+                <a:latin typeface="+mn-lt"/>
+                <a:ea typeface="+mn-ea"/>
+                <a:cs typeface="+mn-cs"/>
+              </a:defRPr>
+            </a:lvl6pPr>
+            <a:lvl7pPr marL="2743200" algn="l" defTabSz="914400" rtl="0" eaLnBrk="1" latinLnBrk="0" hangingPunct="1">
+              <a:defRPr sz="1800" kern="1200">
+                <a:solidFill>
+                  <a:schemeClr val="tx1"/>
+                </a:solidFill>
+                <a:latin typeface="+mn-lt"/>
+                <a:ea typeface="+mn-ea"/>
+                <a:cs typeface="+mn-cs"/>
+              </a:defRPr>
+            </a:lvl7pPr>
+            <a:lvl8pPr marL="3200400" algn="l" defTabSz="914400" rtl="0" eaLnBrk="1" latinLnBrk="0" hangingPunct="1">
+              <a:defRPr sz="1800" kern="1200">
+                <a:solidFill>
+                  <a:schemeClr val="tx1"/>
+                </a:solidFill>
+                <a:latin typeface="+mn-lt"/>
+                <a:ea typeface="+mn-ea"/>
+                <a:cs typeface="+mn-cs"/>
+              </a:defRPr>
+            </a:lvl8pPr>
+            <a:lvl9pPr marL="3657600" algn="l" defTabSz="914400" rtl="0" eaLnBrk="1" latinLnBrk="0" hangingPunct="1">
+              <a:defRPr sz="1800" kern="1200">
+                <a:solidFill>
+                  <a:schemeClr val="tx1"/>
+                </a:solidFill>
+                <a:latin typeface="+mn-lt"/>
+                <a:ea typeface="+mn-ea"/>
+                <a:cs typeface="+mn-cs"/>
+              </a:defRPr>
+            </a:lvl9pPr>
+          </a:lstStyle>
+          <a:p>
+            <a:pPr marL="0" indent="0">
+              <a:buNone/>
+            </a:pPr>
+            <a:r>
+              <a:rPr lang="en-US" sz="1250" b="1" dirty="0">
+                <a:solidFill>
+                  <a:srgbClr val="17365D"/>
+                </a:solidFill>
+              </a:rPr>
+              <a:t>Dashboard KPI</a:t>
+            </a:r>
+            <a:endParaRPr lang="en-US" sz="1250" dirty="0"/>
+          </a:p>
+        </p:txBody>
+      </p:sp>
+      <p:sp>
+        <p:nvSpPr>
+          <p:cNvPr id="35" name="Text 14">
+            <a:extLst>
+              <a:ext uri="{FF2B5EF4-FFF2-40B4-BE49-F238E27FC236}">
+                <a16:creationId xmlns:a16="http://schemas.microsoft.com/office/drawing/2014/main" id="{E9E93F86-D15A-221D-FBC0-A329B5903995}"/>
+              </a:ext>
+            </a:extLst>
+          </p:cNvPr>
+          <p:cNvSpPr/>
+          <p:nvPr/>
+        </p:nvSpPr>
+        <p:spPr>
+          <a:xfrm>
+            <a:off x="713232" y="5829300"/>
+            <a:ext cx="2596896" cy="374904"/>
+          </a:xfrm>
+          <a:prstGeom prst="rect">
+            <a:avLst/>
+          </a:prstGeom>
+          <a:noFill/>
+          <a:ln/>
+        </p:spPr>
+        <p:txBody>
+          <a:bodyPr wrap="square" lIns="254" tIns="254" rIns="254" bIns="254" rtlCol="0" anchor="ctr">
+            <a:normAutofit/>
+          </a:bodyPr>
+          <a:lstStyle>
+            <a:lvl1pPr marL="0" algn="l" defTabSz="914400" rtl="0" eaLnBrk="1" latinLnBrk="0" hangingPunct="1">
+              <a:defRPr sz="1800" kern="1200">
+                <a:solidFill>
+                  <a:schemeClr val="tx1"/>
+                </a:solidFill>
+                <a:latin typeface="+mn-lt"/>
+                <a:ea typeface="+mn-ea"/>
+                <a:cs typeface="+mn-cs"/>
+              </a:defRPr>
+            </a:lvl1pPr>
+            <a:lvl2pPr marL="457200" algn="l" defTabSz="914400" rtl="0" eaLnBrk="1" latinLnBrk="0" hangingPunct="1">
+              <a:defRPr sz="1800" kern="1200">
+                <a:solidFill>
+                  <a:schemeClr val="tx1"/>
+                </a:solidFill>
+                <a:latin typeface="+mn-lt"/>
+                <a:ea typeface="+mn-ea"/>
+                <a:cs typeface="+mn-cs"/>
+              </a:defRPr>
+            </a:lvl2pPr>
+            <a:lvl3pPr marL="914400" algn="l" defTabSz="914400" rtl="0" eaLnBrk="1" latinLnBrk="0" hangingPunct="1">
+              <a:defRPr sz="1800" kern="1200">
+                <a:solidFill>
+                  <a:schemeClr val="tx1"/>
+                </a:solidFill>
+                <a:latin typeface="+mn-lt"/>
+                <a:ea typeface="+mn-ea"/>
+                <a:cs typeface="+mn-cs"/>
+              </a:defRPr>
+            </a:lvl3pPr>
+            <a:lvl4pPr marL="1371600" algn="l" defTabSz="914400" rtl="0" eaLnBrk="1" latinLnBrk="0" hangingPunct="1">
+              <a:defRPr sz="1800" kern="1200">
+                <a:solidFill>
+                  <a:schemeClr val="tx1"/>
+                </a:solidFill>
+                <a:latin typeface="+mn-lt"/>
+                <a:ea typeface="+mn-ea"/>
+                <a:cs typeface="+mn-cs"/>
+              </a:defRPr>
+            </a:lvl4pPr>
+            <a:lvl5pPr marL="1828800" algn="l" defTabSz="914400" rtl="0" eaLnBrk="1" latinLnBrk="0" hangingPunct="1">
+              <a:defRPr sz="1800" kern="1200">
+                <a:solidFill>
+                  <a:schemeClr val="tx1"/>
+                </a:solidFill>
+                <a:latin typeface="+mn-lt"/>
+                <a:ea typeface="+mn-ea"/>
+                <a:cs typeface="+mn-cs"/>
+              </a:defRPr>
+            </a:lvl5pPr>
+            <a:lvl6pPr marL="2286000" algn="l" defTabSz="914400" rtl="0" eaLnBrk="1" latinLnBrk="0" hangingPunct="1">
+              <a:defRPr sz="1800" kern="1200">
+                <a:solidFill>
+                  <a:schemeClr val="tx1"/>
+                </a:solidFill>
+                <a:latin typeface="+mn-lt"/>
+                <a:ea typeface="+mn-ea"/>
+                <a:cs typeface="+mn-cs"/>
+              </a:defRPr>
+            </a:lvl6pPr>
+            <a:lvl7pPr marL="2743200" algn="l" defTabSz="914400" rtl="0" eaLnBrk="1" latinLnBrk="0" hangingPunct="1">
+              <a:defRPr sz="1800" kern="1200">
+                <a:solidFill>
+                  <a:schemeClr val="tx1"/>
+                </a:solidFill>
+                <a:latin typeface="+mn-lt"/>
+                <a:ea typeface="+mn-ea"/>
+                <a:cs typeface="+mn-cs"/>
+              </a:defRPr>
+            </a:lvl7pPr>
+            <a:lvl8pPr marL="3200400" algn="l" defTabSz="914400" rtl="0" eaLnBrk="1" latinLnBrk="0" hangingPunct="1">
+              <a:defRPr sz="1800" kern="1200">
+                <a:solidFill>
+                  <a:schemeClr val="tx1"/>
+                </a:solidFill>
+                <a:latin typeface="+mn-lt"/>
+                <a:ea typeface="+mn-ea"/>
+                <a:cs typeface="+mn-cs"/>
+              </a:defRPr>
+            </a:lvl8pPr>
+            <a:lvl9pPr marL="3657600" algn="l" defTabSz="914400" rtl="0" eaLnBrk="1" latinLnBrk="0" hangingPunct="1">
+              <a:defRPr sz="1800" kern="1200">
+                <a:solidFill>
+                  <a:schemeClr val="tx1"/>
+                </a:solidFill>
+                <a:latin typeface="+mn-lt"/>
+                <a:ea typeface="+mn-ea"/>
+                <a:cs typeface="+mn-cs"/>
+              </a:defRPr>
+            </a:lvl9pPr>
+          </a:lstStyle>
+          <a:p>
+            <a:pPr marL="0" indent="0">
+              <a:buNone/>
+            </a:pPr>
+            <a:r>
+              <a:rPr lang="en-US" sz="1020" dirty="0">
+                <a:solidFill>
+                  <a:srgbClr val="111827"/>
+                </a:solidFill>
+              </a:rPr>
+              <a:t>Métricas, costos, backlog, MTTR/MTBF y análisis.</a:t>
+            </a:r>
+            <a:endParaRPr lang="en-US" sz="1020" dirty="0"/>
+          </a:p>
+        </p:txBody>
       </p:sp>
       <p:pic>
         <p:nvPicPr>
-          <p:cNvPr id="17" name="Image 0" descr="/mnt/data/barb_split/media/image17.png">    </p:cNvPr>
+          <p:cNvPr id="36" name="Image 0">
+            <a:extLst>
+              <a:ext uri="{FF2B5EF4-FFF2-40B4-BE49-F238E27FC236}">
+                <a16:creationId xmlns:a16="http://schemas.microsoft.com/office/drawing/2014/main" id="{ADA60D20-6F98-762A-831C-7EB42BBB3EED}"/>
+              </a:ext>
+            </a:extLst>
+          </p:cNvPr>
           <p:cNvPicPr>
             <a:picLocks noChangeAspect="1"/>
           </p:cNvPicPr>
           <p:nvPr/>
         </p:nvPicPr>
         <p:blipFill>
-          <a:blip r:embed="rId1"/>
-          <a:srcRect l="7465" r="7465" t="0" b="0"/>
-          <a:stretch/>
+          <a:blip r:embed="rId3"/>
+          <a:stretch>
+            <a:fillRect/>
+          </a:stretch>
         </p:blipFill>
         <p:spPr>
           <a:xfrm>
-            <a:off x="3931920" y="1417320"/>
-            <a:ext cx="3749040" cy="4297680"/>
+            <a:off x="3840480" y="1924812"/>
+            <a:ext cx="3005498" cy="2930961"/>
           </a:xfrm>
           <a:prstGeom prst="rect">
             <a:avLst/>
@@ -5761,21 +7507,28 @@
       </p:pic>
       <p:pic>
         <p:nvPicPr>
-          <p:cNvPr id="18" name="Image 1" descr="/mnt/data/barb_split/media/image21.png">    </p:cNvPr>
+          <p:cNvPr id="37" name="Image 1">
+            <a:extLst>
+              <a:ext uri="{FF2B5EF4-FFF2-40B4-BE49-F238E27FC236}">
+                <a16:creationId xmlns:a16="http://schemas.microsoft.com/office/drawing/2014/main" id="{9C2638ED-0978-24C2-E80B-5661EB420B9F}"/>
+              </a:ext>
+            </a:extLst>
+          </p:cNvPr>
           <p:cNvPicPr>
             <a:picLocks noChangeAspect="1"/>
           </p:cNvPicPr>
           <p:nvPr/>
         </p:nvPicPr>
         <p:blipFill>
-          <a:blip r:embed="rId2"/>
-          <a:srcRect l="28283" r="28283" t="0" b="0"/>
-          <a:stretch/>
+          <a:blip r:embed="rId4"/>
+          <a:stretch>
+            <a:fillRect/>
+          </a:stretch>
         </p:blipFill>
         <p:spPr>
           <a:xfrm>
-            <a:off x="8001000" y="1417320"/>
-            <a:ext cx="3566160" cy="4297680"/>
+            <a:off x="7495805" y="1078993"/>
+            <a:ext cx="3982963" cy="2084832"/>
           </a:xfrm>
           <a:prstGeom prst="rect">
             <a:avLst/>
@@ -5784,14 +7537,62 @@
       </p:pic>
       <p:sp>
         <p:nvSpPr>
-          <p:cNvPr id="19" name="Text 15"/>
-          <p:cNvSpPr/>
-          <p:nvPr/>
-        </p:nvSpPr>
-        <p:spPr>
-          <a:xfrm>
-            <a:off x="3931920" y="5925312"/>
-            <a:ext cx="7635240" cy="201168"/>
+          <p:cNvPr id="39" name="Shape 15">
+            <a:extLst>
+              <a:ext uri="{FF2B5EF4-FFF2-40B4-BE49-F238E27FC236}">
+                <a16:creationId xmlns:a16="http://schemas.microsoft.com/office/drawing/2014/main" id="{67F18460-01AC-FC1A-1456-B9058E2105A4}"/>
+              </a:ext>
+            </a:extLst>
+          </p:cNvPr>
+          <p:cNvSpPr/>
+          <p:nvPr/>
+        </p:nvSpPr>
+        <p:spPr>
+          <a:xfrm>
+            <a:off x="8765345" y="3346705"/>
+            <a:ext cx="1417320" cy="292608"/>
+          </a:xfrm>
+          <a:prstGeom prst="roundRect">
+            <a:avLst>
+              <a:gd name="adj" fmla="val 18750"/>
+            </a:avLst>
+          </a:prstGeom>
+          <a:solidFill>
+            <a:srgbClr val="FFFFFF">
+              <a:alpha val="93000"/>
+            </a:srgbClr>
+          </a:solidFill>
+          <a:ln w="12700">
+            <a:solidFill>
+              <a:srgbClr val="D0D7E2"/>
+            </a:solidFill>
+            <a:prstDash val="solid"/>
+          </a:ln>
+        </p:spPr>
+        <p:txBody>
+          <a:bodyPr/>
+          <a:lstStyle/>
+          <a:p>
+            <a:endParaRPr lang="es-MX"/>
+          </a:p>
+        </p:txBody>
+      </p:sp>
+      <p:sp>
+        <p:nvSpPr>
+          <p:cNvPr id="40" name="Text 16">
+            <a:extLst>
+              <a:ext uri="{FF2B5EF4-FFF2-40B4-BE49-F238E27FC236}">
+                <a16:creationId xmlns:a16="http://schemas.microsoft.com/office/drawing/2014/main" id="{071277BF-0E4C-E18A-4C34-2382D3494C7B}"/>
+              </a:ext>
+            </a:extLst>
+          </p:cNvPr>
+          <p:cNvSpPr/>
+          <p:nvPr/>
+        </p:nvSpPr>
+        <p:spPr>
+          <a:xfrm>
+            <a:off x="8820209" y="3410713"/>
+            <a:ext cx="1307592" cy="146304"/>
           </a:xfrm>
           <a:prstGeom prst="rect">
             <a:avLst/>
@@ -5800,23 +7601,275 @@
           <a:ln/>
         </p:spPr>
         <p:txBody>
-          <a:bodyPr wrap="square" lIns="254" tIns="254" rIns="254" bIns="254" rtlCol="0" anchor="t">
-            <a:normAutofit/>
-          </a:bodyPr>
-          <a:lstStyle/>
-          <a:p>
-            <a:pPr algn="ctr" indent="0" marL="0">
-              <a:buNone/>
-            </a:pPr>
-            <a:r>
-              <a:rPr lang="en-US" sz="950" i="1" dirty="0">
-                <a:solidFill>
-                  <a:srgbClr val="6B7280"/>
-                </a:solidFill>
-              </a:rPr>
-              <a:t>Menú principal y topología de planta actuales (AS-IS)</a:t>
-            </a:r>
-            <a:endParaRPr lang="en-US" sz="950" dirty="0"/>
+          <a:bodyPr wrap="square" lIns="0" tIns="0" rIns="0" bIns="0" rtlCol="0" anchor="ctr"/>
+          <a:lstStyle>
+            <a:lvl1pPr marL="0" algn="l" defTabSz="914400" rtl="0" eaLnBrk="1" latinLnBrk="0" hangingPunct="1">
+              <a:defRPr sz="1800" kern="1200">
+                <a:solidFill>
+                  <a:schemeClr val="tx1"/>
+                </a:solidFill>
+                <a:latin typeface="+mn-lt"/>
+                <a:ea typeface="+mn-ea"/>
+                <a:cs typeface="+mn-cs"/>
+              </a:defRPr>
+            </a:lvl1pPr>
+            <a:lvl2pPr marL="457200" algn="l" defTabSz="914400" rtl="0" eaLnBrk="1" latinLnBrk="0" hangingPunct="1">
+              <a:defRPr sz="1800" kern="1200">
+                <a:solidFill>
+                  <a:schemeClr val="tx1"/>
+                </a:solidFill>
+                <a:latin typeface="+mn-lt"/>
+                <a:ea typeface="+mn-ea"/>
+                <a:cs typeface="+mn-cs"/>
+              </a:defRPr>
+            </a:lvl2pPr>
+            <a:lvl3pPr marL="914400" algn="l" defTabSz="914400" rtl="0" eaLnBrk="1" latinLnBrk="0" hangingPunct="1">
+              <a:defRPr sz="1800" kern="1200">
+                <a:solidFill>
+                  <a:schemeClr val="tx1"/>
+                </a:solidFill>
+                <a:latin typeface="+mn-lt"/>
+                <a:ea typeface="+mn-ea"/>
+                <a:cs typeface="+mn-cs"/>
+              </a:defRPr>
+            </a:lvl3pPr>
+            <a:lvl4pPr marL="1371600" algn="l" defTabSz="914400" rtl="0" eaLnBrk="1" latinLnBrk="0" hangingPunct="1">
+              <a:defRPr sz="1800" kern="1200">
+                <a:solidFill>
+                  <a:schemeClr val="tx1"/>
+                </a:solidFill>
+                <a:latin typeface="+mn-lt"/>
+                <a:ea typeface="+mn-ea"/>
+                <a:cs typeface="+mn-cs"/>
+              </a:defRPr>
+            </a:lvl4pPr>
+            <a:lvl5pPr marL="1828800" algn="l" defTabSz="914400" rtl="0" eaLnBrk="1" latinLnBrk="0" hangingPunct="1">
+              <a:defRPr sz="1800" kern="1200">
+                <a:solidFill>
+                  <a:schemeClr val="tx1"/>
+                </a:solidFill>
+                <a:latin typeface="+mn-lt"/>
+                <a:ea typeface="+mn-ea"/>
+                <a:cs typeface="+mn-cs"/>
+              </a:defRPr>
+            </a:lvl5pPr>
+            <a:lvl6pPr marL="2286000" algn="l" defTabSz="914400" rtl="0" eaLnBrk="1" latinLnBrk="0" hangingPunct="1">
+              <a:defRPr sz="1800" kern="1200">
+                <a:solidFill>
+                  <a:schemeClr val="tx1"/>
+                </a:solidFill>
+                <a:latin typeface="+mn-lt"/>
+                <a:ea typeface="+mn-ea"/>
+                <a:cs typeface="+mn-cs"/>
+              </a:defRPr>
+            </a:lvl6pPr>
+            <a:lvl7pPr marL="2743200" algn="l" defTabSz="914400" rtl="0" eaLnBrk="1" latinLnBrk="0" hangingPunct="1">
+              <a:defRPr sz="1800" kern="1200">
+                <a:solidFill>
+                  <a:schemeClr val="tx1"/>
+                </a:solidFill>
+                <a:latin typeface="+mn-lt"/>
+                <a:ea typeface="+mn-ea"/>
+                <a:cs typeface="+mn-cs"/>
+              </a:defRPr>
+            </a:lvl7pPr>
+            <a:lvl8pPr marL="3200400" algn="l" defTabSz="914400" rtl="0" eaLnBrk="1" latinLnBrk="0" hangingPunct="1">
+              <a:defRPr sz="1800" kern="1200">
+                <a:solidFill>
+                  <a:schemeClr val="tx1"/>
+                </a:solidFill>
+                <a:latin typeface="+mn-lt"/>
+                <a:ea typeface="+mn-ea"/>
+                <a:cs typeface="+mn-cs"/>
+              </a:defRPr>
+            </a:lvl8pPr>
+            <a:lvl9pPr marL="3657600" algn="l" defTabSz="914400" rtl="0" eaLnBrk="1" latinLnBrk="0" hangingPunct="1">
+              <a:defRPr sz="1800" kern="1200">
+                <a:solidFill>
+                  <a:schemeClr val="tx1"/>
+                </a:solidFill>
+                <a:latin typeface="+mn-lt"/>
+                <a:ea typeface="+mn-ea"/>
+                <a:cs typeface="+mn-cs"/>
+              </a:defRPr>
+            </a:lvl9pPr>
+          </a:lstStyle>
+          <a:p>
+            <a:pPr marL="0" indent="0" algn="ctr">
+              <a:buNone/>
+            </a:pPr>
+            <a:r>
+              <a:rPr lang="en-US" sz="800" b="1" dirty="0">
+                <a:solidFill>
+                  <a:srgbClr val="17365D"/>
+                </a:solidFill>
+              </a:rPr>
+              <a:t>Topología</a:t>
+            </a:r>
+            <a:endParaRPr lang="en-US" sz="800" dirty="0"/>
+          </a:p>
+        </p:txBody>
+      </p:sp>
+      <p:pic>
+        <p:nvPicPr>
+          <p:cNvPr id="41" name="Image 2">
+            <a:extLst>
+              <a:ext uri="{FF2B5EF4-FFF2-40B4-BE49-F238E27FC236}">
+                <a16:creationId xmlns:a16="http://schemas.microsoft.com/office/drawing/2014/main" id="{ED6E3487-6D61-A73F-E5AC-2EB8EA0BE2EF}"/>
+              </a:ext>
+            </a:extLst>
+          </p:cNvPr>
+          <p:cNvPicPr>
+            <a:picLocks noChangeAspect="1"/>
+          </p:cNvPicPr>
+          <p:nvPr/>
+        </p:nvPicPr>
+        <p:blipFill>
+          <a:blip r:embed="rId5"/>
+          <a:stretch>
+            <a:fillRect/>
+          </a:stretch>
+        </p:blipFill>
+        <p:spPr>
+          <a:xfrm>
+            <a:off x="7302305" y="3972252"/>
+            <a:ext cx="4343400" cy="1446386"/>
+          </a:xfrm>
+          <a:prstGeom prst="rect">
+            <a:avLst/>
+          </a:prstGeom>
+        </p:spPr>
+      </p:pic>
+      <p:sp>
+        <p:nvSpPr>
+          <p:cNvPr id="42" name="Text 18">
+            <a:extLst>
+              <a:ext uri="{FF2B5EF4-FFF2-40B4-BE49-F238E27FC236}">
+                <a16:creationId xmlns:a16="http://schemas.microsoft.com/office/drawing/2014/main" id="{B4769283-AEEE-86E0-B085-C441EDDAA15E}"/>
+              </a:ext>
+            </a:extLst>
+          </p:cNvPr>
+          <p:cNvSpPr/>
+          <p:nvPr/>
+        </p:nvSpPr>
+        <p:spPr>
+          <a:xfrm>
+            <a:off x="8820209" y="5495545"/>
+            <a:ext cx="1307592" cy="146304"/>
+          </a:xfrm>
+          <a:prstGeom prst="rect">
+            <a:avLst/>
+          </a:prstGeom>
+          <a:noFill/>
+          <a:ln/>
+        </p:spPr>
+        <p:txBody>
+          <a:bodyPr wrap="square" lIns="0" tIns="0" rIns="0" bIns="0" rtlCol="0" anchor="ctr"/>
+          <a:lstStyle>
+            <a:lvl1pPr marL="0" algn="l" defTabSz="914400" rtl="0" eaLnBrk="1" latinLnBrk="0" hangingPunct="1">
+              <a:defRPr sz="1800" kern="1200">
+                <a:solidFill>
+                  <a:schemeClr val="tx1"/>
+                </a:solidFill>
+                <a:latin typeface="+mn-lt"/>
+                <a:ea typeface="+mn-ea"/>
+                <a:cs typeface="+mn-cs"/>
+              </a:defRPr>
+            </a:lvl1pPr>
+            <a:lvl2pPr marL="457200" algn="l" defTabSz="914400" rtl="0" eaLnBrk="1" latinLnBrk="0" hangingPunct="1">
+              <a:defRPr sz="1800" kern="1200">
+                <a:solidFill>
+                  <a:schemeClr val="tx1"/>
+                </a:solidFill>
+                <a:latin typeface="+mn-lt"/>
+                <a:ea typeface="+mn-ea"/>
+                <a:cs typeface="+mn-cs"/>
+              </a:defRPr>
+            </a:lvl2pPr>
+            <a:lvl3pPr marL="914400" algn="l" defTabSz="914400" rtl="0" eaLnBrk="1" latinLnBrk="0" hangingPunct="1">
+              <a:defRPr sz="1800" kern="1200">
+                <a:solidFill>
+                  <a:schemeClr val="tx1"/>
+                </a:solidFill>
+                <a:latin typeface="+mn-lt"/>
+                <a:ea typeface="+mn-ea"/>
+                <a:cs typeface="+mn-cs"/>
+              </a:defRPr>
+            </a:lvl3pPr>
+            <a:lvl4pPr marL="1371600" algn="l" defTabSz="914400" rtl="0" eaLnBrk="1" latinLnBrk="0" hangingPunct="1">
+              <a:defRPr sz="1800" kern="1200">
+                <a:solidFill>
+                  <a:schemeClr val="tx1"/>
+                </a:solidFill>
+                <a:latin typeface="+mn-lt"/>
+                <a:ea typeface="+mn-ea"/>
+                <a:cs typeface="+mn-cs"/>
+              </a:defRPr>
+            </a:lvl4pPr>
+            <a:lvl5pPr marL="1828800" algn="l" defTabSz="914400" rtl="0" eaLnBrk="1" latinLnBrk="0" hangingPunct="1">
+              <a:defRPr sz="1800" kern="1200">
+                <a:solidFill>
+                  <a:schemeClr val="tx1"/>
+                </a:solidFill>
+                <a:latin typeface="+mn-lt"/>
+                <a:ea typeface="+mn-ea"/>
+                <a:cs typeface="+mn-cs"/>
+              </a:defRPr>
+            </a:lvl5pPr>
+            <a:lvl6pPr marL="2286000" algn="l" defTabSz="914400" rtl="0" eaLnBrk="1" latinLnBrk="0" hangingPunct="1">
+              <a:defRPr sz="1800" kern="1200">
+                <a:solidFill>
+                  <a:schemeClr val="tx1"/>
+                </a:solidFill>
+                <a:latin typeface="+mn-lt"/>
+                <a:ea typeface="+mn-ea"/>
+                <a:cs typeface="+mn-cs"/>
+              </a:defRPr>
+            </a:lvl6pPr>
+            <a:lvl7pPr marL="2743200" algn="l" defTabSz="914400" rtl="0" eaLnBrk="1" latinLnBrk="0" hangingPunct="1">
+              <a:defRPr sz="1800" kern="1200">
+                <a:solidFill>
+                  <a:schemeClr val="tx1"/>
+                </a:solidFill>
+                <a:latin typeface="+mn-lt"/>
+                <a:ea typeface="+mn-ea"/>
+                <a:cs typeface="+mn-cs"/>
+              </a:defRPr>
+            </a:lvl7pPr>
+            <a:lvl8pPr marL="3200400" algn="l" defTabSz="914400" rtl="0" eaLnBrk="1" latinLnBrk="0" hangingPunct="1">
+              <a:defRPr sz="1800" kern="1200">
+                <a:solidFill>
+                  <a:schemeClr val="tx1"/>
+                </a:solidFill>
+                <a:latin typeface="+mn-lt"/>
+                <a:ea typeface="+mn-ea"/>
+                <a:cs typeface="+mn-cs"/>
+              </a:defRPr>
+            </a:lvl8pPr>
+            <a:lvl9pPr marL="3657600" algn="l" defTabSz="914400" rtl="0" eaLnBrk="1" latinLnBrk="0" hangingPunct="1">
+              <a:defRPr sz="1800" kern="1200">
+                <a:solidFill>
+                  <a:schemeClr val="tx1"/>
+                </a:solidFill>
+                <a:latin typeface="+mn-lt"/>
+                <a:ea typeface="+mn-ea"/>
+                <a:cs typeface="+mn-cs"/>
+              </a:defRPr>
+            </a:lvl9pPr>
+          </a:lstStyle>
+          <a:p>
+            <a:pPr marL="0" indent="0" algn="ctr">
+              <a:buNone/>
+            </a:pPr>
+            <a:r>
+              <a:rPr lang="en-US" sz="800" b="1" dirty="0">
+                <a:solidFill>
+                  <a:srgbClr val="17365D"/>
+                </a:solidFill>
+              </a:rPr>
+              <a:t>Historial</a:t>
+            </a:r>
+            <a:endParaRPr lang="en-US" sz="800" dirty="0"/>
           </a:p>
         </p:txBody>
       </p:sp>
@@ -5836,6 +7889,7 @@
         <a:solidFill>
           <a:srgbClr val="F4F1EC"/>
         </a:solidFill>
+        <a:effectLst/>
       </p:bgPr>
     </p:bg>
     <p:spTree>
@@ -5879,7 +7933,7 @@
           <a:bodyPr wrap="square" lIns="254" tIns="254" rIns="254" bIns="254" rtlCol="0" anchor="ctr"/>
           <a:lstStyle/>
           <a:p>
-            <a:pPr algn="ctr" indent="0" marL="0">
+            <a:pPr marL="0" indent="0" algn="ctr">
               <a:buNone/>
             </a:pPr>
             <a:r>
@@ -5918,7 +7972,7 @@
           <a:bodyPr wrap="square" lIns="0" tIns="0" rIns="0" bIns="0" rtlCol="0" anchor="ctr"/>
           <a:lstStyle/>
           <a:p>
-            <a:pPr indent="0" marL="0">
+            <a:pPr marL="0" indent="0">
               <a:buNone/>
             </a:pPr>
             <a:r>
@@ -5957,7 +8011,7 @@
           <a:bodyPr wrap="square" lIns="0" tIns="0" rIns="0" bIns="0" rtlCol="0" anchor="ctr"/>
           <a:lstStyle/>
           <a:p>
-            <a:pPr indent="0" marL="0">
+            <a:pPr marL="0" indent="0">
               <a:buNone/>
             </a:pPr>
             <a:r>
@@ -5997,6 +8051,13 @@
             <a:prstDash val="solid"/>
           </a:ln>
         </p:spPr>
+        <p:txBody>
+          <a:bodyPr/>
+          <a:lstStyle/>
+          <a:p>
+            <a:endParaRPr lang="es-MX"/>
+          </a:p>
+        </p:txBody>
       </p:sp>
       <p:sp>
         <p:nvSpPr>
@@ -6019,7 +8080,7 @@
           <a:bodyPr wrap="square" lIns="0" tIns="0" rIns="0" bIns="0" rtlCol="0" anchor="ctr"/>
           <a:lstStyle/>
           <a:p>
-            <a:pPr indent="0" marL="0">
+            <a:pPr marL="0" indent="0">
               <a:buNone/>
             </a:pPr>
             <a:r>
@@ -6055,7 +8116,7 @@
           <a:bodyPr wrap="square" lIns="0" tIns="0" rIns="0" bIns="0" rtlCol="0" anchor="ctr"/>
           <a:lstStyle/>
           <a:p>
-            <a:pPr algn="r" indent="0" marL="0">
+            <a:pPr marL="0" indent="0" algn="r">
               <a:buNone/>
             </a:pPr>
             <a:r>
@@ -6080,6 +8141,90 @@
           <a:xfrm>
             <a:off x="548640" y="1024128"/>
             <a:ext cx="7680960" cy="320040"/>
+          </a:xfrm>
+          <a:prstGeom prst="rect">
+            <a:avLst/>
+          </a:prstGeom>
+          <a:noFill/>
+          <a:ln/>
+        </p:spPr>
+        <p:txBody>
+          <a:bodyPr wrap="square" lIns="254" tIns="254" rIns="254" bIns="254" rtlCol="0" anchor="t">
+            <a:normAutofit fontScale="85000" lnSpcReduction="10000"/>
+          </a:bodyPr>
+          <a:lstStyle/>
+          <a:p>
+            <a:pPr marL="0" indent="0" algn="l">
+              <a:buNone/>
+            </a:pPr>
+            <a:r>
+              <a:rPr lang="en-US" sz="1500" b="1" dirty="0">
+                <a:solidFill>
+                  <a:srgbClr val="1F2937"/>
+                </a:solidFill>
+              </a:rPr>
+              <a:t>Estas pantallas son el punto de partida: muestran funcionalidades existentes y ayudan a separar AS-IS de TO-BE.</a:t>
+            </a:r>
+            <a:endParaRPr lang="en-US" sz="1500" dirty="0"/>
+          </a:p>
+        </p:txBody>
+      </p:sp>
+      <p:pic>
+        <p:nvPicPr>
+          <p:cNvPr id="10" name="Image 1" descr="/mnt/data/barb_split/media/image16.png"/>
+          <p:cNvPicPr>
+            <a:picLocks noChangeAspect="1"/>
+          </p:cNvPicPr>
+          <p:nvPr/>
+        </p:nvPicPr>
+        <p:blipFill>
+          <a:blip r:embed="rId3"/>
+          <a:srcRect t="13900" b="13900"/>
+          <a:stretch/>
+        </p:blipFill>
+        <p:spPr>
+          <a:xfrm>
+            <a:off x="6299982" y="1519287"/>
+            <a:ext cx="5349240" cy="2057400"/>
+          </a:xfrm>
+          <a:prstGeom prst="rect">
+            <a:avLst/>
+          </a:prstGeom>
+        </p:spPr>
+      </p:pic>
+      <p:pic>
+        <p:nvPicPr>
+          <p:cNvPr id="13" name="Image 4" descr="/mnt/data/barb_split/media/image22.png"/>
+          <p:cNvPicPr>
+            <a:picLocks noChangeAspect="1"/>
+          </p:cNvPicPr>
+          <p:nvPr/>
+        </p:nvPicPr>
+        <p:blipFill>
+          <a:blip r:embed="rId4"/>
+          <a:srcRect l="9717" r="9717"/>
+          <a:stretch/>
+        </p:blipFill>
+        <p:spPr>
+          <a:xfrm>
+            <a:off x="8025873" y="3965306"/>
+            <a:ext cx="3429000" cy="1417320"/>
+          </a:xfrm>
+          <a:prstGeom prst="rect">
+            <a:avLst/>
+          </a:prstGeom>
+        </p:spPr>
+      </p:pic>
+      <p:sp>
+        <p:nvSpPr>
+          <p:cNvPr id="14" name="Text 7"/>
+          <p:cNvSpPr/>
+          <p:nvPr/>
+        </p:nvSpPr>
+        <p:spPr>
+          <a:xfrm>
+            <a:off x="624840" y="5986494"/>
+            <a:ext cx="10972800" cy="219456"/>
           </a:xfrm>
           <a:prstGeom prst="rect">
             <a:avLst/>
@@ -6093,38 +8238,45 @@
           </a:bodyPr>
           <a:lstStyle/>
           <a:p>
-            <a:pPr algn="l" indent="0" marL="0">
-              <a:buNone/>
-            </a:pPr>
-            <a:r>
-              <a:rPr lang="en-US" sz="1500" b="1" dirty="0">
-                <a:solidFill>
-                  <a:srgbClr val="1F2937"/>
-                </a:solidFill>
-              </a:rPr>
-              <a:t>Estas pantallas son el punto de partida: muestran funcionalidades existentes y ayudan a separar AS-IS de TO-BE.</a:t>
-            </a:r>
-            <a:endParaRPr lang="en-US" sz="1500" dirty="0"/>
+            <a:pPr marL="0" indent="0" algn="ctr">
+              <a:buNone/>
+            </a:pPr>
+            <a:r>
+              <a:rPr lang="en-US" sz="1000" i="1" dirty="0">
+                <a:solidFill>
+                  <a:srgbClr val="6B7280"/>
+                </a:solidFill>
+              </a:rPr>
+              <a:t>Dashboard KPI · Órdenes de trabajo · Chat documental · Carga documental · Historial</a:t>
+            </a:r>
+            <a:endParaRPr lang="en-US" sz="1000" dirty="0"/>
           </a:p>
         </p:txBody>
       </p:sp>
       <p:pic>
         <p:nvPicPr>
-          <p:cNvPr id="9" name="Image 0" descr="/mnt/data/barb_split/media/image14.png">    </p:cNvPr>
+          <p:cNvPr id="15" name="Image 1">
+            <a:extLst>
+              <a:ext uri="{FF2B5EF4-FFF2-40B4-BE49-F238E27FC236}">
+                <a16:creationId xmlns:a16="http://schemas.microsoft.com/office/drawing/2014/main" id="{63AC5572-5DDF-1285-29A8-EBF51E999B34}"/>
+              </a:ext>
+            </a:extLst>
+          </p:cNvPr>
           <p:cNvPicPr>
             <a:picLocks noChangeAspect="1"/>
           </p:cNvPicPr>
           <p:nvPr/>
         </p:nvPicPr>
         <p:blipFill>
-          <a:blip r:embed="rId1"/>
-          <a:srcRect l="10581" r="10581" t="0" b="0"/>
-          <a:stretch/>
+          <a:blip r:embed="rId5"/>
+          <a:stretch>
+            <a:fillRect/>
+          </a:stretch>
         </p:blipFill>
         <p:spPr>
           <a:xfrm>
-            <a:off x="594360" y="1600200"/>
-            <a:ext cx="5349240" cy="2057400"/>
+            <a:off x="606552" y="1710968"/>
+            <a:ext cx="4864613" cy="1835863"/>
           </a:xfrm>
           <a:prstGeom prst="rect">
             <a:avLst/>
@@ -6133,21 +8285,28 @@
       </p:pic>
       <p:pic>
         <p:nvPicPr>
-          <p:cNvPr id="10" name="Image 1" descr="/mnt/data/barb_split/media/image16.png">    </p:cNvPr>
+          <p:cNvPr id="17" name="Imagen 16">
+            <a:extLst>
+              <a:ext uri="{FF2B5EF4-FFF2-40B4-BE49-F238E27FC236}">
+                <a16:creationId xmlns:a16="http://schemas.microsoft.com/office/drawing/2014/main" id="{9A11D080-6F48-5328-53D9-643C7EEB95E6}"/>
+              </a:ext>
+            </a:extLst>
+          </p:cNvPr>
           <p:cNvPicPr>
             <a:picLocks noChangeAspect="1"/>
           </p:cNvPicPr>
           <p:nvPr/>
         </p:nvPicPr>
         <p:blipFill>
-          <a:blip r:embed="rId2"/>
-          <a:srcRect l="0" r="0" t="13900" b="13900"/>
-          <a:stretch/>
+          <a:blip r:embed="rId6"/>
+          <a:stretch>
+            <a:fillRect/>
+          </a:stretch>
         </p:blipFill>
         <p:spPr>
           <a:xfrm>
-            <a:off x="6236208" y="1600200"/>
-            <a:ext cx="5349240" cy="2057400"/>
+            <a:off x="624840" y="3804139"/>
+            <a:ext cx="2810022" cy="1800638"/>
           </a:xfrm>
           <a:prstGeom prst="rect">
             <a:avLst/>
@@ -6156,83 +8315,92 @@
       </p:pic>
       <p:pic>
         <p:nvPicPr>
-          <p:cNvPr id="11" name="Image 2" descr="/mnt/data/barb_split/media/image19.png">    </p:cNvPr>
+          <p:cNvPr id="18" name="Image 1">
+            <a:extLst>
+              <a:ext uri="{FF2B5EF4-FFF2-40B4-BE49-F238E27FC236}">
+                <a16:creationId xmlns:a16="http://schemas.microsoft.com/office/drawing/2014/main" id="{5BC4AB55-F1A0-1E70-8067-B89465F8A4EE}"/>
+              </a:ext>
+            </a:extLst>
+          </p:cNvPr>
           <p:cNvPicPr>
             <a:picLocks noChangeAspect="1"/>
           </p:cNvPicPr>
           <p:nvPr/>
         </p:nvPicPr>
         <p:blipFill>
-          <a:blip r:embed="rId3"/>
-          <a:srcRect l="0" r="0" t="13763" b="13763"/>
-          <a:stretch/>
+          <a:blip r:embed="rId7"/>
+          <a:stretch>
+            <a:fillRect/>
+          </a:stretch>
         </p:blipFill>
         <p:spPr>
           <a:xfrm>
-            <a:off x="594360" y="3977640"/>
-            <a:ext cx="3429000" cy="1417320"/>
+            <a:off x="4429365" y="3896199"/>
+            <a:ext cx="2602005" cy="1800639"/>
           </a:xfrm>
           <a:prstGeom prst="rect">
             <a:avLst/>
           </a:prstGeom>
         </p:spPr>
       </p:pic>
-      <p:pic>
-        <p:nvPicPr>
-          <p:cNvPr id="12" name="Image 3" descr="/mnt/data/barb_split/media/image20.png">    </p:cNvPr>
-          <p:cNvPicPr>
-            <a:picLocks noChangeAspect="1"/>
-          </p:cNvPicPr>
-          <p:nvPr/>
-        </p:nvPicPr>
-        <p:blipFill>
-          <a:blip r:embed="rId4"/>
-          <a:srcRect l="0" r="0" t="20136" b="20136"/>
-          <a:stretch/>
-        </p:blipFill>
-        <p:spPr>
-          <a:xfrm>
-            <a:off x="4370832" y="3977640"/>
-            <a:ext cx="3429000" cy="1417320"/>
-          </a:xfrm>
-          <a:prstGeom prst="rect">
-            <a:avLst/>
-          </a:prstGeom>
-        </p:spPr>
-      </p:pic>
-      <p:pic>
-        <p:nvPicPr>
-          <p:cNvPr id="13" name="Image 4" descr="/mnt/data/barb_split/media/image22.png">    </p:cNvPr>
-          <p:cNvPicPr>
-            <a:picLocks noChangeAspect="1"/>
-          </p:cNvPicPr>
-          <p:nvPr/>
-        </p:nvPicPr>
-        <p:blipFill>
-          <a:blip r:embed="rId5"/>
-          <a:srcRect l="9717" r="9717" t="0" b="0"/>
-          <a:stretch/>
-        </p:blipFill>
-        <p:spPr>
-          <a:xfrm>
-            <a:off x="8138160" y="3977640"/>
-            <a:ext cx="3429000" cy="1417320"/>
-          </a:xfrm>
-          <a:prstGeom prst="rect">
-            <a:avLst/>
-          </a:prstGeom>
-        </p:spPr>
-      </p:pic>
-      <p:sp>
-        <p:nvSpPr>
-          <p:cNvPr id="14" name="Text 7"/>
-          <p:cNvSpPr/>
-          <p:nvPr/>
-        </p:nvSpPr>
-        <p:spPr>
-          <a:xfrm>
-            <a:off x="594360" y="5696712"/>
-            <a:ext cx="10972800" cy="219456"/>
+      <p:sp>
+        <p:nvSpPr>
+          <p:cNvPr id="19" name="Shape 5">
+            <a:extLst>
+              <a:ext uri="{FF2B5EF4-FFF2-40B4-BE49-F238E27FC236}">
+                <a16:creationId xmlns:a16="http://schemas.microsoft.com/office/drawing/2014/main" id="{522AD7F4-0702-828A-4141-9D749140F482}"/>
+              </a:ext>
+            </a:extLst>
+          </p:cNvPr>
+          <p:cNvSpPr/>
+          <p:nvPr/>
+        </p:nvSpPr>
+        <p:spPr>
+          <a:xfrm>
+            <a:off x="5054287" y="5382626"/>
+            <a:ext cx="1450523" cy="268002"/>
+          </a:xfrm>
+          <a:prstGeom prst="roundRect">
+            <a:avLst>
+              <a:gd name="adj" fmla="val 18750"/>
+            </a:avLst>
+          </a:prstGeom>
+          <a:solidFill>
+            <a:srgbClr val="FFFFFF">
+              <a:alpha val="93000"/>
+            </a:srgbClr>
+          </a:solidFill>
+          <a:ln w="12700">
+            <a:solidFill>
+              <a:srgbClr val="D0D7E2"/>
+            </a:solidFill>
+            <a:prstDash val="solid"/>
+          </a:ln>
+        </p:spPr>
+        <p:txBody>
+          <a:bodyPr/>
+          <a:lstStyle/>
+          <a:p>
+            <a:endParaRPr lang="es-MX"/>
+          </a:p>
+        </p:txBody>
+      </p:sp>
+      <p:sp>
+        <p:nvSpPr>
+          <p:cNvPr id="20" name="Text 6">
+            <a:extLst>
+              <a:ext uri="{FF2B5EF4-FFF2-40B4-BE49-F238E27FC236}">
+                <a16:creationId xmlns:a16="http://schemas.microsoft.com/office/drawing/2014/main" id="{7256A851-FD51-8EF0-B93B-BAECEC3EAD4F}"/>
+              </a:ext>
+            </a:extLst>
+          </p:cNvPr>
+          <p:cNvSpPr/>
+          <p:nvPr/>
+        </p:nvSpPr>
+        <p:spPr>
+          <a:xfrm>
+            <a:off x="5109151" y="5434330"/>
+            <a:ext cx="1351058" cy="134001"/>
           </a:xfrm>
           <a:prstGeom prst="rect">
             <a:avLst/>
@@ -6241,23 +8409,645 @@
           <a:ln/>
         </p:spPr>
         <p:txBody>
-          <a:bodyPr wrap="square" lIns="254" tIns="254" rIns="254" bIns="254" rtlCol="0" anchor="t">
-            <a:normAutofit/>
-          </a:bodyPr>
-          <a:lstStyle/>
-          <a:p>
-            <a:pPr algn="ctr" indent="0" marL="0">
-              <a:buNone/>
-            </a:pPr>
-            <a:r>
-              <a:rPr lang="en-US" sz="1000" i="1" dirty="0">
-                <a:solidFill>
-                  <a:srgbClr val="6B7280"/>
-                </a:solidFill>
-              </a:rPr>
-              <a:t>Dashboard KPI · Órdenes de trabajo · Chat documental · Carga documental · Historial</a:t>
-            </a:r>
-            <a:endParaRPr lang="en-US" sz="1000" dirty="0"/>
+          <a:bodyPr wrap="square" lIns="0" tIns="0" rIns="0" bIns="0" rtlCol="0" anchor="ctr"/>
+          <a:lstStyle>
+            <a:lvl1pPr marL="0" algn="l" defTabSz="914400" rtl="0" eaLnBrk="1" latinLnBrk="0" hangingPunct="1">
+              <a:defRPr sz="1800" kern="1200">
+                <a:solidFill>
+                  <a:schemeClr val="tx1"/>
+                </a:solidFill>
+                <a:latin typeface="+mn-lt"/>
+                <a:ea typeface="+mn-ea"/>
+                <a:cs typeface="+mn-cs"/>
+              </a:defRPr>
+            </a:lvl1pPr>
+            <a:lvl2pPr marL="457200" algn="l" defTabSz="914400" rtl="0" eaLnBrk="1" latinLnBrk="0" hangingPunct="1">
+              <a:defRPr sz="1800" kern="1200">
+                <a:solidFill>
+                  <a:schemeClr val="tx1"/>
+                </a:solidFill>
+                <a:latin typeface="+mn-lt"/>
+                <a:ea typeface="+mn-ea"/>
+                <a:cs typeface="+mn-cs"/>
+              </a:defRPr>
+            </a:lvl2pPr>
+            <a:lvl3pPr marL="914400" algn="l" defTabSz="914400" rtl="0" eaLnBrk="1" latinLnBrk="0" hangingPunct="1">
+              <a:defRPr sz="1800" kern="1200">
+                <a:solidFill>
+                  <a:schemeClr val="tx1"/>
+                </a:solidFill>
+                <a:latin typeface="+mn-lt"/>
+                <a:ea typeface="+mn-ea"/>
+                <a:cs typeface="+mn-cs"/>
+              </a:defRPr>
+            </a:lvl3pPr>
+            <a:lvl4pPr marL="1371600" algn="l" defTabSz="914400" rtl="0" eaLnBrk="1" latinLnBrk="0" hangingPunct="1">
+              <a:defRPr sz="1800" kern="1200">
+                <a:solidFill>
+                  <a:schemeClr val="tx1"/>
+                </a:solidFill>
+                <a:latin typeface="+mn-lt"/>
+                <a:ea typeface="+mn-ea"/>
+                <a:cs typeface="+mn-cs"/>
+              </a:defRPr>
+            </a:lvl4pPr>
+            <a:lvl5pPr marL="1828800" algn="l" defTabSz="914400" rtl="0" eaLnBrk="1" latinLnBrk="0" hangingPunct="1">
+              <a:defRPr sz="1800" kern="1200">
+                <a:solidFill>
+                  <a:schemeClr val="tx1"/>
+                </a:solidFill>
+                <a:latin typeface="+mn-lt"/>
+                <a:ea typeface="+mn-ea"/>
+                <a:cs typeface="+mn-cs"/>
+              </a:defRPr>
+            </a:lvl5pPr>
+            <a:lvl6pPr marL="2286000" algn="l" defTabSz="914400" rtl="0" eaLnBrk="1" latinLnBrk="0" hangingPunct="1">
+              <a:defRPr sz="1800" kern="1200">
+                <a:solidFill>
+                  <a:schemeClr val="tx1"/>
+                </a:solidFill>
+                <a:latin typeface="+mn-lt"/>
+                <a:ea typeface="+mn-ea"/>
+                <a:cs typeface="+mn-cs"/>
+              </a:defRPr>
+            </a:lvl6pPr>
+            <a:lvl7pPr marL="2743200" algn="l" defTabSz="914400" rtl="0" eaLnBrk="1" latinLnBrk="0" hangingPunct="1">
+              <a:defRPr sz="1800" kern="1200">
+                <a:solidFill>
+                  <a:schemeClr val="tx1"/>
+                </a:solidFill>
+                <a:latin typeface="+mn-lt"/>
+                <a:ea typeface="+mn-ea"/>
+                <a:cs typeface="+mn-cs"/>
+              </a:defRPr>
+            </a:lvl7pPr>
+            <a:lvl8pPr marL="3200400" algn="l" defTabSz="914400" rtl="0" eaLnBrk="1" latinLnBrk="0" hangingPunct="1">
+              <a:defRPr sz="1800" kern="1200">
+                <a:solidFill>
+                  <a:schemeClr val="tx1"/>
+                </a:solidFill>
+                <a:latin typeface="+mn-lt"/>
+                <a:ea typeface="+mn-ea"/>
+                <a:cs typeface="+mn-cs"/>
+              </a:defRPr>
+            </a:lvl8pPr>
+            <a:lvl9pPr marL="3657600" algn="l" defTabSz="914400" rtl="0" eaLnBrk="1" latinLnBrk="0" hangingPunct="1">
+              <a:defRPr sz="1800" kern="1200">
+                <a:solidFill>
+                  <a:schemeClr val="tx1"/>
+                </a:solidFill>
+                <a:latin typeface="+mn-lt"/>
+                <a:ea typeface="+mn-ea"/>
+                <a:cs typeface="+mn-cs"/>
+              </a:defRPr>
+            </a:lvl9pPr>
+          </a:lstStyle>
+          <a:p>
+            <a:pPr marL="0" indent="0" algn="ctr">
+              <a:buNone/>
+            </a:pPr>
+            <a:r>
+              <a:rPr lang="en-US" sz="800" b="1" dirty="0">
+                <a:solidFill>
+                  <a:srgbClr val="17365D"/>
+                </a:solidFill>
+              </a:rPr>
+              <a:t>Carga documental</a:t>
+            </a:r>
+            <a:endParaRPr lang="en-US" sz="800" dirty="0"/>
+          </a:p>
+        </p:txBody>
+      </p:sp>
+      <p:sp>
+        <p:nvSpPr>
+          <p:cNvPr id="22" name="Shape 5">
+            <a:extLst>
+              <a:ext uri="{FF2B5EF4-FFF2-40B4-BE49-F238E27FC236}">
+                <a16:creationId xmlns:a16="http://schemas.microsoft.com/office/drawing/2014/main" id="{5FDB1A26-0A0E-AC31-FCF8-3D29210F2F4E}"/>
+              </a:ext>
+            </a:extLst>
+          </p:cNvPr>
+          <p:cNvSpPr/>
+          <p:nvPr/>
+        </p:nvSpPr>
+        <p:spPr>
+          <a:xfrm>
+            <a:off x="8289850" y="3377294"/>
+            <a:ext cx="1450523" cy="268002"/>
+          </a:xfrm>
+          <a:prstGeom prst="roundRect">
+            <a:avLst>
+              <a:gd name="adj" fmla="val 18750"/>
+            </a:avLst>
+          </a:prstGeom>
+          <a:solidFill>
+            <a:srgbClr val="FFFFFF">
+              <a:alpha val="93000"/>
+            </a:srgbClr>
+          </a:solidFill>
+          <a:ln w="12700">
+            <a:solidFill>
+              <a:srgbClr val="D0D7E2"/>
+            </a:solidFill>
+            <a:prstDash val="solid"/>
+          </a:ln>
+        </p:spPr>
+        <p:txBody>
+          <a:bodyPr/>
+          <a:lstStyle/>
+          <a:p>
+            <a:endParaRPr lang="es-MX"/>
+          </a:p>
+        </p:txBody>
+      </p:sp>
+      <p:sp>
+        <p:nvSpPr>
+          <p:cNvPr id="24" name="Shape 5">
+            <a:extLst>
+              <a:ext uri="{FF2B5EF4-FFF2-40B4-BE49-F238E27FC236}">
+                <a16:creationId xmlns:a16="http://schemas.microsoft.com/office/drawing/2014/main" id="{6BDA0CDC-7E16-6159-205D-2C7D476D96B5}"/>
+              </a:ext>
+            </a:extLst>
+          </p:cNvPr>
+          <p:cNvSpPr/>
+          <p:nvPr/>
+        </p:nvSpPr>
+        <p:spPr>
+          <a:xfrm>
+            <a:off x="8944122" y="5204712"/>
+            <a:ext cx="1450523" cy="268002"/>
+          </a:xfrm>
+          <a:prstGeom prst="roundRect">
+            <a:avLst>
+              <a:gd name="adj" fmla="val 18750"/>
+            </a:avLst>
+          </a:prstGeom>
+          <a:solidFill>
+            <a:srgbClr val="FFFFFF">
+              <a:alpha val="93000"/>
+            </a:srgbClr>
+          </a:solidFill>
+          <a:ln w="12700">
+            <a:solidFill>
+              <a:srgbClr val="D0D7E2"/>
+            </a:solidFill>
+            <a:prstDash val="solid"/>
+          </a:ln>
+        </p:spPr>
+        <p:txBody>
+          <a:bodyPr/>
+          <a:lstStyle/>
+          <a:p>
+            <a:endParaRPr lang="es-MX"/>
+          </a:p>
+        </p:txBody>
+      </p:sp>
+      <p:sp>
+        <p:nvSpPr>
+          <p:cNvPr id="26" name="Shape 5">
+            <a:extLst>
+              <a:ext uri="{FF2B5EF4-FFF2-40B4-BE49-F238E27FC236}">
+                <a16:creationId xmlns:a16="http://schemas.microsoft.com/office/drawing/2014/main" id="{0AD14257-60D4-1101-68E1-F45FB7A2353A}"/>
+              </a:ext>
+            </a:extLst>
+          </p:cNvPr>
+          <p:cNvSpPr/>
+          <p:nvPr/>
+        </p:nvSpPr>
+        <p:spPr>
+          <a:xfrm>
+            <a:off x="2313596" y="3286423"/>
+            <a:ext cx="1450523" cy="268002"/>
+          </a:xfrm>
+          <a:prstGeom prst="roundRect">
+            <a:avLst>
+              <a:gd name="adj" fmla="val 18750"/>
+            </a:avLst>
+          </a:prstGeom>
+          <a:solidFill>
+            <a:srgbClr val="FFFFFF">
+              <a:alpha val="93000"/>
+            </a:srgbClr>
+          </a:solidFill>
+          <a:ln w="12700">
+            <a:solidFill>
+              <a:srgbClr val="D0D7E2"/>
+            </a:solidFill>
+            <a:prstDash val="solid"/>
+          </a:ln>
+        </p:spPr>
+        <p:txBody>
+          <a:bodyPr/>
+          <a:lstStyle/>
+          <a:p>
+            <a:endParaRPr lang="es-MX" dirty="0"/>
+          </a:p>
+        </p:txBody>
+      </p:sp>
+      <p:sp>
+        <p:nvSpPr>
+          <p:cNvPr id="28" name="Text 6">
+            <a:extLst>
+              <a:ext uri="{FF2B5EF4-FFF2-40B4-BE49-F238E27FC236}">
+                <a16:creationId xmlns:a16="http://schemas.microsoft.com/office/drawing/2014/main" id="{05DD87FE-BAFD-221E-3FDD-6BC8C9FB4BE0}"/>
+              </a:ext>
+            </a:extLst>
+          </p:cNvPr>
+          <p:cNvSpPr/>
+          <p:nvPr/>
+        </p:nvSpPr>
+        <p:spPr>
+          <a:xfrm>
+            <a:off x="2388443" y="3353423"/>
+            <a:ext cx="1351058" cy="134001"/>
+          </a:xfrm>
+          <a:prstGeom prst="rect">
+            <a:avLst/>
+          </a:prstGeom>
+          <a:noFill/>
+          <a:ln/>
+        </p:spPr>
+        <p:txBody>
+          <a:bodyPr wrap="square" lIns="0" tIns="0" rIns="0" bIns="0" rtlCol="0" anchor="ctr"/>
+          <a:lstStyle>
+            <a:lvl1pPr marL="0" algn="l" defTabSz="914400" rtl="0" eaLnBrk="1" latinLnBrk="0" hangingPunct="1">
+              <a:defRPr sz="1800" kern="1200">
+                <a:solidFill>
+                  <a:schemeClr val="tx1"/>
+                </a:solidFill>
+                <a:latin typeface="+mn-lt"/>
+                <a:ea typeface="+mn-ea"/>
+                <a:cs typeface="+mn-cs"/>
+              </a:defRPr>
+            </a:lvl1pPr>
+            <a:lvl2pPr marL="457200" algn="l" defTabSz="914400" rtl="0" eaLnBrk="1" latinLnBrk="0" hangingPunct="1">
+              <a:defRPr sz="1800" kern="1200">
+                <a:solidFill>
+                  <a:schemeClr val="tx1"/>
+                </a:solidFill>
+                <a:latin typeface="+mn-lt"/>
+                <a:ea typeface="+mn-ea"/>
+                <a:cs typeface="+mn-cs"/>
+              </a:defRPr>
+            </a:lvl2pPr>
+            <a:lvl3pPr marL="914400" algn="l" defTabSz="914400" rtl="0" eaLnBrk="1" latinLnBrk="0" hangingPunct="1">
+              <a:defRPr sz="1800" kern="1200">
+                <a:solidFill>
+                  <a:schemeClr val="tx1"/>
+                </a:solidFill>
+                <a:latin typeface="+mn-lt"/>
+                <a:ea typeface="+mn-ea"/>
+                <a:cs typeface="+mn-cs"/>
+              </a:defRPr>
+            </a:lvl3pPr>
+            <a:lvl4pPr marL="1371600" algn="l" defTabSz="914400" rtl="0" eaLnBrk="1" latinLnBrk="0" hangingPunct="1">
+              <a:defRPr sz="1800" kern="1200">
+                <a:solidFill>
+                  <a:schemeClr val="tx1"/>
+                </a:solidFill>
+                <a:latin typeface="+mn-lt"/>
+                <a:ea typeface="+mn-ea"/>
+                <a:cs typeface="+mn-cs"/>
+              </a:defRPr>
+            </a:lvl4pPr>
+            <a:lvl5pPr marL="1828800" algn="l" defTabSz="914400" rtl="0" eaLnBrk="1" latinLnBrk="0" hangingPunct="1">
+              <a:defRPr sz="1800" kern="1200">
+                <a:solidFill>
+                  <a:schemeClr val="tx1"/>
+                </a:solidFill>
+                <a:latin typeface="+mn-lt"/>
+                <a:ea typeface="+mn-ea"/>
+                <a:cs typeface="+mn-cs"/>
+              </a:defRPr>
+            </a:lvl5pPr>
+            <a:lvl6pPr marL="2286000" algn="l" defTabSz="914400" rtl="0" eaLnBrk="1" latinLnBrk="0" hangingPunct="1">
+              <a:defRPr sz="1800" kern="1200">
+                <a:solidFill>
+                  <a:schemeClr val="tx1"/>
+                </a:solidFill>
+                <a:latin typeface="+mn-lt"/>
+                <a:ea typeface="+mn-ea"/>
+                <a:cs typeface="+mn-cs"/>
+              </a:defRPr>
+            </a:lvl6pPr>
+            <a:lvl7pPr marL="2743200" algn="l" defTabSz="914400" rtl="0" eaLnBrk="1" latinLnBrk="0" hangingPunct="1">
+              <a:defRPr sz="1800" kern="1200">
+                <a:solidFill>
+                  <a:schemeClr val="tx1"/>
+                </a:solidFill>
+                <a:latin typeface="+mn-lt"/>
+                <a:ea typeface="+mn-ea"/>
+                <a:cs typeface="+mn-cs"/>
+              </a:defRPr>
+            </a:lvl7pPr>
+            <a:lvl8pPr marL="3200400" algn="l" defTabSz="914400" rtl="0" eaLnBrk="1" latinLnBrk="0" hangingPunct="1">
+              <a:defRPr sz="1800" kern="1200">
+                <a:solidFill>
+                  <a:schemeClr val="tx1"/>
+                </a:solidFill>
+                <a:latin typeface="+mn-lt"/>
+                <a:ea typeface="+mn-ea"/>
+                <a:cs typeface="+mn-cs"/>
+              </a:defRPr>
+            </a:lvl8pPr>
+            <a:lvl9pPr marL="3657600" algn="l" defTabSz="914400" rtl="0" eaLnBrk="1" latinLnBrk="0" hangingPunct="1">
+              <a:defRPr sz="1800" kern="1200">
+                <a:solidFill>
+                  <a:schemeClr val="tx1"/>
+                </a:solidFill>
+                <a:latin typeface="+mn-lt"/>
+                <a:ea typeface="+mn-ea"/>
+                <a:cs typeface="+mn-cs"/>
+              </a:defRPr>
+            </a:lvl9pPr>
+          </a:lstStyle>
+          <a:p>
+            <a:pPr marL="0" indent="0" algn="ctr">
+              <a:buNone/>
+            </a:pPr>
+            <a:r>
+              <a:rPr lang="en-US" sz="800" b="1" dirty="0">
+                <a:solidFill>
+                  <a:srgbClr val="17365D"/>
+                </a:solidFill>
+              </a:rPr>
+              <a:t>KPI</a:t>
+            </a:r>
+            <a:endParaRPr lang="en-US" sz="800" dirty="0"/>
+          </a:p>
+        </p:txBody>
+      </p:sp>
+      <p:sp>
+        <p:nvSpPr>
+          <p:cNvPr id="30" name="Text 6">
+            <a:extLst>
+              <a:ext uri="{FF2B5EF4-FFF2-40B4-BE49-F238E27FC236}">
+                <a16:creationId xmlns:a16="http://schemas.microsoft.com/office/drawing/2014/main" id="{1FDD2C30-2E5D-C868-53A0-BB6A2F8AA148}"/>
+              </a:ext>
+            </a:extLst>
+          </p:cNvPr>
+          <p:cNvSpPr/>
+          <p:nvPr/>
+        </p:nvSpPr>
+        <p:spPr>
+          <a:xfrm>
+            <a:off x="8299073" y="3444979"/>
+            <a:ext cx="1351058" cy="134001"/>
+          </a:xfrm>
+          <a:prstGeom prst="rect">
+            <a:avLst/>
+          </a:prstGeom>
+          <a:noFill/>
+          <a:ln/>
+        </p:spPr>
+        <p:txBody>
+          <a:bodyPr wrap="square" lIns="0" tIns="0" rIns="0" bIns="0" rtlCol="0" anchor="ctr"/>
+          <a:lstStyle>
+            <a:lvl1pPr marL="0" algn="l" defTabSz="914400" rtl="0" eaLnBrk="1" latinLnBrk="0" hangingPunct="1">
+              <a:defRPr sz="1800" kern="1200">
+                <a:solidFill>
+                  <a:schemeClr val="tx1"/>
+                </a:solidFill>
+                <a:latin typeface="+mn-lt"/>
+                <a:ea typeface="+mn-ea"/>
+                <a:cs typeface="+mn-cs"/>
+              </a:defRPr>
+            </a:lvl1pPr>
+            <a:lvl2pPr marL="457200" algn="l" defTabSz="914400" rtl="0" eaLnBrk="1" latinLnBrk="0" hangingPunct="1">
+              <a:defRPr sz="1800" kern="1200">
+                <a:solidFill>
+                  <a:schemeClr val="tx1"/>
+                </a:solidFill>
+                <a:latin typeface="+mn-lt"/>
+                <a:ea typeface="+mn-ea"/>
+                <a:cs typeface="+mn-cs"/>
+              </a:defRPr>
+            </a:lvl2pPr>
+            <a:lvl3pPr marL="914400" algn="l" defTabSz="914400" rtl="0" eaLnBrk="1" latinLnBrk="0" hangingPunct="1">
+              <a:defRPr sz="1800" kern="1200">
+                <a:solidFill>
+                  <a:schemeClr val="tx1"/>
+                </a:solidFill>
+                <a:latin typeface="+mn-lt"/>
+                <a:ea typeface="+mn-ea"/>
+                <a:cs typeface="+mn-cs"/>
+              </a:defRPr>
+            </a:lvl3pPr>
+            <a:lvl4pPr marL="1371600" algn="l" defTabSz="914400" rtl="0" eaLnBrk="1" latinLnBrk="0" hangingPunct="1">
+              <a:defRPr sz="1800" kern="1200">
+                <a:solidFill>
+                  <a:schemeClr val="tx1"/>
+                </a:solidFill>
+                <a:latin typeface="+mn-lt"/>
+                <a:ea typeface="+mn-ea"/>
+                <a:cs typeface="+mn-cs"/>
+              </a:defRPr>
+            </a:lvl4pPr>
+            <a:lvl5pPr marL="1828800" algn="l" defTabSz="914400" rtl="0" eaLnBrk="1" latinLnBrk="0" hangingPunct="1">
+              <a:defRPr sz="1800" kern="1200">
+                <a:solidFill>
+                  <a:schemeClr val="tx1"/>
+                </a:solidFill>
+                <a:latin typeface="+mn-lt"/>
+                <a:ea typeface="+mn-ea"/>
+                <a:cs typeface="+mn-cs"/>
+              </a:defRPr>
+            </a:lvl5pPr>
+            <a:lvl6pPr marL="2286000" algn="l" defTabSz="914400" rtl="0" eaLnBrk="1" latinLnBrk="0" hangingPunct="1">
+              <a:defRPr sz="1800" kern="1200">
+                <a:solidFill>
+                  <a:schemeClr val="tx1"/>
+                </a:solidFill>
+                <a:latin typeface="+mn-lt"/>
+                <a:ea typeface="+mn-ea"/>
+                <a:cs typeface="+mn-cs"/>
+              </a:defRPr>
+            </a:lvl6pPr>
+            <a:lvl7pPr marL="2743200" algn="l" defTabSz="914400" rtl="0" eaLnBrk="1" latinLnBrk="0" hangingPunct="1">
+              <a:defRPr sz="1800" kern="1200">
+                <a:solidFill>
+                  <a:schemeClr val="tx1"/>
+                </a:solidFill>
+                <a:latin typeface="+mn-lt"/>
+                <a:ea typeface="+mn-ea"/>
+                <a:cs typeface="+mn-cs"/>
+              </a:defRPr>
+            </a:lvl7pPr>
+            <a:lvl8pPr marL="3200400" algn="l" defTabSz="914400" rtl="0" eaLnBrk="1" latinLnBrk="0" hangingPunct="1">
+              <a:defRPr sz="1800" kern="1200">
+                <a:solidFill>
+                  <a:schemeClr val="tx1"/>
+                </a:solidFill>
+                <a:latin typeface="+mn-lt"/>
+                <a:ea typeface="+mn-ea"/>
+                <a:cs typeface="+mn-cs"/>
+              </a:defRPr>
+            </a:lvl8pPr>
+            <a:lvl9pPr marL="3657600" algn="l" defTabSz="914400" rtl="0" eaLnBrk="1" latinLnBrk="0" hangingPunct="1">
+              <a:defRPr sz="1800" kern="1200">
+                <a:solidFill>
+                  <a:schemeClr val="tx1"/>
+                </a:solidFill>
+                <a:latin typeface="+mn-lt"/>
+                <a:ea typeface="+mn-ea"/>
+                <a:cs typeface="+mn-cs"/>
+              </a:defRPr>
+            </a:lvl9pPr>
+          </a:lstStyle>
+          <a:p>
+            <a:pPr marL="0" indent="0" algn="ctr">
+              <a:buNone/>
+            </a:pPr>
+            <a:r>
+              <a:rPr lang="en-US" sz="800" b="1" dirty="0">
+                <a:solidFill>
+                  <a:srgbClr val="17365D"/>
+                </a:solidFill>
+              </a:rPr>
+              <a:t>Ordenes de </a:t>
+            </a:r>
+            <a:r>
+              <a:rPr lang="en-US" sz="800" b="1" dirty="0" err="1">
+                <a:solidFill>
+                  <a:srgbClr val="17365D"/>
+                </a:solidFill>
+              </a:rPr>
+              <a:t>trabajo</a:t>
+            </a:r>
+            <a:endParaRPr lang="en-US" sz="800" dirty="0"/>
+          </a:p>
+        </p:txBody>
+      </p:sp>
+      <p:sp>
+        <p:nvSpPr>
+          <p:cNvPr id="32" name="Text 6">
+            <a:extLst>
+              <a:ext uri="{FF2B5EF4-FFF2-40B4-BE49-F238E27FC236}">
+                <a16:creationId xmlns:a16="http://schemas.microsoft.com/office/drawing/2014/main" id="{9A789CEA-5EDE-0E45-6CAD-DC0B244D7356}"/>
+              </a:ext>
+            </a:extLst>
+          </p:cNvPr>
+          <p:cNvSpPr/>
+          <p:nvPr/>
+        </p:nvSpPr>
+        <p:spPr>
+          <a:xfrm>
+            <a:off x="8974602" y="5271712"/>
+            <a:ext cx="1351058" cy="134001"/>
+          </a:xfrm>
+          <a:prstGeom prst="rect">
+            <a:avLst/>
+          </a:prstGeom>
+          <a:noFill/>
+          <a:ln/>
+        </p:spPr>
+        <p:txBody>
+          <a:bodyPr wrap="square" lIns="0" tIns="0" rIns="0" bIns="0" rtlCol="0" anchor="ctr"/>
+          <a:lstStyle>
+            <a:lvl1pPr marL="0" algn="l" defTabSz="914400" rtl="0" eaLnBrk="1" latinLnBrk="0" hangingPunct="1">
+              <a:defRPr sz="1800" kern="1200">
+                <a:solidFill>
+                  <a:schemeClr val="tx1"/>
+                </a:solidFill>
+                <a:latin typeface="+mn-lt"/>
+                <a:ea typeface="+mn-ea"/>
+                <a:cs typeface="+mn-cs"/>
+              </a:defRPr>
+            </a:lvl1pPr>
+            <a:lvl2pPr marL="457200" algn="l" defTabSz="914400" rtl="0" eaLnBrk="1" latinLnBrk="0" hangingPunct="1">
+              <a:defRPr sz="1800" kern="1200">
+                <a:solidFill>
+                  <a:schemeClr val="tx1"/>
+                </a:solidFill>
+                <a:latin typeface="+mn-lt"/>
+                <a:ea typeface="+mn-ea"/>
+                <a:cs typeface="+mn-cs"/>
+              </a:defRPr>
+            </a:lvl2pPr>
+            <a:lvl3pPr marL="914400" algn="l" defTabSz="914400" rtl="0" eaLnBrk="1" latinLnBrk="0" hangingPunct="1">
+              <a:defRPr sz="1800" kern="1200">
+                <a:solidFill>
+                  <a:schemeClr val="tx1"/>
+                </a:solidFill>
+                <a:latin typeface="+mn-lt"/>
+                <a:ea typeface="+mn-ea"/>
+                <a:cs typeface="+mn-cs"/>
+              </a:defRPr>
+            </a:lvl3pPr>
+            <a:lvl4pPr marL="1371600" algn="l" defTabSz="914400" rtl="0" eaLnBrk="1" latinLnBrk="0" hangingPunct="1">
+              <a:defRPr sz="1800" kern="1200">
+                <a:solidFill>
+                  <a:schemeClr val="tx1"/>
+                </a:solidFill>
+                <a:latin typeface="+mn-lt"/>
+                <a:ea typeface="+mn-ea"/>
+                <a:cs typeface="+mn-cs"/>
+              </a:defRPr>
+            </a:lvl4pPr>
+            <a:lvl5pPr marL="1828800" algn="l" defTabSz="914400" rtl="0" eaLnBrk="1" latinLnBrk="0" hangingPunct="1">
+              <a:defRPr sz="1800" kern="1200">
+                <a:solidFill>
+                  <a:schemeClr val="tx1"/>
+                </a:solidFill>
+                <a:latin typeface="+mn-lt"/>
+                <a:ea typeface="+mn-ea"/>
+                <a:cs typeface="+mn-cs"/>
+              </a:defRPr>
+            </a:lvl5pPr>
+            <a:lvl6pPr marL="2286000" algn="l" defTabSz="914400" rtl="0" eaLnBrk="1" latinLnBrk="0" hangingPunct="1">
+              <a:defRPr sz="1800" kern="1200">
+                <a:solidFill>
+                  <a:schemeClr val="tx1"/>
+                </a:solidFill>
+                <a:latin typeface="+mn-lt"/>
+                <a:ea typeface="+mn-ea"/>
+                <a:cs typeface="+mn-cs"/>
+              </a:defRPr>
+            </a:lvl6pPr>
+            <a:lvl7pPr marL="2743200" algn="l" defTabSz="914400" rtl="0" eaLnBrk="1" latinLnBrk="0" hangingPunct="1">
+              <a:defRPr sz="1800" kern="1200">
+                <a:solidFill>
+                  <a:schemeClr val="tx1"/>
+                </a:solidFill>
+                <a:latin typeface="+mn-lt"/>
+                <a:ea typeface="+mn-ea"/>
+                <a:cs typeface="+mn-cs"/>
+              </a:defRPr>
+            </a:lvl7pPr>
+            <a:lvl8pPr marL="3200400" algn="l" defTabSz="914400" rtl="0" eaLnBrk="1" latinLnBrk="0" hangingPunct="1">
+              <a:defRPr sz="1800" kern="1200">
+                <a:solidFill>
+                  <a:schemeClr val="tx1"/>
+                </a:solidFill>
+                <a:latin typeface="+mn-lt"/>
+                <a:ea typeface="+mn-ea"/>
+                <a:cs typeface="+mn-cs"/>
+              </a:defRPr>
+            </a:lvl8pPr>
+            <a:lvl9pPr marL="3657600" algn="l" defTabSz="914400" rtl="0" eaLnBrk="1" latinLnBrk="0" hangingPunct="1">
+              <a:defRPr sz="1800" kern="1200">
+                <a:solidFill>
+                  <a:schemeClr val="tx1"/>
+                </a:solidFill>
+                <a:latin typeface="+mn-lt"/>
+                <a:ea typeface="+mn-ea"/>
+                <a:cs typeface="+mn-cs"/>
+              </a:defRPr>
+            </a:lvl9pPr>
+          </a:lstStyle>
+          <a:p>
+            <a:pPr marL="0" indent="0" algn="ctr">
+              <a:buNone/>
+            </a:pPr>
+            <a:r>
+              <a:rPr lang="en-US" sz="800" b="1" dirty="0" err="1">
+                <a:solidFill>
+                  <a:srgbClr val="17365D"/>
+                </a:solidFill>
+              </a:rPr>
+              <a:t>Historial</a:t>
+            </a:r>
+            <a:endParaRPr lang="en-US" sz="800" dirty="0"/>
           </a:p>
         </p:txBody>
       </p:sp>
@@ -6277,6 +9067,7 @@
         <a:solidFill>
           <a:srgbClr val="F4F1EC"/>
         </a:solidFill>
+        <a:effectLst/>
       </p:bgPr>
     </p:bg>
     <p:spTree>
@@ -6320,7 +9111,7 @@
           <a:bodyPr wrap="square" lIns="254" tIns="254" rIns="254" bIns="254" rtlCol="0" anchor="ctr"/>
           <a:lstStyle/>
           <a:p>
-            <a:pPr algn="ctr" indent="0" marL="0">
+            <a:pPr marL="0" indent="0" algn="ctr">
               <a:buNone/>
             </a:pPr>
             <a:r>
@@ -6359,7 +9150,7 @@
           <a:bodyPr wrap="square" lIns="0" tIns="0" rIns="0" bIns="0" rtlCol="0" anchor="ctr"/>
           <a:lstStyle/>
           <a:p>
-            <a:pPr indent="0" marL="0">
+            <a:pPr marL="0" indent="0">
               <a:buNone/>
             </a:pPr>
             <a:r>
@@ -6398,7 +9189,7 @@
           <a:bodyPr wrap="square" lIns="0" tIns="0" rIns="0" bIns="0" rtlCol="0" anchor="ctr"/>
           <a:lstStyle/>
           <a:p>
-            <a:pPr indent="0" marL="0">
+            <a:pPr marL="0" indent="0">
               <a:buNone/>
             </a:pPr>
             <a:r>
@@ -6438,6 +9229,13 @@
             <a:prstDash val="solid"/>
           </a:ln>
         </p:spPr>
+        <p:txBody>
+          <a:bodyPr/>
+          <a:lstStyle/>
+          <a:p>
+            <a:endParaRPr lang="es-MX"/>
+          </a:p>
+        </p:txBody>
       </p:sp>
       <p:sp>
         <p:nvSpPr>
@@ -6460,7 +9258,7 @@
           <a:bodyPr wrap="square" lIns="0" tIns="0" rIns="0" bIns="0" rtlCol="0" anchor="ctr"/>
           <a:lstStyle/>
           <a:p>
-            <a:pPr indent="0" marL="0">
+            <a:pPr marL="0" indent="0">
               <a:buNone/>
             </a:pPr>
             <a:r>
@@ -6496,7 +9294,7 @@
           <a:bodyPr wrap="square" lIns="0" tIns="0" rIns="0" bIns="0" rtlCol="0" anchor="ctr"/>
           <a:lstStyle/>
           <a:p>
-            <a:pPr algn="r" indent="0" marL="0">
+            <a:pPr marL="0" indent="0" algn="r">
               <a:buNone/>
             </a:pPr>
             <a:r>
@@ -6534,7 +9332,7 @@
           </a:bodyPr>
           <a:lstStyle/>
           <a:p>
-            <a:pPr algn="l" indent="0" marL="0">
+            <a:pPr marL="0" indent="0" algn="l">
               <a:buNone/>
             </a:pPr>
             <a:r>
@@ -6560,7 +9358,7 @@
             <a:off x="685800" y="1874520"/>
             <a:ext cx="4846320" cy="841248"/>
           </a:xfrm>
-          <a:prstGeom prst="rect">
+          <a:prstGeom prst="roundRect">
             <a:avLst/>
           </a:prstGeom>
           <a:solidFill>
@@ -6578,11 +9376,11 @@
           </a:bodyPr>
           <a:lstStyle/>
           <a:p>
-            <a:pPr indent="0" marL="0">
-              <a:buNone/>
-            </a:pPr>
-            <a:r>
-              <a:rPr lang="en-US" sz="1220" b="1" dirty="0">
+            <a:pPr marL="0" indent="0" algn="ctr">
+              <a:buNone/>
+            </a:pPr>
+            <a:r>
+              <a:rPr lang="en-US" sz="1400" b="1" dirty="0">
                 <a:solidFill>
                   <a:srgbClr val="1F2937"/>
                 </a:solidFill>
@@ -6592,17 +9390,14 @@
               </a:rPr>
               <a:t>Frontend Web / PWA</a:t>
             </a:r>
-            <a:pPr indent="0" marL="0">
-              <a:buNone/>
-            </a:pPr>
-            <a:endParaRPr lang="en-US" sz="1220" dirty="0"/>
-          </a:p>
-          <a:p>
-            <a:pPr indent="0" marL="0">
-              <a:buNone/>
-            </a:pPr>
-            <a:r>
-              <a:rPr lang="en-US" sz="1220" dirty="0">
+            <a:endParaRPr lang="en-US" sz="1400" dirty="0"/>
+          </a:p>
+          <a:p>
+            <a:pPr marL="0" indent="0" algn="ctr">
+              <a:buNone/>
+            </a:pPr>
+            <a:r>
+              <a:rPr lang="en-US" sz="1400" dirty="0">
                 <a:solidFill>
                   <a:srgbClr val="1F2937"/>
                 </a:solidFill>
@@ -6612,32 +9407,9 @@
               </a:rPr>
               <a:t>Dashboard, DocChat, topología, OT y experiencia tablet.</a:t>
             </a:r>
-            <a:endParaRPr lang="en-US" sz="1220" dirty="0"/>
-          </a:p>
-        </p:txBody>
-      </p:sp>
-      <p:sp>
-        <p:nvSpPr>
-          <p:cNvPr id="10" name="Shape 8"/>
-          <p:cNvSpPr/>
-          <p:nvPr/>
-        </p:nvSpPr>
-        <p:spPr>
-          <a:xfrm>
-            <a:off x="685800" y="2679192"/>
-            <a:ext cx="4846320" cy="0"/>
-          </a:xfrm>
-          <a:prstGeom prst="line">
-            <a:avLst/>
-          </a:prstGeom>
-          <a:noFill/>
-          <a:ln w="25400">
-            <a:solidFill>
-              <a:srgbClr val="2563EB"/>
-            </a:solidFill>
-            <a:prstDash val="solid"/>
-          </a:ln>
-        </p:spPr>
+            <a:endParaRPr lang="en-US" sz="1400" dirty="0"/>
+          </a:p>
+        </p:txBody>
       </p:sp>
       <p:sp>
         <p:nvSpPr>
@@ -6650,7 +9422,7 @@
             <a:off x="685800" y="2971800"/>
             <a:ext cx="4846320" cy="841248"/>
           </a:xfrm>
-          <a:prstGeom prst="rect">
+          <a:prstGeom prst="roundRect">
             <a:avLst/>
           </a:prstGeom>
           <a:solidFill>
@@ -6668,11 +9440,11 @@
           </a:bodyPr>
           <a:lstStyle/>
           <a:p>
-            <a:pPr indent="0" marL="0">
-              <a:buNone/>
-            </a:pPr>
-            <a:r>
-              <a:rPr lang="en-US" sz="1220" b="1" dirty="0">
+            <a:pPr marL="0" indent="0" algn="ctr">
+              <a:buNone/>
+            </a:pPr>
+            <a:r>
+              <a:rPr lang="en-US" sz="1400" b="1" dirty="0">
                 <a:solidFill>
                   <a:srgbClr val="1F2937"/>
                 </a:solidFill>
@@ -6682,17 +9454,14 @@
               </a:rPr>
               <a:t>API Backend</a:t>
             </a:r>
-            <a:pPr indent="0" marL="0">
-              <a:buNone/>
-            </a:pPr>
-            <a:endParaRPr lang="en-US" sz="1220" dirty="0"/>
-          </a:p>
-          <a:p>
-            <a:pPr indent="0" marL="0">
-              <a:buNone/>
-            </a:pPr>
-            <a:r>
-              <a:rPr lang="en-US" sz="1220" dirty="0">
+            <a:endParaRPr lang="en-US" sz="1400" dirty="0"/>
+          </a:p>
+          <a:p>
+            <a:pPr marL="0" indent="0" algn="ctr">
+              <a:buNone/>
+            </a:pPr>
+            <a:r>
+              <a:rPr lang="en-US" sz="1400" dirty="0">
                 <a:solidFill>
                   <a:srgbClr val="1F2937"/>
                 </a:solidFill>
@@ -6702,32 +9471,9 @@
               </a:rPr>
               <a:t>Servicios REST, reglas de negocio, reportes, auditoría e IA.</a:t>
             </a:r>
-            <a:endParaRPr lang="en-US" sz="1220" dirty="0"/>
-          </a:p>
-        </p:txBody>
-      </p:sp>
-      <p:sp>
-        <p:nvSpPr>
-          <p:cNvPr id="12" name="Shape 10"/>
-          <p:cNvSpPr/>
-          <p:nvPr/>
-        </p:nvSpPr>
-        <p:spPr>
-          <a:xfrm>
-            <a:off x="685800" y="3776472"/>
-            <a:ext cx="4846320" cy="0"/>
-          </a:xfrm>
-          <a:prstGeom prst="line">
-            <a:avLst/>
-          </a:prstGeom>
-          <a:noFill/>
-          <a:ln w="25400">
-            <a:solidFill>
-              <a:srgbClr val="059669"/>
-            </a:solidFill>
-            <a:prstDash val="solid"/>
-          </a:ln>
-        </p:spPr>
+            <a:endParaRPr lang="en-US" sz="1400" dirty="0"/>
+          </a:p>
+        </p:txBody>
       </p:sp>
       <p:sp>
         <p:nvSpPr>
@@ -6740,7 +9486,7 @@
             <a:off x="685800" y="4069080"/>
             <a:ext cx="4846320" cy="841248"/>
           </a:xfrm>
-          <a:prstGeom prst="rect">
+          <a:prstGeom prst="roundRect">
             <a:avLst/>
           </a:prstGeom>
           <a:solidFill>
@@ -6758,11 +9504,11 @@
           </a:bodyPr>
           <a:lstStyle/>
           <a:p>
-            <a:pPr indent="0" marL="0">
-              <a:buNone/>
-            </a:pPr>
-            <a:r>
-              <a:rPr lang="en-US" sz="1220" b="1" dirty="0">
+            <a:pPr marL="0" indent="0" algn="ctr">
+              <a:buNone/>
+            </a:pPr>
+            <a:r>
+              <a:rPr lang="en-US" sz="1400" b="1" dirty="0">
                 <a:solidFill>
                   <a:srgbClr val="1F2937"/>
                 </a:solidFill>
@@ -6772,17 +9518,14 @@
               </a:rPr>
               <a:t>Datos</a:t>
             </a:r>
-            <a:pPr indent="0" marL="0">
-              <a:buNone/>
-            </a:pPr>
-            <a:endParaRPr lang="en-US" sz="1220" dirty="0"/>
-          </a:p>
-          <a:p>
-            <a:pPr indent="0" marL="0">
-              <a:buNone/>
-            </a:pPr>
-            <a:r>
-              <a:rPr lang="en-US" sz="1220" dirty="0">
+            <a:endParaRPr lang="en-US" sz="1400" dirty="0"/>
+          </a:p>
+          <a:p>
+            <a:pPr marL="0" indent="0" algn="ctr">
+              <a:buNone/>
+            </a:pPr>
+            <a:r>
+              <a:rPr lang="en-US" sz="1400" dirty="0">
                 <a:solidFill>
                   <a:srgbClr val="1F2937"/>
                 </a:solidFill>
@@ -6792,32 +9535,9 @@
               </a:rPr>
               <a:t>BD relacional, documentos, adjuntos, logs, topología, sensores y OT.</a:t>
             </a:r>
-            <a:endParaRPr lang="en-US" sz="1220" dirty="0"/>
-          </a:p>
-        </p:txBody>
-      </p:sp>
-      <p:sp>
-        <p:nvSpPr>
-          <p:cNvPr id="14" name="Shape 12"/>
-          <p:cNvSpPr/>
-          <p:nvPr/>
-        </p:nvSpPr>
-        <p:spPr>
-          <a:xfrm>
-            <a:off x="685800" y="4873752"/>
-            <a:ext cx="4846320" cy="0"/>
-          </a:xfrm>
-          <a:prstGeom prst="line">
-            <a:avLst/>
-          </a:prstGeom>
-          <a:noFill/>
-          <a:ln w="25400">
-            <a:solidFill>
-              <a:srgbClr val="E07800"/>
-            </a:solidFill>
-            <a:prstDash val="solid"/>
-          </a:ln>
-        </p:spPr>
+            <a:endParaRPr lang="en-US" sz="1400" dirty="0"/>
+          </a:p>
+        </p:txBody>
       </p:sp>
       <p:sp>
         <p:nvSpPr>
@@ -6830,7 +9550,7 @@
             <a:off x="685800" y="5166360"/>
             <a:ext cx="4846320" cy="841248"/>
           </a:xfrm>
-          <a:prstGeom prst="rect">
+          <a:prstGeom prst="roundRect">
             <a:avLst/>
           </a:prstGeom>
           <a:solidFill>
@@ -6848,11 +9568,11 @@
           </a:bodyPr>
           <a:lstStyle/>
           <a:p>
-            <a:pPr indent="0" marL="0">
-              <a:buNone/>
-            </a:pPr>
-            <a:r>
-              <a:rPr lang="en-US" sz="1220" b="1" dirty="0">
+            <a:pPr marL="0" indent="0" algn="ctr">
+              <a:buNone/>
+            </a:pPr>
+            <a:r>
+              <a:rPr lang="en-US" sz="1400" b="1" dirty="0">
                 <a:solidFill>
                   <a:srgbClr val="1F2937"/>
                 </a:solidFill>
@@ -6862,17 +9582,14 @@
               </a:rPr>
               <a:t>IA / RAG</a:t>
             </a:r>
-            <a:pPr indent="0" marL="0">
-              <a:buNone/>
-            </a:pPr>
-            <a:endParaRPr lang="en-US" sz="1220" dirty="0"/>
-          </a:p>
-          <a:p>
-            <a:pPr indent="0" marL="0">
-              <a:buNone/>
-            </a:pPr>
-            <a:r>
-              <a:rPr lang="en-US" sz="1220" dirty="0">
+            <a:endParaRPr lang="en-US" sz="1400" dirty="0"/>
+          </a:p>
+          <a:p>
+            <a:pPr marL="0" indent="0" algn="ctr">
+              <a:buNone/>
+            </a:pPr>
+            <a:r>
+              <a:rPr lang="en-US" sz="1400" dirty="0">
                 <a:solidFill>
                   <a:srgbClr val="1F2937"/>
                 </a:solidFill>
@@ -6882,32 +9599,9 @@
               </a:rPr>
               <a:t>Servicio principal + recuperación documental y contingencia offline.</a:t>
             </a:r>
-            <a:endParaRPr lang="en-US" sz="1220" dirty="0"/>
-          </a:p>
-        </p:txBody>
-      </p:sp>
-      <p:sp>
-        <p:nvSpPr>
-          <p:cNvPr id="16" name="Shape 14"/>
-          <p:cNvSpPr/>
-          <p:nvPr/>
-        </p:nvSpPr>
-        <p:spPr>
-          <a:xfrm>
-            <a:off x="685800" y="5971032"/>
-            <a:ext cx="4846320" cy="0"/>
-          </a:xfrm>
-          <a:prstGeom prst="line">
-            <a:avLst/>
-          </a:prstGeom>
-          <a:noFill/>
-          <a:ln w="25400">
-            <a:solidFill>
-              <a:srgbClr val="6D28D9"/>
-            </a:solidFill>
-            <a:prstDash val="solid"/>
-          </a:ln>
-        </p:spPr>
+            <a:endParaRPr lang="en-US" sz="1400" dirty="0"/>
+          </a:p>
+        </p:txBody>
       </p:sp>
       <p:sp>
         <p:nvSpPr>
@@ -6932,18 +9626,18 @@
           </a:bodyPr>
           <a:lstStyle/>
           <a:p>
-            <a:pPr algn="l" indent="0" marL="0">
-              <a:buNone/>
-            </a:pPr>
-            <a:r>
-              <a:rPr lang="en-US" sz="1900" b="1" dirty="0">
+            <a:pPr marL="0" indent="0" algn="l">
+              <a:buNone/>
+            </a:pPr>
+            <a:r>
+              <a:rPr lang="en-US" sz="2000" b="1" dirty="0">
                 <a:solidFill>
                   <a:srgbClr val="1F2937"/>
                 </a:solidFill>
               </a:rPr>
               <a:t>Competencias aplicadas</a:t>
             </a:r>
-            <a:endParaRPr lang="en-US" sz="1900" dirty="0"/>
+            <a:endParaRPr lang="en-US" sz="2000" dirty="0"/>
           </a:p>
         </p:txBody>
       </p:sp>
@@ -6970,18 +9664,18 @@
           </a:bodyPr>
           <a:lstStyle/>
           <a:p>
-            <a:pPr indent="0" marL="0">
-              <a:buNone/>
-            </a:pPr>
-            <a:r>
-              <a:rPr lang="en-US" sz="1300" dirty="0">
+            <a:pPr marL="0" indent="0">
+              <a:buNone/>
+            </a:pPr>
+            <a:r>
+              <a:rPr lang="en-US" sz="1400" dirty="0">
                 <a:solidFill>
                   <a:srgbClr val="1F2937"/>
                 </a:solidFill>
               </a:rPr>
               <a:t>• Diseño y desarrollo de software.</a:t>
             </a:r>
-            <a:endParaRPr lang="en-US" sz="1300" dirty="0"/>
+            <a:endParaRPr lang="en-US" sz="1400" dirty="0"/>
           </a:p>
         </p:txBody>
       </p:sp>
@@ -7008,18 +9702,18 @@
           </a:bodyPr>
           <a:lstStyle/>
           <a:p>
-            <a:pPr indent="0" marL="0">
-              <a:buNone/>
-            </a:pPr>
-            <a:r>
-              <a:rPr lang="en-US" sz="1300" dirty="0">
+            <a:pPr marL="0" indent="0">
+              <a:buNone/>
+            </a:pPr>
+            <a:r>
+              <a:rPr lang="en-US" sz="1400" dirty="0">
                 <a:solidFill>
                   <a:srgbClr val="1F2937"/>
                 </a:solidFill>
               </a:rPr>
               <a:t>• Modelamiento y gestión de datos.</a:t>
             </a:r>
-            <a:endParaRPr lang="en-US" sz="1300" dirty="0"/>
+            <a:endParaRPr lang="en-US" sz="1400" dirty="0"/>
           </a:p>
         </p:txBody>
       </p:sp>
@@ -7046,18 +9740,18 @@
           </a:bodyPr>
           <a:lstStyle/>
           <a:p>
-            <a:pPr indent="0" marL="0">
-              <a:buNone/>
-            </a:pPr>
-            <a:r>
-              <a:rPr lang="en-US" sz="1300" dirty="0">
+            <a:pPr marL="0" indent="0">
+              <a:buNone/>
+            </a:pPr>
+            <a:r>
+              <a:rPr lang="en-US" sz="1400" dirty="0">
                 <a:solidFill>
                   <a:srgbClr val="1F2937"/>
                 </a:solidFill>
               </a:rPr>
               <a:t>• Pruebas y aseguramiento de calidad.</a:t>
             </a:r>
-            <a:endParaRPr lang="en-US" sz="1300" dirty="0"/>
+            <a:endParaRPr lang="en-US" sz="1400" dirty="0"/>
           </a:p>
         </p:txBody>
       </p:sp>
@@ -7084,18 +9778,18 @@
           </a:bodyPr>
           <a:lstStyle/>
           <a:p>
-            <a:pPr indent="0" marL="0">
-              <a:buNone/>
-            </a:pPr>
-            <a:r>
-              <a:rPr lang="en-US" sz="1300" dirty="0">
+            <a:pPr marL="0" indent="0">
+              <a:buNone/>
+            </a:pPr>
+            <a:r>
+              <a:rPr lang="en-US" sz="1400" dirty="0">
                 <a:solidFill>
                   <a:srgbClr val="1F2937"/>
                 </a:solidFill>
               </a:rPr>
               <a:t>• Gestión de proyecto informático.</a:t>
             </a:r>
-            <a:endParaRPr lang="en-US" sz="1300" dirty="0"/>
+            <a:endParaRPr lang="en-US" sz="1400" dirty="0"/>
           </a:p>
         </p:txBody>
       </p:sp>
@@ -7122,18 +9816,18 @@
           </a:bodyPr>
           <a:lstStyle/>
           <a:p>
-            <a:pPr indent="0" marL="0">
-              <a:buNone/>
-            </a:pPr>
-            <a:r>
-              <a:rPr lang="en-US" sz="1300" dirty="0">
+            <a:pPr marL="0" indent="0">
+              <a:buNone/>
+            </a:pPr>
+            <a:r>
+              <a:rPr lang="en-US" sz="1400" dirty="0">
                 <a:solidFill>
                   <a:srgbClr val="1F2937"/>
                 </a:solidFill>
               </a:rPr>
               <a:t>• Seguridad, trazabilidad e integración.</a:t>
             </a:r>
-            <a:endParaRPr lang="en-US" sz="1300" dirty="0"/>
+            <a:endParaRPr lang="en-US" sz="1400" dirty="0"/>
           </a:p>
         </p:txBody>
       </p:sp>
@@ -7160,18 +9854,18 @@
           </a:bodyPr>
           <a:lstStyle/>
           <a:p>
-            <a:pPr algn="l" indent="0" marL="0">
-              <a:buNone/>
-            </a:pPr>
-            <a:r>
-              <a:rPr lang="en-US" sz="1500" b="1" dirty="0">
+            <a:pPr marL="0" indent="0" algn="l">
+              <a:buNone/>
+            </a:pPr>
+            <a:r>
+              <a:rPr lang="en-US" sz="1600" b="1" dirty="0">
                 <a:solidFill>
                   <a:srgbClr val="1F4E79"/>
                 </a:solidFill>
               </a:rPr>
               <a:t>Tecnología emergente: IA generativa/RAG aplicada al proceso de mantenimiento.</a:t>
             </a:r>
-            <a:endParaRPr lang="en-US" sz="1500" dirty="0"/>
+            <a:endParaRPr lang="en-US" sz="1600" dirty="0"/>
           </a:p>
         </p:txBody>
       </p:sp>
@@ -7191,6 +9885,7 @@
         <a:solidFill>
           <a:srgbClr val="F4F1EC"/>
         </a:solidFill>
+        <a:effectLst/>
       </p:bgPr>
     </p:bg>
     <p:spTree>
@@ -7234,7 +9929,7 @@
           <a:bodyPr wrap="square" lIns="254" tIns="254" rIns="254" bIns="254" rtlCol="0" anchor="ctr"/>
           <a:lstStyle/>
           <a:p>
-            <a:pPr algn="ctr" indent="0" marL="0">
+            <a:pPr marL="0" indent="0" algn="ctr">
               <a:buNone/>
             </a:pPr>
             <a:r>
@@ -7273,7 +9968,7 @@
           <a:bodyPr wrap="square" lIns="0" tIns="0" rIns="0" bIns="0" rtlCol="0" anchor="ctr"/>
           <a:lstStyle/>
           <a:p>
-            <a:pPr indent="0" marL="0">
+            <a:pPr marL="0" indent="0">
               <a:buNone/>
             </a:pPr>
             <a:r>
@@ -7312,7 +10007,7 @@
           <a:bodyPr wrap="square" lIns="0" tIns="0" rIns="0" bIns="0" rtlCol="0" anchor="ctr"/>
           <a:lstStyle/>
           <a:p>
-            <a:pPr indent="0" marL="0">
+            <a:pPr marL="0" indent="0">
               <a:buNone/>
             </a:pPr>
             <a:r>
@@ -7352,6 +10047,13 @@
             <a:prstDash val="solid"/>
           </a:ln>
         </p:spPr>
+        <p:txBody>
+          <a:bodyPr/>
+          <a:lstStyle/>
+          <a:p>
+            <a:endParaRPr lang="es-MX"/>
+          </a:p>
+        </p:txBody>
       </p:sp>
       <p:sp>
         <p:nvSpPr>
@@ -7374,7 +10076,7 @@
           <a:bodyPr wrap="square" lIns="0" tIns="0" rIns="0" bIns="0" rtlCol="0" anchor="ctr"/>
           <a:lstStyle/>
           <a:p>
-            <a:pPr indent="0" marL="0">
+            <a:pPr marL="0" indent="0">
               <a:buNone/>
             </a:pPr>
             <a:r>
@@ -7410,7 +10112,7 @@
           <a:bodyPr wrap="square" lIns="0" tIns="0" rIns="0" bIns="0" rtlCol="0" anchor="ctr"/>
           <a:lstStyle/>
           <a:p>
-            <a:pPr algn="r" indent="0" marL="0">
+            <a:pPr marL="0" indent="0" algn="r">
               <a:buNone/>
             </a:pPr>
             <a:r>
@@ -7448,7 +10150,7 @@
           </a:bodyPr>
           <a:lstStyle/>
           <a:p>
-            <a:pPr algn="l" indent="0" marL="0">
+            <a:pPr marL="0" indent="0" algn="l">
               <a:buNone/>
             </a:pPr>
             <a:r>
@@ -7474,7 +10176,7 @@
             <a:off x="685800" y="1874520"/>
             <a:ext cx="5212080" cy="1097280"/>
           </a:xfrm>
-          <a:prstGeom prst="rect">
+          <a:prstGeom prst="roundRect">
             <a:avLst/>
           </a:prstGeom>
           <a:solidFill>
@@ -7492,11 +10194,11 @@
           </a:bodyPr>
           <a:lstStyle/>
           <a:p>
-            <a:pPr indent="0" marL="0">
-              <a:buNone/>
-            </a:pPr>
-            <a:r>
-              <a:rPr lang="en-US" sz="1220" b="1" dirty="0">
+            <a:pPr marL="0" indent="0" algn="ctr">
+              <a:buNone/>
+            </a:pPr>
+            <a:r>
+              <a:rPr lang="en-US" sz="1600" b="1" dirty="0">
                 <a:solidFill>
                   <a:srgbClr val="1F2937"/>
                 </a:solidFill>
@@ -7506,17 +10208,14 @@
               </a:rPr>
               <a:t>1 · PWA / movilidad</a:t>
             </a:r>
-            <a:pPr indent="0" marL="0">
-              <a:buNone/>
-            </a:pPr>
-            <a:endParaRPr lang="en-US" sz="1220" dirty="0"/>
-          </a:p>
-          <a:p>
-            <a:pPr indent="0" marL="0">
-              <a:buNone/>
-            </a:pPr>
-            <a:r>
-              <a:rPr lang="en-US" sz="1220" dirty="0">
+            <a:endParaRPr lang="en-US" sz="1600" dirty="0"/>
+          </a:p>
+          <a:p>
+            <a:pPr marL="0" indent="0" algn="ctr">
+              <a:buNone/>
+            </a:pPr>
+            <a:r>
+              <a:rPr lang="en-US" sz="1600" dirty="0">
                 <a:solidFill>
                   <a:srgbClr val="1F2937"/>
                 </a:solidFill>
@@ -7526,32 +10225,9 @@
               </a:rPr>
               <a:t>Uso intensivo en tablets iOS/Android: OT, fotos, consulta IA y sincronización offline.</a:t>
             </a:r>
-            <a:endParaRPr lang="en-US" sz="1220" dirty="0"/>
-          </a:p>
-        </p:txBody>
-      </p:sp>
-      <p:sp>
-        <p:nvSpPr>
-          <p:cNvPr id="10" name="Shape 8"/>
-          <p:cNvSpPr/>
-          <p:nvPr/>
-        </p:nvSpPr>
-        <p:spPr>
-          <a:xfrm>
-            <a:off x="685800" y="2935224"/>
-            <a:ext cx="5212080" cy="0"/>
-          </a:xfrm>
-          <a:prstGeom prst="line">
-            <a:avLst/>
-          </a:prstGeom>
-          <a:noFill/>
-          <a:ln w="25400">
-            <a:solidFill>
-              <a:srgbClr val="2563EB"/>
-            </a:solidFill>
-            <a:prstDash val="solid"/>
-          </a:ln>
-        </p:spPr>
+            <a:endParaRPr lang="en-US" sz="1600" dirty="0"/>
+          </a:p>
+        </p:txBody>
       </p:sp>
       <p:sp>
         <p:nvSpPr>
@@ -7564,7 +10240,7 @@
             <a:off x="6309360" y="1874520"/>
             <a:ext cx="5212080" cy="1097280"/>
           </a:xfrm>
-          <a:prstGeom prst="rect">
+          <a:prstGeom prst="roundRect">
             <a:avLst/>
           </a:prstGeom>
           <a:solidFill>
@@ -7582,11 +10258,11 @@
           </a:bodyPr>
           <a:lstStyle/>
           <a:p>
-            <a:pPr indent="0" marL="0">
-              <a:buNone/>
-            </a:pPr>
-            <a:r>
-              <a:rPr lang="en-US" sz="1220" b="1" dirty="0">
+            <a:pPr marL="0" indent="0" algn="ctr">
+              <a:buNone/>
+            </a:pPr>
+            <a:r>
+              <a:rPr lang="en-US" sz="1600" b="1" dirty="0">
                 <a:solidFill>
                   <a:srgbClr val="1F2937"/>
                 </a:solidFill>
@@ -7596,17 +10272,14 @@
               </a:rPr>
               <a:t>2 · RAG offline</a:t>
             </a:r>
-            <a:pPr indent="0" marL="0">
-              <a:buNone/>
-            </a:pPr>
-            <a:endParaRPr lang="en-US" sz="1220" dirty="0"/>
-          </a:p>
-          <a:p>
-            <a:pPr indent="0" marL="0">
-              <a:buNone/>
-            </a:pPr>
-            <a:r>
-              <a:rPr lang="en-US" sz="1220" dirty="0">
+            <a:endParaRPr lang="en-US" sz="1600" dirty="0"/>
+          </a:p>
+          <a:p>
+            <a:pPr marL="0" indent="0" algn="ctr">
+              <a:buNone/>
+            </a:pPr>
+            <a:r>
+              <a:rPr lang="en-US" sz="1600" dirty="0">
                 <a:solidFill>
                   <a:srgbClr val="1F2937"/>
                 </a:solidFill>
@@ -7616,32 +10289,9 @@
               </a:rPr>
               <a:t>Contingencia para consultar manuales y fragmentos técnicos sin exigir LLM local.</a:t>
             </a:r>
-            <a:endParaRPr lang="en-US" sz="1220" dirty="0"/>
-          </a:p>
-        </p:txBody>
-      </p:sp>
-      <p:sp>
-        <p:nvSpPr>
-          <p:cNvPr id="12" name="Shape 10"/>
-          <p:cNvSpPr/>
-          <p:nvPr/>
-        </p:nvSpPr>
-        <p:spPr>
-          <a:xfrm>
-            <a:off x="6309360" y="2935224"/>
-            <a:ext cx="5212080" cy="0"/>
-          </a:xfrm>
-          <a:prstGeom prst="line">
-            <a:avLst/>
-          </a:prstGeom>
-          <a:noFill/>
-          <a:ln w="25400">
-            <a:solidFill>
-              <a:srgbClr val="6D28D9"/>
-            </a:solidFill>
-            <a:prstDash val="solid"/>
-          </a:ln>
-        </p:spPr>
+            <a:endParaRPr lang="en-US" sz="1600" dirty="0"/>
+          </a:p>
+        </p:txBody>
       </p:sp>
       <p:sp>
         <p:nvSpPr>
@@ -7654,7 +10304,7 @@
             <a:off x="685800" y="3429000"/>
             <a:ext cx="5212080" cy="1097280"/>
           </a:xfrm>
-          <a:prstGeom prst="rect">
+          <a:prstGeom prst="roundRect">
             <a:avLst/>
           </a:prstGeom>
           <a:solidFill>
@@ -7672,11 +10322,11 @@
           </a:bodyPr>
           <a:lstStyle/>
           <a:p>
-            <a:pPr indent="0" marL="0">
-              <a:buNone/>
-            </a:pPr>
-            <a:r>
-              <a:rPr lang="en-US" sz="1220" b="1" dirty="0">
+            <a:pPr marL="0" indent="0" algn="ctr">
+              <a:buNone/>
+            </a:pPr>
+            <a:r>
+              <a:rPr lang="en-US" sz="1600" b="1" dirty="0">
                 <a:solidFill>
                   <a:srgbClr val="1F2937"/>
                 </a:solidFill>
@@ -7686,17 +10336,14 @@
               </a:rPr>
               <a:t>3 · PDF KPI</a:t>
             </a:r>
-            <a:pPr indent="0" marL="0">
-              <a:buNone/>
-            </a:pPr>
-            <a:endParaRPr lang="en-US" sz="1220" dirty="0"/>
-          </a:p>
-          <a:p>
-            <a:pPr indent="0" marL="0">
-              <a:buNone/>
-            </a:pPr>
-            <a:r>
-              <a:rPr lang="en-US" sz="1220" dirty="0">
+            <a:endParaRPr lang="en-US" sz="1600" dirty="0"/>
+          </a:p>
+          <a:p>
+            <a:pPr marL="0" indent="0" algn="ctr">
+              <a:buNone/>
+            </a:pPr>
+            <a:r>
+              <a:rPr lang="en-US" sz="1600" dirty="0">
                 <a:solidFill>
                   <a:srgbClr val="1F2937"/>
                 </a:solidFill>
@@ -7706,32 +10353,9 @@
               </a:rPr>
               <a:t>Reportes gerenciales con MTTR, eficiencia, costos, OTs, incidencias y filtros ejecutivos.</a:t>
             </a:r>
-            <a:endParaRPr lang="en-US" sz="1220" dirty="0"/>
-          </a:p>
-        </p:txBody>
-      </p:sp>
-      <p:sp>
-        <p:nvSpPr>
-          <p:cNvPr id="14" name="Shape 12"/>
-          <p:cNvSpPr/>
-          <p:nvPr/>
-        </p:nvSpPr>
-        <p:spPr>
-          <a:xfrm>
-            <a:off x="685800" y="4489704"/>
-            <a:ext cx="5212080" cy="0"/>
-          </a:xfrm>
-          <a:prstGeom prst="line">
-            <a:avLst/>
-          </a:prstGeom>
-          <a:noFill/>
-          <a:ln w="25400">
-            <a:solidFill>
-              <a:srgbClr val="E07800"/>
-            </a:solidFill>
-            <a:prstDash val="solid"/>
-          </a:ln>
-        </p:spPr>
+            <a:endParaRPr lang="en-US" sz="1600" dirty="0"/>
+          </a:p>
+        </p:txBody>
       </p:sp>
       <p:sp>
         <p:nvSpPr>
@@ -7744,7 +10368,7 @@
             <a:off x="6309360" y="3429000"/>
             <a:ext cx="5212080" cy="1097280"/>
           </a:xfrm>
-          <a:prstGeom prst="rect">
+          <a:prstGeom prst="roundRect">
             <a:avLst/>
           </a:prstGeom>
           <a:solidFill>
@@ -7762,11 +10386,11 @@
           </a:bodyPr>
           <a:lstStyle/>
           <a:p>
-            <a:pPr indent="0" marL="0">
-              <a:buNone/>
-            </a:pPr>
-            <a:r>
-              <a:rPr lang="en-US" sz="1220" b="1" dirty="0">
+            <a:pPr marL="0" indent="0" algn="ctr">
+              <a:buNone/>
+            </a:pPr>
+            <a:r>
+              <a:rPr lang="en-US" sz="1600" b="1" dirty="0">
                 <a:solidFill>
                   <a:srgbClr val="1F2937"/>
                 </a:solidFill>
@@ -7776,17 +10400,14 @@
               </a:rPr>
               <a:t>4 · Auditoría funcional</a:t>
             </a:r>
-            <a:pPr indent="0" marL="0">
-              <a:buNone/>
-            </a:pPr>
-            <a:endParaRPr lang="en-US" sz="1220" dirty="0"/>
-          </a:p>
-          <a:p>
-            <a:pPr indent="0" marL="0">
-              <a:buNone/>
-            </a:pPr>
-            <a:r>
-              <a:rPr lang="en-US" sz="1220" dirty="0">
+            <a:endParaRPr lang="en-US" sz="1600" dirty="0"/>
+          </a:p>
+          <a:p>
+            <a:pPr marL="0" indent="0" algn="ctr">
+              <a:buNone/>
+            </a:pPr>
+            <a:r>
+              <a:rPr lang="en-US" sz="1600" dirty="0">
                 <a:solidFill>
                   <a:srgbClr val="1F2937"/>
                 </a:solidFill>
@@ -7796,32 +10417,9 @@
               </a:rPr>
               <a:t>Logs de OT, usuarios, altas/bajas, cargas, descargas y acciones críticas.</a:t>
             </a:r>
-            <a:endParaRPr lang="en-US" sz="1220" dirty="0"/>
-          </a:p>
-        </p:txBody>
-      </p:sp>
-      <p:sp>
-        <p:nvSpPr>
-          <p:cNvPr id="16" name="Shape 14"/>
-          <p:cNvSpPr/>
-          <p:nvPr/>
-        </p:nvSpPr>
-        <p:spPr>
-          <a:xfrm>
-            <a:off x="6309360" y="4489704"/>
-            <a:ext cx="5212080" cy="0"/>
-          </a:xfrm>
-          <a:prstGeom prst="line">
-            <a:avLst/>
-          </a:prstGeom>
-          <a:noFill/>
-          <a:ln w="25400">
-            <a:solidFill>
-              <a:srgbClr val="059669"/>
-            </a:solidFill>
-            <a:prstDash val="solid"/>
-          </a:ln>
-        </p:spPr>
+            <a:endParaRPr lang="en-US" sz="1600" dirty="0"/>
+          </a:p>
+        </p:txBody>
       </p:sp>
       <p:sp>
         <p:nvSpPr>
@@ -7846,18 +10444,18 @@
           </a:bodyPr>
           <a:lstStyle/>
           <a:p>
-            <a:pPr algn="ctr" indent="0" marL="0">
-              <a:buNone/>
-            </a:pPr>
-            <a:r>
-              <a:rPr lang="en-US" sz="1400" b="1" dirty="0">
+            <a:pPr marL="0" indent="0" algn="ctr">
+              <a:buNone/>
+            </a:pPr>
+            <a:r>
+              <a:rPr lang="en-US" b="1" dirty="0">
                 <a:solidFill>
                   <a:srgbClr val="1F4E79"/>
                 </a:solidFill>
               </a:rPr>
               <a:t>Regla de control: AS-IS = línea base existente · TO-BE = incremento desarrollado por el equipo Capstone.</a:t>
             </a:r>
-            <a:endParaRPr lang="en-US" sz="1400" dirty="0"/>
+            <a:endParaRPr lang="en-US" dirty="0"/>
           </a:p>
         </p:txBody>
       </p:sp>
@@ -7877,6 +10475,7 @@
         <a:solidFill>
           <a:srgbClr val="F4F1EC"/>
         </a:solidFill>
+        <a:effectLst/>
       </p:bgPr>
     </p:bg>
     <p:spTree>
@@ -7920,7 +10519,7 @@
           <a:bodyPr wrap="square" lIns="254" tIns="254" rIns="254" bIns="254" rtlCol="0" anchor="ctr"/>
           <a:lstStyle/>
           <a:p>
-            <a:pPr algn="ctr" indent="0" marL="0">
+            <a:pPr marL="0" indent="0" algn="ctr">
               <a:buNone/>
             </a:pPr>
             <a:r>
@@ -7959,7 +10558,7 @@
           <a:bodyPr wrap="square" lIns="0" tIns="0" rIns="0" bIns="0" rtlCol="0" anchor="ctr"/>
           <a:lstStyle/>
           <a:p>
-            <a:pPr indent="0" marL="0">
+            <a:pPr marL="0" indent="0">
               <a:buNone/>
             </a:pPr>
             <a:r>
@@ -7998,7 +10597,7 @@
           <a:bodyPr wrap="square" lIns="0" tIns="0" rIns="0" bIns="0" rtlCol="0" anchor="ctr"/>
           <a:lstStyle/>
           <a:p>
-            <a:pPr indent="0" marL="0">
+            <a:pPr marL="0" indent="0">
               <a:buNone/>
             </a:pPr>
             <a:r>
@@ -8038,6 +10637,13 @@
             <a:prstDash val="solid"/>
           </a:ln>
         </p:spPr>
+        <p:txBody>
+          <a:bodyPr/>
+          <a:lstStyle/>
+          <a:p>
+            <a:endParaRPr lang="es-MX"/>
+          </a:p>
+        </p:txBody>
       </p:sp>
       <p:sp>
         <p:nvSpPr>
@@ -8060,7 +10666,7 @@
           <a:bodyPr wrap="square" lIns="0" tIns="0" rIns="0" bIns="0" rtlCol="0" anchor="ctr"/>
           <a:lstStyle/>
           <a:p>
-            <a:pPr indent="0" marL="0">
+            <a:pPr marL="0" indent="0">
               <a:buNone/>
             </a:pPr>
             <a:r>
@@ -8096,7 +10702,7 @@
           <a:bodyPr wrap="square" lIns="0" tIns="0" rIns="0" bIns="0" rtlCol="0" anchor="ctr"/>
           <a:lstStyle/>
           <a:p>
-            <a:pPr algn="r" indent="0" marL="0">
+            <a:pPr marL="0" indent="0" algn="r">
               <a:buNone/>
             </a:pPr>
             <a:r>
@@ -8120,7 +10726,7 @@
         <p:spPr>
           <a:xfrm>
             <a:off x="594360" y="1005840"/>
-            <a:ext cx="7863840" cy="320040"/>
+            <a:ext cx="8549640" cy="320040"/>
           </a:xfrm>
           <a:prstGeom prst="rect">
             <a:avLst/>
@@ -8134,38 +10740,38 @@
           </a:bodyPr>
           <a:lstStyle/>
           <a:p>
-            <a:pPr algn="l" indent="0" marL="0">
-              <a:buNone/>
-            </a:pPr>
-            <a:r>
-              <a:rPr lang="en-US" sz="1550" b="1" dirty="0">
+            <a:pPr marL="0" indent="0" algn="l">
+              <a:buNone/>
+            </a:pPr>
+            <a:r>
+              <a:rPr lang="en-US" sz="1600" b="1" dirty="0">
                 <a:solidFill>
                   <a:srgbClr val="1F2937"/>
                 </a:solidFill>
               </a:rPr>
               <a:t>Objetivo: que el técnico trabaje desde tablet en terreno, incluso ante conectividad intermitente.</a:t>
             </a:r>
-            <a:endParaRPr lang="en-US" sz="1550" dirty="0"/>
+            <a:endParaRPr lang="en-US" sz="1600" dirty="0"/>
           </a:p>
         </p:txBody>
       </p:sp>
       <p:pic>
         <p:nvPicPr>
-          <p:cNvPr id="9" name="Image 0" descr="/mnt/data/barb_split/media/image16.png">    </p:cNvPr>
+          <p:cNvPr id="9" name="Image 0" descr="/mnt/data/barb_split/media/image16.png"/>
           <p:cNvPicPr>
             <a:picLocks noChangeAspect="1"/>
           </p:cNvPicPr>
           <p:nvPr/>
         </p:nvPicPr>
         <p:blipFill>
-          <a:blip r:embed="rId1"/>
-          <a:srcRect l="0" r="0" t="7416" b="7416"/>
+          <a:blip r:embed="rId3"/>
+          <a:srcRect t="7416" b="7416"/>
           <a:stretch/>
         </p:blipFill>
         <p:spPr>
           <a:xfrm>
-            <a:off x="594360" y="1600200"/>
-            <a:ext cx="4937760" cy="2240280"/>
+            <a:off x="594359" y="1817077"/>
+            <a:ext cx="5271079" cy="2391508"/>
           </a:xfrm>
           <a:prstGeom prst="rect">
             <a:avLst/>
@@ -8174,15 +10780,15 @@
       </p:pic>
       <p:pic>
         <p:nvPicPr>
-          <p:cNvPr id="10" name="Image 1" descr="/mnt/data/barb_split/media/image9.png">    </p:cNvPr>
+          <p:cNvPr id="10" name="Image 1" descr="/mnt/data/barb_split/media/image9.png"/>
           <p:cNvPicPr>
             <a:picLocks noChangeAspect="1"/>
           </p:cNvPicPr>
           <p:nvPr/>
         </p:nvPicPr>
         <p:blipFill>
-          <a:blip r:embed="rId2"/>
-          <a:srcRect l="7114" r="7114" t="0" b="0"/>
+          <a:blip r:embed="rId4"/>
+          <a:srcRect l="7114" r="7114"/>
           <a:stretch/>
         </p:blipFill>
         <p:spPr>
@@ -8203,7 +10809,7 @@
         </p:nvSpPr>
         <p:spPr>
           <a:xfrm>
-            <a:off x="594360" y="4005072"/>
+            <a:off x="594360" y="4473761"/>
             <a:ext cx="4937760" cy="201168"/>
           </a:xfrm>
           <a:prstGeom prst="rect">
@@ -8218,18 +10824,18 @@
           </a:bodyPr>
           <a:lstStyle/>
           <a:p>
-            <a:pPr algn="ctr" indent="0" marL="0">
-              <a:buNone/>
-            </a:pPr>
-            <a:r>
-              <a:rPr lang="en-US" sz="950" i="1" dirty="0">
+            <a:pPr marL="0" indent="0" algn="ctr">
+              <a:buNone/>
+            </a:pPr>
+            <a:r>
+              <a:rPr lang="en-US" sz="1200" i="1" dirty="0">
                 <a:solidFill>
                   <a:srgbClr val="6B7280"/>
                 </a:solidFill>
               </a:rPr>
               <a:t>AS-IS: gestión de OT</a:t>
             </a:r>
-            <a:endParaRPr lang="en-US" sz="950" dirty="0"/>
+            <a:endParaRPr lang="en-US" sz="1200" dirty="0"/>
           </a:p>
         </p:txBody>
       </p:sp>
@@ -8256,7 +10862,7 @@
           </a:bodyPr>
           <a:lstStyle/>
           <a:p>
-            <a:pPr algn="ctr" indent="0" marL="0">
+            <a:pPr marL="0" indent="0" algn="ctr">
               <a:buNone/>
             </a:pPr>
             <a:r>
@@ -8292,18 +10898,18 @@
           <a:bodyPr wrap="square" lIns="0" tIns="0" rIns="0" bIns="0" rtlCol="0" anchor="ctr"/>
           <a:lstStyle/>
           <a:p>
-            <a:pPr indent="0" marL="0">
-              <a:buNone/>
-            </a:pPr>
-            <a:r>
-              <a:rPr lang="en-US" sz="800" b="1" dirty="0">
+            <a:pPr marL="0" indent="0">
+              <a:buNone/>
+            </a:pPr>
+            <a:r>
+              <a:rPr lang="en-US" sz="1000" b="1" dirty="0">
                 <a:solidFill>
                   <a:srgbClr val="059669"/>
                 </a:solidFill>
               </a:rPr>
               <a:t>SINCRONIZACIÓN OFFLINE PROPUESTA</a:t>
             </a:r>
-            <a:endParaRPr lang="en-US" sz="800" dirty="0"/>
+            <a:endParaRPr lang="en-US" sz="1000" dirty="0"/>
           </a:p>
         </p:txBody>
       </p:sp>
@@ -8330,88 +10936,88 @@
           </a:bodyPr>
           <a:lstStyle/>
           <a:p>
-            <a:pPr algn="l" indent="0" marL="0">
-              <a:buNone/>
-            </a:pPr>
-            <a:r>
-              <a:rPr lang="en-US" sz="1210" dirty="0">
+            <a:pPr marL="0" indent="0" algn="l">
+              <a:buNone/>
+            </a:pPr>
+            <a:r>
+              <a:rPr lang="en-US" sz="1400" dirty="0">
                 <a:solidFill>
                   <a:srgbClr val="1F2937"/>
                 </a:solidFill>
               </a:rPr>
               <a:t>1. Guardar OT + fotos en IndexedDB/Dexie</a:t>
             </a:r>
-            <a:endParaRPr lang="en-US" sz="1210" dirty="0"/>
-          </a:p>
-          <a:p>
-            <a:pPr algn="l" indent="0" marL="0">
-              <a:buNone/>
-            </a:pPr>
-            <a:r>
-              <a:rPr lang="en-US" sz="1210" dirty="0">
+            <a:endParaRPr lang="en-US" sz="1400" dirty="0"/>
+          </a:p>
+          <a:p>
+            <a:pPr marL="0" indent="0" algn="l">
+              <a:buNone/>
+            </a:pPr>
+            <a:r>
+              <a:rPr lang="en-US" sz="1400" dirty="0">
                 <a:solidFill>
                   <a:srgbClr val="1F2937"/>
                 </a:solidFill>
               </a:rPr>
               <a:t>2. Cola local Outbox</a:t>
             </a:r>
-            <a:endParaRPr lang="en-US" sz="1210" dirty="0"/>
-          </a:p>
-          <a:p>
-            <a:pPr algn="l" indent="0" marL="0">
-              <a:buNone/>
-            </a:pPr>
-            <a:r>
-              <a:rPr lang="en-US" sz="1210" dirty="0">
+            <a:endParaRPr lang="en-US" sz="1400" dirty="0"/>
+          </a:p>
+          <a:p>
+            <a:pPr marL="0" indent="0" algn="l">
+              <a:buNone/>
+            </a:pPr>
+            <a:r>
+              <a:rPr lang="en-US" sz="1400" dirty="0">
                 <a:solidFill>
                   <a:srgbClr val="1F2937"/>
                 </a:solidFill>
               </a:rPr>
               <a:t>3. Reintentos con Service Worker/Workbox</a:t>
             </a:r>
-            <a:endParaRPr lang="en-US" sz="1210" dirty="0"/>
-          </a:p>
-          <a:p>
-            <a:pPr algn="l" indent="0" marL="0">
-              <a:buNone/>
-            </a:pPr>
-            <a:r>
-              <a:rPr lang="en-US" sz="1210" dirty="0">
+            <a:endParaRPr lang="en-US" sz="1400" dirty="0"/>
+          </a:p>
+          <a:p>
+            <a:pPr marL="0" indent="0" algn="l">
+              <a:buNone/>
+            </a:pPr>
+            <a:r>
+              <a:rPr lang="en-US" sz="1400" dirty="0">
                 <a:solidFill>
                   <a:srgbClr val="1F2937"/>
                 </a:solidFill>
               </a:rPr>
               <a:t>4. Fallback al abrir/reconectar</a:t>
             </a:r>
-            <a:endParaRPr lang="en-US" sz="1210" dirty="0"/>
-          </a:p>
-          <a:p>
-            <a:pPr algn="l" indent="0" marL="0">
-              <a:buNone/>
-            </a:pPr>
-            <a:r>
-              <a:rPr lang="en-US" sz="1210" dirty="0">
+            <a:endParaRPr lang="en-US" sz="1400" dirty="0"/>
+          </a:p>
+          <a:p>
+            <a:pPr marL="0" indent="0" algn="l">
+              <a:buNone/>
+            </a:pPr>
+            <a:r>
+              <a:rPr lang="en-US" sz="1400" dirty="0">
                 <a:solidFill>
                   <a:srgbClr val="1F2937"/>
                 </a:solidFill>
               </a:rPr>
               <a:t>5. UUID + idempotencia</a:t>
             </a:r>
-            <a:endParaRPr lang="en-US" sz="1210" dirty="0"/>
-          </a:p>
-          <a:p>
-            <a:pPr algn="l" indent="0" marL="0">
-              <a:buNone/>
-            </a:pPr>
-            <a:r>
-              <a:rPr lang="en-US" sz="1210" dirty="0">
+            <a:endParaRPr lang="en-US" sz="1400" dirty="0"/>
+          </a:p>
+          <a:p>
+            <a:pPr marL="0" indent="0" algn="l">
+              <a:buNone/>
+            </a:pPr>
+            <a:r>
+              <a:rPr lang="en-US" sz="1400" dirty="0">
                 <a:solidFill>
                   <a:srgbClr val="1F2937"/>
                 </a:solidFill>
               </a:rPr>
               <a:t>6. Conflictos por versión/updated_at</a:t>
             </a:r>
-            <a:endParaRPr lang="en-US" sz="1210" dirty="0"/>
+            <a:endParaRPr lang="en-US" sz="1400" dirty="0"/>
           </a:p>
         </p:txBody>
       </p:sp>
@@ -8423,8 +11029,8 @@
         </p:nvSpPr>
         <p:spPr>
           <a:xfrm>
-            <a:off x="9144000" y="4617720"/>
-            <a:ext cx="2514600" cy="603504"/>
+            <a:off x="9144000" y="4617719"/>
+            <a:ext cx="2514600" cy="859537"/>
           </a:xfrm>
           <a:prstGeom prst="rect">
             <a:avLst/>
@@ -8438,7 +11044,7 @@
           </a:bodyPr>
           <a:lstStyle/>
           <a:p>
-            <a:pPr algn="l" indent="0" marL="0">
+            <a:pPr marL="0" indent="0" algn="l">
               <a:buNone/>
             </a:pPr>
             <a:r>
@@ -8447,7 +11053,23 @@
                   <a:srgbClr val="1F4E79"/>
                 </a:solidFill>
               </a:rPr>
-              <a:t>Resultado esperado: no perder trabajo en zonas muertas y sincronizar sin duplicar información.</a:t>
+              <a:t>Resultado esperado: no </a:t>
+            </a:r>
+            <a:r>
+              <a:rPr lang="en-US" sz="1500" b="1" dirty="0">
+                <a:solidFill>
+                  <a:srgbClr val="1F4E79"/>
+                </a:solidFill>
+              </a:rPr>
+              <a:t>perder</a:t>
+            </a:r>
+            <a:r>
+              <a:rPr lang="en-US" sz="1320" b="1" dirty="0">
+                <a:solidFill>
+                  <a:srgbClr val="1F4E79"/>
+                </a:solidFill>
+              </a:rPr>
+              <a:t> trabajo en zonas muertas y sincronizar sin duplicar información.</a:t>
             </a:r>
             <a:endParaRPr lang="en-US" sz="1320" dirty="0"/>
           </a:p>
@@ -8469,6 +11091,7 @@
         <a:solidFill>
           <a:srgbClr val="F4F1EC"/>
         </a:solidFill>
+        <a:effectLst/>
       </p:bgPr>
     </p:bg>
     <p:spTree>
@@ -8512,7 +11135,7 @@
           <a:bodyPr wrap="square" lIns="254" tIns="254" rIns="254" bIns="254" rtlCol="0" anchor="ctr"/>
           <a:lstStyle/>
           <a:p>
-            <a:pPr algn="ctr" indent="0" marL="0">
+            <a:pPr marL="0" indent="0" algn="ctr">
               <a:buNone/>
             </a:pPr>
             <a:r>
@@ -8551,7 +11174,7 @@
           <a:bodyPr wrap="square" lIns="0" tIns="0" rIns="0" bIns="0" rtlCol="0" anchor="ctr"/>
           <a:lstStyle/>
           <a:p>
-            <a:pPr indent="0" marL="0">
+            <a:pPr marL="0" indent="0">
               <a:buNone/>
             </a:pPr>
             <a:r>
@@ -8590,7 +11213,7 @@
           <a:bodyPr wrap="square" lIns="0" tIns="0" rIns="0" bIns="0" rtlCol="0" anchor="ctr"/>
           <a:lstStyle/>
           <a:p>
-            <a:pPr indent="0" marL="0">
+            <a:pPr marL="0" indent="0">
               <a:buNone/>
             </a:pPr>
             <a:r>
@@ -8630,6 +11253,13 @@
             <a:prstDash val="solid"/>
           </a:ln>
         </p:spPr>
+        <p:txBody>
+          <a:bodyPr/>
+          <a:lstStyle/>
+          <a:p>
+            <a:endParaRPr lang="es-MX"/>
+          </a:p>
+        </p:txBody>
       </p:sp>
       <p:sp>
         <p:nvSpPr>
@@ -8652,7 +11282,7 @@
           <a:bodyPr wrap="square" lIns="0" tIns="0" rIns="0" bIns="0" rtlCol="0" anchor="ctr"/>
           <a:lstStyle/>
           <a:p>
-            <a:pPr indent="0" marL="0">
+            <a:pPr marL="0" indent="0">
               <a:buNone/>
             </a:pPr>
             <a:r>
@@ -8688,7 +11318,7 @@
           <a:bodyPr wrap="square" lIns="0" tIns="0" rIns="0" bIns="0" rtlCol="0" anchor="ctr"/>
           <a:lstStyle/>
           <a:p>
-            <a:pPr algn="r" indent="0" marL="0">
+            <a:pPr marL="0" indent="0" algn="r">
               <a:buNone/>
             </a:pPr>
             <a:r>
@@ -8705,15 +11335,15 @@
       </p:sp>
       <p:pic>
         <p:nvPicPr>
-          <p:cNvPr id="8" name="Image 0" descr="/mnt/data/barb_split/media/image19.png">    </p:cNvPr>
+          <p:cNvPr id="8" name="Image 0" descr="/mnt/data/barb_split/media/image19.png"/>
           <p:cNvPicPr>
             <a:picLocks noChangeAspect="1"/>
           </p:cNvPicPr>
           <p:nvPr/>
         </p:nvPicPr>
         <p:blipFill>
-          <a:blip r:embed="rId1"/>
-          <a:srcRect l="7227" r="7227" t="0" b="0"/>
+          <a:blip r:embed="rId3"/>
+          <a:srcRect l="7227" r="7227"/>
           <a:stretch/>
         </p:blipFill>
         <p:spPr>
@@ -8749,7 +11379,7 @@
           </a:bodyPr>
           <a:lstStyle/>
           <a:p>
-            <a:pPr algn="ctr" indent="0" marL="0">
+            <a:pPr marL="0" indent="0" algn="ctr">
               <a:buNone/>
             </a:pPr>
             <a:r>
@@ -8783,22 +11413,22 @@
         </p:spPr>
         <p:txBody>
           <a:bodyPr wrap="square" lIns="254" tIns="254" rIns="254" bIns="254" rtlCol="0" anchor="t">
-            <a:normAutofit/>
+            <a:noAutofit/>
           </a:bodyPr>
           <a:lstStyle/>
           <a:p>
-            <a:pPr algn="l" indent="0" marL="0">
-              <a:buNone/>
-            </a:pPr>
-            <a:r>
-              <a:rPr lang="en-US" sz="2000" b="1" dirty="0">
+            <a:pPr marL="0" indent="0" algn="l">
+              <a:buNone/>
+            </a:pPr>
+            <a:r>
+              <a:rPr lang="en-US" sz="2400" b="1" dirty="0">
                 <a:solidFill>
                   <a:srgbClr val="1F2937"/>
                 </a:solidFill>
               </a:rPr>
               <a:t>Idea central</a:t>
             </a:r>
-            <a:endParaRPr lang="en-US" sz="2000" dirty="0"/>
+            <a:endParaRPr lang="en-US" sz="2400" dirty="0"/>
           </a:p>
         </p:txBody>
       </p:sp>
@@ -8821,22 +11451,22 @@
         </p:spPr>
         <p:txBody>
           <a:bodyPr wrap="square" lIns="254" tIns="254" rIns="254" bIns="254" rtlCol="0" anchor="t">
-            <a:normAutofit/>
+            <a:noAutofit/>
           </a:bodyPr>
           <a:lstStyle/>
           <a:p>
-            <a:pPr algn="l" indent="0" marL="0">
-              <a:buNone/>
-            </a:pPr>
-            <a:r>
-              <a:rPr lang="en-US" sz="1430" dirty="0">
+            <a:pPr marL="0" indent="0" algn="l">
+              <a:buNone/>
+            </a:pPr>
+            <a:r>
+              <a:rPr lang="en-US" sz="1600" dirty="0">
                 <a:solidFill>
                   <a:srgbClr val="1F2937"/>
                 </a:solidFill>
               </a:rPr>
               <a:t>No se exige LLM local. La prioridad es recuperar manuales y fragmentos confiables cuando falle la conectividad o el servicio principal.</a:t>
             </a:r>
-            <a:endParaRPr lang="en-US" sz="1430" dirty="0"/>
+            <a:endParaRPr lang="en-US" sz="1600" dirty="0"/>
           </a:p>
         </p:txBody>
       </p:sp>
@@ -8851,7 +11481,7 @@
             <a:off x="6236208" y="2788920"/>
             <a:ext cx="5074920" cy="868680"/>
           </a:xfrm>
-          <a:prstGeom prst="rect">
+          <a:prstGeom prst="roundRect">
             <a:avLst/>
           </a:prstGeom>
           <a:solidFill>
@@ -8869,11 +11499,11 @@
           </a:bodyPr>
           <a:lstStyle/>
           <a:p>
-            <a:pPr indent="0" marL="0">
-              <a:buNone/>
-            </a:pPr>
-            <a:r>
-              <a:rPr lang="en-US" sz="1220" b="1" dirty="0">
+            <a:pPr marL="0" indent="0" algn="ctr">
+              <a:buNone/>
+            </a:pPr>
+            <a:r>
+              <a:rPr lang="en-US" sz="1600" b="1" dirty="0">
                 <a:solidFill>
                   <a:srgbClr val="1F2937"/>
                 </a:solidFill>
@@ -8883,17 +11513,14 @@
               </a:rPr>
               <a:t>TO-BE</a:t>
             </a:r>
-            <a:pPr indent="0" marL="0">
-              <a:buNone/>
-            </a:pPr>
-            <a:endParaRPr lang="en-US" sz="1220" dirty="0"/>
-          </a:p>
-          <a:p>
-            <a:pPr indent="0" marL="0">
-              <a:buNone/>
-            </a:pPr>
-            <a:r>
-              <a:rPr lang="en-US" sz="1220" dirty="0">
+            <a:endParaRPr lang="en-US" sz="1600" dirty="0"/>
+          </a:p>
+          <a:p>
+            <a:pPr marL="0" indent="0" algn="ctr">
+              <a:buNone/>
+            </a:pPr>
+            <a:r>
+              <a:rPr lang="en-US" sz="1600" dirty="0">
                 <a:solidFill>
                   <a:srgbClr val="1F2937"/>
                 </a:solidFill>
@@ -8903,32 +11530,9 @@
               </a:rPr>
               <a:t>Modo de contingencia con fuentes visibles, estado offline identificado y continuidad para el diagnóstico.</a:t>
             </a:r>
-            <a:endParaRPr lang="en-US" sz="1220" dirty="0"/>
-          </a:p>
-        </p:txBody>
-      </p:sp>
-      <p:sp>
-        <p:nvSpPr>
-          <p:cNvPr id="13" name="Shape 10"/>
-          <p:cNvSpPr/>
-          <p:nvPr/>
-        </p:nvSpPr>
-        <p:spPr>
-          <a:xfrm>
-            <a:off x="6236208" y="3621024"/>
-            <a:ext cx="5074920" cy="0"/>
-          </a:xfrm>
-          <a:prstGeom prst="line">
-            <a:avLst/>
-          </a:prstGeom>
-          <a:noFill/>
-          <a:ln w="25400">
-            <a:solidFill>
-              <a:srgbClr val="6D28D9"/>
-            </a:solidFill>
-            <a:prstDash val="solid"/>
-          </a:ln>
-        </p:spPr>
+            <a:endParaRPr lang="en-US" sz="1600" dirty="0"/>
+          </a:p>
+        </p:txBody>
       </p:sp>
       <p:sp>
         <p:nvSpPr>
@@ -8941,7 +11545,7 @@
             <a:off x="6236208" y="3977640"/>
             <a:ext cx="5074920" cy="868680"/>
           </a:xfrm>
-          <a:prstGeom prst="rect">
+          <a:prstGeom prst="roundRect">
             <a:avLst/>
           </a:prstGeom>
           <a:solidFill>
@@ -8959,11 +11563,11 @@
           </a:bodyPr>
           <a:lstStyle/>
           <a:p>
-            <a:pPr indent="0" marL="0">
-              <a:buNone/>
-            </a:pPr>
-            <a:r>
-              <a:rPr lang="en-US" sz="1220" b="1" dirty="0">
+            <a:pPr marL="0" indent="0" algn="ctr">
+              <a:buNone/>
+            </a:pPr>
+            <a:r>
+              <a:rPr lang="en-US" sz="1600" b="1" dirty="0">
                 <a:solidFill>
                   <a:srgbClr val="1F2937"/>
                 </a:solidFill>
@@ -8973,17 +11577,14 @@
               </a:rPr>
               <a:t>Decisión técnica</a:t>
             </a:r>
-            <a:pPr indent="0" marL="0">
-              <a:buNone/>
-            </a:pPr>
-            <a:endParaRPr lang="en-US" sz="1220" dirty="0"/>
-          </a:p>
-          <a:p>
-            <a:pPr indent="0" marL="0">
-              <a:buNone/>
-            </a:pPr>
-            <a:r>
-              <a:rPr lang="en-US" sz="1220" dirty="0">
+            <a:endParaRPr lang="en-US" sz="1600" dirty="0"/>
+          </a:p>
+          <a:p>
+            <a:pPr marL="0" indent="0" algn="ctr">
+              <a:buNone/>
+            </a:pPr>
+            <a:r>
+              <a:rPr lang="en-US" sz="1600" dirty="0">
                 <a:solidFill>
                   <a:srgbClr val="1F2937"/>
                 </a:solidFill>
@@ -8993,32 +11594,9 @@
               </a:rPr>
               <a:t>Vector DB, almacenamiento local, actualización del corpus y estrategia de fallback se definen tras prototipos.</a:t>
             </a:r>
-            <a:endParaRPr lang="en-US" sz="1220" dirty="0"/>
-          </a:p>
-        </p:txBody>
-      </p:sp>
-      <p:sp>
-        <p:nvSpPr>
-          <p:cNvPr id="15" name="Shape 12"/>
-          <p:cNvSpPr/>
-          <p:nvPr/>
-        </p:nvSpPr>
-        <p:spPr>
-          <a:xfrm>
-            <a:off x="6236208" y="4809744"/>
-            <a:ext cx="5074920" cy="0"/>
-          </a:xfrm>
-          <a:prstGeom prst="line">
-            <a:avLst/>
-          </a:prstGeom>
-          <a:noFill/>
-          <a:ln w="25400">
-            <a:solidFill>
-              <a:srgbClr val="2563EB"/>
-            </a:solidFill>
-            <a:prstDash val="solid"/>
-          </a:ln>
-        </p:spPr>
+            <a:endParaRPr lang="en-US" sz="1600" dirty="0"/>
+          </a:p>
+        </p:txBody>
       </p:sp>
       <p:sp>
         <p:nvSpPr>
@@ -9039,22 +11617,22 @@
         </p:spPr>
         <p:txBody>
           <a:bodyPr wrap="square" lIns="254" tIns="254" rIns="254" bIns="254" rtlCol="0" anchor="t">
-            <a:normAutofit/>
+            <a:normAutofit fontScale="85000" lnSpcReduction="20000"/>
           </a:bodyPr>
           <a:lstStyle/>
           <a:p>
-            <a:pPr algn="l" indent="0" marL="0">
-              <a:buNone/>
-            </a:pPr>
-            <a:r>
-              <a:rPr lang="en-US" sz="1520" b="1" dirty="0">
+            <a:pPr marL="0" indent="0" algn="l">
+              <a:buNone/>
+            </a:pPr>
+            <a:r>
+              <a:rPr lang="en-US" sz="1400" b="1" dirty="0">
                 <a:solidFill>
                   <a:srgbClr val="059669"/>
                 </a:solidFill>
               </a:rPr>
               <a:t>Valor: el técnico no queda detenido por no poder acceder a documentación crítica.</a:t>
             </a:r>
-            <a:endParaRPr lang="en-US" sz="1520" dirty="0"/>
+            <a:endParaRPr lang="en-US" sz="1400" dirty="0"/>
           </a:p>
         </p:txBody>
       </p:sp>
@@ -9074,6 +11652,7 @@
         <a:solidFill>
           <a:srgbClr val="F4F1EC"/>
         </a:solidFill>
+        <a:effectLst/>
       </p:bgPr>
     </p:bg>
     <p:spTree>
@@ -9117,7 +11696,7 @@
           <a:bodyPr wrap="square" lIns="254" tIns="254" rIns="254" bIns="254" rtlCol="0" anchor="ctr"/>
           <a:lstStyle/>
           <a:p>
-            <a:pPr algn="ctr" indent="0" marL="0">
+            <a:pPr marL="0" indent="0" algn="ctr">
               <a:buNone/>
             </a:pPr>
             <a:r>
@@ -9156,7 +11735,7 @@
           <a:bodyPr wrap="square" lIns="0" tIns="0" rIns="0" bIns="0" rtlCol="0" anchor="ctr"/>
           <a:lstStyle/>
           <a:p>
-            <a:pPr indent="0" marL="0">
+            <a:pPr marL="0" indent="0">
               <a:buNone/>
             </a:pPr>
             <a:r>
@@ -9195,7 +11774,7 @@
           <a:bodyPr wrap="square" lIns="0" tIns="0" rIns="0" bIns="0" rtlCol="0" anchor="ctr"/>
           <a:lstStyle/>
           <a:p>
-            <a:pPr indent="0" marL="0">
+            <a:pPr marL="0" indent="0">
               <a:buNone/>
             </a:pPr>
             <a:r>
@@ -9235,6 +11814,13 @@
             <a:prstDash val="solid"/>
           </a:ln>
         </p:spPr>
+        <p:txBody>
+          <a:bodyPr/>
+          <a:lstStyle/>
+          <a:p>
+            <a:endParaRPr lang="es-MX"/>
+          </a:p>
+        </p:txBody>
       </p:sp>
       <p:sp>
         <p:nvSpPr>
@@ -9257,7 +11843,7 @@
           <a:bodyPr wrap="square" lIns="0" tIns="0" rIns="0" bIns="0" rtlCol="0" anchor="ctr"/>
           <a:lstStyle/>
           <a:p>
-            <a:pPr indent="0" marL="0">
+            <a:pPr marL="0" indent="0">
               <a:buNone/>
             </a:pPr>
             <a:r>
@@ -9293,7 +11879,7 @@
           <a:bodyPr wrap="square" lIns="0" tIns="0" rIns="0" bIns="0" rtlCol="0" anchor="ctr"/>
           <a:lstStyle/>
           <a:p>
-            <a:pPr algn="r" indent="0" marL="0">
+            <a:pPr marL="0" indent="0" algn="r">
               <a:buNone/>
             </a:pPr>
             <a:r>
@@ -9310,15 +11896,15 @@
       </p:sp>
       <p:pic>
         <p:nvPicPr>
-          <p:cNvPr id="8" name="Image 0" descr="/mnt/data/barb_split/media/image15.png">    </p:cNvPr>
+          <p:cNvPr id="8" name="Image 0" descr="/mnt/data/barb_split/media/image15.png"/>
           <p:cNvPicPr>
             <a:picLocks noChangeAspect="1"/>
           </p:cNvPicPr>
           <p:nvPr/>
         </p:nvPicPr>
         <p:blipFill>
-          <a:blip r:embed="rId1"/>
-          <a:srcRect l="19521" r="19521" t="0" b="0"/>
+          <a:blip r:embed="rId3"/>
+          <a:srcRect l="19521" r="19521"/>
           <a:stretch/>
         </p:blipFill>
         <p:spPr>
@@ -9333,15 +11919,15 @@
       </p:pic>
       <p:pic>
         <p:nvPicPr>
-          <p:cNvPr id="9" name="Image 1" descr="/mnt/data/barb_split/media/image11.png">    </p:cNvPr>
+          <p:cNvPr id="9" name="Image 1" descr="/mnt/data/barb_split/media/image11.png"/>
           <p:cNvPicPr>
             <a:picLocks noChangeAspect="1"/>
           </p:cNvPicPr>
           <p:nvPr/>
         </p:nvPicPr>
         <p:blipFill>
-          <a:blip r:embed="rId2"/>
-          <a:srcRect l="0" r="0" t="18047" b="18047"/>
+          <a:blip r:embed="rId4"/>
+          <a:srcRect t="18047" b="18047"/>
           <a:stretch/>
         </p:blipFill>
         <p:spPr>
@@ -9377,7 +11963,7 @@
           </a:bodyPr>
           <a:lstStyle/>
           <a:p>
-            <a:pPr algn="ctr" indent="0" marL="0">
+            <a:pPr marL="0" indent="0" algn="ctr">
               <a:buNone/>
             </a:pPr>
             <a:r>
@@ -9411,22 +11997,22 @@
         </p:spPr>
         <p:txBody>
           <a:bodyPr wrap="square" lIns="254" tIns="254" rIns="254" bIns="254" rtlCol="0" anchor="t">
-            <a:normAutofit/>
+            <a:noAutofit/>
           </a:bodyPr>
           <a:lstStyle/>
           <a:p>
-            <a:pPr algn="l" indent="0" marL="0">
-              <a:buNone/>
-            </a:pPr>
-            <a:r>
-              <a:rPr lang="en-US" sz="2000" b="1" dirty="0">
+            <a:pPr marL="0" indent="0" algn="l">
+              <a:buNone/>
+            </a:pPr>
+            <a:r>
+              <a:rPr lang="en-US" sz="2400" b="1" dirty="0">
                 <a:solidFill>
                   <a:srgbClr val="1F2937"/>
                 </a:solidFill>
               </a:rPr>
               <a:t>Reporte ejecutivo, no solo “status”</a:t>
             </a:r>
-            <a:endParaRPr lang="en-US" sz="2000" dirty="0"/>
+            <a:endParaRPr lang="en-US" sz="2400" dirty="0"/>
           </a:p>
         </p:txBody>
       </p:sp>
@@ -9453,18 +12039,18 @@
           </a:bodyPr>
           <a:lstStyle/>
           <a:p>
-            <a:pPr indent="0" marL="0">
-              <a:buNone/>
-            </a:pPr>
-            <a:r>
-              <a:rPr lang="en-US" sz="1300" dirty="0">
+            <a:pPr marL="0" indent="0">
+              <a:buNone/>
+            </a:pPr>
+            <a:r>
+              <a:rPr lang="en-US" sz="1400" dirty="0">
                 <a:solidFill>
                   <a:srgbClr val="1F2937"/>
                 </a:solidFill>
               </a:rPr>
               <a:t>• KPIs: MTTR, MTBF, eficiencia, costos, OTs e incidencias.</a:t>
             </a:r>
-            <a:endParaRPr lang="en-US" sz="1300" dirty="0"/>
+            <a:endParaRPr lang="en-US" sz="1400" dirty="0"/>
           </a:p>
         </p:txBody>
       </p:sp>
@@ -9491,18 +12077,18 @@
           </a:bodyPr>
           <a:lstStyle/>
           <a:p>
-            <a:pPr indent="0" marL="0">
-              <a:buNone/>
-            </a:pPr>
-            <a:r>
-              <a:rPr lang="en-US" sz="1300" dirty="0">
+            <a:pPr marL="0" indent="0">
+              <a:buNone/>
+            </a:pPr>
+            <a:r>
+              <a:rPr lang="en-US" sz="1400" dirty="0">
                 <a:solidFill>
                   <a:srgbClr val="1F2937"/>
                 </a:solidFill>
               </a:rPr>
               <a:t>• Tendencias, rankings y lectura gerencial.</a:t>
             </a:r>
-            <a:endParaRPr lang="en-US" sz="1300" dirty="0"/>
+            <a:endParaRPr lang="en-US" sz="1400" dirty="0"/>
           </a:p>
         </p:txBody>
       </p:sp>
@@ -9515,6 +12101,44 @@
         <p:spPr>
           <a:xfrm>
             <a:off x="6355080" y="2697480"/>
+            <a:ext cx="5212080" cy="256032"/>
+          </a:xfrm>
+          <a:prstGeom prst="rect">
+            <a:avLst/>
+          </a:prstGeom>
+          <a:noFill/>
+          <a:ln/>
+        </p:spPr>
+        <p:txBody>
+          <a:bodyPr wrap="square" lIns="0" tIns="0" rIns="0" bIns="0" rtlCol="0" anchor="ctr">
+            <a:noAutofit/>
+          </a:bodyPr>
+          <a:lstStyle/>
+          <a:p>
+            <a:pPr marL="0" indent="0">
+              <a:buNone/>
+            </a:pPr>
+            <a:r>
+              <a:rPr lang="en-US" sz="1400" dirty="0">
+                <a:solidFill>
+                  <a:srgbClr val="1F2937"/>
+                </a:solidFill>
+              </a:rPr>
+              <a:t>• Filtros por período, planta/site, piso/zona, máquina, status, incidente u OT.</a:t>
+            </a:r>
+            <a:endParaRPr lang="en-US" sz="1400" dirty="0"/>
+          </a:p>
+        </p:txBody>
+      </p:sp>
+      <p:sp>
+        <p:nvSpPr>
+          <p:cNvPr id="15" name="Text 11"/>
+          <p:cNvSpPr/>
+          <p:nvPr/>
+        </p:nvSpPr>
+        <p:spPr>
+          <a:xfrm>
+            <a:off x="6355080" y="3182112"/>
             <a:ext cx="5212080" cy="256032"/>
           </a:xfrm>
           <a:prstGeom prst="rect">
@@ -9529,56 +12153,18 @@
           </a:bodyPr>
           <a:lstStyle/>
           <a:p>
-            <a:pPr indent="0" marL="0">
-              <a:buNone/>
-            </a:pPr>
-            <a:r>
-              <a:rPr lang="en-US" sz="1300" dirty="0">
+            <a:pPr marL="0" indent="0">
+              <a:buNone/>
+            </a:pPr>
+            <a:r>
+              <a:rPr lang="en-US" sz="1400" dirty="0">
                 <a:solidFill>
                   <a:srgbClr val="1F2937"/>
                 </a:solidFill>
               </a:rPr>
-              <a:t>• Filtros por período, planta/site, piso/zona, máquina, status, incidente u OT.</a:t>
-            </a:r>
-            <a:endParaRPr lang="en-US" sz="1300" dirty="0"/>
-          </a:p>
-        </p:txBody>
-      </p:sp>
-      <p:sp>
-        <p:nvSpPr>
-          <p:cNvPr id="15" name="Text 11"/>
-          <p:cNvSpPr/>
-          <p:nvPr/>
-        </p:nvSpPr>
-        <p:spPr>
-          <a:xfrm>
-            <a:off x="6355080" y="3182112"/>
-            <a:ext cx="5212080" cy="256032"/>
-          </a:xfrm>
-          <a:prstGeom prst="rect">
-            <a:avLst/>
-          </a:prstGeom>
-          <a:noFill/>
-          <a:ln/>
-        </p:spPr>
-        <p:txBody>
-          <a:bodyPr wrap="square" lIns="0" tIns="0" rIns="0" bIns="0" rtlCol="0" anchor="ctr">
-            <a:normAutofit/>
-          </a:bodyPr>
-          <a:lstStyle/>
-          <a:p>
-            <a:pPr indent="0" marL="0">
-              <a:buNone/>
-            </a:pPr>
-            <a:r>
-              <a:rPr lang="en-US" sz="1300" dirty="0">
-                <a:solidFill>
-                  <a:srgbClr val="1F2937"/>
-                </a:solidFill>
-              </a:rPr>
               <a:t>• PDF descargable para reuniones, correo y seguimiento.</a:t>
             </a:r>
-            <a:endParaRPr lang="en-US" sz="1300" dirty="0"/>
+            <a:endParaRPr lang="en-US" sz="1400" dirty="0"/>
           </a:p>
         </p:txBody>
       </p:sp>
@@ -9593,7 +12179,7 @@
             <a:off x="6355080" y="4251960"/>
             <a:ext cx="4800600" cy="914400"/>
           </a:xfrm>
-          <a:prstGeom prst="rect">
+          <a:prstGeom prst="roundRect">
             <a:avLst/>
           </a:prstGeom>
           <a:solidFill>
@@ -9607,15 +12193,15 @@
         </p:spPr>
         <p:txBody>
           <a:bodyPr wrap="square" lIns="1524" tIns="1524" rIns="1524" bIns="1524" rtlCol="0" anchor="t">
-            <a:normAutofit/>
+            <a:normAutofit fontScale="92500"/>
           </a:bodyPr>
           <a:lstStyle/>
           <a:p>
-            <a:pPr indent="0" marL="0">
-              <a:buNone/>
-            </a:pPr>
-            <a:r>
-              <a:rPr lang="en-US" sz="1220" b="1" dirty="0">
+            <a:pPr marL="0" indent="0" algn="ctr">
+              <a:buNone/>
+            </a:pPr>
+            <a:r>
+              <a:rPr lang="en-US" sz="1600" b="1" dirty="0">
                 <a:solidFill>
                   <a:srgbClr val="1F2937"/>
                 </a:solidFill>
@@ -9625,17 +12211,14 @@
               </a:rPr>
               <a:t>Resultado esperado</a:t>
             </a:r>
-            <a:pPr indent="0" marL="0">
-              <a:buNone/>
-            </a:pPr>
-            <a:endParaRPr lang="en-US" sz="1220" dirty="0"/>
-          </a:p>
-          <a:p>
-            <a:pPr indent="0" marL="0">
-              <a:buNone/>
-            </a:pPr>
-            <a:r>
-              <a:rPr lang="en-US" sz="1220" dirty="0">
+            <a:endParaRPr lang="en-US" sz="1600" dirty="0"/>
+          </a:p>
+          <a:p>
+            <a:pPr marL="0" indent="0" algn="ctr">
+              <a:buNone/>
+            </a:pPr>
+            <a:r>
+              <a:rPr lang="en-US" sz="1600" dirty="0">
                 <a:solidFill>
                   <a:srgbClr val="1F2937"/>
                 </a:solidFill>
@@ -9643,34 +12226,33 @@
                 <a:ea typeface="Calibri" pitchFamily="34" charset="-122"/>
                 <a:cs typeface="Calibri" pitchFamily="34" charset="-120"/>
               </a:rPr>
-              <a:t>Un informe formal que convierta los datos operacionales en información útil para jefaturas y gerencia.</a:t>
-            </a:r>
-            <a:endParaRPr lang="en-US" sz="1220" dirty="0"/>
-          </a:p>
-        </p:txBody>
-      </p:sp>
-      <p:sp>
-        <p:nvSpPr>
-          <p:cNvPr id="17" name="Shape 13"/>
-          <p:cNvSpPr/>
-          <p:nvPr/>
-        </p:nvSpPr>
-        <p:spPr>
-          <a:xfrm>
-            <a:off x="6355080" y="5129784"/>
-            <a:ext cx="4800600" cy="0"/>
-          </a:xfrm>
-          <a:prstGeom prst="line">
-            <a:avLst/>
-          </a:prstGeom>
-          <a:noFill/>
-          <a:ln w="25400">
-            <a:solidFill>
-              <a:srgbClr val="E07800"/>
-            </a:solidFill>
-            <a:prstDash val="solid"/>
-          </a:ln>
-        </p:spPr>
+              <a:t>Un informe formal que convierta los datos </a:t>
+            </a:r>
+            <a:r>
+              <a:rPr lang="en-US" dirty="0">
+                <a:solidFill>
+                  <a:srgbClr val="1F2937"/>
+                </a:solidFill>
+                <a:latin typeface="Calibri" pitchFamily="34" charset="0"/>
+                <a:ea typeface="Calibri" pitchFamily="34" charset="-122"/>
+                <a:cs typeface="Calibri" pitchFamily="34" charset="-120"/>
+              </a:rPr>
+              <a:t>operacionales</a:t>
+            </a:r>
+            <a:r>
+              <a:rPr lang="en-US" sz="1600" dirty="0">
+                <a:solidFill>
+                  <a:srgbClr val="1F2937"/>
+                </a:solidFill>
+                <a:latin typeface="Calibri" pitchFamily="34" charset="0"/>
+                <a:ea typeface="Calibri" pitchFamily="34" charset="-122"/>
+                <a:cs typeface="Calibri" pitchFamily="34" charset="-120"/>
+              </a:rPr>
+              <a:t> en información útil para jefaturas y gerencia.</a:t>
+            </a:r>
+            <a:endParaRPr lang="en-US" sz="1600" dirty="0"/>
+          </a:p>
+        </p:txBody>
       </p:sp>
     </p:spTree>
   </p:cSld>
@@ -9973,4 +12555,319 @@
     </a:ext>
   </a:extLst>
 </a:theme>
+</file>
+
+<file path=ppt/theme/theme2.xml><?xml version="1.0" encoding="utf-8"?>
+<a:theme xmlns:a="http://schemas.openxmlformats.org/drawingml/2006/main" name="Tema de Office">
+  <a:themeElements>
+    <a:clrScheme name="Office">
+      <a:dk1>
+        <a:sysClr val="windowText" lastClr="000000"/>
+      </a:dk1>
+      <a:lt1>
+        <a:sysClr val="window" lastClr="FFFFFF"/>
+      </a:lt1>
+      <a:dk2>
+        <a:srgbClr val="0E2841"/>
+      </a:dk2>
+      <a:lt2>
+        <a:srgbClr val="E8E8E8"/>
+      </a:lt2>
+      <a:accent1>
+        <a:srgbClr val="156082"/>
+      </a:accent1>
+      <a:accent2>
+        <a:srgbClr val="E97132"/>
+      </a:accent2>
+      <a:accent3>
+        <a:srgbClr val="196B24"/>
+      </a:accent3>
+      <a:accent4>
+        <a:srgbClr val="0F9ED5"/>
+      </a:accent4>
+      <a:accent5>
+        <a:srgbClr val="A02B93"/>
+      </a:accent5>
+      <a:accent6>
+        <a:srgbClr val="4EA72E"/>
+      </a:accent6>
+      <a:hlink>
+        <a:srgbClr val="467886"/>
+      </a:hlink>
+      <a:folHlink>
+        <a:srgbClr val="96607D"/>
+      </a:folHlink>
+    </a:clrScheme>
+    <a:fontScheme name="Office">
+      <a:majorFont>
+        <a:latin typeface="Aptos Display" panose="02110004020202020204"/>
+        <a:ea typeface=""/>
+        <a:cs typeface=""/>
+        <a:font script="Jpan" typeface="游ゴシック Light"/>
+        <a:font script="Hang" typeface="맑은 고딕"/>
+        <a:font script="Hans" typeface="等线 Light"/>
+        <a:font script="Hant" typeface="新細明體"/>
+        <a:font script="Arab" typeface="Times New Roman"/>
+        <a:font script="Hebr" typeface="Times New Roman"/>
+        <a:font script="Thai" typeface="Angsana New"/>
+        <a:font script="Ethi" typeface="Nyala"/>
+        <a:font script="Beng" typeface="Vrinda"/>
+        <a:font script="Gujr" typeface="Shruti"/>
+        <a:font script="Khmr" typeface="MoolBoran"/>
+        <a:font script="Knda" typeface="Tunga"/>
+        <a:font script="Guru" typeface="Raavi"/>
+        <a:font script="Cans" typeface="Euphemia"/>
+        <a:font script="Cher" typeface="Plantagenet Cherokee"/>
+        <a:font script="Yiii" typeface="Microsoft Yi Baiti"/>
+        <a:font script="Tibt" typeface="Microsoft Himalaya"/>
+        <a:font script="Thaa" typeface="MV Boli"/>
+        <a:font script="Deva" typeface="Mangal"/>
+        <a:font script="Telu" typeface="Gautami"/>
+        <a:font script="Taml" typeface="Latha"/>
+        <a:font script="Syrc" typeface="Estrangelo Edessa"/>
+        <a:font script="Orya" typeface="Kalinga"/>
+        <a:font script="Mlym" typeface="Kartika"/>
+        <a:font script="Laoo" typeface="DokChampa"/>
+        <a:font script="Sinh" typeface="Iskoola Pota"/>
+        <a:font script="Mong" typeface="Mongolian Baiti"/>
+        <a:font script="Viet" typeface="Times New Roman"/>
+        <a:font script="Uigh" typeface="Microsoft Uighur"/>
+        <a:font script="Geor" typeface="Sylfaen"/>
+        <a:font script="Armn" typeface="Arial"/>
+        <a:font script="Bugi" typeface="Leelawadee UI"/>
+        <a:font script="Bopo" typeface="Microsoft JhengHei"/>
+        <a:font script="Java" typeface="Javanese Text"/>
+        <a:font script="Lisu" typeface="Segoe UI"/>
+        <a:font script="Mymr" typeface="Myanmar Text"/>
+        <a:font script="Nkoo" typeface="Ebrima"/>
+        <a:font script="Olck" typeface="Nirmala UI"/>
+        <a:font script="Osma" typeface="Ebrima"/>
+        <a:font script="Phag" typeface="Phagspa"/>
+        <a:font script="Syrn" typeface="Estrangelo Edessa"/>
+        <a:font script="Syrj" typeface="Estrangelo Edessa"/>
+        <a:font script="Syre" typeface="Estrangelo Edessa"/>
+        <a:font script="Sora" typeface="Nirmala UI"/>
+        <a:font script="Tale" typeface="Microsoft Tai Le"/>
+        <a:font script="Talu" typeface="Microsoft New Tai Lue"/>
+        <a:font script="Tfng" typeface="Ebrima"/>
+      </a:majorFont>
+      <a:minorFont>
+        <a:latin typeface="Aptos" panose="02110004020202020204"/>
+        <a:ea typeface=""/>
+        <a:cs typeface=""/>
+        <a:font script="Jpan" typeface="游ゴシック"/>
+        <a:font script="Hang" typeface="맑은 고딕"/>
+        <a:font script="Hans" typeface="等线"/>
+        <a:font script="Hant" typeface="新細明體"/>
+        <a:font script="Arab" typeface="Arial"/>
+        <a:font script="Hebr" typeface="Arial"/>
+        <a:font script="Thai" typeface="Cordia New"/>
+        <a:font script="Ethi" typeface="Nyala"/>
+        <a:font script="Beng" typeface="Vrinda"/>
+        <a:font script="Gujr" typeface="Shruti"/>
+        <a:font script="Khmr" typeface="DaunPenh"/>
+        <a:font script="Knda" typeface="Tunga"/>
+        <a:font script="Guru" typeface="Raavi"/>
+        <a:font script="Cans" typeface="Euphemia"/>
+        <a:font script="Cher" typeface="Plantagenet Cherokee"/>
+        <a:font script="Yiii" typeface="Microsoft Yi Baiti"/>
+        <a:font script="Tibt" typeface="Microsoft Himalaya"/>
+        <a:font script="Thaa" typeface="MV Boli"/>
+        <a:font script="Deva" typeface="Mangal"/>
+        <a:font script="Telu" typeface="Gautami"/>
+        <a:font script="Taml" typeface="Latha"/>
+        <a:font script="Syrc" typeface="Estrangelo Edessa"/>
+        <a:font script="Orya" typeface="Kalinga"/>
+        <a:font script="Mlym" typeface="Kartika"/>
+        <a:font script="Laoo" typeface="DokChampa"/>
+        <a:font script="Sinh" typeface="Iskoola Pota"/>
+        <a:font script="Mong" typeface="Mongolian Baiti"/>
+        <a:font script="Viet" typeface="Arial"/>
+        <a:font script="Uigh" typeface="Microsoft Uighur"/>
+        <a:font script="Geor" typeface="Sylfaen"/>
+        <a:font script="Armn" typeface="Arial"/>
+        <a:font script="Bugi" typeface="Leelawadee UI"/>
+        <a:font script="Bopo" typeface="Microsoft JhengHei"/>
+        <a:font script="Java" typeface="Javanese Text"/>
+        <a:font script="Lisu" typeface="Segoe UI"/>
+        <a:font script="Mymr" typeface="Myanmar Text"/>
+        <a:font script="Nkoo" typeface="Ebrima"/>
+        <a:font script="Olck" typeface="Nirmala UI"/>
+        <a:font script="Osma" typeface="Ebrima"/>
+        <a:font script="Phag" typeface="Phagspa"/>
+        <a:font script="Syrn" typeface="Estrangelo Edessa"/>
+        <a:font script="Syrj" typeface="Estrangelo Edessa"/>
+        <a:font script="Syre" typeface="Estrangelo Edessa"/>
+        <a:font script="Sora" typeface="Nirmala UI"/>
+        <a:font script="Tale" typeface="Microsoft Tai Le"/>
+        <a:font script="Talu" typeface="Microsoft New Tai Lue"/>
+        <a:font script="Tfng" typeface="Ebrima"/>
+      </a:minorFont>
+    </a:fontScheme>
+    <a:fmtScheme name="Office">
+      <a:fillStyleLst>
+        <a:solidFill>
+          <a:schemeClr val="phClr"/>
+        </a:solidFill>
+        <a:gradFill rotWithShape="1">
+          <a:gsLst>
+            <a:gs pos="0">
+              <a:schemeClr val="phClr">
+                <a:lumMod val="110000"/>
+                <a:satMod val="105000"/>
+                <a:tint val="67000"/>
+              </a:schemeClr>
+            </a:gs>
+            <a:gs pos="50000">
+              <a:schemeClr val="phClr">
+                <a:lumMod val="105000"/>
+                <a:satMod val="103000"/>
+                <a:tint val="73000"/>
+              </a:schemeClr>
+            </a:gs>
+            <a:gs pos="100000">
+              <a:schemeClr val="phClr">
+                <a:lumMod val="105000"/>
+                <a:satMod val="109000"/>
+                <a:tint val="81000"/>
+              </a:schemeClr>
+            </a:gs>
+          </a:gsLst>
+          <a:lin ang="5400000" scaled="0"/>
+        </a:gradFill>
+        <a:gradFill rotWithShape="1">
+          <a:gsLst>
+            <a:gs pos="0">
+              <a:schemeClr val="phClr">
+                <a:satMod val="103000"/>
+                <a:lumMod val="102000"/>
+                <a:tint val="94000"/>
+              </a:schemeClr>
+            </a:gs>
+            <a:gs pos="50000">
+              <a:schemeClr val="phClr">
+                <a:satMod val="110000"/>
+                <a:lumMod val="100000"/>
+                <a:shade val="100000"/>
+              </a:schemeClr>
+            </a:gs>
+            <a:gs pos="100000">
+              <a:schemeClr val="phClr">
+                <a:lumMod val="99000"/>
+                <a:satMod val="120000"/>
+                <a:shade val="78000"/>
+              </a:schemeClr>
+            </a:gs>
+          </a:gsLst>
+          <a:lin ang="5400000" scaled="0"/>
+        </a:gradFill>
+      </a:fillStyleLst>
+      <a:lnStyleLst>
+        <a:ln w="12700" cap="flat" cmpd="sng" algn="ctr">
+          <a:solidFill>
+            <a:schemeClr val="phClr"/>
+          </a:solidFill>
+          <a:prstDash val="solid"/>
+          <a:miter lim="800000"/>
+        </a:ln>
+        <a:ln w="19050" cap="flat" cmpd="sng" algn="ctr">
+          <a:solidFill>
+            <a:schemeClr val="phClr"/>
+          </a:solidFill>
+          <a:prstDash val="solid"/>
+          <a:miter lim="800000"/>
+        </a:ln>
+        <a:ln w="25400" cap="flat" cmpd="sng" algn="ctr">
+          <a:solidFill>
+            <a:schemeClr val="phClr"/>
+          </a:solidFill>
+          <a:prstDash val="solid"/>
+          <a:miter lim="800000"/>
+        </a:ln>
+      </a:lnStyleLst>
+      <a:effectStyleLst>
+        <a:effectStyle>
+          <a:effectLst/>
+        </a:effectStyle>
+        <a:effectStyle>
+          <a:effectLst/>
+        </a:effectStyle>
+        <a:effectStyle>
+          <a:effectLst>
+            <a:outerShdw blurRad="57150" dist="19050" dir="5400000" algn="ctr" rotWithShape="0">
+              <a:srgbClr val="000000">
+                <a:alpha val="63000"/>
+              </a:srgbClr>
+            </a:outerShdw>
+          </a:effectLst>
+        </a:effectStyle>
+      </a:effectStyleLst>
+      <a:bgFillStyleLst>
+        <a:solidFill>
+          <a:schemeClr val="phClr"/>
+        </a:solidFill>
+        <a:solidFill>
+          <a:schemeClr val="phClr">
+            <a:tint val="95000"/>
+            <a:satMod val="170000"/>
+          </a:schemeClr>
+        </a:solidFill>
+        <a:gradFill rotWithShape="1">
+          <a:gsLst>
+            <a:gs pos="0">
+              <a:schemeClr val="phClr">
+                <a:tint val="93000"/>
+                <a:satMod val="150000"/>
+                <a:shade val="98000"/>
+                <a:lumMod val="102000"/>
+              </a:schemeClr>
+            </a:gs>
+            <a:gs pos="50000">
+              <a:schemeClr val="phClr">
+                <a:tint val="98000"/>
+                <a:satMod val="130000"/>
+                <a:shade val="90000"/>
+                <a:lumMod val="103000"/>
+              </a:schemeClr>
+            </a:gs>
+            <a:gs pos="100000">
+              <a:schemeClr val="phClr">
+                <a:shade val="63000"/>
+                <a:satMod val="120000"/>
+              </a:schemeClr>
+            </a:gs>
+          </a:gsLst>
+          <a:lin ang="5400000" scaled="0"/>
+        </a:gradFill>
+      </a:bgFillStyleLst>
+    </a:fmtScheme>
+  </a:themeElements>
+  <a:objectDefaults>
+    <a:lnDef>
+      <a:spPr/>
+      <a:bodyPr/>
+      <a:lstStyle/>
+      <a:style>
+        <a:lnRef idx="2">
+          <a:schemeClr val="accent1"/>
+        </a:lnRef>
+        <a:fillRef idx="0">
+          <a:schemeClr val="accent1"/>
+        </a:fillRef>
+        <a:effectRef idx="1">
+          <a:schemeClr val="accent1"/>
+        </a:effectRef>
+        <a:fontRef idx="minor">
+          <a:schemeClr val="tx1"/>
+        </a:fontRef>
+      </a:style>
+    </a:lnDef>
+  </a:objectDefaults>
+  <a:extraClrSchemeLst/>
+  <a:extLst>
+    <a:ext uri="{05A4C25C-085E-4340-85A3-A5531E510DB2}">
+      <thm15:themeFamily xmlns:thm15="http://schemas.microsoft.com/office/thememl/2012/main" name="Office Theme" id="{2E142A2C-CD16-42D6-873A-C26D2A0506FA}" vid="{1BDDFF52-6CD6-40A5-AB3C-68EB2F1E4D0A}"/>
+    </a:ext>
+  </a:extLst>
+</a:theme>
 </file>